--- a/docs/산출물_20260921/06_ECS_화면설계서.pptx
+++ b/docs/산출물_20260921/06_ECS_화면설계서.pptx
@@ -3260,7 +3260,7 @@
                 </a:solidFill>
                 <a:latin typeface="맑은 고딕"/>
               </a:rPr>
-              <a:t>ECS Renewal   ·   Ver 1.2   ·   2026-09-17</a:t>
+              <a:t>ECS Renewal   ·   Ver 2.0   ·   2026-09-21</a:t>
             </a:r>
           </a:p>
         </p:txBody>
@@ -3295,7 +3295,7 @@
                 </a:solidFill>
                 <a:latin typeface="맑은 고딕"/>
               </a:rPr>
-              <a:t>기준 : EXE_NEWUI\WCS_CLIENT\Ecs.exe (Build 2026.09.17 08:18:34) + Ecs.ini</a:t>
+              <a:t>기준 : EXE_NEWUI\WCS_CLIENT\Ecs.exe (Build 2026.09.21 17:13:55) + Ecs.ini</a:t>
             </a:r>
           </a:p>
         </p:txBody>
@@ -3585,7 +3585,7 @@
                 </a:solidFill>
                 <a:latin typeface="맑은 고딕"/>
               </a:rPr>
-              <a:t>LG 화학 1동 ECS  |  화면설계서  |  Ver 1.2</a:t>
+              <a:t>LG 화학 1동 ECS  |  화면설계서  |  Ver 2.0</a:t>
             </a:r>
           </a:p>
         </p:txBody>
@@ -3910,7 +3910,7 @@
                 </a:solidFill>
                 <a:latin typeface="맑은 고딕"/>
               </a:rPr>
-              <a:t>LG 화학 1동 ECS  |  화면설계서  |  Ver 1.2</a:t>
+              <a:t>LG 화학 1동 ECS  |  화면설계서  |  Ver 2.0</a:t>
             </a:r>
           </a:p>
         </p:txBody>
@@ -4247,7 +4247,7 @@
                 </a:solidFill>
                 <a:latin typeface="맑은 고딕"/>
               </a:rPr>
-              <a:t>LG 화학 1동 ECS  |  화면설계서  |  Ver 1.2</a:t>
+              <a:t>LG 화학 1동 ECS  |  화면설계서  |  Ver 2.0</a:t>
             </a:r>
           </a:p>
         </p:txBody>
@@ -4584,7 +4584,7 @@
                 </a:solidFill>
                 <a:latin typeface="맑은 고딕"/>
               </a:rPr>
-              <a:t>LG 화학 1동 ECS  |  화면설계서  |  Ver 1.2</a:t>
+              <a:t>LG 화학 1동 ECS  |  화면설계서  |  Ver 2.0</a:t>
             </a:r>
           </a:p>
         </p:txBody>
@@ -4864,7 +4864,7 @@
                 </a:solidFill>
                 <a:latin typeface="맑은 고딕"/>
               </a:rPr>
-              <a:t>LG 화학 1동 ECS  |  화면설계서  |  Ver 1.2</a:t>
+              <a:t>LG 화학 1동 ECS  |  화면설계서  |  Ver 2.0</a:t>
             </a:r>
           </a:p>
         </p:txBody>
@@ -5153,7 +5153,7 @@
                 </a:solidFill>
                 <a:latin typeface="맑은 고딕"/>
               </a:rPr>
-              <a:t>LG 화학 1동 ECS  |  화면설계서  |  Ver 1.2</a:t>
+              <a:t>LG 화학 1동 ECS  |  화면설계서  |  Ver 2.0</a:t>
             </a:r>
           </a:p>
         </p:txBody>
@@ -5508,7 +5508,7 @@
                 </a:solidFill>
                 <a:latin typeface="맑은 고딕"/>
               </a:rPr>
-              <a:t>LG 화학 1동 ECS  |  화면설계서  |  Ver 1.2</a:t>
+              <a:t>LG 화학 1동 ECS  |  화면설계서  |  Ver 2.0</a:t>
             </a:r>
           </a:p>
         </p:txBody>
@@ -5821,7 +5821,7 @@
                 </a:solidFill>
                 <a:latin typeface="맑은 고딕"/>
               </a:rPr>
-              <a:t>LG 화학 1동 ECS  |  화면설계서  |  Ver 1.2</a:t>
+              <a:t>LG 화학 1동 ECS  |  화면설계서  |  Ver 2.0</a:t>
             </a:r>
           </a:p>
         </p:txBody>
@@ -6134,7 +6134,7 @@
                 </a:solidFill>
                 <a:latin typeface="맑은 고딕"/>
               </a:rPr>
-              <a:t>LG 화학 1동 ECS  |  화면설계서  |  Ver 1.2</a:t>
+              <a:t>LG 화학 1동 ECS  |  화면설계서  |  Ver 2.0</a:t>
             </a:r>
           </a:p>
         </p:txBody>
@@ -6414,7 +6414,7 @@
                 </a:solidFill>
                 <a:latin typeface="맑은 고딕"/>
               </a:rPr>
-              <a:t>LG 화학 1동 ECS  |  화면설계서  |  Ver 1.2</a:t>
+              <a:t>LG 화학 1동 ECS  |  화면설계서  |  Ver 2.0</a:t>
             </a:r>
           </a:p>
         </p:txBody>
@@ -6530,7 +6530,7 @@
         </p:nvGraphicFramePr>
         <p:xfrm>
           <a:off x="640080" y="1280160"/>
-          <a:ext cx="10881360" cy="1929384"/>
+          <a:ext cx="10881360" cy="2286000"/>
         </p:xfrm>
         <a:graphic>
           <a:graphicData uri="http://schemas.openxmlformats.org/drawingml/2006/table">
@@ -7313,6 +7313,121 @@
                   </a:ext>
                 </a:extLst>
               </a:tr>
+              <a:tr h="457200">
+                <a:tc>
+                  <a:txBody>
+                    <a:bodyPr/>
+                    <a:lstStyle/>
+                    <a:p>
+                      <a:r>
+                        <a:rPr sz="1100">
+                          <a:solidFill>
+                            <a:srgbClr val="222222"/>
+                          </a:solidFill>
+                          <a:latin typeface="맑은 고딕"/>
+                        </a:rPr>
+                        <a:t>V2.0</a:t>
+                      </a:r>
+                    </a:p>
+                  </a:txBody>
+                  <a:tcPr marT="27432" marB="27432">
+                    <a:solidFill>
+                      <a:srgbClr val="FFFFFF"/>
+                    </a:solidFill>
+                  </a:tcPr>
+                </a:tc>
+                <a:tc>
+                  <a:txBody>
+                    <a:bodyPr/>
+                    <a:lstStyle/>
+                    <a:p>
+                      <a:r>
+                        <a:rPr sz="1100">
+                          <a:solidFill>
+                            <a:srgbClr val="222222"/>
+                          </a:solidFill>
+                          <a:latin typeface="맑은 고딕"/>
+                        </a:rPr>
+                        <a:t>2026-09-21</a:t>
+                      </a:r>
+                    </a:p>
+                  </a:txBody>
+                  <a:tcPr marT="27432" marB="27432">
+                    <a:solidFill>
+                      <a:srgbClr val="FFFFFF"/>
+                    </a:solidFill>
+                  </a:tcPr>
+                </a:tc>
+                <a:tc>
+                  <a:txBody>
+                    <a:bodyPr/>
+                    <a:lstStyle/>
+                    <a:p>
+                      <a:r>
+                        <a:rPr sz="1100">
+                          <a:solidFill>
+                            <a:srgbClr val="222222"/>
+                          </a:solidFill>
+                          <a:latin typeface="맑은 고딕"/>
+                        </a:rPr>
+                        <a:t>LGLS ECS Renewal</a:t>
+                      </a:r>
+                    </a:p>
+                  </a:txBody>
+                  <a:tcPr marT="27432" marB="27432">
+                    <a:solidFill>
+                      <a:srgbClr val="FFFFFF"/>
+                    </a:solidFill>
+                  </a:tcPr>
+                </a:tc>
+                <a:tc>
+                  <a:txBody>
+                    <a:bodyPr/>
+                    <a:lstStyle/>
+                    <a:p>
+                      <a:endParaRPr/>
+                    </a:p>
+                  </a:txBody>
+                  <a:tcPr marT="27432" marB="27432">
+                    <a:solidFill>
+                      <a:srgbClr val="FFFFFF"/>
+                    </a:solidFill>
+                  </a:tcPr>
+                </a:tc>
+                <a:tc>
+                  <a:txBody>
+                    <a:bodyPr/>
+                    <a:lstStyle/>
+                    <a:p>
+                      <a:r>
+                        <a:rPr sz="1100" dirty="0" err="1">
+                          <a:solidFill>
+                            <a:srgbClr val="222222"/>
+                          </a:solidFill>
+                          <a:latin typeface="맑은 고딕"/>
+                        </a:rPr>
+                        <a:t>최종판 : 크레인·RGV 상태창 정리(동작상태 파생 항목 제거, 값 칸 통합·확대), 설비 DOWN·수동을 에러색으로, 에러 칸 "[코드]문구" 표시, 상태창 긴 글자 흐름 표시, MANUAL 수동지시 숨김 반영. 캡처 전면 갱신(전체화면)</a:t>
+                      </a:r>
+                      <a:endParaRPr sz="1100" dirty="0">
+                        <a:solidFill>
+                          <a:srgbClr val="222222"/>
+                        </a:solidFill>
+                        <a:latin typeface="맑은 고딕"/>
+                      </a:endParaRPr>
+                    </a:p>
+                  </a:txBody>
+                  <a:tcPr marT="27432" marB="27432">
+                    <a:solidFill>
+                      <a:srgbClr val="FFFFFF"/>
+                    </a:solidFill>
+                  </a:tcPr>
+                </a:tc>
+                <a:extLst>
+                  <a:ext uri="{0D108BD9-81ED-4DB2-BD59-A6C34878D82A}">
+                    <a16:rowId xmlns:a16="http://schemas.microsoft.com/office/drawing/2014/main" val="10003"/>
+                  </a:ext>
+                </a:extLst>
+              </a:tr>
             </a:tbl>
           </a:graphicData>
         </a:graphic>
@@ -7347,7 +7462,7 @@
                 </a:solidFill>
                 <a:latin typeface="맑은 고딕"/>
               </a:rPr>
-              <a:t>LG 화학 1동 ECS  |  화면설계서  |  Ver 1.2</a:t>
+              <a:t>LG 화학 1동 ECS  |  화면설계서  |  Ver 2.0</a:t>
             </a:r>
           </a:p>
         </p:txBody>
@@ -7660,7 +7775,7 @@
                 </a:solidFill>
                 <a:latin typeface="맑은 고딕"/>
               </a:rPr>
-              <a:t>LG 화학 1동 ECS  |  화면설계서  |  Ver 1.2</a:t>
+              <a:t>LG 화학 1동 ECS  |  화면설계서  |  Ver 2.0</a:t>
             </a:r>
           </a:p>
         </p:txBody>
@@ -7908,6 +8023,54 @@
               <a:t>설비(CV/SC/RTV) 에러 발생·해제 이력(EQP_ERR_HIS)을 조회한다.</a:t>
             </a:r>
           </a:p>
+          <a:p>
+            <a:pPr algn="l"/>
+            <a:r>
+              <a:rPr sz="1100" b="0">
+                <a:solidFill>
+                  <a:srgbClr val="595959"/>
+                </a:solidFill>
+                <a:latin typeface="맑은 고딕"/>
+              </a:rPr>
+              <a:t/>
+            </a:r>
+          </a:p>
+          <a:p>
+            <a:pPr algn="l"/>
+            <a:r>
+              <a:rPr sz="1100" b="0">
+                <a:solidFill>
+                  <a:srgbClr val="595959"/>
+                </a:solidFill>
+                <a:latin typeface="맑은 고딕"/>
+              </a:rPr>
+              <a:t>■ 특기사항</a:t>
+            </a:r>
+          </a:p>
+          <a:p>
+            <a:pPr algn="l"/>
+            <a:r>
+              <a:rPr sz="1100" b="0">
+                <a:solidFill>
+                  <a:srgbClr val="595959"/>
+                </a:solidFill>
+                <a:latin typeface="맑은 고딕"/>
+              </a:rPr>
+              <a:t>· 에러 문구는 에러코드 마스터(EQP_ECD_MST)에서 설비·코드표 구분으로 찾는다. 크레인은 PLC 알람 리스트 코드표(SC_LGLS).</a:t>
+            </a:r>
+          </a:p>
+          <a:p>
+            <a:pPr algn="l"/>
+            <a:r>
+              <a:rPr sz="1100" b="0">
+                <a:solidFill>
+                  <a:srgbClr val="595959"/>
+                </a:solidFill>
+                <a:latin typeface="맑은 고딕"/>
+              </a:rPr>
+              <a:t>· 설비구분 SC 를 고르면 SC_LGLS 등 크레인 코드표 구분으로 쌓인 이력도 함께 조회된다.</a:t>
+            </a:r>
+          </a:p>
         </p:txBody>
       </p:sp>
       <p:sp>
@@ -7940,7 +8103,7 @@
                 </a:solidFill>
                 <a:latin typeface="맑은 고딕"/>
               </a:rPr>
-              <a:t>LG 화학 1동 ECS  |  화면설계서  |  Ver 1.2</a:t>
+              <a:t>LG 화학 1동 ECS  |  화면설계서  |  Ver 2.0</a:t>
             </a:r>
           </a:p>
         </p:txBody>
@@ -8220,7 +8383,7 @@
                 </a:solidFill>
                 <a:latin typeface="맑은 고딕"/>
               </a:rPr>
-              <a:t>LG 화학 1동 ECS  |  화면설계서  |  Ver 1.2</a:t>
+              <a:t>LG 화학 1동 ECS  |  화면설계서  |  Ver 2.0</a:t>
             </a:r>
           </a:p>
         </p:txBody>
@@ -8500,7 +8663,7 @@
                 </a:solidFill>
                 <a:latin typeface="맑은 고딕"/>
               </a:rPr>
-              <a:t>LG 화학 1동 ECS  |  화면설계서  |  Ver 1.2</a:t>
+              <a:t>LG 화학 1동 ECS  |  화면설계서  |  Ver 2.0</a:t>
             </a:r>
           </a:p>
         </p:txBody>
@@ -8813,7 +8976,7 @@
                 </a:solidFill>
                 <a:latin typeface="맑은 고딕"/>
               </a:rPr>
-              <a:t>LG 화학 1동 ECS  |  화면설계서  |  Ver 1.2</a:t>
+              <a:t>LG 화학 1동 ECS  |  화면설계서  |  Ver 2.0</a:t>
             </a:r>
           </a:p>
         </p:txBody>
@@ -8989,30 +9152,6 @@
           </a:p>
         </p:txBody>
       </p:sp>
-      <p:pic>
-        <p:nvPicPr>
-          <p:cNvPr id="4" name="Picture 3" descr="cv_0.png"/>
-          <p:cNvPicPr>
-            <a:picLocks noChangeAspect="1"/>
-          </p:cNvPicPr>
-          <p:nvPr/>
-        </p:nvPicPr>
-        <p:blipFill>
-          <a:blip r:embed="rId2"/>
-          <a:stretch>
-            <a:fillRect/>
-          </a:stretch>
-        </p:blipFill>
-        <p:spPr>
-          <a:xfrm>
-            <a:off x="2196917" y="1280160"/>
-            <a:ext cx="4384405" cy="4846320"/>
-          </a:xfrm>
-          <a:prstGeom prst="rect">
-            <a:avLst/>
-          </a:prstGeom>
-        </p:spPr>
-      </p:pic>
       <p:sp>
         <p:nvSpPr>
           <p:cNvPr id="5" name="TextBox 4"/>
@@ -9148,6 +9287,18 @@
               <a:t>· 확대 버튼은 숨김(Ecs.ini ZOOM_BTN=0).</a:t>
             </a:r>
           </a:p>
+          <a:p>
+            <a:pPr algn="l"/>
+            <a:r>
+              <a:rPr sz="1000" b="0">
+                <a:solidFill>
+                  <a:srgbClr val="595959"/>
+                </a:solidFill>
+                <a:latin typeface="맑은 고딕"/>
+              </a:rPr>
+              <a:t>· 칸에 다 들어가지 않는 긴 글자는 그 칸에서 한 글자씩 흘러간다(입력 중인 칸은 제외). 2026-09-21 추가.</a:t>
+            </a:r>
+          </a:p>
         </p:txBody>
       </p:sp>
       <p:sp>
@@ -9180,7 +9331,7 @@
                 </a:solidFill>
                 <a:latin typeface="맑은 고딕"/>
               </a:rPr>
-              <a:t>LG 화학 1동 ECS  |  화면설계서  |  Ver 1.2</a:t>
+              <a:t>LG 화학 1동 ECS  |  화면설계서  |  Ver 2.0</a:t>
             </a:r>
           </a:p>
         </p:txBody>
@@ -9220,6 +9371,30 @@
           </a:p>
         </p:txBody>
       </p:sp>
+      <p:pic>
+        <p:nvPicPr>
+          <p:cNvPr id="8" name="Picture 7" descr="cv_0_v20.png"/>
+          <p:cNvPicPr>
+            <a:picLocks noChangeAspect="1"/>
+          </p:cNvPicPr>
+          <p:nvPr/>
+        </p:nvPicPr>
+        <p:blipFill>
+          <a:blip r:embed="rId3"/>
+          <a:stretch>
+            <a:fillRect/>
+          </a:stretch>
+        </p:blipFill>
+        <p:spPr>
+          <a:xfrm>
+            <a:off x="2196917" y="1280160"/>
+            <a:ext cx="4384405" cy="4747878"/>
+          </a:xfrm>
+          <a:prstGeom prst="rect">
+            <a:avLst/>
+          </a:prstGeom>
+        </p:spPr>
+      </p:pic>
     </p:spTree>
   </p:cSld>
   <p:clrMapOvr>
@@ -9326,30 +9501,6 @@
           </a:p>
         </p:txBody>
       </p:sp>
-      <p:pic>
-        <p:nvPicPr>
-          <p:cNvPr id="4" name="Picture 3" descr="sc_0.png"/>
-          <p:cNvPicPr>
-            <a:picLocks noChangeAspect="1"/>
-          </p:cNvPicPr>
-          <p:nvPr/>
-        </p:nvPicPr>
-        <p:blipFill>
-          <a:blip r:embed="rId2"/>
-          <a:stretch>
-            <a:fillRect/>
-          </a:stretch>
-        </p:blipFill>
-        <p:spPr>
-          <a:xfrm>
-            <a:off x="2405492" y="1280160"/>
-            <a:ext cx="3967255" cy="4846320"/>
-          </a:xfrm>
-          <a:prstGeom prst="rect">
-            <a:avLst/>
-          </a:prstGeom>
-        </p:spPr>
-      </p:pic>
       <p:sp>
         <p:nvSpPr>
           <p:cNvPr id="5" name="TextBox 4"/>
@@ -9485,6 +9636,54 @@
               <a:t>· 확대 버튼은 숨김(ZOOM_BTN=0).</a:t>
             </a:r>
           </a:p>
+          <a:p>
+            <a:pPr algn="l"/>
+            <a:r>
+              <a:rPr sz="1000" b="0">
+                <a:solidFill>
+                  <a:srgbClr val="595959"/>
+                </a:solidFill>
+                <a:latin typeface="맑은 고딕"/>
+              </a:rPr>
+              <a:t>· 에러 칸은 "[코드]알람 문구" 로 표시한다 (예 [0073]좌측 렉 이중입고). 코드표 = Ecs.ini [SC_ERR] ERR_TYP(SC_LGLS).</a:t>
+            </a:r>
+          </a:p>
+          <a:p>
+            <a:pPr algn="l"/>
+            <a:r>
+              <a:rPr sz="1000" b="0">
+                <a:solidFill>
+                  <a:srgbClr val="595959"/>
+                </a:solidFill>
+                <a:latin typeface="맑은 고딕"/>
+              </a:rPr>
+              <a:t>· 에러 해제 시 이중입고(73·74)·공출고(75) 확인창은 Ecs.ini [SC_ERR] DUAL_CODES / EMPTY_CODES 기준.</a:t>
+            </a:r>
+          </a:p>
+          <a:p>
+            <a:pPr algn="l"/>
+            <a:r>
+              <a:rPr sz="1000" b="0">
+                <a:solidFill>
+                  <a:srgbClr val="595959"/>
+                </a:solidFill>
+                <a:latin typeface="맑은 고딕"/>
+              </a:rPr>
+              <a:t>· 2026-09-21 : 지상반·기상반·SRC상태 칸을 없앴다(셋 다 동작상태 워드에서 계산한 값이라 동작상태와 늘 같았다).</a:t>
+            </a:r>
+          </a:p>
+          <a:p>
+            <a:pPr algn="l"/>
+            <a:r>
+              <a:rPr sz="1000" b="0">
+                <a:solidFill>
+                  <a:srgbClr val="595959"/>
+                </a:solidFill>
+                <a:latin typeface="맑은 고딕"/>
+              </a:rPr>
+              <a:t>· 화물유무·포크위치·수평주행·완료상태를 동작상태와 한 그룹으로 모으고 값 칸을 넓혔다.</a:t>
+            </a:r>
+          </a:p>
         </p:txBody>
       </p:sp>
       <p:sp>
@@ -9517,7 +9716,7 @@
                 </a:solidFill>
                 <a:latin typeface="맑은 고딕"/>
               </a:rPr>
-              <a:t>LG 화학 1동 ECS  |  화면설계서  |  Ver 1.2</a:t>
+              <a:t>LG 화학 1동 ECS  |  화면설계서  |  Ver 2.0</a:t>
             </a:r>
           </a:p>
         </p:txBody>
@@ -9557,6 +9756,30 @@
           </a:p>
         </p:txBody>
       </p:sp>
+      <p:pic>
+        <p:nvPicPr>
+          <p:cNvPr id="8" name="Picture 7" descr="sc_0_v20.png"/>
+          <p:cNvPicPr>
+            <a:picLocks noChangeAspect="1"/>
+          </p:cNvPicPr>
+          <p:nvPr/>
+        </p:nvPicPr>
+        <p:blipFill>
+          <a:blip r:embed="rId3"/>
+          <a:stretch>
+            <a:fillRect/>
+          </a:stretch>
+        </p:blipFill>
+        <p:spPr>
+          <a:xfrm>
+            <a:off x="2405492" y="1280160"/>
+            <a:ext cx="3967255" cy="4694585"/>
+          </a:xfrm>
+          <a:prstGeom prst="rect">
+            <a:avLst/>
+          </a:prstGeom>
+        </p:spPr>
+      </p:pic>
     </p:spTree>
   </p:cSld>
   <p:clrMapOvr>
@@ -9663,30 +9886,6 @@
           </a:p>
         </p:txBody>
       </p:sp>
-      <p:pic>
-        <p:nvPicPr>
-          <p:cNvPr id="4" name="Picture 3" descr="rtv_0.png"/>
-          <p:cNvPicPr>
-            <a:picLocks noChangeAspect="1"/>
-          </p:cNvPicPr>
-          <p:nvPr/>
-        </p:nvPicPr>
-        <p:blipFill>
-          <a:blip r:embed="rId2"/>
-          <a:stretch>
-            <a:fillRect/>
-          </a:stretch>
-        </p:blipFill>
-        <p:spPr>
-          <a:xfrm>
-            <a:off x="2183372" y="1280160"/>
-            <a:ext cx="4411495" cy="4846320"/>
-          </a:xfrm>
-          <a:prstGeom prst="rect">
-            <a:avLst/>
-          </a:prstGeom>
-        </p:spPr>
-      </p:pic>
       <p:sp>
         <p:nvSpPr>
           <p:cNvPr id="5" name="TextBox 4"/>
@@ -9810,6 +10009,30 @@
               <a:t>· 확대 버튼은 숨김(ZOOM_BTN=0).</a:t>
             </a:r>
           </a:p>
+          <a:p>
+            <a:pPr algn="l"/>
+            <a:r>
+              <a:rPr sz="1000" b="0">
+                <a:solidFill>
+                  <a:srgbClr val="595959"/>
+                </a:solidFill>
+                <a:latin typeface="맑은 고딕"/>
+              </a:rPr>
+              <a:t>· 진단 칸은 "[코드]알람 문구" 로 표시한다 (예 [0033]RGV 전진 한계점, PLC 알람 비트 M5601~M560F).</a:t>
+            </a:r>
+          </a:p>
+          <a:p>
+            <a:pPr algn="l"/>
+            <a:r>
+              <a:rPr sz="1000" b="0">
+                <a:solidFill>
+                  <a:srgbClr val="595959"/>
+                </a:solidFill>
+                <a:latin typeface="맑은 고딕"/>
+              </a:rPr>
+              <a:t>· 2026-09-21 : 운영모드·ACTIVE 칸을 없애고(동작상태 파생값), [RTV 금지] 영역에 맞춰 배치를 정리했다.</a:t>
+            </a:r>
+          </a:p>
         </p:txBody>
       </p:sp>
       <p:sp>
@@ -9842,7 +10065,7 @@
                 </a:solidFill>
                 <a:latin typeface="맑은 고딕"/>
               </a:rPr>
-              <a:t>LG 화학 1동 ECS  |  화면설계서  |  Ver 1.2</a:t>
+              <a:t>LG 화학 1동 ECS  |  화면설계서  |  Ver 2.0</a:t>
             </a:r>
           </a:p>
         </p:txBody>
@@ -9882,6 +10105,30 @@
           </a:p>
         </p:txBody>
       </p:sp>
+      <p:pic>
+        <p:nvPicPr>
+          <p:cNvPr id="8" name="Picture 7" descr="rtv_0_v20.png"/>
+          <p:cNvPicPr>
+            <a:picLocks noChangeAspect="1"/>
+          </p:cNvPicPr>
+          <p:nvPr/>
+        </p:nvPicPr>
+        <p:blipFill>
+          <a:blip r:embed="rId3"/>
+          <a:stretch>
+            <a:fillRect/>
+          </a:stretch>
+        </p:blipFill>
+        <p:spPr>
+          <a:xfrm>
+            <a:off x="2183372" y="1280160"/>
+            <a:ext cx="4411495" cy="4668248"/>
+          </a:xfrm>
+          <a:prstGeom prst="rect">
+            <a:avLst/>
+          </a:prstGeom>
+        </p:spPr>
+      </p:pic>
     </p:spTree>
   </p:cSld>
   <p:clrMapOvr>
@@ -11280,7 +11527,7 @@
                 </a:solidFill>
                 <a:latin typeface="맑은 고딕"/>
               </a:rPr>
-              <a:t>LG 화학 1동 ECS  |  화면설계서  |  Ver 1.2</a:t>
+              <a:t>LG 화학 1동 ECS  |  화면설계서  |  Ver 2.0</a:t>
             </a:r>
           </a:p>
         </p:txBody>
@@ -11380,105 +11627,100 @@
           </a:p>
         </p:txBody>
       </p:sp>
+      <p:sp>
+        <p:nvSpPr>
+          <p:cNvPr id="4" name="TextBox 3"/>
+          <p:cNvSpPr txBox="1"/>
+          <p:nvPr/>
+        </p:nvSpPr>
+        <p:spPr>
+          <a:xfrm>
+            <a:off x="457200" y="6446520"/>
+            <a:ext cx="4572000" cy="320040"/>
+          </a:xfrm>
+          <a:prstGeom prst="rect">
+            <a:avLst/>
+          </a:prstGeom>
+          <a:noFill/>
+        </p:spPr>
+        <p:txBody>
+          <a:bodyPr wrap="square" lIns="45720" rIns="45720" anchor="t">
+            <a:spAutoFit/>
+          </a:bodyPr>
+          <a:lstStyle/>
+          <a:p>
+            <a:pPr algn="l"/>
+            <a:r>
+              <a:rPr sz="1000" b="0">
+                <a:solidFill>
+                  <a:srgbClr val="595959"/>
+                </a:solidFill>
+                <a:latin typeface="맑은 고딕"/>
+              </a:rPr>
+              <a:t>LG 화학 1동 ECS  |  화면설계서  |  Ver 2.0</a:t>
+            </a:r>
+          </a:p>
+        </p:txBody>
+      </p:sp>
+      <p:sp>
+        <p:nvSpPr>
+          <p:cNvPr id="5" name="TextBox 4"/>
+          <p:cNvSpPr txBox="1"/>
+          <p:nvPr/>
+        </p:nvSpPr>
+        <p:spPr>
+          <a:xfrm>
+            <a:off x="11155680" y="6446520"/>
+            <a:ext cx="731520" cy="320040"/>
+          </a:xfrm>
+          <a:prstGeom prst="rect">
+            <a:avLst/>
+          </a:prstGeom>
+          <a:noFill/>
+        </p:spPr>
+        <p:txBody>
+          <a:bodyPr wrap="square" lIns="45720" rIns="45720" anchor="t">
+            <a:spAutoFit/>
+          </a:bodyPr>
+          <a:lstStyle/>
+          <a:p>
+            <a:pPr algn="r"/>
+            <a:r>
+              <a:rPr sz="1000" b="0">
+                <a:solidFill>
+                  <a:srgbClr val="595959"/>
+                </a:solidFill>
+                <a:latin typeface="맑은 고딕"/>
+              </a:rPr>
+              <a:t>4</a:t>
+            </a:r>
+          </a:p>
+        </p:txBody>
+      </p:sp>
       <p:pic>
         <p:nvPicPr>
-          <p:cNvPr id="3" name="Picture 2" descr="main_full.png"/>
+          <p:cNvPr id="6" name="Picture 5" descr="main_full_v20.png"/>
           <p:cNvPicPr>
             <a:picLocks noChangeAspect="1"/>
           </p:cNvPicPr>
           <p:nvPr/>
         </p:nvPicPr>
         <p:blipFill>
-          <a:blip r:embed="rId2"/>
+          <a:blip r:embed="rId3"/>
           <a:stretch>
             <a:fillRect/>
           </a:stretch>
         </p:blipFill>
         <p:spPr>
           <a:xfrm>
-            <a:off x="735666" y="621792"/>
-            <a:ext cx="10717618" cy="5760720"/>
-          </a:xfrm>
-          <a:prstGeom prst="rect">
-            <a:avLst/>
-          </a:prstGeom>
-          <a:ln>
-            <a:solidFill>
-              <a:srgbClr val="C8CEDA"/>
-            </a:solidFill>
-          </a:ln>
+            <a:off x="773505" y="621792"/>
+            <a:ext cx="10641940" cy="5760720"/>
+          </a:xfrm>
+          <a:prstGeom prst="rect">
+            <a:avLst/>
+          </a:prstGeom>
         </p:spPr>
       </p:pic>
-      <p:sp>
-        <p:nvSpPr>
-          <p:cNvPr id="4" name="TextBox 3"/>
-          <p:cNvSpPr txBox="1"/>
-          <p:nvPr/>
-        </p:nvSpPr>
-        <p:spPr>
-          <a:xfrm>
-            <a:off x="457200" y="6446520"/>
-            <a:ext cx="4572000" cy="320040"/>
-          </a:xfrm>
-          <a:prstGeom prst="rect">
-            <a:avLst/>
-          </a:prstGeom>
-          <a:noFill/>
-        </p:spPr>
-        <p:txBody>
-          <a:bodyPr wrap="square" lIns="45720" rIns="45720" anchor="t">
-            <a:spAutoFit/>
-          </a:bodyPr>
-          <a:lstStyle/>
-          <a:p>
-            <a:pPr algn="l"/>
-            <a:r>
-              <a:rPr sz="1000" b="0">
-                <a:solidFill>
-                  <a:srgbClr val="595959"/>
-                </a:solidFill>
-                <a:latin typeface="맑은 고딕"/>
-              </a:rPr>
-              <a:t>LG 화학 1동 ECS  |  화면설계서  |  Ver 1.2</a:t>
-            </a:r>
-          </a:p>
-        </p:txBody>
-      </p:sp>
-      <p:sp>
-        <p:nvSpPr>
-          <p:cNvPr id="5" name="TextBox 4"/>
-          <p:cNvSpPr txBox="1"/>
-          <p:nvPr/>
-        </p:nvSpPr>
-        <p:spPr>
-          <a:xfrm>
-            <a:off x="11155680" y="6446520"/>
-            <a:ext cx="731520" cy="320040"/>
-          </a:xfrm>
-          <a:prstGeom prst="rect">
-            <a:avLst/>
-          </a:prstGeom>
-          <a:noFill/>
-        </p:spPr>
-        <p:txBody>
-          <a:bodyPr wrap="square" lIns="45720" rIns="45720" anchor="t">
-            <a:spAutoFit/>
-          </a:bodyPr>
-          <a:lstStyle/>
-          <a:p>
-            <a:pPr algn="r"/>
-            <a:r>
-              <a:rPr sz="1000" b="0">
-                <a:solidFill>
-                  <a:srgbClr val="595959"/>
-                </a:solidFill>
-                <a:latin typeface="맑은 고딕"/>
-              </a:rPr>
-              <a:t>4</a:t>
-            </a:r>
-          </a:p>
-        </p:txBody>
-      </p:sp>
     </p:spTree>
   </p:cSld>
   <p:clrMapOvr>
@@ -12186,7 +12428,7 @@
                 </a:solidFill>
                 <a:latin typeface="맑은 고딕"/>
               </a:rPr>
-              <a:t>LG 화학 1동 ECS  |  화면설계서  |  Ver 1.2</a:t>
+              <a:t>LG 화학 1동 ECS  |  화면설계서  |  Ver 2.0</a:t>
             </a:r>
           </a:p>
         </p:txBody>
@@ -12321,35 +12563,6 @@
           </a:p>
         </p:txBody>
       </p:sp>
-      <p:pic>
-        <p:nvPicPr>
-          <p:cNvPr id="4" name="Picture 3" descr="ribbon_ecs_l.png"/>
-          <p:cNvPicPr>
-            <a:picLocks noChangeAspect="1"/>
-          </p:cNvPicPr>
-          <p:nvPr/>
-        </p:nvPicPr>
-        <p:blipFill>
-          <a:blip r:embed="rId2"/>
-          <a:stretch>
-            <a:fillRect/>
-          </a:stretch>
-        </p:blipFill>
-        <p:spPr>
-          <a:xfrm>
-            <a:off x="2274570" y="960120"/>
-            <a:ext cx="5143500" cy="822960"/>
-          </a:xfrm>
-          <a:prstGeom prst="rect">
-            <a:avLst/>
-          </a:prstGeom>
-          <a:ln>
-            <a:solidFill>
-              <a:srgbClr val="C8CEDA"/>
-            </a:solidFill>
-          </a:ln>
-        </p:spPr>
-      </p:pic>
       <p:sp>
         <p:nvSpPr>
           <p:cNvPr id="5" name="TextBox 4"/>
@@ -12385,35 +12598,6 @@
           </a:p>
         </p:txBody>
       </p:sp>
-      <p:pic>
-        <p:nvPicPr>
-          <p:cNvPr id="6" name="Picture 5" descr="ribbon_manual_l.png"/>
-          <p:cNvPicPr>
-            <a:picLocks noChangeAspect="1"/>
-          </p:cNvPicPr>
-          <p:nvPr/>
-        </p:nvPicPr>
-        <p:blipFill>
-          <a:blip r:embed="rId3"/>
-          <a:stretch>
-            <a:fillRect/>
-          </a:stretch>
-        </p:blipFill>
-        <p:spPr>
-          <a:xfrm>
-            <a:off x="2274570" y="1828800"/>
-            <a:ext cx="5143500" cy="822960"/>
-          </a:xfrm>
-          <a:prstGeom prst="rect">
-            <a:avLst/>
-          </a:prstGeom>
-          <a:ln>
-            <a:solidFill>
-              <a:srgbClr val="C8CEDA"/>
-            </a:solidFill>
-          </a:ln>
-        </p:spPr>
-      </p:pic>
       <p:sp>
         <p:nvSpPr>
           <p:cNvPr id="7" name="TextBox 6"/>
@@ -12449,35 +12633,6 @@
           </a:p>
         </p:txBody>
       </p:sp>
-      <p:pic>
-        <p:nvPicPr>
-          <p:cNvPr id="8" name="Picture 7" descr="ribbon_log_l.png"/>
-          <p:cNvPicPr>
-            <a:picLocks noChangeAspect="1"/>
-          </p:cNvPicPr>
-          <p:nvPr/>
-        </p:nvPicPr>
-        <p:blipFill>
-          <a:blip r:embed="rId4"/>
-          <a:stretch>
-            <a:fillRect/>
-          </a:stretch>
-        </p:blipFill>
-        <p:spPr>
-          <a:xfrm>
-            <a:off x="2274570" y="2697480"/>
-            <a:ext cx="5143500" cy="822960"/>
-          </a:xfrm>
-          <a:prstGeom prst="rect">
-            <a:avLst/>
-          </a:prstGeom>
-          <a:ln>
-            <a:solidFill>
-              <a:srgbClr val="C8CEDA"/>
-            </a:solidFill>
-          </a:ln>
-        </p:spPr>
-      </p:pic>
       <p:sp>
         <p:nvSpPr>
           <p:cNvPr id="9" name="TextBox 8"/>
@@ -12513,35 +12668,6 @@
           </a:p>
         </p:txBody>
       </p:sp>
-      <p:pic>
-        <p:nvPicPr>
-          <p:cNvPr id="10" name="Picture 9" descr="ribbon_comm.png"/>
-          <p:cNvPicPr>
-            <a:picLocks noChangeAspect="1"/>
-          </p:cNvPicPr>
-          <p:nvPr/>
-        </p:nvPicPr>
-        <p:blipFill>
-          <a:blip r:embed="rId5"/>
-          <a:stretch>
-            <a:fillRect/>
-          </a:stretch>
-        </p:blipFill>
-        <p:spPr>
-          <a:xfrm>
-            <a:off x="8595360" y="1554480"/>
-            <a:ext cx="1097280" cy="819302"/>
-          </a:xfrm>
-          <a:prstGeom prst="rect">
-            <a:avLst/>
-          </a:prstGeom>
-          <a:ln>
-            <a:solidFill>
-              <a:srgbClr val="C8CEDA"/>
-            </a:solidFill>
-          </a:ln>
-        </p:spPr>
-      </p:pic>
       <p:graphicFrame>
         <p:nvGraphicFramePr>
           <p:cNvPr id="11" name="Table 10"/>
@@ -13186,7 +13312,7 @@
                 </a:solidFill>
                 <a:latin typeface="맑은 고딕"/>
               </a:rPr>
-              <a:t>LG 화학 1동 ECS  |  화면설계서  |  Ver 1.2</a:t>
+              <a:t>LG 화학 1동 ECS  |  화면설계서  |  Ver 2.0</a:t>
             </a:r>
           </a:p>
         </p:txBody>
@@ -13226,6 +13352,102 @@
           </a:p>
         </p:txBody>
       </p:sp>
+      <p:pic>
+        <p:nvPicPr>
+          <p:cNvPr id="14" name="Picture 13" descr="ribbon_ecs.png"/>
+          <p:cNvPicPr>
+            <a:picLocks noChangeAspect="1"/>
+          </p:cNvPicPr>
+          <p:nvPr/>
+        </p:nvPicPr>
+        <p:blipFill>
+          <a:blip r:embed="rId6"/>
+          <a:stretch>
+            <a:fillRect/>
+          </a:stretch>
+        </p:blipFill>
+        <p:spPr>
+          <a:xfrm>
+            <a:off x="2274570" y="960120"/>
+            <a:ext cx="5143500" cy="523701"/>
+          </a:xfrm>
+          <a:prstGeom prst="rect">
+            <a:avLst/>
+          </a:prstGeom>
+        </p:spPr>
+      </p:pic>
+      <p:pic>
+        <p:nvPicPr>
+          <p:cNvPr id="15" name="Picture 14" descr="ribbon_manual.png"/>
+          <p:cNvPicPr>
+            <a:picLocks noChangeAspect="1"/>
+          </p:cNvPicPr>
+          <p:nvPr/>
+        </p:nvPicPr>
+        <p:blipFill>
+          <a:blip r:embed="rId7"/>
+          <a:stretch>
+            <a:fillRect/>
+          </a:stretch>
+        </p:blipFill>
+        <p:spPr>
+          <a:xfrm>
+            <a:off x="2274570" y="1828800"/>
+            <a:ext cx="5143500" cy="523701"/>
+          </a:xfrm>
+          <a:prstGeom prst="rect">
+            <a:avLst/>
+          </a:prstGeom>
+        </p:spPr>
+      </p:pic>
+      <p:pic>
+        <p:nvPicPr>
+          <p:cNvPr id="16" name="Picture 15" descr="ribbon_log.png"/>
+          <p:cNvPicPr>
+            <a:picLocks noChangeAspect="1"/>
+          </p:cNvPicPr>
+          <p:nvPr/>
+        </p:nvPicPr>
+        <p:blipFill>
+          <a:blip r:embed="rId8"/>
+          <a:stretch>
+            <a:fillRect/>
+          </a:stretch>
+        </p:blipFill>
+        <p:spPr>
+          <a:xfrm>
+            <a:off x="2274570" y="2697480"/>
+            <a:ext cx="5143500" cy="523701"/>
+          </a:xfrm>
+          <a:prstGeom prst="rect">
+            <a:avLst/>
+          </a:prstGeom>
+        </p:spPr>
+      </p:pic>
+      <p:pic>
+        <p:nvPicPr>
+          <p:cNvPr id="17" name="Picture 16" descr="ribbon_comm.png"/>
+          <p:cNvPicPr>
+            <a:picLocks noChangeAspect="1"/>
+          </p:cNvPicPr>
+          <p:nvPr/>
+        </p:nvPicPr>
+        <p:blipFill>
+          <a:blip r:embed="rId9"/>
+          <a:stretch>
+            <a:fillRect/>
+          </a:stretch>
+        </p:blipFill>
+        <p:spPr>
+          <a:xfrm>
+            <a:off x="8595360" y="1554480"/>
+            <a:ext cx="1097280" cy="740333"/>
+          </a:xfrm>
+          <a:prstGeom prst="rect">
+            <a:avLst/>
+          </a:prstGeom>
+        </p:spPr>
+      </p:pic>
     </p:spTree>
   </p:cSld>
   <p:clrMapOvr>
@@ -13774,6 +13996,18 @@
               <a:t>· 색은 ECS &gt; 환경설정 &gt; 범례 에서 바꾸며 저장 즉시 반영된다.</a:t>
             </a:r>
           </a:p>
+          <a:p>
+            <a:pPr algn="l"/>
+            <a:r>
+              <a:rPr sz="1050" b="0">
+                <a:solidFill>
+                  <a:srgbClr val="595959"/>
+                </a:solidFill>
+                <a:latin typeface="맑은 고딕"/>
+              </a:rPr>
+              <a:t>· 2026-09-21 : 설비 동작상태가 DOWN 이거나 기상반이 수동이면 크레인·RGV 를 에러색으로 그린다.</a:t>
+            </a:r>
+          </a:p>
         </p:txBody>
       </p:sp>
       <p:sp>
@@ -13806,7 +14040,7 @@
                 </a:solidFill>
                 <a:latin typeface="맑은 고딕"/>
               </a:rPr>
-              <a:t>LG 화학 1동 ECS  |  화면설계서  |  Ver 1.2</a:t>
+              <a:t>LG 화학 1동 ECS  |  화면설계서  |  Ver 2.0</a:t>
             </a:r>
           </a:p>
         </p:txBody>
@@ -14148,7 +14382,7 @@
                 </a:solidFill>
                 <a:latin typeface="맑은 고딕"/>
               </a:rPr>
-              <a:t>LG 화학 1동 ECS  |  화면설계서  |  Ver 1.2</a:t>
+              <a:t>LG 화학 1동 ECS  |  화면설계서  |  Ver 2.0</a:t>
             </a:r>
           </a:p>
         </p:txBody>
@@ -14909,7 +15143,7 @@
                 </a:solidFill>
                 <a:latin typeface="맑은 고딕"/>
               </a:rPr>
-              <a:t>LG 화학 1동 ECS  |  화면설계서  |  Ver 1.2</a:t>
+              <a:t>LG 화학 1동 ECS  |  화면설계서  |  Ver 2.0</a:t>
             </a:r>
           </a:p>
         </p:txBody>

--- a/docs/산출물_20260921/06_ECS_화면설계서.pptx
+++ b/docs/산출물_20260921/06_ECS_화면설계서.pptx
@@ -21,17 +21,15 @@
     <p:sldId id="269" r:id="rId15"/>
     <p:sldId id="270" r:id="rId16"/>
     <p:sldId id="271" r:id="rId17"/>
-    <p:sldId id="272" r:id="rId18"/>
-    <p:sldId id="273" r:id="rId19"/>
-    <p:sldId id="274" r:id="rId20"/>
-    <p:sldId id="275" r:id="rId21"/>
-    <p:sldId id="276" r:id="rId22"/>
-    <p:sldId id="277" r:id="rId23"/>
-    <p:sldId id="278" r:id="rId24"/>
-    <p:sldId id="279" r:id="rId25"/>
-    <p:sldId id="280" r:id="rId26"/>
-    <p:sldId id="281" r:id="rId27"/>
-    <p:sldId id="282" r:id="rId28"/>
+    <p:sldId id="274" r:id="rId18"/>
+    <p:sldId id="275" r:id="rId19"/>
+    <p:sldId id="276" r:id="rId20"/>
+    <p:sldId id="277" r:id="rId21"/>
+    <p:sldId id="278" r:id="rId22"/>
+    <p:sldId id="279" r:id="rId23"/>
+    <p:sldId id="280" r:id="rId24"/>
+    <p:sldId id="281" r:id="rId25"/>
+    <p:sldId id="282" r:id="rId26"/>
   </p:sldIdLst>
   <p:sldSz cx="12192000" cy="6858000"/>
   <p:notesSz cx="6858000" cy="9144000"/>
@@ -328,7 +326,7 @@
           <a:p>
             <a:fld id="{5BCAD085-E8A6-8845-BD4E-CB4CCA059FC4}" type="datetimeFigureOut">
               <a:rPr lang="en-US" smtClean="0"/>
-              <a:t>9/17/2026</a:t>
+              <a:t>9/21/2026</a:t>
             </a:fld>
             <a:endParaRPr lang="en-US"/>
           </a:p>
@@ -496,7 +494,7 @@
           <a:p>
             <a:fld id="{5BCAD085-E8A6-8845-BD4E-CB4CCA059FC4}" type="datetimeFigureOut">
               <a:rPr lang="en-US" smtClean="0"/>
-              <a:t>9/17/2026</a:t>
+              <a:t>9/21/2026</a:t>
             </a:fld>
             <a:endParaRPr lang="en-US"/>
           </a:p>
@@ -674,7 +672,7 @@
           <a:p>
             <a:fld id="{5BCAD085-E8A6-8845-BD4E-CB4CCA059FC4}" type="datetimeFigureOut">
               <a:rPr lang="en-US" smtClean="0"/>
-              <a:t>9/17/2026</a:t>
+              <a:t>9/21/2026</a:t>
             </a:fld>
             <a:endParaRPr lang="en-US"/>
           </a:p>
@@ -842,7 +840,7 @@
           <a:p>
             <a:fld id="{5BCAD085-E8A6-8845-BD4E-CB4CCA059FC4}" type="datetimeFigureOut">
               <a:rPr lang="en-US" smtClean="0"/>
-              <a:t>9/17/2026</a:t>
+              <a:t>9/21/2026</a:t>
             </a:fld>
             <a:endParaRPr lang="en-US"/>
           </a:p>
@@ -1087,7 +1085,7 @@
           <a:p>
             <a:fld id="{5BCAD085-E8A6-8845-BD4E-CB4CCA059FC4}" type="datetimeFigureOut">
               <a:rPr lang="en-US" smtClean="0"/>
-              <a:t>9/17/2026</a:t>
+              <a:t>9/21/2026</a:t>
             </a:fld>
             <a:endParaRPr lang="en-US"/>
           </a:p>
@@ -1372,7 +1370,7 @@
           <a:p>
             <a:fld id="{5BCAD085-E8A6-8845-BD4E-CB4CCA059FC4}" type="datetimeFigureOut">
               <a:rPr lang="en-US" smtClean="0"/>
-              <a:t>9/17/2026</a:t>
+              <a:t>9/21/2026</a:t>
             </a:fld>
             <a:endParaRPr lang="en-US"/>
           </a:p>
@@ -1791,7 +1789,7 @@
           <a:p>
             <a:fld id="{5BCAD085-E8A6-8845-BD4E-CB4CCA059FC4}" type="datetimeFigureOut">
               <a:rPr lang="en-US" smtClean="0"/>
-              <a:t>9/17/2026</a:t>
+              <a:t>9/21/2026</a:t>
             </a:fld>
             <a:endParaRPr lang="en-US"/>
           </a:p>
@@ -1908,7 +1906,7 @@
           <a:p>
             <a:fld id="{5BCAD085-E8A6-8845-BD4E-CB4CCA059FC4}" type="datetimeFigureOut">
               <a:rPr lang="en-US" smtClean="0"/>
-              <a:t>9/17/2026</a:t>
+              <a:t>9/21/2026</a:t>
             </a:fld>
             <a:endParaRPr lang="en-US"/>
           </a:p>
@@ -2003,7 +2001,7 @@
           <a:p>
             <a:fld id="{5BCAD085-E8A6-8845-BD4E-CB4CCA059FC4}" type="datetimeFigureOut">
               <a:rPr lang="en-US" smtClean="0"/>
-              <a:t>9/17/2026</a:t>
+              <a:t>9/21/2026</a:t>
             </a:fld>
             <a:endParaRPr lang="en-US"/>
           </a:p>
@@ -2278,7 +2276,7 @@
           <a:p>
             <a:fld id="{5BCAD085-E8A6-8845-BD4E-CB4CCA059FC4}" type="datetimeFigureOut">
               <a:rPr lang="en-US" smtClean="0"/>
-              <a:t>9/17/2026</a:t>
+              <a:t>9/21/2026</a:t>
             </a:fld>
             <a:endParaRPr lang="en-US"/>
           </a:p>
@@ -2530,7 +2528,7 @@
           <a:p>
             <a:fld id="{5BCAD085-E8A6-8845-BD4E-CB4CCA059FC4}" type="datetimeFigureOut">
               <a:rPr lang="en-US" smtClean="0"/>
-              <a:t>9/17/2026</a:t>
+              <a:t>9/21/2026</a:t>
             </a:fld>
             <a:endParaRPr lang="en-US"/>
           </a:p>
@@ -2741,7 +2739,7 @@
           <a:p>
             <a:fld id="{5BCAD085-E8A6-8845-BD4E-CB4CCA059FC4}" type="datetimeFigureOut">
               <a:rPr lang="en-US" smtClean="0"/>
-              <a:t>9/17/2026</a:t>
+              <a:t>9/21/2026</a:t>
             </a:fld>
             <a:endParaRPr lang="en-US"/>
           </a:p>
@@ -3254,13 +3252,13 @@
           <a:p>
             <a:pPr algn="l"/>
             <a:r>
-              <a:rPr sz="1600" b="0">
+              <a:rPr sz="1600" b="0" dirty="0">
                 <a:solidFill>
                   <a:srgbClr val="CADCFC"/>
                 </a:solidFill>
                 <a:latin typeface="맑은 고딕"/>
               </a:rPr>
-              <a:t>ECS Renewal   ·   Ver 2.0   ·   2026-09-21</a:t>
+              <a:t>ECS Renewal   ·   Ver 1.1   ·   2026-09-21</a:t>
             </a:r>
           </a:p>
         </p:txBody>
@@ -3289,13 +3287,22 @@
           <a:p>
             <a:pPr algn="l"/>
             <a:r>
-              <a:rPr sz="1200" b="0">
+              <a:rPr sz="1200" b="0" dirty="0" err="1">
                 <a:solidFill>
                   <a:srgbClr val="CADCFC"/>
                 </a:solidFill>
                 <a:latin typeface="맑은 고딕"/>
               </a:rPr>
-              <a:t>기준 : EXE_NEWUI\WCS_CLIENT\Ecs.exe (Build 2026.09.21 17:13:55) + Ecs.ini</a:t>
+              <a:t>기준</a:t>
+            </a:r>
+            <a:r>
+              <a:rPr sz="1200" b="0" dirty="0">
+                <a:solidFill>
+                  <a:srgbClr val="CADCFC"/>
+                </a:solidFill>
+                <a:latin typeface="맑은 고딕"/>
+              </a:rPr>
+              <a:t> : EXE_NEWUI\WCS_CLIENT\Ecs.exe (Build 2026.09.21 17:13:55) + Ecs.ini</a:t>
             </a:r>
           </a:p>
         </p:txBody>
@@ -3585,7 +3592,7 @@
                 </a:solidFill>
                 <a:latin typeface="맑은 고딕"/>
               </a:rPr>
-              <a:t>LG 화학 1동 ECS  |  화면설계서  |  Ver 2.0</a:t>
+              <a:t>LG 화학 1동 ECS  |  화면설계서  |  Ver 1.1</a:t>
             </a:r>
           </a:p>
         </p:txBody>
@@ -3910,7 +3917,7 @@
                 </a:solidFill>
                 <a:latin typeface="맑은 고딕"/>
               </a:rPr>
-              <a:t>LG 화학 1동 ECS  |  화면설계서  |  Ver 2.0</a:t>
+              <a:t>LG 화학 1동 ECS  |  화면설계서  |  Ver 1.1</a:t>
             </a:r>
           </a:p>
         </p:txBody>
@@ -4247,7 +4254,7 @@
                 </a:solidFill>
                 <a:latin typeface="맑은 고딕"/>
               </a:rPr>
-              <a:t>LG 화학 1동 ECS  |  화면설계서  |  Ver 2.0</a:t>
+              <a:t>LG 화학 1동 ECS  |  화면설계서  |  Ver 1.1</a:t>
             </a:r>
           </a:p>
         </p:txBody>
@@ -4584,7 +4591,7 @@
                 </a:solidFill>
                 <a:latin typeface="맑은 고딕"/>
               </a:rPr>
-              <a:t>LG 화학 1동 ECS  |  화면설계서  |  Ver 2.0</a:t>
+              <a:t>LG 화학 1동 ECS  |  화면설계서  |  Ver 1.1</a:t>
             </a:r>
           </a:p>
         </p:txBody>
@@ -4864,7 +4871,7 @@
                 </a:solidFill>
                 <a:latin typeface="맑은 고딕"/>
               </a:rPr>
-              <a:t>LG 화학 1동 ECS  |  화면설계서  |  Ver 2.0</a:t>
+              <a:t>LG 화학 1동 ECS  |  화면설계서  |  Ver 1.1</a:t>
             </a:r>
           </a:p>
         </p:txBody>
@@ -5153,7 +5160,7 @@
                 </a:solidFill>
                 <a:latin typeface="맑은 고딕"/>
               </a:rPr>
-              <a:t>LG 화학 1동 ECS  |  화면설계서  |  Ver 2.0</a:t>
+              <a:t>LG 화학 1동 ECS  |  화면설계서  |  Ver 1.1</a:t>
             </a:r>
           </a:p>
         </p:txBody>
@@ -5508,7 +5515,7 @@
                 </a:solidFill>
                 <a:latin typeface="맑은 고딕"/>
               </a:rPr>
-              <a:t>LG 화학 1동 ECS  |  화면설계서  |  Ver 2.0</a:t>
+              <a:t>LG 화학 1동 ECS  |  화면설계서  |  Ver 1.1</a:t>
             </a:r>
           </a:p>
         </p:txBody>
@@ -5603,7 +5610,7 @@
                 </a:solidFill>
                 <a:latin typeface="맑은 고딕"/>
               </a:rPr>
-              <a:t>MANUAL - 크레인 수동작업</a:t>
+              <a:t>LOG - 작업 로그</a:t>
             </a:r>
           </a:p>
         </p:txBody>
@@ -5656,7 +5663,7 @@
       </p:sp>
       <p:pic>
         <p:nvPicPr>
-          <p:cNvPr id="4" name="Picture 3" descr="manual_sc_0.png"/>
+          <p:cNvPr id="4" name="Picture 3" descr="log_io_0.png"/>
           <p:cNvPicPr>
             <a:picLocks noChangeAspect="1"/>
           </p:cNvPicPr>
@@ -5670,8 +5677,8 @@
         </p:blipFill>
         <p:spPr>
           <a:xfrm>
-            <a:off x="2069782" y="1283970"/>
-            <a:ext cx="4638675" cy="4838700"/>
+            <a:off x="640080" y="1455096"/>
+            <a:ext cx="7498079" cy="4496446"/>
           </a:xfrm>
           <a:prstGeom prst="rect">
             <a:avLst/>
@@ -5720,7 +5727,7 @@
                 </a:solidFill>
                 <a:latin typeface="맑은 고딕"/>
               </a:rPr>
-              <a:t>MANUAL ▷ 수동조작 ▷ 크레인</a:t>
+              <a:t>LOG ▷ 로그 ▷ 작업로그</a:t>
             </a:r>
           </a:p>
           <a:p>
@@ -5753,40 +5760,7 @@
                 </a:solidFill>
                 <a:latin typeface="맑은 고딕"/>
               </a:rPr>
-              <a:t>크레인 한 대에 H/S(트랙)·셀 위치를 지정해 직접 이송 지시를 낸다.</a:t>
-            </a:r>
-          </a:p>
-          <a:p>
-            <a:pPr algn="l"/>
-            <a:endParaRPr sz="1100" b="0">
-              <a:solidFill>
-                <a:srgbClr val="595959"/>
-              </a:solidFill>
-              <a:latin typeface="맑은 고딕"/>
-            </a:endParaRPr>
-          </a:p>
-          <a:p>
-            <a:pPr algn="l"/>
-            <a:r>
-              <a:rPr sz="1300" b="1">
-                <a:solidFill>
-                  <a:srgbClr val="1E2761"/>
-                </a:solidFill>
-                <a:latin typeface="맑은 고딕"/>
-              </a:rPr>
-              <a:t>■ 특기사항</a:t>
-            </a:r>
-          </a:p>
-          <a:p>
-            <a:pPr algn="l"/>
-            <a:r>
-              <a:rPr sz="1000" b="0">
-                <a:solidFill>
-                  <a:srgbClr val="595959"/>
-                </a:solidFill>
-                <a:latin typeface="맑은 고딕"/>
-              </a:rPr>
-              <a:t>· 그 크레인에 진행 중인 지시가 있으면 수동 지시를 거부한다.</a:t>
+              <a:t>작업 이력(JOB_MST_HIS)을 기간/작업번호/상태로 조회한다.</a:t>
             </a:r>
           </a:p>
         </p:txBody>
@@ -5821,7 +5795,7 @@
                 </a:solidFill>
                 <a:latin typeface="맑은 고딕"/>
               </a:rPr>
-              <a:t>LG 화학 1동 ECS  |  화면설계서  |  Ver 2.0</a:t>
+              <a:t>LG 화학 1동 ECS  |  화면설계서  |  Ver 1.1</a:t>
             </a:r>
           </a:p>
         </p:txBody>
@@ -5856,7 +5830,7 @@
                 </a:solidFill>
                 <a:latin typeface="맑은 고딕"/>
               </a:rPr>
-              <a:t>17</a:t>
+              <a:t>19</a:t>
             </a:r>
           </a:p>
         </p:txBody>
@@ -5916,7 +5890,7 @@
                 </a:solidFill>
                 <a:latin typeface="맑은 고딕"/>
               </a:rPr>
-              <a:t>MANUAL - RTV(RGV) 수동작업</a:t>
+              <a:t>LOG - HOST 로그</a:t>
             </a:r>
           </a:p>
         </p:txBody>
@@ -5969,7 +5943,7 @@
       </p:sp>
       <p:pic>
         <p:nvPicPr>
-          <p:cNvPr id="4" name="Picture 3" descr="manual_rtv_0.png"/>
+          <p:cNvPr id="4" name="Picture 3" descr="log_mes_0.png"/>
           <p:cNvPicPr>
             <a:picLocks noChangeAspect="1"/>
           </p:cNvPicPr>
@@ -5983,8 +5957,8 @@
         </p:blipFill>
         <p:spPr>
           <a:xfrm>
-            <a:off x="2245995" y="2103120"/>
-            <a:ext cx="4286250" cy="3200400"/>
+            <a:off x="640080" y="1503883"/>
+            <a:ext cx="7498079" cy="4398873"/>
           </a:xfrm>
           <a:prstGeom prst="rect">
             <a:avLst/>
@@ -6033,7 +6007,7 @@
                 </a:solidFill>
                 <a:latin typeface="맑은 고딕"/>
               </a:rPr>
-              <a:t>MANUAL ▷ 수동조작 ▷ RTV</a:t>
+              <a:t>LOG ▷ 로그 ▷ HOST로그</a:t>
             </a:r>
           </a:p>
           <a:p>
@@ -6066,7 +6040,7 @@
                 </a:solidFill>
                 <a:latin typeface="맑은 고딕"/>
               </a:rPr>
-              <a:t>RGV 에 출발지/도착지 트랙을 지정해 직접 반송 지시를 낸다.</a:t>
+              <a:t>상위(WMS/IMS)와 주고받은 전문 이력(HOST_IF_LOG)을 조회한다.</a:t>
             </a:r>
           </a:p>
           <a:p>
@@ -6099,7 +6073,7 @@
                 </a:solidFill>
                 <a:latin typeface="맑은 고딕"/>
               </a:rPr>
-              <a:t>· 출발지=도착지 지시와, 진행 중 지시가 있을 때의 지시는 거부된다.</a:t>
+              <a:t>· 전문 : O(작업지시) R(응답) M(모드 전환) S(상태보고) E(에러보고) F(완료)</a:t>
             </a:r>
           </a:p>
         </p:txBody>
@@ -6134,7 +6108,7 @@
                 </a:solidFill>
                 <a:latin typeface="맑은 고딕"/>
               </a:rPr>
-              <a:t>LG 화학 1동 ECS  |  화면설계서  |  Ver 2.0</a:t>
+              <a:t>LG 화학 1동 ECS  |  화면설계서  |  Ver 1.1</a:t>
             </a:r>
           </a:p>
         </p:txBody>
@@ -6169,7 +6143,7 @@
                 </a:solidFill>
                 <a:latin typeface="맑은 고딕"/>
               </a:rPr>
-              <a:t>18</a:t>
+              <a:t>20</a:t>
             </a:r>
           </a:p>
         </p:txBody>
@@ -6229,7 +6203,7 @@
                 </a:solidFill>
                 <a:latin typeface="맑은 고딕"/>
               </a:rPr>
-              <a:t>LOG - 작업 로그</a:t>
+              <a:t>LOG - 설비에러이력</a:t>
             </a:r>
           </a:p>
         </p:txBody>
@@ -6282,7 +6256,7 @@
       </p:sp>
       <p:pic>
         <p:nvPicPr>
-          <p:cNvPr id="4" name="Picture 3" descr="log_io_0.png"/>
+          <p:cNvPr id="4" name="Picture 3" descr="log_eqp_his_0.png"/>
           <p:cNvPicPr>
             <a:picLocks noChangeAspect="1"/>
           </p:cNvPicPr>
@@ -6296,8 +6270,8 @@
         </p:blipFill>
         <p:spPr>
           <a:xfrm>
-            <a:off x="640080" y="1455096"/>
-            <a:ext cx="7498079" cy="4496446"/>
+            <a:off x="803995" y="1280160"/>
+            <a:ext cx="7170248" cy="4846320"/>
           </a:xfrm>
           <a:prstGeom prst="rect">
             <a:avLst/>
@@ -6346,7 +6320,7 @@
                 </a:solidFill>
                 <a:latin typeface="맑은 고딕"/>
               </a:rPr>
-              <a:t>LOG ▷ 로그 ▷ 작업로그</a:t>
+              <a:t>LOG ▷ 로그 ▷ 설비에러이력</a:t>
             </a:r>
           </a:p>
           <a:p>
@@ -6379,7 +6353,52 @@
                 </a:solidFill>
                 <a:latin typeface="맑은 고딕"/>
               </a:rPr>
-              <a:t>작업 이력(JOB_MST_HIS)을 기간/작업번호/상태로 조회한다.</a:t>
+              <a:t>설비(CV/SC/RTV) 에러 발생·해제 이력(EQP_ERR_HIS)을 조회한다.</a:t>
+            </a:r>
+          </a:p>
+          <a:p>
+            <a:pPr algn="l"/>
+            <a:endParaRPr sz="1100" b="0">
+              <a:solidFill>
+                <a:srgbClr val="595959"/>
+              </a:solidFill>
+              <a:latin typeface="맑은 고딕"/>
+            </a:endParaRPr>
+          </a:p>
+          <a:p>
+            <a:pPr algn="l"/>
+            <a:r>
+              <a:rPr sz="1100" b="0">
+                <a:solidFill>
+                  <a:srgbClr val="595959"/>
+                </a:solidFill>
+                <a:latin typeface="맑은 고딕"/>
+              </a:rPr>
+              <a:t>■ 특기사항</a:t>
+            </a:r>
+          </a:p>
+          <a:p>
+            <a:pPr algn="l"/>
+            <a:r>
+              <a:rPr sz="1100" b="0">
+                <a:solidFill>
+                  <a:srgbClr val="595959"/>
+                </a:solidFill>
+                <a:latin typeface="맑은 고딕"/>
+              </a:rPr>
+              <a:t>· 에러 문구는 에러코드 마스터(EQP_ECD_MST)에서 설비·코드표 구분으로 찾는다. 크레인은 PLC 알람 리스트 코드표(SC_LGLS).</a:t>
+            </a:r>
+          </a:p>
+          <a:p>
+            <a:pPr algn="l"/>
+            <a:r>
+              <a:rPr sz="1100" b="0">
+                <a:solidFill>
+                  <a:srgbClr val="595959"/>
+                </a:solidFill>
+                <a:latin typeface="맑은 고딕"/>
+              </a:rPr>
+              <a:t>· 설비구분 SC 를 고르면 SC_LGLS 등 크레인 코드표 구분으로 쌓인 이력도 함께 조회된다.</a:t>
             </a:r>
           </a:p>
         </p:txBody>
@@ -6414,7 +6433,7 @@
                 </a:solidFill>
                 <a:latin typeface="맑은 고딕"/>
               </a:rPr>
-              <a:t>LG 화학 1동 ECS  |  화면설계서  |  Ver 2.0</a:t>
+              <a:t>LG 화학 1동 ECS  |  화면설계서  |  Ver 1.1</a:t>
             </a:r>
           </a:p>
         </p:txBody>
@@ -6449,7 +6468,7 @@
                 </a:solidFill>
                 <a:latin typeface="맑은 고딕"/>
               </a:rPr>
-              <a:t>19</a:t>
+              <a:t>21</a:t>
             </a:r>
           </a:p>
         </p:txBody>
@@ -6523,14 +6542,14 @@
           <p:nvPr>
             <p:extLst>
               <p:ext uri="{D42A27DB-BD31-4B8C-83A1-F6EECF244321}">
-                <p14:modId xmlns:p14="http://schemas.microsoft.com/office/powerpoint/2010/main" val="1374009286"/>
+                <p14:modId xmlns:p14="http://schemas.microsoft.com/office/powerpoint/2010/main" val="3953754112"/>
               </p:ext>
             </p:extLst>
           </p:nvPr>
         </p:nvGraphicFramePr>
         <p:xfrm>
           <a:off x="640080" y="1280160"/>
-          <a:ext cx="10881360" cy="2286000"/>
+          <a:ext cx="10881360" cy="2822448"/>
         </p:xfrm>
         <a:graphic>
           <a:graphicData uri="http://schemas.openxmlformats.org/drawingml/2006/table">
@@ -7291,14 +7310,197 @@
                           </a:solidFill>
                           <a:latin typeface="맑은 고딕"/>
                         </a:rPr>
-                        <a:t>정정, 작업대 명칭 위치·색 정정, 리본 [제품정보]→[적재용기](적재용기 끝 4자리 표시)</a:t>
+                        <a:t>정정</a:t>
                       </a:r>
-                      <a:endParaRPr sz="1100" dirty="0">
-                        <a:solidFill>
-                          <a:srgbClr val="222222"/>
-                        </a:solidFill>
-                        <a:latin typeface="맑은 고딕"/>
-                      </a:endParaRPr>
+                      <a:r>
+                        <a:rPr sz="1100" dirty="0">
+                          <a:solidFill>
+                            <a:srgbClr val="222222"/>
+                          </a:solidFill>
+                          <a:latin typeface="맑은 고딕"/>
+                        </a:rPr>
+                        <a:t>, </a:t>
+                      </a:r>
+                      <a:r>
+                        <a:rPr sz="1100" dirty="0" err="1">
+                          <a:solidFill>
+                            <a:srgbClr val="222222"/>
+                          </a:solidFill>
+                          <a:latin typeface="맑은 고딕"/>
+                        </a:rPr>
+                        <a:t>작업대</a:t>
+                      </a:r>
+                      <a:r>
+                        <a:rPr sz="1100" dirty="0">
+                          <a:solidFill>
+                            <a:srgbClr val="222222"/>
+                          </a:solidFill>
+                          <a:latin typeface="맑은 고딕"/>
+                        </a:rPr>
+                        <a:t> </a:t>
+                      </a:r>
+                      <a:r>
+                        <a:rPr sz="1100" dirty="0" err="1">
+                          <a:solidFill>
+                            <a:srgbClr val="222222"/>
+                          </a:solidFill>
+                          <a:latin typeface="맑은 고딕"/>
+                        </a:rPr>
+                        <a:t>명칭</a:t>
+                      </a:r>
+                      <a:r>
+                        <a:rPr sz="1100" dirty="0">
+                          <a:solidFill>
+                            <a:srgbClr val="222222"/>
+                          </a:solidFill>
+                          <a:latin typeface="맑은 고딕"/>
+                        </a:rPr>
+                        <a:t> </a:t>
+                      </a:r>
+                      <a:r>
+                        <a:rPr sz="1100" dirty="0" err="1">
+                          <a:solidFill>
+                            <a:srgbClr val="222222"/>
+                          </a:solidFill>
+                          <a:latin typeface="맑은 고딕"/>
+                        </a:rPr>
+                        <a:t>위치·색</a:t>
+                      </a:r>
+                      <a:r>
+                        <a:rPr sz="1100" dirty="0">
+                          <a:solidFill>
+                            <a:srgbClr val="222222"/>
+                          </a:solidFill>
+                          <a:latin typeface="맑은 고딕"/>
+                        </a:rPr>
+                        <a:t> </a:t>
+                      </a:r>
+                      <a:r>
+                        <a:rPr sz="1100" dirty="0" err="1">
+                          <a:solidFill>
+                            <a:srgbClr val="222222"/>
+                          </a:solidFill>
+                          <a:latin typeface="맑은 고딕"/>
+                        </a:rPr>
+                        <a:t>정정</a:t>
+                      </a:r>
+                      <a:r>
+                        <a:rPr sz="1100" dirty="0">
+                          <a:solidFill>
+                            <a:srgbClr val="222222"/>
+                          </a:solidFill>
+                          <a:latin typeface="맑은 고딕"/>
+                        </a:rPr>
+                        <a:t>, </a:t>
+                      </a:r>
+                      <a:r>
+                        <a:rPr sz="1100" dirty="0" err="1">
+                          <a:solidFill>
+                            <a:srgbClr val="222222"/>
+                          </a:solidFill>
+                          <a:latin typeface="맑은 고딕"/>
+                        </a:rPr>
+                        <a:t>리본</a:t>
+                      </a:r>
+                      <a:r>
+                        <a:rPr sz="1100" dirty="0">
+                          <a:solidFill>
+                            <a:srgbClr val="222222"/>
+                          </a:solidFill>
+                          <a:latin typeface="맑은 고딕"/>
+                        </a:rPr>
+                        <a:t> </a:t>
+                      </a:r>
+                      <a:r>
+                        <a:rPr lang="en-US" altLang="ko-KR" sz="1100" dirty="0">
+                          <a:solidFill>
+                            <a:srgbClr val="222222"/>
+                          </a:solidFill>
+                          <a:latin typeface="맑은 고딕"/>
+                        </a:rPr>
+                        <a:t>[</a:t>
+                      </a:r>
+                      <a:r>
+                        <a:rPr lang="ko-KR" altLang="en-US" sz="1100" dirty="0">
+                          <a:solidFill>
+                            <a:srgbClr val="222222"/>
+                          </a:solidFill>
+                          <a:latin typeface="맑은 고딕"/>
+                        </a:rPr>
+                        <a:t>제품정보</a:t>
+                      </a:r>
+                      <a:r>
+                        <a:rPr lang="en-US" altLang="ko-KR" sz="1100" dirty="0">
+                          <a:solidFill>
+                            <a:srgbClr val="222222"/>
+                          </a:solidFill>
+                          <a:latin typeface="맑은 고딕"/>
+                        </a:rPr>
+                        <a:t>]→</a:t>
+                      </a:r>
+                      <a:r>
+                        <a:rPr sz="1100" dirty="0">
+                          <a:solidFill>
+                            <a:srgbClr val="222222"/>
+                          </a:solidFill>
+                          <a:latin typeface="맑은 고딕"/>
+                        </a:rPr>
+                        <a:t>[</a:t>
+                      </a:r>
+                      <a:r>
+                        <a:rPr sz="1100" dirty="0" err="1">
+                          <a:solidFill>
+                            <a:srgbClr val="222222"/>
+                          </a:solidFill>
+                          <a:latin typeface="맑은 고딕"/>
+                        </a:rPr>
+                        <a:t>적재용기</a:t>
+                      </a:r>
+                      <a:r>
+                        <a:rPr sz="1100" dirty="0">
+                          <a:solidFill>
+                            <a:srgbClr val="222222"/>
+                          </a:solidFill>
+                          <a:latin typeface="맑은 고딕"/>
+                        </a:rPr>
+                        <a:t>](</a:t>
+                      </a:r>
+                      <a:r>
+                        <a:rPr sz="1100" dirty="0" err="1">
+                          <a:solidFill>
+                            <a:srgbClr val="222222"/>
+                          </a:solidFill>
+                          <a:latin typeface="맑은 고딕"/>
+                        </a:rPr>
+                        <a:t>적재용기</a:t>
+                      </a:r>
+                      <a:r>
+                        <a:rPr sz="1100" dirty="0">
+                          <a:solidFill>
+                            <a:srgbClr val="222222"/>
+                          </a:solidFill>
+                          <a:latin typeface="맑은 고딕"/>
+                        </a:rPr>
+                        <a:t> 끝 4자리 </a:t>
+                      </a:r>
+                      <a:r>
+                        <a:rPr sz="1100" dirty="0" err="1">
+                          <a:solidFill>
+                            <a:srgbClr val="222222"/>
+                          </a:solidFill>
+                          <a:latin typeface="맑은 고딕"/>
+                        </a:rPr>
+                        <a:t>표시</a:t>
+                      </a:r>
+                      <a:r>
+                        <a:rPr sz="1100" dirty="0">
+                          <a:solidFill>
+                            <a:srgbClr val="222222"/>
+                          </a:solidFill>
+                          <a:latin typeface="맑은 고딕"/>
+                        </a:rPr>
+                        <a:t>)</a:t>
+                      </a:r>
                     </a:p>
                   </a:txBody>
                   <a:tcPr marT="27432" marB="27432">
@@ -7326,7 +7528,7 @@
                           </a:solidFill>
                           <a:latin typeface="맑은 고딕"/>
                         </a:rPr>
-                        <a:t>V2.0</a:t>
+                        <a:t>V1.1</a:t>
                       </a:r>
                     </a:p>
                   </a:txBody>
@@ -7424,7 +7626,7 @@
                 </a:tc>
                 <a:extLst>
                   <a:ext uri="{0D108BD9-81ED-4DB2-BD59-A6C34878D82A}">
-                    <a16:rowId xmlns:a16="http://schemas.microsoft.com/office/drawing/2014/main" val="10003"/>
+                    <a16:rowId xmlns:a16="http://schemas.microsoft.com/office/drawing/2014/main" val="206684592"/>
                   </a:ext>
                 </a:extLst>
               </a:tr>
@@ -7462,7 +7664,7 @@
                 </a:solidFill>
                 <a:latin typeface="맑은 고딕"/>
               </a:rPr>
-              <a:t>LG 화학 1동 ECS  |  화면설계서  |  Ver 2.0</a:t>
+              <a:t>LG 화학 1동 ECS  |  화면설계서  |  Ver 1.1</a:t>
             </a:r>
           </a:p>
         </p:txBody>
@@ -7557,7 +7759,7 @@
                 </a:solidFill>
                 <a:latin typeface="맑은 고딕"/>
               </a:rPr>
-              <a:t>LOG - HOST 로그</a:t>
+              <a:t>LOG - 유저사용 로그</a:t>
             </a:r>
           </a:p>
         </p:txBody>
@@ -7610,7 +7812,7 @@
       </p:sp>
       <p:pic>
         <p:nvPicPr>
-          <p:cNvPr id="4" name="Picture 3" descr="log_mes_0.png"/>
+          <p:cNvPr id="4" name="Picture 3" descr="log_client_0.png"/>
           <p:cNvPicPr>
             <a:picLocks noChangeAspect="1"/>
           </p:cNvPicPr>
@@ -7624,8 +7826,8 @@
         </p:blipFill>
         <p:spPr>
           <a:xfrm>
-            <a:off x="640080" y="1503883"/>
-            <a:ext cx="7498079" cy="4398873"/>
+            <a:off x="756098" y="1280160"/>
+            <a:ext cx="7266042" cy="4846320"/>
           </a:xfrm>
           <a:prstGeom prst="rect">
             <a:avLst/>
@@ -7674,7 +7876,7 @@
                 </a:solidFill>
                 <a:latin typeface="맑은 고딕"/>
               </a:rPr>
-              <a:t>LOG ▷ 로그 ▷ HOST로그</a:t>
+              <a:t>LOG ▷ 로그 ▷ 유저사용로그</a:t>
             </a:r>
           </a:p>
           <a:p>
@@ -7707,40 +7909,7 @@
                 </a:solidFill>
                 <a:latin typeface="맑은 고딕"/>
               </a:rPr>
-              <a:t>상위(WMS/IMS)와 주고받은 전문 이력(HOST_IF_LOG)을 조회한다.</a:t>
-            </a:r>
-          </a:p>
-          <a:p>
-            <a:pPr algn="l"/>
-            <a:endParaRPr sz="1100" b="0">
-              <a:solidFill>
-                <a:srgbClr val="595959"/>
-              </a:solidFill>
-              <a:latin typeface="맑은 고딕"/>
-            </a:endParaRPr>
-          </a:p>
-          <a:p>
-            <a:pPr algn="l"/>
-            <a:r>
-              <a:rPr sz="1300" b="1">
-                <a:solidFill>
-                  <a:srgbClr val="1E2761"/>
-                </a:solidFill>
-                <a:latin typeface="맑은 고딕"/>
-              </a:rPr>
-              <a:t>■ 특기사항</a:t>
-            </a:r>
-          </a:p>
-          <a:p>
-            <a:pPr algn="l"/>
-            <a:r>
-              <a:rPr sz="1000" b="0">
-                <a:solidFill>
-                  <a:srgbClr val="595959"/>
-                </a:solidFill>
-                <a:latin typeface="맑은 고딕"/>
-              </a:rPr>
-              <a:t>· 전문 : O(작업지시) R(응답) M(모드 전환) S(상태보고) E(에러보고) F(완료)</a:t>
+              <a:t>운전 화면에서 사람이 수행한 조작(지시/삭제/설정 변경/방향 전환) 기록(WCS_CLIENT_LOG)을 조회한다.</a:t>
             </a:r>
           </a:p>
         </p:txBody>
@@ -7775,7 +7944,7 @@
                 </a:solidFill>
                 <a:latin typeface="맑은 고딕"/>
               </a:rPr>
-              <a:t>LG 화학 1동 ECS  |  화면설계서  |  Ver 2.0</a:t>
+              <a:t>LG 화학 1동 ECS  |  화면설계서  |  Ver 1.1</a:t>
             </a:r>
           </a:p>
         </p:txBody>
@@ -7810,7 +7979,7 @@
                 </a:solidFill>
                 <a:latin typeface="맑은 고딕"/>
               </a:rPr>
-              <a:t>20</a:t>
+              <a:t>22</a:t>
             </a:r>
           </a:p>
         </p:txBody>
@@ -7870,7 +8039,7 @@
                 </a:solidFill>
                 <a:latin typeface="맑은 고딕"/>
               </a:rPr>
-              <a:t>LOG - 설비에러이력</a:t>
+              <a:t>LOG - ECS 프로그램 이력</a:t>
             </a:r>
           </a:p>
         </p:txBody>
@@ -7923,7 +8092,7 @@
       </p:sp>
       <p:pic>
         <p:nvPicPr>
-          <p:cNvPr id="4" name="Picture 3" descr="log_eqp_his_0.png"/>
+          <p:cNvPr id="4" name="Picture 3" descr="alarm_0.png"/>
           <p:cNvPicPr>
             <a:picLocks noChangeAspect="1"/>
           </p:cNvPicPr>
@@ -7937,8 +8106,8 @@
         </p:blipFill>
         <p:spPr>
           <a:xfrm>
-            <a:off x="803995" y="1280160"/>
-            <a:ext cx="7170248" cy="4846320"/>
+            <a:off x="640080" y="1766792"/>
+            <a:ext cx="7498079" cy="3873054"/>
           </a:xfrm>
           <a:prstGeom prst="rect">
             <a:avLst/>
@@ -7987,7 +8156,7 @@
                 </a:solidFill>
                 <a:latin typeface="맑은 고딕"/>
               </a:rPr>
-              <a:t>LOG ▷ 로그 ▷ 설비에러이력</a:t>
+              <a:t>LOG ▷ 로그 ▷ ECS프로그램로그</a:t>
             </a:r>
           </a:p>
           <a:p>
@@ -8020,55 +8189,7 @@
                 </a:solidFill>
                 <a:latin typeface="맑은 고딕"/>
               </a:rPr>
-              <a:t>설비(CV/SC/RTV) 에러 발생·해제 이력(EQP_ERR_HIS)을 조회한다.</a:t>
-            </a:r>
-          </a:p>
-          <a:p>
-            <a:pPr algn="l"/>
-            <a:r>
-              <a:rPr sz="1100" b="0">
-                <a:solidFill>
-                  <a:srgbClr val="595959"/>
-                </a:solidFill>
-                <a:latin typeface="맑은 고딕"/>
-              </a:rPr>
-              <a:t/>
-            </a:r>
-          </a:p>
-          <a:p>
-            <a:pPr algn="l"/>
-            <a:r>
-              <a:rPr sz="1100" b="0">
-                <a:solidFill>
-                  <a:srgbClr val="595959"/>
-                </a:solidFill>
-                <a:latin typeface="맑은 고딕"/>
-              </a:rPr>
-              <a:t>■ 특기사항</a:t>
-            </a:r>
-          </a:p>
-          <a:p>
-            <a:pPr algn="l"/>
-            <a:r>
-              <a:rPr sz="1100" b="0">
-                <a:solidFill>
-                  <a:srgbClr val="595959"/>
-                </a:solidFill>
-                <a:latin typeface="맑은 고딕"/>
-              </a:rPr>
-              <a:t>· 에러 문구는 에러코드 마스터(EQP_ECD_MST)에서 설비·코드표 구분으로 찾는다. 크레인은 PLC 알람 리스트 코드표(SC_LGLS).</a:t>
-            </a:r>
-          </a:p>
-          <a:p>
-            <a:pPr algn="l"/>
-            <a:r>
-              <a:rPr sz="1100" b="0">
-                <a:solidFill>
-                  <a:srgbClr val="595959"/>
-                </a:solidFill>
-                <a:latin typeface="맑은 고딕"/>
-              </a:rPr>
-              <a:t>· 설비구분 SC 를 고르면 SC_LGLS 등 크레인 코드표 구분으로 쌓인 이력도 함께 조회된다.</a:t>
+              <a:t>서버 프로그램(스케줄러/설비 통신/상위 통신)이 남긴 운전 이력(WCS_LOG_PGR)을 프로그램·시간·작업번호로 조회한다.</a:t>
             </a:r>
           </a:p>
         </p:txBody>
@@ -8103,7 +8224,7 @@
                 </a:solidFill>
                 <a:latin typeface="맑은 고딕"/>
               </a:rPr>
-              <a:t>LG 화학 1동 ECS  |  화면설계서  |  Ver 2.0</a:t>
+              <a:t>LG 화학 1동 ECS  |  화면설계서  |  Ver 1.1</a:t>
             </a:r>
           </a:p>
         </p:txBody>
@@ -8138,7 +8259,7 @@
                 </a:solidFill>
                 <a:latin typeface="맑은 고딕"/>
               </a:rPr>
-              <a:t>21</a:t>
+              <a:t>23</a:t>
             </a:r>
           </a:p>
         </p:txBody>
@@ -8198,7 +8319,7 @@
                 </a:solidFill>
                 <a:latin typeface="맑은 고딕"/>
               </a:rPr>
-              <a:t>LOG - 유저사용 로그</a:t>
+              <a:t>LOG - 알람 (경고창)</a:t>
             </a:r>
           </a:p>
         </p:txBody>
@@ -8249,30 +8370,6 @@
           </a:p>
         </p:txBody>
       </p:sp>
-      <p:pic>
-        <p:nvPicPr>
-          <p:cNvPr id="4" name="Picture 3" descr="log_client_0.png"/>
-          <p:cNvPicPr>
-            <a:picLocks noChangeAspect="1"/>
-          </p:cNvPicPr>
-          <p:nvPr/>
-        </p:nvPicPr>
-        <p:blipFill>
-          <a:blip r:embed="rId2"/>
-          <a:stretch>
-            <a:fillRect/>
-          </a:stretch>
-        </p:blipFill>
-        <p:spPr>
-          <a:xfrm>
-            <a:off x="756098" y="1280160"/>
-            <a:ext cx="7266042" cy="4846320"/>
-          </a:xfrm>
-          <a:prstGeom prst="rect">
-            <a:avLst/>
-          </a:prstGeom>
-        </p:spPr>
-      </p:pic>
       <p:sp>
         <p:nvSpPr>
           <p:cNvPr id="5" name="TextBox 4"/>
@@ -8282,7 +8379,7 @@
         <p:spPr>
           <a:xfrm>
             <a:off x="8503920" y="1188720"/>
-            <a:ext cx="3291840" cy="5029200"/>
+            <a:ext cx="3291840" cy="2631490"/>
           </a:xfrm>
           <a:prstGeom prst="rect">
             <a:avLst/>
@@ -8297,30 +8394,120 @@
           <a:p>
             <a:pPr algn="l"/>
             <a:r>
-              <a:rPr sz="1300" b="1">
+              <a:rPr sz="1300" b="1" dirty="0">
                 <a:solidFill>
                   <a:srgbClr val="1E2761"/>
                 </a:solidFill>
                 <a:latin typeface="맑은 고딕"/>
               </a:rPr>
-              <a:t>■ 메뉴 Path</a:t>
-            </a:r>
-          </a:p>
-          <a:p>
-            <a:pPr algn="l"/>
-            <a:r>
-              <a:rPr sz="1100" b="0">
-                <a:solidFill>
-                  <a:srgbClr val="595959"/>
-                </a:solidFill>
-                <a:latin typeface="맑은 고딕"/>
-              </a:rPr>
-              <a:t>LOG ▷ 로그 ▷ 유저사용로그</a:t>
-            </a:r>
-          </a:p>
-          <a:p>
-            <a:pPr algn="l"/>
-            <a:endParaRPr sz="1100" b="0">
+              <a:t>■ </a:t>
+            </a:r>
+            <a:r>
+              <a:rPr sz="1300" b="1" dirty="0" err="1">
+                <a:solidFill>
+                  <a:srgbClr val="1E2761"/>
+                </a:solidFill>
+                <a:latin typeface="맑은 고딕"/>
+              </a:rPr>
+              <a:t>메뉴</a:t>
+            </a:r>
+            <a:r>
+              <a:rPr sz="1300" b="1" dirty="0">
+                <a:solidFill>
+                  <a:srgbClr val="1E2761"/>
+                </a:solidFill>
+                <a:latin typeface="맑은 고딕"/>
+              </a:rPr>
+              <a:t> Path</a:t>
+            </a:r>
+          </a:p>
+          <a:p>
+            <a:pPr algn="l"/>
+            <a:r>
+              <a:rPr sz="1100" b="0" dirty="0">
+                <a:solidFill>
+                  <a:srgbClr val="595959"/>
+                </a:solidFill>
+                <a:latin typeface="맑은 고딕"/>
+              </a:rPr>
+              <a:t>LOG ▷ </a:t>
+            </a:r>
+            <a:r>
+              <a:rPr sz="1100" b="0" dirty="0" err="1">
+                <a:solidFill>
+                  <a:srgbClr val="595959"/>
+                </a:solidFill>
+                <a:latin typeface="맑은 고딕"/>
+              </a:rPr>
+              <a:t>알람</a:t>
+            </a:r>
+            <a:r>
+              <a:rPr sz="1100" b="0" dirty="0">
+                <a:solidFill>
+                  <a:srgbClr val="595959"/>
+                </a:solidFill>
+                <a:latin typeface="맑은 고딕"/>
+              </a:rPr>
+              <a:t> ▷ </a:t>
+            </a:r>
+            <a:r>
+              <a:rPr sz="1100" b="0" dirty="0" err="1">
+                <a:solidFill>
+                  <a:srgbClr val="595959"/>
+                </a:solidFill>
+                <a:latin typeface="맑은 고딕"/>
+              </a:rPr>
+              <a:t>알람</a:t>
+            </a:r>
+            <a:r>
+              <a:rPr sz="1100" b="0" dirty="0">
+                <a:solidFill>
+                  <a:srgbClr val="595959"/>
+                </a:solidFill>
+                <a:latin typeface="맑은 고딕"/>
+              </a:rPr>
+              <a:t>  (</a:t>
+            </a:r>
+            <a:r>
+              <a:rPr sz="1100" b="0" dirty="0" err="1">
+                <a:solidFill>
+                  <a:srgbClr val="595959"/>
+                </a:solidFill>
+                <a:latin typeface="맑은 고딕"/>
+              </a:rPr>
+              <a:t>자동</a:t>
+            </a:r>
+            <a:r>
+              <a:rPr sz="1100" b="0" dirty="0">
+                <a:solidFill>
+                  <a:srgbClr val="595959"/>
+                </a:solidFill>
+                <a:latin typeface="맑은 고딕"/>
+              </a:rPr>
+              <a:t> </a:t>
+            </a:r>
+            <a:r>
+              <a:rPr sz="1100" b="0" dirty="0" err="1">
+                <a:solidFill>
+                  <a:srgbClr val="595959"/>
+                </a:solidFill>
+                <a:latin typeface="맑은 고딕"/>
+              </a:rPr>
+              <a:t>표시</a:t>
+            </a:r>
+            <a:r>
+              <a:rPr sz="1100" b="0" dirty="0">
+                <a:solidFill>
+                  <a:srgbClr val="595959"/>
+                </a:solidFill>
+                <a:latin typeface="맑은 고딕"/>
+              </a:rPr>
+              <a:t>)</a:t>
+            </a:r>
+          </a:p>
+          <a:p>
+            <a:pPr algn="l"/>
+            <a:endParaRPr sz="1100" b="0" dirty="0">
               <a:solidFill>
                 <a:srgbClr val="595959"/>
               </a:solidFill>
@@ -8330,25 +8517,895 @@
           <a:p>
             <a:pPr algn="l"/>
             <a:r>
-              <a:rPr sz="1300" b="1">
+              <a:rPr sz="1300" b="1" dirty="0">
                 <a:solidFill>
                   <a:srgbClr val="1E2761"/>
                 </a:solidFill>
                 <a:latin typeface="맑은 고딕"/>
               </a:rPr>
-              <a:t>■ 프로그램 개요</a:t>
-            </a:r>
-          </a:p>
-          <a:p>
-            <a:pPr algn="l"/>
-            <a:r>
-              <a:rPr sz="1100" b="0">
-                <a:solidFill>
-                  <a:srgbClr val="595959"/>
-                </a:solidFill>
-                <a:latin typeface="맑은 고딕"/>
-              </a:rPr>
-              <a:t>운전 화면에서 사람이 수행한 조작(지시/삭제/설정 변경/방향 전환) 기록(WCS_CLIENT_LOG)을 조회한다.</a:t>
+              <a:t>■ </a:t>
+            </a:r>
+            <a:r>
+              <a:rPr sz="1300" b="1" dirty="0" err="1">
+                <a:solidFill>
+                  <a:srgbClr val="1E2761"/>
+                </a:solidFill>
+                <a:latin typeface="맑은 고딕"/>
+              </a:rPr>
+              <a:t>프로그램</a:t>
+            </a:r>
+            <a:r>
+              <a:rPr sz="1300" b="1" dirty="0">
+                <a:solidFill>
+                  <a:srgbClr val="1E2761"/>
+                </a:solidFill>
+                <a:latin typeface="맑은 고딕"/>
+              </a:rPr>
+              <a:t> </a:t>
+            </a:r>
+            <a:r>
+              <a:rPr sz="1300" b="1" dirty="0" err="1">
+                <a:solidFill>
+                  <a:srgbClr val="1E2761"/>
+                </a:solidFill>
+                <a:latin typeface="맑은 고딕"/>
+              </a:rPr>
+              <a:t>개요</a:t>
+            </a:r>
+            <a:endParaRPr sz="1300" b="1" dirty="0">
+              <a:solidFill>
+                <a:srgbClr val="1E2761"/>
+              </a:solidFill>
+              <a:latin typeface="맑은 고딕"/>
+            </a:endParaRPr>
+          </a:p>
+          <a:p>
+            <a:pPr algn="l"/>
+            <a:r>
+              <a:rPr sz="1100" b="0" dirty="0" err="1">
+                <a:solidFill>
+                  <a:srgbClr val="595959"/>
+                </a:solidFill>
+                <a:latin typeface="맑은 고딕"/>
+              </a:rPr>
+              <a:t>체류</a:t>
+            </a:r>
+            <a:r>
+              <a:rPr sz="1100" b="0" dirty="0">
+                <a:solidFill>
+                  <a:srgbClr val="595959"/>
+                </a:solidFill>
+                <a:latin typeface="맑은 고딕"/>
+              </a:rPr>
+              <a:t> </a:t>
+            </a:r>
+            <a:r>
+              <a:rPr sz="1100" b="0" dirty="0" err="1">
+                <a:solidFill>
+                  <a:srgbClr val="595959"/>
+                </a:solidFill>
+                <a:latin typeface="맑은 고딕"/>
+              </a:rPr>
+              <a:t>작업과</a:t>
+            </a:r>
+            <a:r>
+              <a:rPr sz="1100" b="0" dirty="0">
+                <a:solidFill>
+                  <a:srgbClr val="595959"/>
+                </a:solidFill>
+                <a:latin typeface="맑은 고딕"/>
+              </a:rPr>
+              <a:t> </a:t>
+            </a:r>
+            <a:r>
+              <a:rPr sz="1100" b="0" dirty="0" err="1">
+                <a:solidFill>
+                  <a:srgbClr val="595959"/>
+                </a:solidFill>
+                <a:latin typeface="맑은 고딕"/>
+              </a:rPr>
+              <a:t>알람을</a:t>
+            </a:r>
+            <a:r>
+              <a:rPr sz="1100" b="0" dirty="0">
+                <a:solidFill>
+                  <a:srgbClr val="595959"/>
+                </a:solidFill>
+                <a:latin typeface="맑은 고딕"/>
+              </a:rPr>
+              <a:t> </a:t>
+            </a:r>
+            <a:r>
+              <a:rPr sz="1100" b="0" dirty="0" err="1">
+                <a:solidFill>
+                  <a:srgbClr val="595959"/>
+                </a:solidFill>
+                <a:latin typeface="맑은 고딕"/>
+              </a:rPr>
+              <a:t>모아</a:t>
+            </a:r>
+            <a:r>
+              <a:rPr sz="1100" b="0" dirty="0">
+                <a:solidFill>
+                  <a:srgbClr val="595959"/>
+                </a:solidFill>
+                <a:latin typeface="맑은 고딕"/>
+              </a:rPr>
+              <a:t> </a:t>
+            </a:r>
+            <a:r>
+              <a:rPr sz="1100" b="0" dirty="0" err="1">
+                <a:solidFill>
+                  <a:srgbClr val="595959"/>
+                </a:solidFill>
+                <a:latin typeface="맑은 고딕"/>
+              </a:rPr>
+              <a:t>보여</a:t>
+            </a:r>
+            <a:r>
+              <a:rPr sz="1100" b="0" dirty="0">
+                <a:solidFill>
+                  <a:srgbClr val="595959"/>
+                </a:solidFill>
+                <a:latin typeface="맑은 고딕"/>
+              </a:rPr>
+              <a:t> </a:t>
+            </a:r>
+            <a:r>
+              <a:rPr sz="1100" b="0" dirty="0" err="1">
+                <a:solidFill>
+                  <a:srgbClr val="595959"/>
+                </a:solidFill>
+                <a:latin typeface="맑은 고딕"/>
+              </a:rPr>
+              <a:t>주는</a:t>
+            </a:r>
+            <a:r>
+              <a:rPr sz="1100" b="0" dirty="0">
+                <a:solidFill>
+                  <a:srgbClr val="595959"/>
+                </a:solidFill>
+                <a:latin typeface="맑은 고딕"/>
+              </a:rPr>
+              <a:t> </a:t>
+            </a:r>
+            <a:r>
+              <a:rPr sz="1100" b="0" dirty="0" err="1">
+                <a:solidFill>
+                  <a:srgbClr val="595959"/>
+                </a:solidFill>
+                <a:latin typeface="맑은 고딕"/>
+              </a:rPr>
+              <a:t>경고창</a:t>
+            </a:r>
+            <a:r>
+              <a:rPr sz="1100" b="0" dirty="0">
+                <a:solidFill>
+                  <a:srgbClr val="595959"/>
+                </a:solidFill>
+                <a:latin typeface="맑은 고딕"/>
+              </a:rPr>
+              <a:t>. 10초마다 </a:t>
+            </a:r>
+            <a:r>
+              <a:rPr sz="1100" b="0" dirty="0" err="1">
+                <a:solidFill>
+                  <a:srgbClr val="595959"/>
+                </a:solidFill>
+                <a:latin typeface="맑은 고딕"/>
+              </a:rPr>
+              <a:t>조회해</a:t>
+            </a:r>
+            <a:r>
+              <a:rPr sz="1100" b="0" dirty="0">
+                <a:solidFill>
+                  <a:srgbClr val="595959"/>
+                </a:solidFill>
+                <a:latin typeface="맑은 고딕"/>
+              </a:rPr>
+              <a:t> </a:t>
+            </a:r>
+            <a:r>
+              <a:rPr sz="1100" b="0" dirty="0" err="1">
+                <a:solidFill>
+                  <a:srgbClr val="595959"/>
+                </a:solidFill>
+                <a:latin typeface="맑은 고딕"/>
+              </a:rPr>
+              <a:t>해당</a:t>
+            </a:r>
+            <a:r>
+              <a:rPr sz="1100" b="0" dirty="0">
+                <a:solidFill>
+                  <a:srgbClr val="595959"/>
+                </a:solidFill>
+                <a:latin typeface="맑은 고딕"/>
+              </a:rPr>
+              <a:t> </a:t>
+            </a:r>
+            <a:r>
+              <a:rPr sz="1100" b="0" dirty="0" err="1">
+                <a:solidFill>
+                  <a:srgbClr val="595959"/>
+                </a:solidFill>
+                <a:latin typeface="맑은 고딕"/>
+              </a:rPr>
+              <a:t>건이</a:t>
+            </a:r>
+            <a:r>
+              <a:rPr sz="1100" b="0" dirty="0">
+                <a:solidFill>
+                  <a:srgbClr val="595959"/>
+                </a:solidFill>
+                <a:latin typeface="맑은 고딕"/>
+              </a:rPr>
+              <a:t> </a:t>
+            </a:r>
+            <a:r>
+              <a:rPr sz="1100" b="0" dirty="0" err="1">
+                <a:solidFill>
+                  <a:srgbClr val="595959"/>
+                </a:solidFill>
+                <a:latin typeface="맑은 고딕"/>
+              </a:rPr>
+              <a:t>있으면</a:t>
+            </a:r>
+            <a:r>
+              <a:rPr sz="1100" b="0" dirty="0">
+                <a:solidFill>
+                  <a:srgbClr val="595959"/>
+                </a:solidFill>
+                <a:latin typeface="맑은 고딕"/>
+              </a:rPr>
+              <a:t> </a:t>
+            </a:r>
+            <a:r>
+              <a:rPr sz="1100" b="0" dirty="0" err="1">
+                <a:solidFill>
+                  <a:srgbClr val="595959"/>
+                </a:solidFill>
+                <a:latin typeface="맑은 고딕"/>
+              </a:rPr>
+              <a:t>화면</a:t>
+            </a:r>
+            <a:r>
+              <a:rPr sz="1100" b="0" dirty="0">
+                <a:solidFill>
+                  <a:srgbClr val="595959"/>
+                </a:solidFill>
+                <a:latin typeface="맑은 고딕"/>
+              </a:rPr>
+              <a:t> </a:t>
+            </a:r>
+            <a:r>
+              <a:rPr sz="1100" b="0" dirty="0" err="1">
+                <a:solidFill>
+                  <a:srgbClr val="595959"/>
+                </a:solidFill>
+                <a:latin typeface="맑은 고딕"/>
+              </a:rPr>
+              <a:t>오른쪽</a:t>
+            </a:r>
+            <a:r>
+              <a:rPr sz="1100" b="0" dirty="0">
+                <a:solidFill>
+                  <a:srgbClr val="595959"/>
+                </a:solidFill>
+                <a:latin typeface="맑은 고딕"/>
+              </a:rPr>
+              <a:t> </a:t>
+            </a:r>
+            <a:r>
+              <a:rPr sz="1100" b="0" dirty="0" err="1">
+                <a:solidFill>
+                  <a:srgbClr val="595959"/>
+                </a:solidFill>
+                <a:latin typeface="맑은 고딕"/>
+              </a:rPr>
+              <a:t>아래에</a:t>
+            </a:r>
+            <a:r>
+              <a:rPr sz="1100" b="0" dirty="0">
+                <a:solidFill>
+                  <a:srgbClr val="595959"/>
+                </a:solidFill>
+                <a:latin typeface="맑은 고딕"/>
+              </a:rPr>
+              <a:t> </a:t>
+            </a:r>
+            <a:r>
+              <a:rPr sz="1100" b="0" dirty="0" err="1">
+                <a:solidFill>
+                  <a:srgbClr val="595959"/>
+                </a:solidFill>
+                <a:latin typeface="맑은 고딕"/>
+              </a:rPr>
+              <a:t>스스로</a:t>
+            </a:r>
+            <a:r>
+              <a:rPr sz="1100" b="0" dirty="0">
+                <a:solidFill>
+                  <a:srgbClr val="595959"/>
+                </a:solidFill>
+                <a:latin typeface="맑은 고딕"/>
+              </a:rPr>
+              <a:t> </a:t>
+            </a:r>
+            <a:r>
+              <a:rPr sz="1100" b="0" dirty="0" err="1">
+                <a:solidFill>
+                  <a:srgbClr val="595959"/>
+                </a:solidFill>
+                <a:latin typeface="맑은 고딕"/>
+              </a:rPr>
+              <a:t>뜬다</a:t>
+            </a:r>
+            <a:r>
+              <a:rPr sz="1100" b="0" dirty="0">
+                <a:solidFill>
+                  <a:srgbClr val="595959"/>
+                </a:solidFill>
+                <a:latin typeface="맑은 고딕"/>
+              </a:rPr>
+              <a:t>.</a:t>
+            </a:r>
+          </a:p>
+          <a:p>
+            <a:pPr algn="l"/>
+            <a:endParaRPr sz="1100" b="0" dirty="0">
+              <a:solidFill>
+                <a:srgbClr val="595959"/>
+              </a:solidFill>
+              <a:latin typeface="맑은 고딕"/>
+            </a:endParaRPr>
+          </a:p>
+          <a:p>
+            <a:pPr algn="l"/>
+            <a:r>
+              <a:rPr sz="1300" b="1" dirty="0">
+                <a:solidFill>
+                  <a:srgbClr val="1E2761"/>
+                </a:solidFill>
+                <a:latin typeface="맑은 고딕"/>
+              </a:rPr>
+              <a:t>■ </a:t>
+            </a:r>
+            <a:r>
+              <a:rPr sz="1300" b="1" dirty="0" err="1">
+                <a:solidFill>
+                  <a:srgbClr val="1E2761"/>
+                </a:solidFill>
+                <a:latin typeface="맑은 고딕"/>
+              </a:rPr>
+              <a:t>특기사항</a:t>
+            </a:r>
+            <a:endParaRPr sz="1300" b="1" dirty="0">
+              <a:solidFill>
+                <a:srgbClr val="1E2761"/>
+              </a:solidFill>
+              <a:latin typeface="맑은 고딕"/>
+            </a:endParaRPr>
+          </a:p>
+          <a:p>
+            <a:pPr algn="l"/>
+            <a:r>
+              <a:rPr sz="1000" b="0" dirty="0">
+                <a:solidFill>
+                  <a:srgbClr val="595959"/>
+                </a:solidFill>
+                <a:latin typeface="맑은 고딕"/>
+              </a:rPr>
+              <a:t>· </a:t>
+            </a:r>
+            <a:r>
+              <a:rPr sz="1000" b="0" dirty="0" err="1">
+                <a:solidFill>
+                  <a:srgbClr val="595959"/>
+                </a:solidFill>
+                <a:latin typeface="맑은 고딕"/>
+              </a:rPr>
+              <a:t>체류</a:t>
+            </a:r>
+            <a:r>
+              <a:rPr sz="1000" b="0" dirty="0">
+                <a:solidFill>
+                  <a:srgbClr val="595959"/>
+                </a:solidFill>
+                <a:latin typeface="맑은 고딕"/>
+              </a:rPr>
+              <a:t> </a:t>
+            </a:r>
+            <a:r>
+              <a:rPr sz="1000" b="0" dirty="0" err="1">
+                <a:solidFill>
+                  <a:srgbClr val="595959"/>
+                </a:solidFill>
+                <a:latin typeface="맑은 고딕"/>
+              </a:rPr>
+              <a:t>기준</a:t>
+            </a:r>
+            <a:r>
+              <a:rPr sz="1000" b="0" dirty="0">
+                <a:solidFill>
+                  <a:srgbClr val="595959"/>
+                </a:solidFill>
+                <a:latin typeface="맑은 고딕"/>
+              </a:rPr>
+              <a:t> : Ecs.ini [USER] JOB_STALL_WARN_SEC=300 (</a:t>
+            </a:r>
+            <a:r>
+              <a:rPr sz="1000" b="0" dirty="0" err="1">
+                <a:solidFill>
+                  <a:srgbClr val="595959"/>
+                </a:solidFill>
+                <a:latin typeface="맑은 고딕"/>
+              </a:rPr>
+              <a:t>최소</a:t>
+            </a:r>
+            <a:r>
+              <a:rPr sz="1000" b="0" dirty="0">
+                <a:solidFill>
+                  <a:srgbClr val="595959"/>
+                </a:solidFill>
+                <a:latin typeface="맑은 고딕"/>
+              </a:rPr>
+              <a:t> 10초, </a:t>
+            </a:r>
+            <a:r>
+              <a:rPr sz="1000" b="0" dirty="0" err="1">
+                <a:solidFill>
+                  <a:srgbClr val="595959"/>
+                </a:solidFill>
+                <a:latin typeface="맑은 고딕"/>
+              </a:rPr>
+              <a:t>저장</a:t>
+            </a:r>
+            <a:r>
+              <a:rPr sz="1000" b="0" dirty="0">
+                <a:solidFill>
+                  <a:srgbClr val="595959"/>
+                </a:solidFill>
+                <a:latin typeface="맑은 고딕"/>
+              </a:rPr>
+              <a:t> </a:t>
+            </a:r>
+            <a:r>
+              <a:rPr sz="1000" b="0" dirty="0" err="1">
+                <a:solidFill>
+                  <a:srgbClr val="595959"/>
+                </a:solidFill>
+                <a:latin typeface="맑은 고딕"/>
+              </a:rPr>
+              <a:t>즉시</a:t>
+            </a:r>
+            <a:r>
+              <a:rPr sz="1000" b="0" dirty="0">
+                <a:solidFill>
+                  <a:srgbClr val="595959"/>
+                </a:solidFill>
+                <a:latin typeface="맑은 고딕"/>
+              </a:rPr>
+              <a:t> </a:t>
+            </a:r>
+            <a:r>
+              <a:rPr sz="1000" b="0" dirty="0" err="1">
+                <a:solidFill>
+                  <a:srgbClr val="595959"/>
+                </a:solidFill>
+                <a:latin typeface="맑은 고딕"/>
+              </a:rPr>
+              <a:t>반영</a:t>
+            </a:r>
+            <a:r>
+              <a:rPr sz="1000" b="0" dirty="0">
+                <a:solidFill>
+                  <a:srgbClr val="595959"/>
+                </a:solidFill>
+                <a:latin typeface="맑은 고딕"/>
+              </a:rPr>
+              <a:t>).</a:t>
+            </a:r>
+          </a:p>
+          <a:p>
+            <a:pPr algn="l"/>
+            <a:r>
+              <a:rPr sz="1000" b="0" dirty="0">
+                <a:solidFill>
+                  <a:srgbClr val="595959"/>
+                </a:solidFill>
+                <a:latin typeface="맑은 고딕"/>
+              </a:rPr>
+              <a:t>· </a:t>
+            </a:r>
+            <a:r>
+              <a:rPr sz="1000" b="0" dirty="0" err="1">
+                <a:solidFill>
+                  <a:srgbClr val="595959"/>
+                </a:solidFill>
+                <a:latin typeface="맑은 고딕"/>
+              </a:rPr>
+              <a:t>목록</a:t>
+            </a:r>
+            <a:r>
+              <a:rPr sz="1000" b="0" dirty="0">
+                <a:solidFill>
+                  <a:srgbClr val="595959"/>
+                </a:solidFill>
+                <a:latin typeface="맑은 고딕"/>
+              </a:rPr>
+              <a:t> 열 : </a:t>
+            </a:r>
+            <a:r>
+              <a:rPr sz="1000" b="0" dirty="0" err="1">
+                <a:solidFill>
+                  <a:srgbClr val="595959"/>
+                </a:solidFill>
+                <a:latin typeface="맑은 고딕"/>
+              </a:rPr>
+              <a:t>시각</a:t>
+            </a:r>
+            <a:r>
+              <a:rPr sz="1000" b="0" dirty="0">
+                <a:solidFill>
+                  <a:srgbClr val="595959"/>
+                </a:solidFill>
+                <a:latin typeface="맑은 고딕"/>
+              </a:rPr>
+              <a:t> / </a:t>
+            </a:r>
+            <a:r>
+              <a:rPr sz="1000" b="0" dirty="0" err="1">
+                <a:solidFill>
+                  <a:srgbClr val="595959"/>
+                </a:solidFill>
+                <a:latin typeface="맑은 고딕"/>
+              </a:rPr>
+              <a:t>작업번호</a:t>
+            </a:r>
+            <a:r>
+              <a:rPr sz="1000" b="0" dirty="0">
+                <a:solidFill>
+                  <a:srgbClr val="595959"/>
+                </a:solidFill>
+                <a:latin typeface="맑은 고딕"/>
+              </a:rPr>
+              <a:t> / </a:t>
+            </a:r>
+            <a:r>
+              <a:rPr sz="1000" b="0" dirty="0" err="1">
+                <a:solidFill>
+                  <a:srgbClr val="595959"/>
+                </a:solidFill>
+                <a:latin typeface="맑은 고딕"/>
+              </a:rPr>
+              <a:t>구분</a:t>
+            </a:r>
+            <a:r>
+              <a:rPr sz="1000" b="0" dirty="0">
+                <a:solidFill>
+                  <a:srgbClr val="595959"/>
+                </a:solidFill>
+                <a:latin typeface="맑은 고딕"/>
+              </a:rPr>
+              <a:t> / </a:t>
+            </a:r>
+            <a:r>
+              <a:rPr sz="1000" b="0" dirty="0" err="1">
+                <a:solidFill>
+                  <a:srgbClr val="595959"/>
+                </a:solidFill>
+                <a:latin typeface="맑은 고딕"/>
+              </a:rPr>
+              <a:t>체류</a:t>
+            </a:r>
+            <a:r>
+              <a:rPr sz="1000" b="0" dirty="0">
+                <a:solidFill>
+                  <a:srgbClr val="595959"/>
+                </a:solidFill>
+                <a:latin typeface="맑은 고딕"/>
+              </a:rPr>
+              <a:t>(초) / </a:t>
+            </a:r>
+            <a:r>
+              <a:rPr sz="1000" b="0" dirty="0" err="1">
+                <a:solidFill>
+                  <a:srgbClr val="595959"/>
+                </a:solidFill>
+                <a:latin typeface="맑은 고딕"/>
+              </a:rPr>
+              <a:t>내용</a:t>
+            </a:r>
+            <a:r>
+              <a:rPr sz="1000" b="0" dirty="0">
+                <a:solidFill>
+                  <a:srgbClr val="595959"/>
+                </a:solidFill>
+                <a:latin typeface="맑은 고딕"/>
+              </a:rPr>
+              <a:t>. [STOP] 은 </a:t>
+            </a:r>
+            <a:r>
+              <a:rPr sz="1000" b="0" dirty="0" err="1">
+                <a:solidFill>
+                  <a:srgbClr val="595959"/>
+                </a:solidFill>
+                <a:latin typeface="맑은 고딕"/>
+              </a:rPr>
+              <a:t>숨긴다</a:t>
+            </a:r>
+            <a:r>
+              <a:rPr sz="1000" b="0" dirty="0">
+                <a:solidFill>
+                  <a:srgbClr val="595959"/>
+                </a:solidFill>
+                <a:latin typeface="맑은 고딕"/>
+              </a:rPr>
+              <a:t>.</a:t>
+            </a:r>
+          </a:p>
+          <a:p>
+            <a:pPr algn="l"/>
+            <a:r>
+              <a:rPr sz="1000" b="0" dirty="0">
+                <a:solidFill>
+                  <a:srgbClr val="595959"/>
+                </a:solidFill>
+                <a:latin typeface="맑은 고딕"/>
+              </a:rPr>
+              <a:t>· </a:t>
+            </a:r>
+            <a:r>
+              <a:rPr sz="1000" b="0" dirty="0" err="1">
+                <a:solidFill>
+                  <a:srgbClr val="595959"/>
+                </a:solidFill>
+                <a:latin typeface="맑은 고딕"/>
+              </a:rPr>
+              <a:t>체류는</a:t>
+            </a:r>
+            <a:r>
+              <a:rPr sz="1000" b="0" dirty="0">
+                <a:solidFill>
+                  <a:srgbClr val="595959"/>
+                </a:solidFill>
+                <a:latin typeface="맑은 고딕"/>
+              </a:rPr>
+              <a:t> </a:t>
+            </a:r>
+            <a:r>
+              <a:rPr sz="1000" b="0" dirty="0" err="1">
+                <a:solidFill>
+                  <a:srgbClr val="595959"/>
+                </a:solidFill>
+                <a:latin typeface="맑은 고딕"/>
+              </a:rPr>
+              <a:t>경고만</a:t>
+            </a:r>
+            <a:r>
+              <a:rPr sz="1000" b="0" dirty="0">
+                <a:solidFill>
+                  <a:srgbClr val="595959"/>
+                </a:solidFill>
+                <a:latin typeface="맑은 고딕"/>
+              </a:rPr>
+              <a:t> </a:t>
+            </a:r>
+            <a:r>
+              <a:rPr sz="1000" b="0" dirty="0" err="1">
+                <a:solidFill>
+                  <a:srgbClr val="595959"/>
+                </a:solidFill>
+                <a:latin typeface="맑은 고딕"/>
+              </a:rPr>
+              <a:t>한다</a:t>
+            </a:r>
+            <a:r>
+              <a:rPr sz="1000" b="0" dirty="0">
+                <a:solidFill>
+                  <a:srgbClr val="595959"/>
+                </a:solidFill>
+                <a:latin typeface="맑은 고딕"/>
+              </a:rPr>
+              <a:t> - </a:t>
+            </a:r>
+            <a:r>
+              <a:rPr sz="1000" b="0" dirty="0" err="1">
+                <a:solidFill>
+                  <a:srgbClr val="595959"/>
+                </a:solidFill>
+                <a:latin typeface="맑은 고딕"/>
+              </a:rPr>
+              <a:t>시간</a:t>
+            </a:r>
+            <a:r>
+              <a:rPr sz="1000" b="0" dirty="0">
+                <a:solidFill>
+                  <a:srgbClr val="595959"/>
+                </a:solidFill>
+                <a:latin typeface="맑은 고딕"/>
+              </a:rPr>
+              <a:t> </a:t>
+            </a:r>
+            <a:r>
+              <a:rPr sz="1000" b="0" dirty="0" err="1">
+                <a:solidFill>
+                  <a:srgbClr val="595959"/>
+                </a:solidFill>
+                <a:latin typeface="맑은 고딕"/>
+              </a:rPr>
+              <a:t>경과로</a:t>
+            </a:r>
+            <a:r>
+              <a:rPr sz="1000" b="0" dirty="0">
+                <a:solidFill>
+                  <a:srgbClr val="595959"/>
+                </a:solidFill>
+                <a:latin typeface="맑은 고딕"/>
+              </a:rPr>
+              <a:t> </a:t>
+            </a:r>
+            <a:r>
+              <a:rPr sz="1000" b="0" dirty="0" err="1">
+                <a:solidFill>
+                  <a:srgbClr val="595959"/>
+                </a:solidFill>
+                <a:latin typeface="맑은 고딕"/>
+              </a:rPr>
+              <a:t>작업을</a:t>
+            </a:r>
+            <a:r>
+              <a:rPr sz="1000" b="0" dirty="0">
+                <a:solidFill>
+                  <a:srgbClr val="595959"/>
+                </a:solidFill>
+                <a:latin typeface="맑은 고딕"/>
+              </a:rPr>
+              <a:t> </a:t>
+            </a:r>
+            <a:r>
+              <a:rPr sz="1000" b="0" dirty="0" err="1">
+                <a:solidFill>
+                  <a:srgbClr val="595959"/>
+                </a:solidFill>
+                <a:latin typeface="맑은 고딕"/>
+              </a:rPr>
+              <a:t>자동</a:t>
+            </a:r>
+            <a:r>
+              <a:rPr sz="1000" b="0" dirty="0">
+                <a:solidFill>
+                  <a:srgbClr val="595959"/>
+                </a:solidFill>
+                <a:latin typeface="맑은 고딕"/>
+              </a:rPr>
+              <a:t> </a:t>
+            </a:r>
+            <a:r>
+              <a:rPr sz="1000" b="0" dirty="0" err="1">
+                <a:solidFill>
+                  <a:srgbClr val="595959"/>
+                </a:solidFill>
+                <a:latin typeface="맑은 고딕"/>
+              </a:rPr>
+              <a:t>완료하지</a:t>
+            </a:r>
+            <a:r>
+              <a:rPr sz="1000" b="0" dirty="0">
+                <a:solidFill>
+                  <a:srgbClr val="595959"/>
+                </a:solidFill>
+                <a:latin typeface="맑은 고딕"/>
+              </a:rPr>
+              <a:t> </a:t>
+            </a:r>
+            <a:r>
+              <a:rPr sz="1000" b="0" dirty="0" err="1">
+                <a:solidFill>
+                  <a:srgbClr val="595959"/>
+                </a:solidFill>
+                <a:latin typeface="맑은 고딕"/>
+              </a:rPr>
+              <a:t>않는다</a:t>
+            </a:r>
+            <a:r>
+              <a:rPr sz="1000" b="0" dirty="0">
+                <a:solidFill>
+                  <a:srgbClr val="595959"/>
+                </a:solidFill>
+                <a:latin typeface="맑은 고딕"/>
+              </a:rPr>
+              <a:t>(</a:t>
+            </a:r>
+            <a:r>
+              <a:rPr sz="1000" b="0" dirty="0" err="1">
+                <a:solidFill>
+                  <a:srgbClr val="595959"/>
+                </a:solidFill>
+                <a:latin typeface="맑은 고딕"/>
+              </a:rPr>
+              <a:t>설비</a:t>
+            </a:r>
+            <a:r>
+              <a:rPr sz="1000" b="0" dirty="0">
+                <a:solidFill>
+                  <a:srgbClr val="595959"/>
+                </a:solidFill>
+                <a:latin typeface="맑은 고딕"/>
+              </a:rPr>
+              <a:t> </a:t>
+            </a:r>
+            <a:r>
+              <a:rPr sz="1000" b="0" dirty="0" err="1">
+                <a:solidFill>
+                  <a:srgbClr val="595959"/>
+                </a:solidFill>
+                <a:latin typeface="맑은 고딕"/>
+              </a:rPr>
+              <a:t>신호와</a:t>
+            </a:r>
+            <a:r>
+              <a:rPr sz="1000" b="0" dirty="0">
+                <a:solidFill>
+                  <a:srgbClr val="595959"/>
+                </a:solidFill>
+                <a:latin typeface="맑은 고딕"/>
+              </a:rPr>
+              <a:t> </a:t>
+            </a:r>
+            <a:r>
+              <a:rPr sz="1000" b="0" dirty="0" err="1">
+                <a:solidFill>
+                  <a:srgbClr val="595959"/>
+                </a:solidFill>
+                <a:latin typeface="맑은 고딕"/>
+              </a:rPr>
+              <a:t>실물을</a:t>
+            </a:r>
+            <a:r>
+              <a:rPr sz="1000" b="0" dirty="0">
+                <a:solidFill>
+                  <a:srgbClr val="595959"/>
+                </a:solidFill>
+                <a:latin typeface="맑은 고딕"/>
+              </a:rPr>
+              <a:t> </a:t>
+            </a:r>
+            <a:r>
+              <a:rPr sz="1000" b="0" dirty="0" err="1">
+                <a:solidFill>
+                  <a:srgbClr val="595959"/>
+                </a:solidFill>
+                <a:latin typeface="맑은 고딕"/>
+              </a:rPr>
+              <a:t>확인</a:t>
+            </a:r>
+            <a:r>
+              <a:rPr sz="1000" b="0" dirty="0">
+                <a:solidFill>
+                  <a:srgbClr val="595959"/>
+                </a:solidFill>
+                <a:latin typeface="맑은 고딕"/>
+              </a:rPr>
+              <a:t> 후 </a:t>
+            </a:r>
+            <a:r>
+              <a:rPr sz="1000" b="0" dirty="0" err="1">
+                <a:solidFill>
+                  <a:srgbClr val="595959"/>
+                </a:solidFill>
+                <a:latin typeface="맑은 고딕"/>
+              </a:rPr>
+              <a:t>처리</a:t>
+            </a:r>
+            <a:r>
+              <a:rPr sz="1000" b="0" dirty="0">
+                <a:solidFill>
+                  <a:srgbClr val="595959"/>
+                </a:solidFill>
+                <a:latin typeface="맑은 고딕"/>
+              </a:rPr>
+              <a:t>).</a:t>
             </a:r>
           </a:p>
         </p:txBody>
@@ -8383,7 +9440,7 @@
                 </a:solidFill>
                 <a:latin typeface="맑은 고딕"/>
               </a:rPr>
-              <a:t>LG 화학 1동 ECS  |  화면설계서  |  Ver 2.0</a:t>
+              <a:t>LG 화학 1동 ECS  |  화면설계서  |  Ver 1.1</a:t>
             </a:r>
           </a:p>
         </p:txBody>
@@ -8418,11 +9475,41 @@
                 </a:solidFill>
                 <a:latin typeface="맑은 고딕"/>
               </a:rPr>
-              <a:t>22</a:t>
+              <a:t>24</a:t>
             </a:r>
           </a:p>
         </p:txBody>
       </p:sp>
+      <p:pic>
+        <p:nvPicPr>
+          <p:cNvPr id="9" name="그림 8">
+            <a:extLst>
+              <a:ext uri="{FF2B5EF4-FFF2-40B4-BE49-F238E27FC236}">
+                <a16:creationId xmlns:a16="http://schemas.microsoft.com/office/drawing/2014/main" id="{461B19C5-784F-1DE8-6BB5-FB8FA66BB42C}"/>
+              </a:ext>
+            </a:extLst>
+          </p:cNvPr>
+          <p:cNvPicPr>
+            <a:picLocks noChangeAspect="1"/>
+          </p:cNvPicPr>
+          <p:nvPr/>
+        </p:nvPicPr>
+        <p:blipFill>
+          <a:blip r:embed="rId2"/>
+          <a:stretch>
+            <a:fillRect/>
+          </a:stretch>
+        </p:blipFill>
+        <p:spPr>
+          <a:xfrm>
+            <a:off x="1359747" y="1694873"/>
+            <a:ext cx="6058746" cy="3477110"/>
+          </a:xfrm>
+          <a:prstGeom prst="rect">
+            <a:avLst/>
+          </a:prstGeom>
+        </p:spPr>
+      </p:pic>
     </p:spTree>
   </p:cSld>
   <p:clrMapOvr>
@@ -8478,7 +9565,7 @@
                 </a:solidFill>
                 <a:latin typeface="맑은 고딕"/>
               </a:rPr>
-              <a:t>LOG - ECS 프로그램 이력</a:t>
+              <a:t>설비 대화상자 - CV 상태</a:t>
             </a:r>
           </a:p>
         </p:txBody>
@@ -8529,30 +9616,6 @@
           </a:p>
         </p:txBody>
       </p:sp>
-      <p:pic>
-        <p:nvPicPr>
-          <p:cNvPr id="4" name="Picture 3" descr="alarm_0.png"/>
-          <p:cNvPicPr>
-            <a:picLocks noChangeAspect="1"/>
-          </p:cNvPicPr>
-          <p:nvPr/>
-        </p:nvPicPr>
-        <p:blipFill>
-          <a:blip r:embed="rId2"/>
-          <a:stretch>
-            <a:fillRect/>
-          </a:stretch>
-        </p:blipFill>
-        <p:spPr>
-          <a:xfrm>
-            <a:off x="640080" y="1766792"/>
-            <a:ext cx="7498079" cy="3873054"/>
-          </a:xfrm>
-          <a:prstGeom prst="rect">
-            <a:avLst/>
-          </a:prstGeom>
-        </p:spPr>
-      </p:pic>
       <p:sp>
         <p:nvSpPr>
           <p:cNvPr id="5" name="TextBox 4"/>
@@ -8562,7 +9625,7 @@
         <p:spPr>
           <a:xfrm>
             <a:off x="8503920" y="1188720"/>
-            <a:ext cx="3291840" cy="5029200"/>
+            <a:ext cx="3291840" cy="2785378"/>
           </a:xfrm>
           <a:prstGeom prst="rect">
             <a:avLst/>
@@ -8577,30 +9640,117 @@
           <a:p>
             <a:pPr algn="l"/>
             <a:r>
-              <a:rPr sz="1300" b="1">
+              <a:rPr sz="1300" b="1" dirty="0">
                 <a:solidFill>
                   <a:srgbClr val="1E2761"/>
                 </a:solidFill>
                 <a:latin typeface="맑은 고딕"/>
               </a:rPr>
-              <a:t>■ 메뉴 Path</a:t>
-            </a:r>
-          </a:p>
-          <a:p>
-            <a:pPr algn="l"/>
-            <a:r>
-              <a:rPr sz="1100" b="0">
-                <a:solidFill>
-                  <a:srgbClr val="595959"/>
-                </a:solidFill>
-                <a:latin typeface="맑은 고딕"/>
-              </a:rPr>
-              <a:t>LOG ▷ 로그 ▷ ECS프로그램로그</a:t>
-            </a:r>
-          </a:p>
-          <a:p>
-            <a:pPr algn="l"/>
-            <a:endParaRPr sz="1100" b="0">
+              <a:t>■ </a:t>
+            </a:r>
+            <a:r>
+              <a:rPr sz="1300" b="1" dirty="0" err="1">
+                <a:solidFill>
+                  <a:srgbClr val="1E2761"/>
+                </a:solidFill>
+                <a:latin typeface="맑은 고딕"/>
+              </a:rPr>
+              <a:t>메뉴</a:t>
+            </a:r>
+            <a:r>
+              <a:rPr sz="1300" b="1" dirty="0">
+                <a:solidFill>
+                  <a:srgbClr val="1E2761"/>
+                </a:solidFill>
+                <a:latin typeface="맑은 고딕"/>
+              </a:rPr>
+              <a:t> Path</a:t>
+            </a:r>
+          </a:p>
+          <a:p>
+            <a:pPr algn="l"/>
+            <a:r>
+              <a:rPr sz="1100" b="0" dirty="0" err="1">
+                <a:solidFill>
+                  <a:srgbClr val="595959"/>
+                </a:solidFill>
+                <a:latin typeface="맑은 고딕"/>
+              </a:rPr>
+              <a:t>메인</a:t>
+            </a:r>
+            <a:r>
+              <a:rPr sz="1100" b="0" dirty="0">
+                <a:solidFill>
+                  <a:srgbClr val="595959"/>
+                </a:solidFill>
+                <a:latin typeface="맑은 고딕"/>
+              </a:rPr>
+              <a:t> </a:t>
+            </a:r>
+            <a:r>
+              <a:rPr sz="1100" b="0" dirty="0" err="1">
+                <a:solidFill>
+                  <a:srgbClr val="595959"/>
+                </a:solidFill>
+                <a:latin typeface="맑은 고딕"/>
+              </a:rPr>
+              <a:t>화면에서</a:t>
+            </a:r>
+            <a:r>
+              <a:rPr sz="1100" b="0" dirty="0">
+                <a:solidFill>
+                  <a:srgbClr val="595959"/>
+                </a:solidFill>
+                <a:latin typeface="맑은 고딕"/>
+              </a:rPr>
+              <a:t> </a:t>
+            </a:r>
+            <a:r>
+              <a:rPr sz="1100" b="0" dirty="0" err="1">
+                <a:solidFill>
+                  <a:srgbClr val="595959"/>
+                </a:solidFill>
+                <a:latin typeface="맑은 고딕"/>
+              </a:rPr>
+              <a:t>컨베이어</a:t>
+            </a:r>
+            <a:r>
+              <a:rPr sz="1100" b="0" dirty="0">
+                <a:solidFill>
+                  <a:srgbClr val="595959"/>
+                </a:solidFill>
+                <a:latin typeface="맑은 고딕"/>
+              </a:rPr>
+              <a:t> </a:t>
+            </a:r>
+            <a:r>
+              <a:rPr sz="1100" b="0" dirty="0" err="1">
+                <a:solidFill>
+                  <a:srgbClr val="595959"/>
+                </a:solidFill>
+                <a:latin typeface="맑은 고딕"/>
+              </a:rPr>
+              <a:t>트랙</a:t>
+            </a:r>
+            <a:r>
+              <a:rPr sz="1100" b="0" dirty="0">
+                <a:solidFill>
+                  <a:srgbClr val="595959"/>
+                </a:solidFill>
+                <a:latin typeface="맑은 고딕"/>
+              </a:rPr>
+              <a:t> </a:t>
+            </a:r>
+            <a:r>
+              <a:rPr sz="1100" b="0" dirty="0" err="1">
+                <a:solidFill>
+                  <a:srgbClr val="595959"/>
+                </a:solidFill>
+                <a:latin typeface="맑은 고딕"/>
+              </a:rPr>
+              <a:t>클릭</a:t>
+            </a:r>
+            <a:endParaRPr sz="1100" b="0" dirty="0">
               <a:solidFill>
                 <a:srgbClr val="595959"/>
               </a:solidFill>
@@ -8609,26 +9759,1121 @@
           </a:p>
           <a:p>
             <a:pPr algn="l"/>
-            <a:r>
-              <a:rPr sz="1300" b="1">
+            <a:endParaRPr sz="1100" b="0" dirty="0">
+              <a:solidFill>
+                <a:srgbClr val="595959"/>
+              </a:solidFill>
+              <a:latin typeface="맑은 고딕"/>
+            </a:endParaRPr>
+          </a:p>
+          <a:p>
+            <a:pPr algn="l"/>
+            <a:r>
+              <a:rPr sz="1300" b="1" dirty="0">
                 <a:solidFill>
                   <a:srgbClr val="1E2761"/>
                 </a:solidFill>
                 <a:latin typeface="맑은 고딕"/>
               </a:rPr>
-              <a:t>■ 프로그램 개요</a:t>
-            </a:r>
-          </a:p>
-          <a:p>
-            <a:pPr algn="l"/>
-            <a:r>
-              <a:rPr sz="1100" b="0">
-                <a:solidFill>
-                  <a:srgbClr val="595959"/>
-                </a:solidFill>
-                <a:latin typeface="맑은 고딕"/>
-              </a:rPr>
-              <a:t>서버 프로그램(스케줄러/설비 통신/상위 통신)이 남긴 운전 이력(WCS_LOG_PGR)을 프로그램·시간·작업번호로 조회한다.</a:t>
+              <a:t>■ </a:t>
+            </a:r>
+            <a:r>
+              <a:rPr sz="1300" b="1" dirty="0" err="1">
+                <a:solidFill>
+                  <a:srgbClr val="1E2761"/>
+                </a:solidFill>
+                <a:latin typeface="맑은 고딕"/>
+              </a:rPr>
+              <a:t>프로그램</a:t>
+            </a:r>
+            <a:r>
+              <a:rPr sz="1300" b="1" dirty="0">
+                <a:solidFill>
+                  <a:srgbClr val="1E2761"/>
+                </a:solidFill>
+                <a:latin typeface="맑은 고딕"/>
+              </a:rPr>
+              <a:t> </a:t>
+            </a:r>
+            <a:r>
+              <a:rPr sz="1300" b="1" dirty="0" err="1">
+                <a:solidFill>
+                  <a:srgbClr val="1E2761"/>
+                </a:solidFill>
+                <a:latin typeface="맑은 고딕"/>
+              </a:rPr>
+              <a:t>개요</a:t>
+            </a:r>
+            <a:endParaRPr sz="1300" b="1" dirty="0">
+              <a:solidFill>
+                <a:srgbClr val="1E2761"/>
+              </a:solidFill>
+              <a:latin typeface="맑은 고딕"/>
+            </a:endParaRPr>
+          </a:p>
+          <a:p>
+            <a:pPr algn="l"/>
+            <a:r>
+              <a:rPr sz="1100" b="0" dirty="0" err="1">
+                <a:solidFill>
+                  <a:srgbClr val="595959"/>
+                </a:solidFill>
+                <a:latin typeface="맑은 고딕"/>
+              </a:rPr>
+              <a:t>컨베이어</a:t>
+            </a:r>
+            <a:r>
+              <a:rPr sz="1100" b="0" dirty="0">
+                <a:solidFill>
+                  <a:srgbClr val="595959"/>
+                </a:solidFill>
+                <a:latin typeface="맑은 고딕"/>
+              </a:rPr>
+              <a:t> </a:t>
+            </a:r>
+            <a:r>
+              <a:rPr sz="1100" b="0" dirty="0" err="1">
+                <a:solidFill>
+                  <a:srgbClr val="595959"/>
+                </a:solidFill>
+                <a:latin typeface="맑은 고딕"/>
+              </a:rPr>
+              <a:t>트랙의</a:t>
+            </a:r>
+            <a:r>
+              <a:rPr sz="1100" b="0" dirty="0">
+                <a:solidFill>
+                  <a:srgbClr val="595959"/>
+                </a:solidFill>
+                <a:latin typeface="맑은 고딕"/>
+              </a:rPr>
+              <a:t> PLC </a:t>
+            </a:r>
+            <a:r>
+              <a:rPr sz="1100" b="0" dirty="0" err="1">
+                <a:solidFill>
+                  <a:srgbClr val="595959"/>
+                </a:solidFill>
+                <a:latin typeface="맑은 고딕"/>
+              </a:rPr>
+              <a:t>신호와</a:t>
+            </a:r>
+            <a:r>
+              <a:rPr sz="1100" b="0" dirty="0">
+                <a:solidFill>
+                  <a:srgbClr val="595959"/>
+                </a:solidFill>
+                <a:latin typeface="맑은 고딕"/>
+              </a:rPr>
+              <a:t> </a:t>
+            </a:r>
+            <a:r>
+              <a:rPr sz="1100" b="0" dirty="0" err="1">
+                <a:solidFill>
+                  <a:srgbClr val="595959"/>
+                </a:solidFill>
+                <a:latin typeface="맑은 고딕"/>
+              </a:rPr>
+              <a:t>작업</a:t>
+            </a:r>
+            <a:r>
+              <a:rPr sz="1100" b="0" dirty="0">
+                <a:solidFill>
+                  <a:srgbClr val="595959"/>
+                </a:solidFill>
+                <a:latin typeface="맑은 고딕"/>
+              </a:rPr>
+              <a:t> </a:t>
+            </a:r>
+            <a:r>
+              <a:rPr sz="1100" b="0" dirty="0" err="1">
+                <a:solidFill>
+                  <a:srgbClr val="595959"/>
+                </a:solidFill>
+                <a:latin typeface="맑은 고딕"/>
+              </a:rPr>
+              <a:t>정보를</a:t>
+            </a:r>
+            <a:r>
+              <a:rPr sz="1100" b="0" dirty="0">
+                <a:solidFill>
+                  <a:srgbClr val="595959"/>
+                </a:solidFill>
+                <a:latin typeface="맑은 고딕"/>
+              </a:rPr>
+              <a:t> </a:t>
+            </a:r>
+            <a:r>
+              <a:rPr sz="1100" b="0" dirty="0" err="1">
+                <a:solidFill>
+                  <a:srgbClr val="595959"/>
+                </a:solidFill>
+                <a:latin typeface="맑은 고딕"/>
+              </a:rPr>
+              <a:t>보고</a:t>
+            </a:r>
+            <a:r>
+              <a:rPr sz="1100" b="0" dirty="0">
+                <a:solidFill>
+                  <a:srgbClr val="595959"/>
+                </a:solidFill>
+                <a:latin typeface="맑은 고딕"/>
+              </a:rPr>
+              <a:t>, </a:t>
+            </a:r>
+            <a:r>
+              <a:rPr sz="1100" b="0" dirty="0" err="1">
+                <a:solidFill>
+                  <a:srgbClr val="595959"/>
+                </a:solidFill>
+                <a:latin typeface="맑은 고딕"/>
+              </a:rPr>
+              <a:t>작업번호</a:t>
+            </a:r>
+            <a:r>
+              <a:rPr sz="1100" b="0" dirty="0">
+                <a:solidFill>
+                  <a:srgbClr val="595959"/>
+                </a:solidFill>
+                <a:latin typeface="맑은 고딕"/>
+              </a:rPr>
+              <a:t> </a:t>
+            </a:r>
+            <a:r>
+              <a:rPr sz="1100" b="0" dirty="0" err="1">
+                <a:solidFill>
+                  <a:srgbClr val="595959"/>
+                </a:solidFill>
+                <a:latin typeface="맑은 고딕"/>
+              </a:rPr>
+              <a:t>쓰기</a:t>
+            </a:r>
+            <a:r>
+              <a:rPr sz="1100" b="0" dirty="0">
+                <a:solidFill>
+                  <a:srgbClr val="595959"/>
+                </a:solidFill>
+                <a:latin typeface="맑은 고딕"/>
+              </a:rPr>
+              <a:t>/</a:t>
+            </a:r>
+            <a:r>
+              <a:rPr sz="1100" b="0" dirty="0" err="1">
+                <a:solidFill>
+                  <a:srgbClr val="595959"/>
+                </a:solidFill>
+                <a:latin typeface="맑은 고딕"/>
+              </a:rPr>
+              <a:t>삭제</a:t>
+            </a:r>
+            <a:r>
+              <a:rPr sz="1100" b="0" dirty="0">
+                <a:solidFill>
+                  <a:srgbClr val="595959"/>
+                </a:solidFill>
+                <a:latin typeface="맑은 고딕"/>
+              </a:rPr>
+              <a:t>/</a:t>
+            </a:r>
+            <a:r>
+              <a:rPr sz="1100" b="0" dirty="0" err="1">
+                <a:solidFill>
+                  <a:srgbClr val="595959"/>
+                </a:solidFill>
+                <a:latin typeface="맑은 고딕"/>
+              </a:rPr>
+              <a:t>복사</a:t>
+            </a:r>
+            <a:r>
+              <a:rPr sz="1100" b="0" dirty="0">
+                <a:solidFill>
+                  <a:srgbClr val="595959"/>
+                </a:solidFill>
+                <a:latin typeface="맑은 고딕"/>
+              </a:rPr>
+              <a:t>/</a:t>
+            </a:r>
+            <a:r>
+              <a:rPr sz="1100" b="0" dirty="0" err="1">
+                <a:solidFill>
+                  <a:srgbClr val="595959"/>
+                </a:solidFill>
+                <a:latin typeface="맑은 고딕"/>
+              </a:rPr>
+              <a:t>잘라내기</a:t>
+            </a:r>
+            <a:r>
+              <a:rPr sz="1100" b="0" dirty="0">
+                <a:solidFill>
+                  <a:srgbClr val="595959"/>
+                </a:solidFill>
+                <a:latin typeface="맑은 고딕"/>
+              </a:rPr>
+              <a:t>/</a:t>
+            </a:r>
+            <a:r>
+              <a:rPr sz="1100" b="0" dirty="0" err="1">
+                <a:solidFill>
+                  <a:srgbClr val="595959"/>
+                </a:solidFill>
+                <a:latin typeface="맑은 고딕"/>
+              </a:rPr>
+              <a:t>붙여넣기</a:t>
+            </a:r>
+            <a:r>
+              <a:rPr sz="1100" b="0" dirty="0">
+                <a:solidFill>
+                  <a:srgbClr val="595959"/>
+                </a:solidFill>
+                <a:latin typeface="맑은 고딕"/>
+              </a:rPr>
+              <a:t>, </a:t>
+            </a:r>
+            <a:r>
+              <a:rPr sz="1100" b="0" dirty="0" err="1">
+                <a:solidFill>
+                  <a:srgbClr val="595959"/>
+                </a:solidFill>
+                <a:latin typeface="맑은 고딕"/>
+              </a:rPr>
+              <a:t>트랙</a:t>
+            </a:r>
+            <a:r>
+              <a:rPr sz="1100" b="0" dirty="0">
+                <a:solidFill>
+                  <a:srgbClr val="595959"/>
+                </a:solidFill>
+                <a:latin typeface="맑은 고딕"/>
+              </a:rPr>
+              <a:t> </a:t>
+            </a:r>
+            <a:r>
+              <a:rPr sz="1100" b="0" dirty="0" err="1">
+                <a:solidFill>
+                  <a:srgbClr val="595959"/>
+                </a:solidFill>
+                <a:latin typeface="맑은 고딕"/>
+              </a:rPr>
+              <a:t>일시정지</a:t>
+            </a:r>
+            <a:r>
+              <a:rPr sz="1100" b="0" dirty="0">
+                <a:solidFill>
+                  <a:srgbClr val="595959"/>
+                </a:solidFill>
+                <a:latin typeface="맑은 고딕"/>
+              </a:rPr>
+              <a:t>, H/S </a:t>
+            </a:r>
+            <a:r>
+              <a:rPr sz="1100" b="0" dirty="0" err="1">
+                <a:solidFill>
+                  <a:srgbClr val="595959"/>
+                </a:solidFill>
+                <a:latin typeface="맑은 고딕"/>
+              </a:rPr>
+              <a:t>배출을</a:t>
+            </a:r>
+            <a:r>
+              <a:rPr sz="1100" b="0" dirty="0">
+                <a:solidFill>
+                  <a:srgbClr val="595959"/>
+                </a:solidFill>
+                <a:latin typeface="맑은 고딕"/>
+              </a:rPr>
+              <a:t> </a:t>
+            </a:r>
+            <a:r>
+              <a:rPr sz="1100" b="0" dirty="0" err="1">
+                <a:solidFill>
+                  <a:srgbClr val="595959"/>
+                </a:solidFill>
+                <a:latin typeface="맑은 고딕"/>
+              </a:rPr>
+              <a:t>수행한다</a:t>
+            </a:r>
+            <a:r>
+              <a:rPr sz="1100" b="0" dirty="0">
+                <a:solidFill>
+                  <a:srgbClr val="595959"/>
+                </a:solidFill>
+                <a:latin typeface="맑은 고딕"/>
+              </a:rPr>
+              <a:t>.</a:t>
+            </a:r>
+          </a:p>
+          <a:p>
+            <a:pPr algn="l"/>
+            <a:endParaRPr sz="1100" b="0" dirty="0">
+              <a:solidFill>
+                <a:srgbClr val="595959"/>
+              </a:solidFill>
+              <a:latin typeface="맑은 고딕"/>
+            </a:endParaRPr>
+          </a:p>
+          <a:p>
+            <a:pPr algn="l"/>
+            <a:r>
+              <a:rPr sz="1300" b="1" dirty="0">
+                <a:solidFill>
+                  <a:srgbClr val="1E2761"/>
+                </a:solidFill>
+                <a:latin typeface="맑은 고딕"/>
+              </a:rPr>
+              <a:t>■ </a:t>
+            </a:r>
+            <a:r>
+              <a:rPr sz="1300" b="1" dirty="0" err="1">
+                <a:solidFill>
+                  <a:srgbClr val="1E2761"/>
+                </a:solidFill>
+                <a:latin typeface="맑은 고딕"/>
+              </a:rPr>
+              <a:t>특기사항</a:t>
+            </a:r>
+            <a:endParaRPr sz="1300" b="1" dirty="0">
+              <a:solidFill>
+                <a:srgbClr val="1E2761"/>
+              </a:solidFill>
+              <a:latin typeface="맑은 고딕"/>
+            </a:endParaRPr>
+          </a:p>
+          <a:p>
+            <a:pPr algn="l"/>
+            <a:r>
+              <a:rPr sz="1000" b="0" dirty="0">
+                <a:solidFill>
+                  <a:srgbClr val="595959"/>
+                </a:solidFill>
+                <a:latin typeface="맑은 고딕"/>
+              </a:rPr>
+              <a:t>· [</a:t>
+            </a:r>
+            <a:r>
+              <a:rPr sz="1000" b="0" dirty="0" err="1">
+                <a:solidFill>
+                  <a:srgbClr val="595959"/>
+                </a:solidFill>
+                <a:latin typeface="맑은 고딕"/>
+              </a:rPr>
+              <a:t>쓰기</a:t>
+            </a:r>
+            <a:r>
+              <a:rPr sz="1000" b="0" dirty="0">
+                <a:solidFill>
+                  <a:srgbClr val="595959"/>
+                </a:solidFill>
+                <a:latin typeface="맑은 고딕"/>
+              </a:rPr>
+              <a:t>]/[</a:t>
+            </a:r>
+            <a:r>
+              <a:rPr sz="1000" b="0" dirty="0" err="1">
+                <a:solidFill>
+                  <a:srgbClr val="595959"/>
+                </a:solidFill>
+                <a:latin typeface="맑은 고딕"/>
+              </a:rPr>
+              <a:t>붙여넣기</a:t>
+            </a:r>
+            <a:r>
+              <a:rPr sz="1000" b="0" dirty="0">
+                <a:solidFill>
+                  <a:srgbClr val="595959"/>
+                </a:solidFill>
+                <a:latin typeface="맑은 고딕"/>
+              </a:rPr>
+              <a:t>] 로 </a:t>
+            </a:r>
+            <a:r>
+              <a:rPr sz="1000" b="0" dirty="0" err="1">
+                <a:solidFill>
+                  <a:srgbClr val="595959"/>
+                </a:solidFill>
+                <a:latin typeface="맑은 고딕"/>
+              </a:rPr>
+              <a:t>작업을</a:t>
+            </a:r>
+            <a:r>
+              <a:rPr sz="1000" b="0" dirty="0">
+                <a:solidFill>
+                  <a:srgbClr val="595959"/>
+                </a:solidFill>
+                <a:latin typeface="맑은 고딕"/>
+              </a:rPr>
+              <a:t> </a:t>
+            </a:r>
+            <a:r>
+              <a:rPr sz="1000" b="0" dirty="0" err="1">
+                <a:solidFill>
+                  <a:srgbClr val="595959"/>
+                </a:solidFill>
+                <a:latin typeface="맑은 고딕"/>
+              </a:rPr>
+              <a:t>트랙에</a:t>
+            </a:r>
+            <a:r>
+              <a:rPr sz="1000" b="0" dirty="0">
+                <a:solidFill>
+                  <a:srgbClr val="595959"/>
+                </a:solidFill>
+                <a:latin typeface="맑은 고딕"/>
+              </a:rPr>
+              <a:t> </a:t>
+            </a:r>
+            <a:r>
+              <a:rPr sz="1000" b="0" dirty="0" err="1">
+                <a:solidFill>
+                  <a:srgbClr val="595959"/>
+                </a:solidFill>
+                <a:latin typeface="맑은 고딕"/>
+              </a:rPr>
+              <a:t>올리면</a:t>
+            </a:r>
+            <a:r>
+              <a:rPr sz="1000" b="0" dirty="0">
+                <a:solidFill>
+                  <a:srgbClr val="595959"/>
+                </a:solidFill>
+                <a:latin typeface="맑은 고딕"/>
+              </a:rPr>
+              <a:t> </a:t>
+            </a:r>
+            <a:r>
+              <a:rPr sz="1000" b="0" dirty="0" err="1">
+                <a:solidFill>
+                  <a:srgbClr val="595959"/>
+                </a:solidFill>
+                <a:latin typeface="맑은 고딕"/>
+              </a:rPr>
+              <a:t>통로</a:t>
+            </a:r>
+            <a:r>
+              <a:rPr sz="1000" b="0" dirty="0">
+                <a:solidFill>
+                  <a:srgbClr val="595959"/>
+                </a:solidFill>
+                <a:latin typeface="맑은 고딕"/>
+              </a:rPr>
+              <a:t> CV(</a:t>
+            </a:r>
+            <a:r>
+              <a:rPr sz="1000" b="0" dirty="0" err="1">
+                <a:solidFill>
+                  <a:srgbClr val="595959"/>
+                </a:solidFill>
+                <a:latin typeface="맑은 고딕"/>
+              </a:rPr>
+              <a:t>트랙</a:t>
+            </a:r>
+            <a:r>
+              <a:rPr sz="1000" b="0" dirty="0">
+                <a:solidFill>
+                  <a:srgbClr val="595959"/>
+                </a:solidFill>
+                <a:latin typeface="맑은 고딕"/>
+              </a:rPr>
+              <a:t> 103~120)는 </a:t>
+            </a:r>
+            <a:r>
+              <a:rPr sz="1000" b="0" dirty="0" err="1">
+                <a:solidFill>
+                  <a:srgbClr val="595959"/>
+                </a:solidFill>
+                <a:latin typeface="맑은 고딕"/>
+              </a:rPr>
+              <a:t>상태</a:t>
+            </a:r>
+            <a:r>
+              <a:rPr sz="1000" b="0" dirty="0">
+                <a:solidFill>
+                  <a:srgbClr val="595959"/>
+                </a:solidFill>
+                <a:latin typeface="맑은 고딕"/>
+              </a:rPr>
+              <a:t> 16(</a:t>
+            </a:r>
+            <a:r>
+              <a:rPr sz="1000" b="0" dirty="0" err="1">
+                <a:solidFill>
+                  <a:srgbClr val="595959"/>
+                </a:solidFill>
+                <a:latin typeface="맑은 고딕"/>
+              </a:rPr>
+              <a:t>통로CV</a:t>
+            </a:r>
+            <a:r>
+              <a:rPr sz="1000" b="0" dirty="0">
+                <a:solidFill>
+                  <a:srgbClr val="595959"/>
+                </a:solidFill>
+                <a:latin typeface="맑은 고딕"/>
+              </a:rPr>
+              <a:t> </a:t>
+            </a:r>
+            <a:r>
+              <a:rPr sz="1000" b="0" dirty="0" err="1">
+                <a:solidFill>
+                  <a:srgbClr val="595959"/>
+                </a:solidFill>
+                <a:latin typeface="맑은 고딕"/>
+              </a:rPr>
+              <a:t>구동중</a:t>
+            </a:r>
+            <a:r>
+              <a:rPr sz="1000" b="0" dirty="0">
+                <a:solidFill>
+                  <a:srgbClr val="595959"/>
+                </a:solidFill>
+                <a:latin typeface="맑은 고딕"/>
+              </a:rPr>
+              <a:t>), 그 </a:t>
+            </a:r>
+            <a:r>
+              <a:rPr sz="1000" b="0" dirty="0" err="1">
+                <a:solidFill>
+                  <a:srgbClr val="595959"/>
+                </a:solidFill>
+                <a:latin typeface="맑은 고딕"/>
+              </a:rPr>
+              <a:t>밖의</a:t>
+            </a:r>
+            <a:r>
+              <a:rPr sz="1000" b="0" dirty="0">
+                <a:solidFill>
+                  <a:srgbClr val="595959"/>
+                </a:solidFill>
+                <a:latin typeface="맑은 고딕"/>
+              </a:rPr>
+              <a:t> </a:t>
+            </a:r>
+            <a:r>
+              <a:rPr sz="1000" b="0" dirty="0" err="1">
+                <a:solidFill>
+                  <a:srgbClr val="595959"/>
+                </a:solidFill>
+                <a:latin typeface="맑은 고딕"/>
+              </a:rPr>
+              <a:t>작업대는</a:t>
+            </a:r>
+            <a:r>
+              <a:rPr sz="1000" b="0" dirty="0">
+                <a:solidFill>
+                  <a:srgbClr val="595959"/>
+                </a:solidFill>
+                <a:latin typeface="맑은 고딕"/>
+              </a:rPr>
+              <a:t> 15 로 </a:t>
+            </a:r>
+            <a:r>
+              <a:rPr sz="1000" b="0" dirty="0" err="1">
+                <a:solidFill>
+                  <a:srgbClr val="595959"/>
+                </a:solidFill>
+                <a:latin typeface="맑은 고딕"/>
+              </a:rPr>
+              <a:t>기록된다</a:t>
+            </a:r>
+            <a:r>
+              <a:rPr sz="1000" b="0" dirty="0">
+                <a:solidFill>
+                  <a:srgbClr val="595959"/>
+                </a:solidFill>
+                <a:latin typeface="맑은 고딕"/>
+              </a:rPr>
+              <a:t>.</a:t>
+            </a:r>
+          </a:p>
+          <a:p>
+            <a:pPr algn="l"/>
+            <a:r>
+              <a:rPr sz="1000" b="0" dirty="0">
+                <a:solidFill>
+                  <a:srgbClr val="595959"/>
+                </a:solidFill>
+                <a:latin typeface="맑은 고딕"/>
+              </a:rPr>
+              <a:t>· </a:t>
+            </a:r>
+            <a:r>
+              <a:rPr sz="1000" b="0" dirty="0" err="1">
+                <a:solidFill>
+                  <a:srgbClr val="595959"/>
+                </a:solidFill>
+                <a:latin typeface="맑은 고딕"/>
+              </a:rPr>
+              <a:t>예외</a:t>
+            </a:r>
+            <a:r>
+              <a:rPr sz="1000" b="0" dirty="0">
+                <a:solidFill>
+                  <a:srgbClr val="595959"/>
+                </a:solidFill>
+                <a:latin typeface="맑은 고딕"/>
+              </a:rPr>
+              <a:t> </a:t>
+            </a:r>
+            <a:r>
+              <a:rPr sz="1000" b="0" dirty="0" err="1">
+                <a:solidFill>
+                  <a:srgbClr val="595959"/>
+                </a:solidFill>
+                <a:latin typeface="맑은 고딕"/>
+              </a:rPr>
+              <a:t>처리</a:t>
+            </a:r>
+            <a:r>
+              <a:rPr sz="1000" b="0" dirty="0">
+                <a:solidFill>
+                  <a:srgbClr val="595959"/>
+                </a:solidFill>
+                <a:latin typeface="맑은 고딕"/>
+              </a:rPr>
+              <a:t> [H/S </a:t>
+            </a:r>
+            <a:r>
+              <a:rPr sz="1000" b="0" dirty="0" err="1">
+                <a:solidFill>
+                  <a:srgbClr val="595959"/>
+                </a:solidFill>
+                <a:latin typeface="맑은 고딕"/>
+              </a:rPr>
+              <a:t>배출</a:t>
+            </a:r>
+            <a:r>
+              <a:rPr sz="1000" b="0" dirty="0">
+                <a:solidFill>
+                  <a:srgbClr val="595959"/>
+                </a:solidFill>
+                <a:latin typeface="맑은 고딕"/>
+              </a:rPr>
+              <a:t>] 은 </a:t>
+            </a:r>
+            <a:r>
+              <a:rPr sz="1000" b="0" dirty="0" err="1">
+                <a:solidFill>
+                  <a:srgbClr val="595959"/>
+                </a:solidFill>
+                <a:latin typeface="맑은 고딕"/>
+              </a:rPr>
+              <a:t>출고</a:t>
+            </a:r>
+            <a:r>
+              <a:rPr sz="1000" b="0" dirty="0">
+                <a:solidFill>
+                  <a:srgbClr val="595959"/>
+                </a:solidFill>
+                <a:latin typeface="맑은 고딕"/>
+              </a:rPr>
+              <a:t> H/S 에 </a:t>
+            </a:r>
+            <a:r>
+              <a:rPr sz="1000" b="0" dirty="0" err="1">
+                <a:solidFill>
+                  <a:srgbClr val="595959"/>
+                </a:solidFill>
+                <a:latin typeface="맑은 고딕"/>
+              </a:rPr>
+              <a:t>놓인</a:t>
+            </a:r>
+            <a:r>
+              <a:rPr sz="1000" b="0" dirty="0">
+                <a:solidFill>
+                  <a:srgbClr val="595959"/>
+                </a:solidFill>
+                <a:latin typeface="맑은 고딕"/>
+              </a:rPr>
+              <a:t> </a:t>
+            </a:r>
+            <a:r>
+              <a:rPr sz="1000" b="0" dirty="0" err="1">
+                <a:solidFill>
+                  <a:srgbClr val="595959"/>
+                </a:solidFill>
+                <a:latin typeface="맑은 고딕"/>
+              </a:rPr>
+              <a:t>작업</a:t>
+            </a:r>
+            <a:r>
+              <a:rPr sz="1000" b="0" dirty="0">
+                <a:solidFill>
+                  <a:srgbClr val="595959"/>
+                </a:solidFill>
+                <a:latin typeface="맑은 고딕"/>
+              </a:rPr>
+              <a:t> </a:t>
+            </a:r>
+            <a:r>
+              <a:rPr sz="1000" b="0" dirty="0" err="1">
+                <a:solidFill>
+                  <a:srgbClr val="595959"/>
+                </a:solidFill>
+                <a:latin typeface="맑은 고딕"/>
+              </a:rPr>
+              <a:t>없는</a:t>
+            </a:r>
+            <a:r>
+              <a:rPr sz="1000" b="0" dirty="0">
+                <a:solidFill>
+                  <a:srgbClr val="595959"/>
+                </a:solidFill>
+                <a:latin typeface="맑은 고딕"/>
+              </a:rPr>
+              <a:t> </a:t>
+            </a:r>
+            <a:r>
+              <a:rPr sz="1000" b="0" dirty="0" err="1">
+                <a:solidFill>
+                  <a:srgbClr val="595959"/>
+                </a:solidFill>
+                <a:latin typeface="맑은 고딕"/>
+              </a:rPr>
+              <a:t>화물을</a:t>
+            </a:r>
+            <a:r>
+              <a:rPr sz="1000" b="0" dirty="0">
+                <a:solidFill>
+                  <a:srgbClr val="595959"/>
+                </a:solidFill>
+                <a:latin typeface="맑은 고딕"/>
+              </a:rPr>
+              <a:t> </a:t>
+            </a:r>
+            <a:r>
+              <a:rPr sz="1000" b="0" dirty="0" err="1">
+                <a:solidFill>
+                  <a:srgbClr val="595959"/>
+                </a:solidFill>
+                <a:latin typeface="맑은 고딕"/>
+              </a:rPr>
+              <a:t>출고대로</a:t>
+            </a:r>
+            <a:r>
+              <a:rPr sz="1000" b="0" dirty="0">
+                <a:solidFill>
+                  <a:srgbClr val="595959"/>
+                </a:solidFill>
+                <a:latin typeface="맑은 고딕"/>
+              </a:rPr>
+              <a:t> </a:t>
+            </a:r>
+            <a:r>
+              <a:rPr sz="1000" b="0" dirty="0" err="1">
+                <a:solidFill>
+                  <a:srgbClr val="595959"/>
+                </a:solidFill>
+                <a:latin typeface="맑은 고딕"/>
+              </a:rPr>
+              <a:t>내보낸다</a:t>
+            </a:r>
+            <a:r>
+              <a:rPr sz="1000" b="0" dirty="0">
+                <a:solidFill>
+                  <a:srgbClr val="595959"/>
+                </a:solidFill>
+                <a:latin typeface="맑은 고딕"/>
+              </a:rPr>
+              <a:t>(</a:t>
+            </a:r>
+            <a:r>
+              <a:rPr sz="1000" b="0" dirty="0" err="1">
+                <a:solidFill>
+                  <a:srgbClr val="595959"/>
+                </a:solidFill>
+                <a:latin typeface="맑은 고딕"/>
+              </a:rPr>
+              <a:t>반자동</a:t>
+            </a:r>
+            <a:r>
+              <a:rPr sz="1000" b="0" dirty="0">
+                <a:solidFill>
+                  <a:srgbClr val="595959"/>
+                </a:solidFill>
+                <a:latin typeface="맑은 고딕"/>
+              </a:rPr>
+              <a:t> </a:t>
+            </a:r>
+            <a:r>
+              <a:rPr sz="1000" b="0" dirty="0" err="1">
+                <a:solidFill>
+                  <a:srgbClr val="595959"/>
+                </a:solidFill>
+                <a:latin typeface="맑은 고딕"/>
+              </a:rPr>
+              <a:t>출고</a:t>
+            </a:r>
+            <a:r>
+              <a:rPr sz="1000" b="0" dirty="0">
+                <a:solidFill>
+                  <a:srgbClr val="595959"/>
+                </a:solidFill>
+                <a:latin typeface="맑은 고딕"/>
+              </a:rPr>
+              <a:t>, </a:t>
+            </a:r>
+            <a:r>
+              <a:rPr sz="1000" b="0" dirty="0" err="1">
+                <a:solidFill>
+                  <a:srgbClr val="595959"/>
+                </a:solidFill>
+                <a:latin typeface="맑은 고딕"/>
+              </a:rPr>
+              <a:t>상위</a:t>
+            </a:r>
+            <a:r>
+              <a:rPr sz="1000" b="0" dirty="0">
+                <a:solidFill>
+                  <a:srgbClr val="595959"/>
+                </a:solidFill>
+                <a:latin typeface="맑은 고딕"/>
+              </a:rPr>
+              <a:t> </a:t>
+            </a:r>
+            <a:r>
+              <a:rPr sz="1000" b="0" dirty="0" err="1">
+                <a:solidFill>
+                  <a:srgbClr val="595959"/>
+                </a:solidFill>
+                <a:latin typeface="맑은 고딕"/>
+              </a:rPr>
+              <a:t>보고</a:t>
+            </a:r>
+            <a:r>
+              <a:rPr sz="1000" b="0" dirty="0">
+                <a:solidFill>
+                  <a:srgbClr val="595959"/>
+                </a:solidFill>
+                <a:latin typeface="맑은 고딕"/>
+              </a:rPr>
+              <a:t> </a:t>
+            </a:r>
+            <a:r>
+              <a:rPr sz="1000" b="0" dirty="0" err="1">
+                <a:solidFill>
+                  <a:srgbClr val="595959"/>
+                </a:solidFill>
+                <a:latin typeface="맑은 고딕"/>
+              </a:rPr>
+              <a:t>없음</a:t>
+            </a:r>
+            <a:r>
+              <a:rPr sz="1000" b="0" dirty="0">
+                <a:solidFill>
+                  <a:srgbClr val="595959"/>
+                </a:solidFill>
+                <a:latin typeface="맑은 고딕"/>
+              </a:rPr>
+              <a:t>).</a:t>
+            </a:r>
+          </a:p>
+          <a:p>
+            <a:pPr algn="l"/>
+            <a:r>
+              <a:rPr sz="1000" b="0" dirty="0">
+                <a:solidFill>
+                  <a:srgbClr val="595959"/>
+                </a:solidFill>
+                <a:latin typeface="맑은 고딕"/>
+              </a:rPr>
+              <a:t>· </a:t>
+            </a:r>
+            <a:r>
+              <a:rPr sz="1000" b="0" dirty="0" err="1">
+                <a:solidFill>
+                  <a:srgbClr val="595959"/>
+                </a:solidFill>
+                <a:latin typeface="맑은 고딕"/>
+              </a:rPr>
+              <a:t>칸에</a:t>
+            </a:r>
+            <a:r>
+              <a:rPr sz="1000" b="0" dirty="0">
+                <a:solidFill>
+                  <a:srgbClr val="595959"/>
+                </a:solidFill>
+                <a:latin typeface="맑은 고딕"/>
+              </a:rPr>
+              <a:t> 다 </a:t>
+            </a:r>
+            <a:r>
+              <a:rPr sz="1000" b="0" dirty="0" err="1">
+                <a:solidFill>
+                  <a:srgbClr val="595959"/>
+                </a:solidFill>
+                <a:latin typeface="맑은 고딕"/>
+              </a:rPr>
+              <a:t>들어가지</a:t>
+            </a:r>
+            <a:r>
+              <a:rPr sz="1000" b="0" dirty="0">
+                <a:solidFill>
+                  <a:srgbClr val="595959"/>
+                </a:solidFill>
+                <a:latin typeface="맑은 고딕"/>
+              </a:rPr>
+              <a:t> </a:t>
+            </a:r>
+            <a:r>
+              <a:rPr sz="1000" b="0" dirty="0" err="1">
+                <a:solidFill>
+                  <a:srgbClr val="595959"/>
+                </a:solidFill>
+                <a:latin typeface="맑은 고딕"/>
+              </a:rPr>
+              <a:t>않는</a:t>
+            </a:r>
+            <a:r>
+              <a:rPr sz="1000" b="0" dirty="0">
+                <a:solidFill>
+                  <a:srgbClr val="595959"/>
+                </a:solidFill>
+                <a:latin typeface="맑은 고딕"/>
+              </a:rPr>
+              <a:t> 긴 </a:t>
+            </a:r>
+            <a:r>
+              <a:rPr sz="1000" b="0" dirty="0" err="1">
+                <a:solidFill>
+                  <a:srgbClr val="595959"/>
+                </a:solidFill>
+                <a:latin typeface="맑은 고딕"/>
+              </a:rPr>
+              <a:t>글자는</a:t>
+            </a:r>
+            <a:r>
+              <a:rPr sz="1000" b="0" dirty="0">
+                <a:solidFill>
+                  <a:srgbClr val="595959"/>
+                </a:solidFill>
+                <a:latin typeface="맑은 고딕"/>
+              </a:rPr>
+              <a:t> 그 </a:t>
+            </a:r>
+            <a:r>
+              <a:rPr sz="1000" b="0" dirty="0" err="1">
+                <a:solidFill>
+                  <a:srgbClr val="595959"/>
+                </a:solidFill>
+                <a:latin typeface="맑은 고딕"/>
+              </a:rPr>
+              <a:t>칸에서</a:t>
+            </a:r>
+            <a:r>
+              <a:rPr sz="1000" b="0" dirty="0">
+                <a:solidFill>
+                  <a:srgbClr val="595959"/>
+                </a:solidFill>
+                <a:latin typeface="맑은 고딕"/>
+              </a:rPr>
+              <a:t> 한 </a:t>
+            </a:r>
+            <a:r>
+              <a:rPr sz="1000" b="0" dirty="0" err="1">
+                <a:solidFill>
+                  <a:srgbClr val="595959"/>
+                </a:solidFill>
+                <a:latin typeface="맑은 고딕"/>
+              </a:rPr>
+              <a:t>글자씩</a:t>
+            </a:r>
+            <a:r>
+              <a:rPr sz="1000" b="0" dirty="0">
+                <a:solidFill>
+                  <a:srgbClr val="595959"/>
+                </a:solidFill>
+                <a:latin typeface="맑은 고딕"/>
+              </a:rPr>
+              <a:t> </a:t>
+            </a:r>
+            <a:r>
+              <a:rPr sz="1000" b="0" dirty="0" err="1">
+                <a:solidFill>
+                  <a:srgbClr val="595959"/>
+                </a:solidFill>
+                <a:latin typeface="맑은 고딕"/>
+              </a:rPr>
+              <a:t>흘러간다</a:t>
+            </a:r>
+            <a:r>
+              <a:rPr sz="1000" b="0" dirty="0">
+                <a:solidFill>
+                  <a:srgbClr val="595959"/>
+                </a:solidFill>
+                <a:latin typeface="맑은 고딕"/>
+              </a:rPr>
+              <a:t>(</a:t>
+            </a:r>
+            <a:r>
+              <a:rPr sz="1000" b="0" dirty="0" err="1">
+                <a:solidFill>
+                  <a:srgbClr val="595959"/>
+                </a:solidFill>
+                <a:latin typeface="맑은 고딕"/>
+              </a:rPr>
+              <a:t>입력</a:t>
+            </a:r>
+            <a:r>
+              <a:rPr sz="1000" b="0" dirty="0">
+                <a:solidFill>
+                  <a:srgbClr val="595959"/>
+                </a:solidFill>
+                <a:latin typeface="맑은 고딕"/>
+              </a:rPr>
+              <a:t> </a:t>
+            </a:r>
+            <a:r>
+              <a:rPr sz="1000" b="0" dirty="0" err="1">
+                <a:solidFill>
+                  <a:srgbClr val="595959"/>
+                </a:solidFill>
+                <a:latin typeface="맑은 고딕"/>
+              </a:rPr>
+              <a:t>중인</a:t>
+            </a:r>
+            <a:r>
+              <a:rPr sz="1000" b="0" dirty="0">
+                <a:solidFill>
+                  <a:srgbClr val="595959"/>
+                </a:solidFill>
+                <a:latin typeface="맑은 고딕"/>
+              </a:rPr>
+              <a:t> </a:t>
+            </a:r>
+            <a:r>
+              <a:rPr sz="1000" b="0" dirty="0" err="1">
+                <a:solidFill>
+                  <a:srgbClr val="595959"/>
+                </a:solidFill>
+                <a:latin typeface="맑은 고딕"/>
+              </a:rPr>
+              <a:t>칸은</a:t>
+            </a:r>
+            <a:r>
+              <a:rPr sz="1000" b="0" dirty="0">
+                <a:solidFill>
+                  <a:srgbClr val="595959"/>
+                </a:solidFill>
+                <a:latin typeface="맑은 고딕"/>
+              </a:rPr>
+              <a:t> </a:t>
+            </a:r>
+            <a:r>
+              <a:rPr sz="1000" b="0" dirty="0" err="1">
+                <a:solidFill>
+                  <a:srgbClr val="595959"/>
+                </a:solidFill>
+                <a:latin typeface="맑은 고딕"/>
+              </a:rPr>
+              <a:t>제외</a:t>
+            </a:r>
+            <a:r>
+              <a:rPr sz="1000" b="0" dirty="0">
+                <a:solidFill>
+                  <a:srgbClr val="595959"/>
+                </a:solidFill>
+                <a:latin typeface="맑은 고딕"/>
+              </a:rPr>
+              <a:t>). </a:t>
             </a:r>
           </a:p>
         </p:txBody>
@@ -8663,7 +10908,7 @@
                 </a:solidFill>
                 <a:latin typeface="맑은 고딕"/>
               </a:rPr>
-              <a:t>LG 화학 1동 ECS  |  화면설계서  |  Ver 2.0</a:t>
+              <a:t>LG 화학 1동 ECS  |  화면설계서  |  Ver 1.1</a:t>
             </a:r>
           </a:p>
         </p:txBody>
@@ -8698,11 +10943,35 @@
                 </a:solidFill>
                 <a:latin typeface="맑은 고딕"/>
               </a:rPr>
-              <a:t>23</a:t>
+              <a:t>25</a:t>
             </a:r>
           </a:p>
         </p:txBody>
       </p:sp>
+      <p:pic>
+        <p:nvPicPr>
+          <p:cNvPr id="8" name="Picture 7" descr="cv_0_v20.png"/>
+          <p:cNvPicPr>
+            <a:picLocks noChangeAspect="1"/>
+          </p:cNvPicPr>
+          <p:nvPr/>
+        </p:nvPicPr>
+        <p:blipFill>
+          <a:blip r:embed="rId2"/>
+          <a:stretch>
+            <a:fillRect/>
+          </a:stretch>
+        </p:blipFill>
+        <p:spPr>
+          <a:xfrm>
+            <a:off x="2196917" y="1280160"/>
+            <a:ext cx="4384405" cy="4747878"/>
+          </a:xfrm>
+          <a:prstGeom prst="rect">
+            <a:avLst/>
+          </a:prstGeom>
+        </p:spPr>
+      </p:pic>
     </p:spTree>
   </p:cSld>
   <p:clrMapOvr>
@@ -8758,7 +11027,7 @@
                 </a:solidFill>
                 <a:latin typeface="맑은 고딕"/>
               </a:rPr>
-              <a:t>LOG - 알람 (경고창)</a:t>
+              <a:t>설비 대화상자 - SC 상태</a:t>
             </a:r>
           </a:p>
         </p:txBody>
@@ -8818,7 +11087,7 @@
         <p:spPr>
           <a:xfrm>
             <a:off x="8503920" y="1188720"/>
-            <a:ext cx="3291840" cy="5029200"/>
+            <a:ext cx="3291840" cy="2785378"/>
           </a:xfrm>
           <a:prstGeom prst="rect">
             <a:avLst/>
@@ -8833,30 +11102,99 @@
           <a:p>
             <a:pPr algn="l"/>
             <a:r>
-              <a:rPr sz="1300" b="1">
+              <a:rPr sz="1300" b="1" dirty="0">
                 <a:solidFill>
                   <a:srgbClr val="1E2761"/>
                 </a:solidFill>
                 <a:latin typeface="맑은 고딕"/>
               </a:rPr>
-              <a:t>■ 메뉴 Path</a:t>
-            </a:r>
-          </a:p>
-          <a:p>
-            <a:pPr algn="l"/>
-            <a:r>
-              <a:rPr sz="1100" b="0">
-                <a:solidFill>
-                  <a:srgbClr val="595959"/>
-                </a:solidFill>
-                <a:latin typeface="맑은 고딕"/>
-              </a:rPr>
-              <a:t>LOG ▷ 알람 ▷ 알람  (자동 표시)</a:t>
-            </a:r>
-          </a:p>
-          <a:p>
-            <a:pPr algn="l"/>
-            <a:endParaRPr sz="1100" b="0">
+              <a:t>■ </a:t>
+            </a:r>
+            <a:r>
+              <a:rPr sz="1300" b="1" dirty="0" err="1">
+                <a:solidFill>
+                  <a:srgbClr val="1E2761"/>
+                </a:solidFill>
+                <a:latin typeface="맑은 고딕"/>
+              </a:rPr>
+              <a:t>메뉴</a:t>
+            </a:r>
+            <a:r>
+              <a:rPr sz="1300" b="1" dirty="0">
+                <a:solidFill>
+                  <a:srgbClr val="1E2761"/>
+                </a:solidFill>
+                <a:latin typeface="맑은 고딕"/>
+              </a:rPr>
+              <a:t> Path</a:t>
+            </a:r>
+          </a:p>
+          <a:p>
+            <a:pPr algn="l"/>
+            <a:r>
+              <a:rPr sz="1100" b="0" dirty="0" err="1">
+                <a:solidFill>
+                  <a:srgbClr val="595959"/>
+                </a:solidFill>
+                <a:latin typeface="맑은 고딕"/>
+              </a:rPr>
+              <a:t>메인</a:t>
+            </a:r>
+            <a:r>
+              <a:rPr sz="1100" b="0" dirty="0">
+                <a:solidFill>
+                  <a:srgbClr val="595959"/>
+                </a:solidFill>
+                <a:latin typeface="맑은 고딕"/>
+              </a:rPr>
+              <a:t> </a:t>
+            </a:r>
+            <a:r>
+              <a:rPr sz="1100" b="0" dirty="0" err="1">
+                <a:solidFill>
+                  <a:srgbClr val="595959"/>
+                </a:solidFill>
+                <a:latin typeface="맑은 고딕"/>
+              </a:rPr>
+              <a:t>화면에서</a:t>
+            </a:r>
+            <a:r>
+              <a:rPr sz="1100" b="0" dirty="0">
+                <a:solidFill>
+                  <a:srgbClr val="595959"/>
+                </a:solidFill>
+                <a:latin typeface="맑은 고딕"/>
+              </a:rPr>
+              <a:t> </a:t>
+            </a:r>
+            <a:r>
+              <a:rPr sz="1100" b="0" dirty="0" err="1">
+                <a:solidFill>
+                  <a:srgbClr val="595959"/>
+                </a:solidFill>
+                <a:latin typeface="맑은 고딕"/>
+              </a:rPr>
+              <a:t>크레인</a:t>
+            </a:r>
+            <a:r>
+              <a:rPr sz="1100" b="0" dirty="0">
+                <a:solidFill>
+                  <a:srgbClr val="595959"/>
+                </a:solidFill>
+                <a:latin typeface="맑은 고딕"/>
+              </a:rPr>
+              <a:t> </a:t>
+            </a:r>
+            <a:r>
+              <a:rPr sz="1100" b="0" dirty="0" err="1">
+                <a:solidFill>
+                  <a:srgbClr val="595959"/>
+                </a:solidFill>
+                <a:latin typeface="맑은 고딕"/>
+              </a:rPr>
+              <a:t>클릭</a:t>
+            </a:r>
+            <a:endParaRPr sz="1100" b="0" dirty="0">
               <a:solidFill>
                 <a:srgbClr val="595959"/>
               </a:solidFill>
@@ -8865,31 +11203,7 @@
           </a:p>
           <a:p>
             <a:pPr algn="l"/>
-            <a:r>
-              <a:rPr sz="1300" b="1">
-                <a:solidFill>
-                  <a:srgbClr val="1E2761"/>
-                </a:solidFill>
-                <a:latin typeface="맑은 고딕"/>
-              </a:rPr>
-              <a:t>■ 프로그램 개요</a:t>
-            </a:r>
-          </a:p>
-          <a:p>
-            <a:pPr algn="l"/>
-            <a:r>
-              <a:rPr sz="1100" b="0">
-                <a:solidFill>
-                  <a:srgbClr val="595959"/>
-                </a:solidFill>
-                <a:latin typeface="맑은 고딕"/>
-              </a:rPr>
-              <a:t>체류 작업과 알람을 모아 보여 주는 경고창. 10초마다 조회해 해당 건이 있으면 화면 오른쪽 아래에 스스로 뜬다.</a:t>
-            </a:r>
-          </a:p>
-          <a:p>
-            <a:pPr algn="l"/>
-            <a:endParaRPr sz="1100" b="0">
+            <a:endParaRPr sz="1100" b="0" dirty="0">
               <a:solidFill>
                 <a:srgbClr val="595959"/>
               </a:solidFill>
@@ -8899,49 +11213,769 @@
           <a:p>
             <a:pPr algn="l"/>
             <a:r>
-              <a:rPr sz="1300" b="1">
+              <a:rPr sz="1300" b="1" dirty="0">
                 <a:solidFill>
                   <a:srgbClr val="1E2761"/>
                 </a:solidFill>
                 <a:latin typeface="맑은 고딕"/>
               </a:rPr>
-              <a:t>■ 특기사항</a:t>
-            </a:r>
-          </a:p>
-          <a:p>
-            <a:pPr algn="l"/>
-            <a:r>
-              <a:rPr sz="1000" b="0">
-                <a:solidFill>
-                  <a:srgbClr val="595959"/>
-                </a:solidFill>
-                <a:latin typeface="맑은 고딕"/>
-              </a:rPr>
-              <a:t>· 체류 기준 : Ecs.ini [USER] JOB_STALL_WARN_SEC=300 (최소 10초, 저장 즉시 반영).</a:t>
-            </a:r>
-          </a:p>
-          <a:p>
-            <a:pPr algn="l"/>
-            <a:r>
-              <a:rPr sz="1000" b="0">
-                <a:solidFill>
-                  <a:srgbClr val="595959"/>
-                </a:solidFill>
-                <a:latin typeface="맑은 고딕"/>
-              </a:rPr>
-              <a:t>· 목록 열 : 시각 / 작업번호 / 구분 / 체류(초) / 내용. [STOP] 은 음소거 후 숨긴다.</a:t>
-            </a:r>
-          </a:p>
-          <a:p>
-            <a:pPr algn="l"/>
-            <a:r>
-              <a:rPr sz="1000" b="0">
-                <a:solidFill>
-                  <a:srgbClr val="595959"/>
-                </a:solidFill>
-                <a:latin typeface="맑은 고딕"/>
-              </a:rPr>
-              <a:t>· 체류는 경고만 한다 - 시간 경과로 작업을 자동 완료하지 않는다(설비 신호와 실물을 확인 후 처리).</a:t>
+              <a:t>■ </a:t>
+            </a:r>
+            <a:r>
+              <a:rPr sz="1300" b="1" dirty="0" err="1">
+                <a:solidFill>
+                  <a:srgbClr val="1E2761"/>
+                </a:solidFill>
+                <a:latin typeface="맑은 고딕"/>
+              </a:rPr>
+              <a:t>프로그램</a:t>
+            </a:r>
+            <a:r>
+              <a:rPr sz="1300" b="1" dirty="0">
+                <a:solidFill>
+                  <a:srgbClr val="1E2761"/>
+                </a:solidFill>
+                <a:latin typeface="맑은 고딕"/>
+              </a:rPr>
+              <a:t> </a:t>
+            </a:r>
+            <a:r>
+              <a:rPr sz="1300" b="1" dirty="0" err="1">
+                <a:solidFill>
+                  <a:srgbClr val="1E2761"/>
+                </a:solidFill>
+                <a:latin typeface="맑은 고딕"/>
+              </a:rPr>
+              <a:t>개요</a:t>
+            </a:r>
+            <a:endParaRPr sz="1300" b="1" dirty="0">
+              <a:solidFill>
+                <a:srgbClr val="1E2761"/>
+              </a:solidFill>
+              <a:latin typeface="맑은 고딕"/>
+            </a:endParaRPr>
+          </a:p>
+          <a:p>
+            <a:pPr algn="l"/>
+            <a:r>
+              <a:rPr sz="1100" b="0" dirty="0" err="1">
+                <a:solidFill>
+                  <a:srgbClr val="595959"/>
+                </a:solidFill>
+                <a:latin typeface="맑은 고딕"/>
+              </a:rPr>
+              <a:t>크레인</a:t>
+            </a:r>
+            <a:r>
+              <a:rPr sz="1100" b="0" dirty="0">
+                <a:solidFill>
+                  <a:srgbClr val="595959"/>
+                </a:solidFill>
+                <a:latin typeface="맑은 고딕"/>
+              </a:rPr>
+              <a:t> </a:t>
+            </a:r>
+            <a:r>
+              <a:rPr sz="1100" b="0" dirty="0" err="1">
+                <a:solidFill>
+                  <a:srgbClr val="595959"/>
+                </a:solidFill>
+                <a:latin typeface="맑은 고딕"/>
+              </a:rPr>
+              <a:t>상태·차상</a:t>
+            </a:r>
+            <a:r>
+              <a:rPr sz="1100" b="0" dirty="0">
+                <a:solidFill>
+                  <a:srgbClr val="595959"/>
+                </a:solidFill>
+                <a:latin typeface="맑은 고딕"/>
+              </a:rPr>
+              <a:t> </a:t>
+            </a:r>
+            <a:r>
+              <a:rPr sz="1100" b="0" dirty="0" err="1">
+                <a:solidFill>
+                  <a:srgbClr val="595959"/>
+                </a:solidFill>
+                <a:latin typeface="맑은 고딕"/>
+              </a:rPr>
+              <a:t>화물·좌표·에러와</a:t>
+            </a:r>
+            <a:r>
+              <a:rPr sz="1100" b="0" dirty="0">
+                <a:solidFill>
+                  <a:srgbClr val="595959"/>
+                </a:solidFill>
+                <a:latin typeface="맑은 고딕"/>
+              </a:rPr>
+              <a:t> </a:t>
+            </a:r>
+            <a:r>
+              <a:rPr sz="1100" b="0" dirty="0" err="1">
+                <a:solidFill>
+                  <a:srgbClr val="595959"/>
+                </a:solidFill>
+                <a:latin typeface="맑은 고딕"/>
+              </a:rPr>
+              <a:t>작업</a:t>
+            </a:r>
+            <a:r>
+              <a:rPr sz="1100" b="0" dirty="0">
+                <a:solidFill>
+                  <a:srgbClr val="595959"/>
+                </a:solidFill>
+                <a:latin typeface="맑은 고딕"/>
+              </a:rPr>
+              <a:t> </a:t>
+            </a:r>
+            <a:r>
+              <a:rPr sz="1100" b="0" dirty="0" err="1">
+                <a:solidFill>
+                  <a:srgbClr val="595959"/>
+                </a:solidFill>
+                <a:latin typeface="맑은 고딕"/>
+              </a:rPr>
+              <a:t>상태를</a:t>
+            </a:r>
+            <a:r>
+              <a:rPr sz="1100" b="0" dirty="0">
+                <a:solidFill>
+                  <a:srgbClr val="595959"/>
+                </a:solidFill>
+                <a:latin typeface="맑은 고딕"/>
+              </a:rPr>
+              <a:t> </a:t>
+            </a:r>
+            <a:r>
+              <a:rPr sz="1100" b="0" dirty="0" err="1">
+                <a:solidFill>
+                  <a:srgbClr val="595959"/>
+                </a:solidFill>
+                <a:latin typeface="맑은 고딕"/>
+              </a:rPr>
+              <a:t>본다</a:t>
+            </a:r>
+            <a:r>
+              <a:rPr sz="1100" b="0" dirty="0">
+                <a:solidFill>
+                  <a:srgbClr val="595959"/>
+                </a:solidFill>
+                <a:latin typeface="맑은 고딕"/>
+              </a:rPr>
+              <a:t>. </a:t>
+            </a:r>
+            <a:r>
+              <a:rPr sz="1100" b="0" dirty="0" err="1">
+                <a:solidFill>
+                  <a:srgbClr val="595959"/>
+                </a:solidFill>
+                <a:latin typeface="맑은 고딕"/>
+              </a:rPr>
+              <a:t>명령</a:t>
+            </a:r>
+            <a:r>
+              <a:rPr sz="1100" b="0" dirty="0">
+                <a:solidFill>
+                  <a:srgbClr val="595959"/>
+                </a:solidFill>
+                <a:latin typeface="맑은 고딕"/>
+              </a:rPr>
+              <a:t> : </a:t>
+            </a:r>
+            <a:r>
+              <a:rPr sz="1100" b="0" dirty="0" err="1">
+                <a:solidFill>
+                  <a:srgbClr val="595959"/>
+                </a:solidFill>
+                <a:latin typeface="맑은 고딕"/>
+              </a:rPr>
+              <a:t>지시</a:t>
+            </a:r>
+            <a:r>
+              <a:rPr sz="1100" b="0" dirty="0">
+                <a:solidFill>
+                  <a:srgbClr val="595959"/>
+                </a:solidFill>
+                <a:latin typeface="맑은 고딕"/>
+              </a:rPr>
+              <a:t> </a:t>
+            </a:r>
+            <a:r>
+              <a:rPr sz="1100" b="0" dirty="0" err="1">
+                <a:solidFill>
+                  <a:srgbClr val="595959"/>
+                </a:solidFill>
+                <a:latin typeface="맑은 고딕"/>
+              </a:rPr>
+              <a:t>재전송</a:t>
+            </a:r>
+            <a:r>
+              <a:rPr sz="1100" b="0" dirty="0">
+                <a:solidFill>
+                  <a:srgbClr val="595959"/>
+                </a:solidFill>
+                <a:latin typeface="맑은 고딕"/>
+              </a:rPr>
+              <a:t> / </a:t>
+            </a:r>
+            <a:r>
+              <a:rPr sz="1100" b="0" dirty="0" err="1">
+                <a:solidFill>
+                  <a:srgbClr val="595959"/>
+                </a:solidFill>
+                <a:latin typeface="맑은 고딕"/>
+              </a:rPr>
+              <a:t>강제완료</a:t>
+            </a:r>
+            <a:r>
+              <a:rPr sz="1100" b="0" dirty="0">
+                <a:solidFill>
+                  <a:srgbClr val="595959"/>
+                </a:solidFill>
+                <a:latin typeface="맑은 고딕"/>
+              </a:rPr>
+              <a:t> / </a:t>
+            </a:r>
+            <a:r>
+              <a:rPr sz="1100" b="0" dirty="0" err="1">
+                <a:solidFill>
+                  <a:srgbClr val="595959"/>
+                </a:solidFill>
+                <a:latin typeface="맑은 고딕"/>
+              </a:rPr>
+              <a:t>수동지시</a:t>
+            </a:r>
+            <a:r>
+              <a:rPr sz="1100" b="0" dirty="0">
+                <a:solidFill>
+                  <a:srgbClr val="595959"/>
+                </a:solidFill>
+                <a:latin typeface="맑은 고딕"/>
+              </a:rPr>
+              <a:t>, </a:t>
+            </a:r>
+            <a:r>
+              <a:rPr sz="1100" b="0" dirty="0" err="1">
+                <a:solidFill>
+                  <a:srgbClr val="595959"/>
+                </a:solidFill>
+                <a:latin typeface="맑은 고딕"/>
+              </a:rPr>
+              <a:t>입출고상태</a:t>
+            </a:r>
+            <a:r>
+              <a:rPr sz="1100" b="0" dirty="0">
+                <a:solidFill>
+                  <a:srgbClr val="595959"/>
+                </a:solidFill>
+                <a:latin typeface="맑은 고딕"/>
+              </a:rPr>
+              <a:t> : </a:t>
+            </a:r>
+            <a:r>
+              <a:rPr sz="1100" b="0" dirty="0" err="1">
+                <a:solidFill>
+                  <a:srgbClr val="595959"/>
+                </a:solidFill>
+                <a:latin typeface="맑은 고딕"/>
+              </a:rPr>
+              <a:t>입고</a:t>
+            </a:r>
+            <a:r>
+              <a:rPr sz="1100" b="0" dirty="0">
+                <a:solidFill>
+                  <a:srgbClr val="595959"/>
+                </a:solidFill>
+                <a:latin typeface="맑은 고딕"/>
+              </a:rPr>
+              <a:t> </a:t>
+            </a:r>
+            <a:r>
+              <a:rPr sz="1100" b="0" dirty="0" err="1">
+                <a:solidFill>
+                  <a:srgbClr val="595959"/>
+                </a:solidFill>
+                <a:latin typeface="맑은 고딕"/>
+              </a:rPr>
+              <a:t>정지</a:t>
+            </a:r>
+            <a:r>
+              <a:rPr sz="1100" b="0" dirty="0">
+                <a:solidFill>
+                  <a:srgbClr val="595959"/>
+                </a:solidFill>
+                <a:latin typeface="맑은 고딕"/>
+              </a:rPr>
+              <a:t> / </a:t>
+            </a:r>
+            <a:r>
+              <a:rPr sz="1100" b="0" dirty="0" err="1">
+                <a:solidFill>
+                  <a:srgbClr val="595959"/>
+                </a:solidFill>
+                <a:latin typeface="맑은 고딕"/>
+              </a:rPr>
+              <a:t>출고</a:t>
+            </a:r>
+            <a:r>
+              <a:rPr sz="1100" b="0" dirty="0">
+                <a:solidFill>
+                  <a:srgbClr val="595959"/>
+                </a:solidFill>
+                <a:latin typeface="맑은 고딕"/>
+              </a:rPr>
+              <a:t> </a:t>
+            </a:r>
+            <a:r>
+              <a:rPr sz="1100" b="0" dirty="0" err="1">
+                <a:solidFill>
+                  <a:srgbClr val="595959"/>
+                </a:solidFill>
+                <a:latin typeface="맑은 고딕"/>
+              </a:rPr>
+              <a:t>정지</a:t>
+            </a:r>
+            <a:r>
+              <a:rPr sz="1100" b="0" dirty="0">
+                <a:solidFill>
+                  <a:srgbClr val="595959"/>
+                </a:solidFill>
+                <a:latin typeface="맑은 고딕"/>
+              </a:rPr>
+              <a:t> / </a:t>
+            </a:r>
+            <a:r>
+              <a:rPr sz="1100" b="0" dirty="0" err="1">
+                <a:solidFill>
+                  <a:srgbClr val="595959"/>
+                </a:solidFill>
+                <a:latin typeface="맑은 고딕"/>
+              </a:rPr>
+              <a:t>작업금지</a:t>
+            </a:r>
+            <a:r>
+              <a:rPr sz="1100" b="0" dirty="0">
+                <a:solidFill>
+                  <a:srgbClr val="595959"/>
+                </a:solidFill>
+                <a:latin typeface="맑은 고딕"/>
+              </a:rPr>
+              <a:t>.</a:t>
+            </a:r>
+          </a:p>
+          <a:p>
+            <a:pPr algn="l"/>
+            <a:endParaRPr sz="1100" b="0" dirty="0">
+              <a:solidFill>
+                <a:srgbClr val="595959"/>
+              </a:solidFill>
+              <a:latin typeface="맑은 고딕"/>
+            </a:endParaRPr>
+          </a:p>
+          <a:p>
+            <a:pPr algn="l"/>
+            <a:r>
+              <a:rPr sz="1300" b="1" dirty="0">
+                <a:solidFill>
+                  <a:srgbClr val="1E2761"/>
+                </a:solidFill>
+                <a:latin typeface="맑은 고딕"/>
+              </a:rPr>
+              <a:t>■ </a:t>
+            </a:r>
+            <a:r>
+              <a:rPr sz="1300" b="1" dirty="0" err="1">
+                <a:solidFill>
+                  <a:srgbClr val="1E2761"/>
+                </a:solidFill>
+                <a:latin typeface="맑은 고딕"/>
+              </a:rPr>
+              <a:t>특기사항</a:t>
+            </a:r>
+            <a:endParaRPr sz="1300" b="1" dirty="0">
+              <a:solidFill>
+                <a:srgbClr val="1E2761"/>
+              </a:solidFill>
+              <a:latin typeface="맑은 고딕"/>
+            </a:endParaRPr>
+          </a:p>
+          <a:p>
+            <a:pPr algn="l"/>
+            <a:r>
+              <a:rPr sz="1000" b="0" dirty="0">
+                <a:solidFill>
+                  <a:srgbClr val="595959"/>
+                </a:solidFill>
+                <a:latin typeface="맑은 고딕"/>
+              </a:rPr>
+              <a:t>· </a:t>
+            </a:r>
+            <a:r>
+              <a:rPr sz="1000" b="0" dirty="0" err="1">
+                <a:solidFill>
+                  <a:srgbClr val="595959"/>
+                </a:solidFill>
+                <a:latin typeface="맑은 고딕"/>
+              </a:rPr>
+              <a:t>제목줄에</a:t>
+            </a:r>
+            <a:r>
+              <a:rPr sz="1000" b="0" dirty="0">
+                <a:solidFill>
+                  <a:srgbClr val="595959"/>
+                </a:solidFill>
+                <a:latin typeface="맑은 고딕"/>
+              </a:rPr>
+              <a:t> </a:t>
+            </a:r>
+            <a:r>
+              <a:rPr sz="1000" b="0" dirty="0" err="1">
+                <a:solidFill>
+                  <a:srgbClr val="595959"/>
+                </a:solidFill>
+                <a:latin typeface="맑은 고딕"/>
+              </a:rPr>
+              <a:t>호기와</a:t>
+            </a:r>
+            <a:r>
+              <a:rPr sz="1000" b="0" dirty="0">
+                <a:solidFill>
+                  <a:srgbClr val="595959"/>
+                </a:solidFill>
+                <a:latin typeface="맑은 고딕"/>
+              </a:rPr>
+              <a:t> </a:t>
+            </a:r>
+            <a:r>
+              <a:rPr sz="1000" b="0" dirty="0" err="1">
+                <a:solidFill>
+                  <a:srgbClr val="595959"/>
+                </a:solidFill>
+                <a:latin typeface="맑은 고딕"/>
+              </a:rPr>
+              <a:t>담당</a:t>
+            </a:r>
+            <a:r>
+              <a:rPr sz="1000" b="0" dirty="0">
+                <a:solidFill>
+                  <a:srgbClr val="595959"/>
+                </a:solidFill>
+                <a:latin typeface="맑은 고딕"/>
+              </a:rPr>
+              <a:t> Bank 를 </a:t>
+            </a:r>
+            <a:r>
+              <a:rPr sz="1000" b="0" dirty="0" err="1">
+                <a:solidFill>
+                  <a:srgbClr val="595959"/>
+                </a:solidFill>
+                <a:latin typeface="맑은 고딕"/>
+              </a:rPr>
+              <a:t>표시한다</a:t>
+            </a:r>
+            <a:r>
+              <a:rPr sz="1000" b="0" dirty="0">
+                <a:solidFill>
+                  <a:srgbClr val="595959"/>
+                </a:solidFill>
+                <a:latin typeface="맑은 고딕"/>
+              </a:rPr>
+              <a:t> (예 S/C#2 (Bank 03,04)).</a:t>
+            </a:r>
+          </a:p>
+          <a:p>
+            <a:pPr algn="l"/>
+            <a:r>
+              <a:rPr sz="1000" b="0" dirty="0">
+                <a:solidFill>
+                  <a:srgbClr val="595959"/>
+                </a:solidFill>
+                <a:latin typeface="맑은 고딕"/>
+              </a:rPr>
+              <a:t>· </a:t>
+            </a:r>
+            <a:r>
+              <a:rPr sz="1000" b="0" dirty="0" err="1">
+                <a:solidFill>
+                  <a:srgbClr val="595959"/>
+                </a:solidFill>
+                <a:latin typeface="맑은 고딕"/>
+              </a:rPr>
+              <a:t>에러</a:t>
+            </a:r>
+            <a:r>
+              <a:rPr sz="1000" b="0" dirty="0">
+                <a:solidFill>
+                  <a:srgbClr val="595959"/>
+                </a:solidFill>
+                <a:latin typeface="맑은 고딕"/>
+              </a:rPr>
+              <a:t> </a:t>
+            </a:r>
+            <a:r>
+              <a:rPr sz="1000" b="0" dirty="0" err="1">
+                <a:solidFill>
+                  <a:srgbClr val="595959"/>
+                </a:solidFill>
+                <a:latin typeface="맑은 고딕"/>
+              </a:rPr>
+              <a:t>칸은</a:t>
+            </a:r>
+            <a:r>
+              <a:rPr sz="1000" b="0" dirty="0">
+                <a:solidFill>
+                  <a:srgbClr val="595959"/>
+                </a:solidFill>
+                <a:latin typeface="맑은 고딕"/>
+              </a:rPr>
+              <a:t> "[</a:t>
+            </a:r>
+            <a:r>
+              <a:rPr sz="1000" b="0" dirty="0" err="1">
+                <a:solidFill>
+                  <a:srgbClr val="595959"/>
+                </a:solidFill>
+                <a:latin typeface="맑은 고딕"/>
+              </a:rPr>
+              <a:t>코드</a:t>
+            </a:r>
+            <a:r>
+              <a:rPr sz="1000" b="0" dirty="0">
+                <a:solidFill>
+                  <a:srgbClr val="595959"/>
+                </a:solidFill>
+                <a:latin typeface="맑은 고딕"/>
+              </a:rPr>
+              <a:t>]</a:t>
+            </a:r>
+            <a:r>
+              <a:rPr sz="1000" b="0" dirty="0" err="1">
+                <a:solidFill>
+                  <a:srgbClr val="595959"/>
+                </a:solidFill>
+                <a:latin typeface="맑은 고딕"/>
+              </a:rPr>
+              <a:t>알람</a:t>
+            </a:r>
+            <a:r>
+              <a:rPr sz="1000" b="0" dirty="0">
+                <a:solidFill>
+                  <a:srgbClr val="595959"/>
+                </a:solidFill>
+                <a:latin typeface="맑은 고딕"/>
+              </a:rPr>
+              <a:t> </a:t>
+            </a:r>
+            <a:r>
+              <a:rPr sz="1000" b="0" dirty="0" err="1">
+                <a:solidFill>
+                  <a:srgbClr val="595959"/>
+                </a:solidFill>
+                <a:latin typeface="맑은 고딕"/>
+              </a:rPr>
+              <a:t>문구</a:t>
+            </a:r>
+            <a:r>
+              <a:rPr sz="1000" b="0" dirty="0">
+                <a:solidFill>
+                  <a:srgbClr val="595959"/>
+                </a:solidFill>
+                <a:latin typeface="맑은 고딕"/>
+              </a:rPr>
+              <a:t>" 로 </a:t>
+            </a:r>
+            <a:r>
+              <a:rPr sz="1000" b="0" dirty="0" err="1">
+                <a:solidFill>
+                  <a:srgbClr val="595959"/>
+                </a:solidFill>
+                <a:latin typeface="맑은 고딕"/>
+              </a:rPr>
+              <a:t>표시한다</a:t>
+            </a:r>
+            <a:r>
+              <a:rPr sz="1000" b="0" dirty="0">
+                <a:solidFill>
+                  <a:srgbClr val="595959"/>
+                </a:solidFill>
+                <a:latin typeface="맑은 고딕"/>
+              </a:rPr>
+              <a:t> (예 [0073]</a:t>
+            </a:r>
+            <a:r>
+              <a:rPr sz="1000" b="0" dirty="0" err="1">
+                <a:solidFill>
+                  <a:srgbClr val="595959"/>
+                </a:solidFill>
+                <a:latin typeface="맑은 고딕"/>
+              </a:rPr>
+              <a:t>좌측</a:t>
+            </a:r>
+            <a:r>
+              <a:rPr sz="1000" b="0" dirty="0">
+                <a:solidFill>
+                  <a:srgbClr val="595959"/>
+                </a:solidFill>
+                <a:latin typeface="맑은 고딕"/>
+              </a:rPr>
+              <a:t> 렉 </a:t>
+            </a:r>
+            <a:r>
+              <a:rPr sz="1000" b="0" dirty="0" err="1">
+                <a:solidFill>
+                  <a:srgbClr val="595959"/>
+                </a:solidFill>
+                <a:latin typeface="맑은 고딕"/>
+              </a:rPr>
+              <a:t>이중입고</a:t>
+            </a:r>
+            <a:r>
+              <a:rPr sz="1000" b="0" dirty="0">
+                <a:solidFill>
+                  <a:srgbClr val="595959"/>
+                </a:solidFill>
+                <a:latin typeface="맑은 고딕"/>
+              </a:rPr>
+              <a:t>). </a:t>
+            </a:r>
+            <a:r>
+              <a:rPr sz="1000" b="0" dirty="0" err="1">
+                <a:solidFill>
+                  <a:srgbClr val="595959"/>
+                </a:solidFill>
+                <a:latin typeface="맑은 고딕"/>
+              </a:rPr>
+              <a:t>코드표</a:t>
+            </a:r>
+            <a:r>
+              <a:rPr sz="1000" b="0" dirty="0">
+                <a:solidFill>
+                  <a:srgbClr val="595959"/>
+                </a:solidFill>
+                <a:latin typeface="맑은 고딕"/>
+              </a:rPr>
+              <a:t> = Ecs.ini [SC_ERR] ERR_TYP(SC_LGLS).</a:t>
+            </a:r>
+          </a:p>
+          <a:p>
+            <a:pPr algn="l"/>
+            <a:r>
+              <a:rPr sz="1000" b="0" dirty="0">
+                <a:solidFill>
+                  <a:srgbClr val="595959"/>
+                </a:solidFill>
+                <a:latin typeface="맑은 고딕"/>
+              </a:rPr>
+              <a:t>· </a:t>
+            </a:r>
+            <a:r>
+              <a:rPr sz="1000" b="0" dirty="0" err="1">
+                <a:solidFill>
+                  <a:srgbClr val="595959"/>
+                </a:solidFill>
+                <a:latin typeface="맑은 고딕"/>
+              </a:rPr>
+              <a:t>에러</a:t>
+            </a:r>
+            <a:r>
+              <a:rPr sz="1000" b="0" dirty="0">
+                <a:solidFill>
+                  <a:srgbClr val="595959"/>
+                </a:solidFill>
+                <a:latin typeface="맑은 고딕"/>
+              </a:rPr>
+              <a:t> </a:t>
+            </a:r>
+            <a:r>
+              <a:rPr sz="1000" b="0" dirty="0" err="1">
+                <a:solidFill>
+                  <a:srgbClr val="595959"/>
+                </a:solidFill>
+                <a:latin typeface="맑은 고딕"/>
+              </a:rPr>
+              <a:t>해제</a:t>
+            </a:r>
+            <a:r>
+              <a:rPr sz="1000" b="0" dirty="0">
+                <a:solidFill>
+                  <a:srgbClr val="595959"/>
+                </a:solidFill>
+                <a:latin typeface="맑은 고딕"/>
+              </a:rPr>
+              <a:t> 시 </a:t>
+            </a:r>
+            <a:r>
+              <a:rPr sz="1000" b="0" dirty="0" err="1">
+                <a:solidFill>
+                  <a:srgbClr val="595959"/>
+                </a:solidFill>
+                <a:latin typeface="맑은 고딕"/>
+              </a:rPr>
+              <a:t>이중입고</a:t>
+            </a:r>
+            <a:r>
+              <a:rPr sz="1000" b="0" dirty="0">
+                <a:solidFill>
+                  <a:srgbClr val="595959"/>
+                </a:solidFill>
+                <a:latin typeface="맑은 고딕"/>
+              </a:rPr>
+              <a:t>(73·74)·</a:t>
+            </a:r>
+            <a:r>
+              <a:rPr sz="1000" b="0" dirty="0" err="1">
+                <a:solidFill>
+                  <a:srgbClr val="595959"/>
+                </a:solidFill>
+                <a:latin typeface="맑은 고딕"/>
+              </a:rPr>
+              <a:t>공출고</a:t>
+            </a:r>
+            <a:r>
+              <a:rPr sz="1000" b="0" dirty="0">
+                <a:solidFill>
+                  <a:srgbClr val="595959"/>
+                </a:solidFill>
+                <a:latin typeface="맑은 고딕"/>
+              </a:rPr>
+              <a:t>(75) </a:t>
+            </a:r>
+            <a:r>
+              <a:rPr sz="1000" b="0" dirty="0" err="1">
+                <a:solidFill>
+                  <a:srgbClr val="595959"/>
+                </a:solidFill>
+                <a:latin typeface="맑은 고딕"/>
+              </a:rPr>
+              <a:t>확인창은</a:t>
+            </a:r>
+            <a:r>
+              <a:rPr sz="1000" b="0" dirty="0">
+                <a:solidFill>
+                  <a:srgbClr val="595959"/>
+                </a:solidFill>
+                <a:latin typeface="맑은 고딕"/>
+              </a:rPr>
+              <a:t> Ecs.ini [SC_ERR] DUAL_CODES / EMPTY_CODES </a:t>
+            </a:r>
+            <a:r>
+              <a:rPr sz="1000" b="0" dirty="0" err="1">
+                <a:solidFill>
+                  <a:srgbClr val="595959"/>
+                </a:solidFill>
+                <a:latin typeface="맑은 고딕"/>
+              </a:rPr>
+              <a:t>기준</a:t>
+            </a:r>
+            <a:r>
+              <a:rPr sz="1000" b="0" dirty="0">
+                <a:solidFill>
+                  <a:srgbClr val="595959"/>
+                </a:solidFill>
+                <a:latin typeface="맑은 고딕"/>
+              </a:rPr>
+              <a:t>.</a:t>
             </a:r>
           </a:p>
         </p:txBody>
@@ -8976,7 +12010,7 @@
                 </a:solidFill>
                 <a:latin typeface="맑은 고딕"/>
               </a:rPr>
-              <a:t>LG 화학 1동 ECS  |  화면설계서  |  Ver 2.0</a:t>
+              <a:t>LG 화학 1동 ECS  |  화면설계서  |  Ver 1.1</a:t>
             </a:r>
           </a:p>
         </p:txBody>
@@ -9011,20 +12045,14 @@
                 </a:solidFill>
                 <a:latin typeface="맑은 고딕"/>
               </a:rPr>
-              <a:t>24</a:t>
+              <a:t>26</a:t>
             </a:r>
           </a:p>
         </p:txBody>
       </p:sp>
       <p:pic>
         <p:nvPicPr>
-          <p:cNvPr id="9" name="그림 8">
-            <a:extLst>
-              <a:ext uri="{FF2B5EF4-FFF2-40B4-BE49-F238E27FC236}">
-                <a16:creationId xmlns:a16="http://schemas.microsoft.com/office/drawing/2014/main" id="{461B19C5-784F-1DE8-6BB5-FB8FA66BB42C}"/>
-              </a:ext>
-            </a:extLst>
-          </p:cNvPr>
+          <p:cNvPr id="8" name="Picture 7" descr="sc_0_v20.png"/>
           <p:cNvPicPr>
             <a:picLocks noChangeAspect="1"/>
           </p:cNvPicPr>
@@ -9038,8 +12066,8 @@
         </p:blipFill>
         <p:spPr>
           <a:xfrm>
-            <a:off x="1359747" y="1694873"/>
-            <a:ext cx="6058746" cy="3477110"/>
+            <a:off x="2405492" y="1280160"/>
+            <a:ext cx="3967255" cy="4694585"/>
           </a:xfrm>
           <a:prstGeom prst="rect">
             <a:avLst/>
@@ -9101,7 +12129,7 @@
                 </a:solidFill>
                 <a:latin typeface="맑은 고딕"/>
               </a:rPr>
-              <a:t>설비 대화상자 - CV 상태</a:t>
+              <a:t>설비 대화상자 - RTV(RGV) 상태</a:t>
             </a:r>
           </a:p>
         </p:txBody>
@@ -9161,7 +12189,7 @@
         <p:spPr>
           <a:xfrm>
             <a:off x="8503920" y="1188720"/>
-            <a:ext cx="3291840" cy="5029200"/>
+            <a:ext cx="3291840" cy="2154436"/>
           </a:xfrm>
           <a:prstGeom prst="rect">
             <a:avLst/>
@@ -9176,30 +12204,81 @@
           <a:p>
             <a:pPr algn="l"/>
             <a:r>
-              <a:rPr sz="1300" b="1">
+              <a:rPr sz="1300" b="1" dirty="0">
                 <a:solidFill>
                   <a:srgbClr val="1E2761"/>
                 </a:solidFill>
                 <a:latin typeface="맑은 고딕"/>
               </a:rPr>
-              <a:t>■ 메뉴 Path</a:t>
-            </a:r>
-          </a:p>
-          <a:p>
-            <a:pPr algn="l"/>
-            <a:r>
-              <a:rPr sz="1100" b="0">
-                <a:solidFill>
-                  <a:srgbClr val="595959"/>
-                </a:solidFill>
-                <a:latin typeface="맑은 고딕"/>
-              </a:rPr>
-              <a:t>메인 화면에서 컨베이어 트랙 클릭</a:t>
-            </a:r>
-          </a:p>
-          <a:p>
-            <a:pPr algn="l"/>
-            <a:endParaRPr sz="1100" b="0">
+              <a:t>■ </a:t>
+            </a:r>
+            <a:r>
+              <a:rPr sz="1300" b="1" dirty="0" err="1">
+                <a:solidFill>
+                  <a:srgbClr val="1E2761"/>
+                </a:solidFill>
+                <a:latin typeface="맑은 고딕"/>
+              </a:rPr>
+              <a:t>메뉴</a:t>
+            </a:r>
+            <a:r>
+              <a:rPr sz="1300" b="1" dirty="0">
+                <a:solidFill>
+                  <a:srgbClr val="1E2761"/>
+                </a:solidFill>
+                <a:latin typeface="맑은 고딕"/>
+              </a:rPr>
+              <a:t> Path</a:t>
+            </a:r>
+          </a:p>
+          <a:p>
+            <a:pPr algn="l"/>
+            <a:r>
+              <a:rPr sz="1100" b="0" dirty="0" err="1">
+                <a:solidFill>
+                  <a:srgbClr val="595959"/>
+                </a:solidFill>
+                <a:latin typeface="맑은 고딕"/>
+              </a:rPr>
+              <a:t>메인</a:t>
+            </a:r>
+            <a:r>
+              <a:rPr sz="1100" b="0" dirty="0">
+                <a:solidFill>
+                  <a:srgbClr val="595959"/>
+                </a:solidFill>
+                <a:latin typeface="맑은 고딕"/>
+              </a:rPr>
+              <a:t> </a:t>
+            </a:r>
+            <a:r>
+              <a:rPr sz="1100" b="0" dirty="0" err="1">
+                <a:solidFill>
+                  <a:srgbClr val="595959"/>
+                </a:solidFill>
+                <a:latin typeface="맑은 고딕"/>
+              </a:rPr>
+              <a:t>화면에서</a:t>
+            </a:r>
+            <a:r>
+              <a:rPr sz="1100" b="0" dirty="0">
+                <a:solidFill>
+                  <a:srgbClr val="595959"/>
+                </a:solidFill>
+                <a:latin typeface="맑은 고딕"/>
+              </a:rPr>
+              <a:t> RGV </a:t>
+            </a:r>
+            <a:r>
+              <a:rPr sz="1100" b="0" dirty="0" err="1">
+                <a:solidFill>
+                  <a:srgbClr val="595959"/>
+                </a:solidFill>
+                <a:latin typeface="맑은 고딕"/>
+              </a:rPr>
+              <a:t>클릭</a:t>
+            </a:r>
+            <a:endParaRPr sz="1100" b="0" dirty="0">
               <a:solidFill>
                 <a:srgbClr val="595959"/>
               </a:solidFill>
@@ -9208,31 +12287,7 @@
           </a:p>
           <a:p>
             <a:pPr algn="l"/>
-            <a:r>
-              <a:rPr sz="1300" b="1">
-                <a:solidFill>
-                  <a:srgbClr val="1E2761"/>
-                </a:solidFill>
-                <a:latin typeface="맑은 고딕"/>
-              </a:rPr>
-              <a:t>■ 프로그램 개요</a:t>
-            </a:r>
-          </a:p>
-          <a:p>
-            <a:pPr algn="l"/>
-            <a:r>
-              <a:rPr sz="1100" b="0">
-                <a:solidFill>
-                  <a:srgbClr val="595959"/>
-                </a:solidFill>
-                <a:latin typeface="맑은 고딕"/>
-              </a:rPr>
-              <a:t>컨베이어 트랙의 PLC 신호와 작업 정보를 보고, 작업번호 쓰기/삭제/복사/잘라내기/붙여넣기, 트랙 일시정지, H/S 배출을 수행한다.</a:t>
-            </a:r>
-          </a:p>
-          <a:p>
-            <a:pPr algn="l"/>
-            <a:endParaRPr sz="1100" b="0">
+            <a:endParaRPr sz="1100" b="0" dirty="0">
               <a:solidFill>
                 <a:srgbClr val="595959"/>
               </a:solidFill>
@@ -9242,61 +12297,586 @@
           <a:p>
             <a:pPr algn="l"/>
             <a:r>
-              <a:rPr sz="1300" b="1">
+              <a:rPr sz="1300" b="1" dirty="0">
                 <a:solidFill>
                   <a:srgbClr val="1E2761"/>
                 </a:solidFill>
                 <a:latin typeface="맑은 고딕"/>
               </a:rPr>
-              <a:t>■ 특기사항</a:t>
-            </a:r>
-          </a:p>
-          <a:p>
-            <a:pPr algn="l"/>
-            <a:r>
-              <a:rPr sz="1000" b="0">
-                <a:solidFill>
-                  <a:srgbClr val="595959"/>
-                </a:solidFill>
-                <a:latin typeface="맑은 고딕"/>
-              </a:rPr>
-              <a:t>· [쓰기]/[붙여넣기] 로 작업을 트랙에 올리면 통로 CV(트랙 103~120)는 상태 16(통로CV 구동중), 그 밖의 작업대는 15 로 기록된다.</a:t>
-            </a:r>
-          </a:p>
-          <a:p>
-            <a:pPr algn="l"/>
-            <a:r>
-              <a:rPr sz="1000" b="0">
-                <a:solidFill>
-                  <a:srgbClr val="595959"/>
-                </a:solidFill>
-                <a:latin typeface="맑은 고딕"/>
-              </a:rPr>
-              <a:t>· 예외 처리 [H/S 배출] 은 출고 H/S 에 놓인 작업 없는 화물을 출고대로 내보낸다(반자동 출고, 상위 보고 없음).</a:t>
-            </a:r>
-          </a:p>
-          <a:p>
-            <a:pPr algn="l"/>
-            <a:r>
-              <a:rPr sz="1000" b="0">
-                <a:solidFill>
-                  <a:srgbClr val="595959"/>
-                </a:solidFill>
-                <a:latin typeface="맑은 고딕"/>
-              </a:rPr>
-              <a:t>· 확대 버튼은 숨김(Ecs.ini ZOOM_BTN=0).</a:t>
-            </a:r>
-          </a:p>
-          <a:p>
-            <a:pPr algn="l"/>
-            <a:r>
-              <a:rPr sz="1000" b="0">
-                <a:solidFill>
-                  <a:srgbClr val="595959"/>
-                </a:solidFill>
-                <a:latin typeface="맑은 고딕"/>
-              </a:rPr>
-              <a:t>· 칸에 다 들어가지 않는 긴 글자는 그 칸에서 한 글자씩 흘러간다(입력 중인 칸은 제외). 2026-09-21 추가.</a:t>
+              <a:t>■ </a:t>
+            </a:r>
+            <a:r>
+              <a:rPr sz="1300" b="1" dirty="0" err="1">
+                <a:solidFill>
+                  <a:srgbClr val="1E2761"/>
+                </a:solidFill>
+                <a:latin typeface="맑은 고딕"/>
+              </a:rPr>
+              <a:t>프로그램</a:t>
+            </a:r>
+            <a:r>
+              <a:rPr sz="1300" b="1" dirty="0">
+                <a:solidFill>
+                  <a:srgbClr val="1E2761"/>
+                </a:solidFill>
+                <a:latin typeface="맑은 고딕"/>
+              </a:rPr>
+              <a:t> </a:t>
+            </a:r>
+            <a:r>
+              <a:rPr sz="1300" b="1" dirty="0" err="1">
+                <a:solidFill>
+                  <a:srgbClr val="1E2761"/>
+                </a:solidFill>
+                <a:latin typeface="맑은 고딕"/>
+              </a:rPr>
+              <a:t>개요</a:t>
+            </a:r>
+            <a:endParaRPr sz="1300" b="1" dirty="0">
+              <a:solidFill>
+                <a:srgbClr val="1E2761"/>
+              </a:solidFill>
+              <a:latin typeface="맑은 고딕"/>
+            </a:endParaRPr>
+          </a:p>
+          <a:p>
+            <a:pPr algn="l"/>
+            <a:r>
+              <a:rPr sz="1100" b="0" dirty="0">
+                <a:solidFill>
+                  <a:srgbClr val="595959"/>
+                </a:solidFill>
+                <a:latin typeface="맑은 고딕"/>
+              </a:rPr>
+              <a:t>RGV </a:t>
+            </a:r>
+            <a:r>
+              <a:rPr sz="1100" b="0" dirty="0" err="1">
+                <a:solidFill>
+                  <a:srgbClr val="595959"/>
+                </a:solidFill>
+                <a:latin typeface="맑은 고딕"/>
+              </a:rPr>
+              <a:t>상태와</a:t>
+            </a:r>
+            <a:r>
+              <a:rPr sz="1100" b="0" dirty="0">
+                <a:solidFill>
+                  <a:srgbClr val="595959"/>
+                </a:solidFill>
+                <a:latin typeface="맑은 고딕"/>
+              </a:rPr>
+              <a:t> </a:t>
+            </a:r>
+            <a:r>
+              <a:rPr sz="1100" b="0" dirty="0" err="1">
+                <a:solidFill>
+                  <a:srgbClr val="595959"/>
+                </a:solidFill>
+                <a:latin typeface="맑은 고딕"/>
+              </a:rPr>
+              <a:t>작업</a:t>
+            </a:r>
+            <a:r>
+              <a:rPr sz="1100" b="0" dirty="0">
+                <a:solidFill>
+                  <a:srgbClr val="595959"/>
+                </a:solidFill>
+                <a:latin typeface="맑은 고딕"/>
+              </a:rPr>
+              <a:t> </a:t>
+            </a:r>
+            <a:r>
+              <a:rPr sz="1100" b="0" dirty="0" err="1">
+                <a:solidFill>
+                  <a:srgbClr val="595959"/>
+                </a:solidFill>
+                <a:latin typeface="맑은 고딕"/>
+              </a:rPr>
+              <a:t>상태를</a:t>
+            </a:r>
+            <a:r>
+              <a:rPr sz="1100" b="0" dirty="0">
+                <a:solidFill>
+                  <a:srgbClr val="595959"/>
+                </a:solidFill>
+                <a:latin typeface="맑은 고딕"/>
+              </a:rPr>
+              <a:t> </a:t>
+            </a:r>
+            <a:r>
+              <a:rPr sz="1100" b="0" dirty="0" err="1">
+                <a:solidFill>
+                  <a:srgbClr val="595959"/>
+                </a:solidFill>
+                <a:latin typeface="맑은 고딕"/>
+              </a:rPr>
+              <a:t>본다</a:t>
+            </a:r>
+            <a:r>
+              <a:rPr sz="1100" b="0" dirty="0">
+                <a:solidFill>
+                  <a:srgbClr val="595959"/>
+                </a:solidFill>
+                <a:latin typeface="맑은 고딕"/>
+              </a:rPr>
+              <a:t>. </a:t>
+            </a:r>
+            <a:r>
+              <a:rPr sz="1100" b="0" dirty="0" err="1">
+                <a:solidFill>
+                  <a:srgbClr val="595959"/>
+                </a:solidFill>
+                <a:latin typeface="맑은 고딕"/>
+              </a:rPr>
+              <a:t>명령</a:t>
+            </a:r>
+            <a:r>
+              <a:rPr sz="1100" b="0" dirty="0">
+                <a:solidFill>
+                  <a:srgbClr val="595959"/>
+                </a:solidFill>
+                <a:latin typeface="맑은 고딕"/>
+              </a:rPr>
+              <a:t> : </a:t>
+            </a:r>
+            <a:r>
+              <a:rPr sz="1100" b="0" dirty="0" err="1">
+                <a:solidFill>
+                  <a:srgbClr val="595959"/>
+                </a:solidFill>
+                <a:latin typeface="맑은 고딕"/>
+              </a:rPr>
+              <a:t>지시</a:t>
+            </a:r>
+            <a:r>
+              <a:rPr sz="1100" b="0" dirty="0">
+                <a:solidFill>
+                  <a:srgbClr val="595959"/>
+                </a:solidFill>
+                <a:latin typeface="맑은 고딕"/>
+              </a:rPr>
+              <a:t> </a:t>
+            </a:r>
+            <a:r>
+              <a:rPr sz="1100" b="0" dirty="0" err="1">
+                <a:solidFill>
+                  <a:srgbClr val="595959"/>
+                </a:solidFill>
+                <a:latin typeface="맑은 고딕"/>
+              </a:rPr>
+              <a:t>재전송</a:t>
+            </a:r>
+            <a:r>
+              <a:rPr sz="1100" b="0" dirty="0">
+                <a:solidFill>
+                  <a:srgbClr val="595959"/>
+                </a:solidFill>
+                <a:latin typeface="맑은 고딕"/>
+              </a:rPr>
+              <a:t> / </a:t>
+            </a:r>
+            <a:r>
+              <a:rPr sz="1100" b="0" dirty="0" err="1">
+                <a:solidFill>
+                  <a:srgbClr val="595959"/>
+                </a:solidFill>
+                <a:latin typeface="맑은 고딕"/>
+              </a:rPr>
+              <a:t>강제완료</a:t>
+            </a:r>
+            <a:r>
+              <a:rPr sz="1100" b="0" dirty="0">
+                <a:solidFill>
+                  <a:srgbClr val="595959"/>
+                </a:solidFill>
+                <a:latin typeface="맑은 고딕"/>
+              </a:rPr>
+              <a:t> / </a:t>
+            </a:r>
+            <a:r>
+              <a:rPr sz="1100" b="0" dirty="0" err="1">
+                <a:solidFill>
+                  <a:srgbClr val="595959"/>
+                </a:solidFill>
+                <a:latin typeface="맑은 고딕"/>
+              </a:rPr>
+              <a:t>수동지시</a:t>
+            </a:r>
+            <a:r>
+              <a:rPr sz="1100" b="0" dirty="0">
+                <a:solidFill>
+                  <a:srgbClr val="595959"/>
+                </a:solidFill>
+                <a:latin typeface="맑은 고딕"/>
+              </a:rPr>
+              <a:t>, RTV </a:t>
+            </a:r>
+            <a:r>
+              <a:rPr sz="1100" b="0" dirty="0" err="1">
+                <a:solidFill>
+                  <a:srgbClr val="595959"/>
+                </a:solidFill>
+                <a:latin typeface="맑은 고딕"/>
+              </a:rPr>
+              <a:t>금지</a:t>
+            </a:r>
+            <a:r>
+              <a:rPr sz="1100" b="0" dirty="0">
+                <a:solidFill>
+                  <a:srgbClr val="595959"/>
+                </a:solidFill>
+                <a:latin typeface="맑은 고딕"/>
+              </a:rPr>
+              <a:t>.</a:t>
+            </a:r>
+          </a:p>
+          <a:p>
+            <a:pPr algn="l"/>
+            <a:endParaRPr sz="1100" b="0" dirty="0">
+              <a:solidFill>
+                <a:srgbClr val="595959"/>
+              </a:solidFill>
+              <a:latin typeface="맑은 고딕"/>
+            </a:endParaRPr>
+          </a:p>
+          <a:p>
+            <a:pPr algn="l"/>
+            <a:r>
+              <a:rPr sz="1300" b="1" dirty="0">
+                <a:solidFill>
+                  <a:srgbClr val="1E2761"/>
+                </a:solidFill>
+                <a:latin typeface="맑은 고딕"/>
+              </a:rPr>
+              <a:t>■ </a:t>
+            </a:r>
+            <a:r>
+              <a:rPr sz="1300" b="1" dirty="0" err="1">
+                <a:solidFill>
+                  <a:srgbClr val="1E2761"/>
+                </a:solidFill>
+                <a:latin typeface="맑은 고딕"/>
+              </a:rPr>
+              <a:t>특기사항</a:t>
+            </a:r>
+            <a:endParaRPr sz="1300" b="1" dirty="0">
+              <a:solidFill>
+                <a:srgbClr val="1E2761"/>
+              </a:solidFill>
+              <a:latin typeface="맑은 고딕"/>
+            </a:endParaRPr>
+          </a:p>
+          <a:p>
+            <a:pPr algn="l"/>
+            <a:r>
+              <a:rPr sz="1000" b="0" dirty="0">
+                <a:solidFill>
+                  <a:srgbClr val="595959"/>
+                </a:solidFill>
+                <a:latin typeface="맑은 고딕"/>
+              </a:rPr>
+              <a:t>· RTV </a:t>
+            </a:r>
+            <a:r>
+              <a:rPr sz="1000" b="0" dirty="0" err="1">
+                <a:solidFill>
+                  <a:srgbClr val="595959"/>
+                </a:solidFill>
+                <a:latin typeface="맑은 고딕"/>
+              </a:rPr>
+              <a:t>상태</a:t>
+            </a:r>
+            <a:r>
+              <a:rPr sz="1000" b="0" dirty="0">
+                <a:solidFill>
+                  <a:srgbClr val="595959"/>
+                </a:solidFill>
+                <a:latin typeface="맑은 고딕"/>
+              </a:rPr>
+              <a:t> : </a:t>
+            </a:r>
+            <a:r>
+              <a:rPr sz="1000" b="0" dirty="0" err="1">
+                <a:solidFill>
+                  <a:srgbClr val="595959"/>
+                </a:solidFill>
+                <a:latin typeface="맑은 고딕"/>
+              </a:rPr>
+              <a:t>운영모드</a:t>
+            </a:r>
+            <a:r>
+              <a:rPr sz="1000" b="0" dirty="0">
+                <a:solidFill>
+                  <a:srgbClr val="595959"/>
+                </a:solidFill>
+                <a:latin typeface="맑은 고딕"/>
+              </a:rPr>
+              <a:t> / </a:t>
+            </a:r>
+            <a:r>
+              <a:rPr sz="1000" b="0" dirty="0" err="1">
+                <a:solidFill>
+                  <a:srgbClr val="595959"/>
+                </a:solidFill>
+                <a:latin typeface="맑은 고딕"/>
+              </a:rPr>
+              <a:t>완료상태</a:t>
+            </a:r>
+            <a:r>
+              <a:rPr sz="1000" b="0" dirty="0">
+                <a:solidFill>
+                  <a:srgbClr val="595959"/>
+                </a:solidFill>
+                <a:latin typeface="맑은 고딕"/>
+              </a:rPr>
+              <a:t> / </a:t>
+            </a:r>
+            <a:r>
+              <a:rPr sz="1000" b="0" dirty="0" err="1">
+                <a:solidFill>
+                  <a:srgbClr val="595959"/>
+                </a:solidFill>
+                <a:latin typeface="맑은 고딕"/>
+              </a:rPr>
+              <a:t>화물유무</a:t>
+            </a:r>
+            <a:r>
+              <a:rPr sz="1000" b="0" dirty="0">
+                <a:solidFill>
+                  <a:srgbClr val="595959"/>
+                </a:solidFill>
+                <a:latin typeface="맑은 고딕"/>
+              </a:rPr>
+              <a:t> / </a:t>
+            </a:r>
+            <a:r>
+              <a:rPr sz="1000" b="0" dirty="0" err="1">
+                <a:solidFill>
+                  <a:srgbClr val="595959"/>
+                </a:solidFill>
+                <a:latin typeface="맑은 고딕"/>
+              </a:rPr>
+              <a:t>RTV상태</a:t>
+            </a:r>
+            <a:r>
+              <a:rPr sz="1000" b="0" dirty="0">
+                <a:solidFill>
+                  <a:srgbClr val="595959"/>
+                </a:solidFill>
+                <a:latin typeface="맑은 고딕"/>
+              </a:rPr>
+              <a:t> / ACTIVE / </a:t>
+            </a:r>
+            <a:r>
+              <a:rPr sz="1000" b="0" dirty="0" err="1">
+                <a:solidFill>
+                  <a:srgbClr val="595959"/>
+                </a:solidFill>
+                <a:latin typeface="맑은 고딕"/>
+              </a:rPr>
+              <a:t>주행위치</a:t>
+            </a:r>
+            <a:r>
+              <a:rPr sz="1000" b="0" dirty="0">
+                <a:solidFill>
+                  <a:srgbClr val="595959"/>
+                </a:solidFill>
+                <a:latin typeface="맑은 고딕"/>
+              </a:rPr>
+              <a:t>.</a:t>
+            </a:r>
+          </a:p>
+          <a:p>
+            <a:pPr algn="l"/>
+            <a:r>
+              <a:rPr sz="1000" b="0" dirty="0">
+                <a:solidFill>
+                  <a:srgbClr val="595959"/>
+                </a:solidFill>
+                <a:latin typeface="맑은 고딕"/>
+              </a:rPr>
+              <a:t>· </a:t>
+            </a:r>
+            <a:r>
+              <a:rPr sz="1000" b="0" dirty="0" err="1">
+                <a:solidFill>
+                  <a:srgbClr val="595959"/>
+                </a:solidFill>
+                <a:latin typeface="맑은 고딕"/>
+              </a:rPr>
+              <a:t>진단</a:t>
+            </a:r>
+            <a:r>
+              <a:rPr sz="1000" b="0" dirty="0">
+                <a:solidFill>
+                  <a:srgbClr val="595959"/>
+                </a:solidFill>
+                <a:latin typeface="맑은 고딕"/>
+              </a:rPr>
+              <a:t> </a:t>
+            </a:r>
+            <a:r>
+              <a:rPr sz="1000" b="0" dirty="0" err="1">
+                <a:solidFill>
+                  <a:srgbClr val="595959"/>
+                </a:solidFill>
+                <a:latin typeface="맑은 고딕"/>
+              </a:rPr>
+              <a:t>칸은</a:t>
+            </a:r>
+            <a:r>
+              <a:rPr sz="1000" b="0" dirty="0">
+                <a:solidFill>
+                  <a:srgbClr val="595959"/>
+                </a:solidFill>
+                <a:latin typeface="맑은 고딕"/>
+              </a:rPr>
+              <a:t> "[</a:t>
+            </a:r>
+            <a:r>
+              <a:rPr sz="1000" b="0" dirty="0" err="1">
+                <a:solidFill>
+                  <a:srgbClr val="595959"/>
+                </a:solidFill>
+                <a:latin typeface="맑은 고딕"/>
+              </a:rPr>
+              <a:t>코드</a:t>
+            </a:r>
+            <a:r>
+              <a:rPr sz="1000" b="0" dirty="0">
+                <a:solidFill>
+                  <a:srgbClr val="595959"/>
+                </a:solidFill>
+                <a:latin typeface="맑은 고딕"/>
+              </a:rPr>
+              <a:t>]</a:t>
+            </a:r>
+            <a:r>
+              <a:rPr sz="1000" b="0" dirty="0" err="1">
+                <a:solidFill>
+                  <a:srgbClr val="595959"/>
+                </a:solidFill>
+                <a:latin typeface="맑은 고딕"/>
+              </a:rPr>
+              <a:t>알람</a:t>
+            </a:r>
+            <a:r>
+              <a:rPr sz="1000" b="0" dirty="0">
+                <a:solidFill>
+                  <a:srgbClr val="595959"/>
+                </a:solidFill>
+                <a:latin typeface="맑은 고딕"/>
+              </a:rPr>
+              <a:t> </a:t>
+            </a:r>
+            <a:r>
+              <a:rPr sz="1000" b="0" dirty="0" err="1">
+                <a:solidFill>
+                  <a:srgbClr val="595959"/>
+                </a:solidFill>
+                <a:latin typeface="맑은 고딕"/>
+              </a:rPr>
+              <a:t>문구</a:t>
+            </a:r>
+            <a:r>
+              <a:rPr sz="1000" b="0" dirty="0">
+                <a:solidFill>
+                  <a:srgbClr val="595959"/>
+                </a:solidFill>
+                <a:latin typeface="맑은 고딕"/>
+              </a:rPr>
+              <a:t>" 로 </a:t>
+            </a:r>
+            <a:r>
+              <a:rPr sz="1000" b="0" dirty="0" err="1">
+                <a:solidFill>
+                  <a:srgbClr val="595959"/>
+                </a:solidFill>
+                <a:latin typeface="맑은 고딕"/>
+              </a:rPr>
+              <a:t>표시한다</a:t>
+            </a:r>
+            <a:r>
+              <a:rPr sz="1000" b="0" dirty="0">
+                <a:solidFill>
+                  <a:srgbClr val="595959"/>
+                </a:solidFill>
+                <a:latin typeface="맑은 고딕"/>
+              </a:rPr>
+              <a:t> (예 [0033]RGV </a:t>
+            </a:r>
+            <a:r>
+              <a:rPr sz="1000" b="0" dirty="0" err="1">
+                <a:solidFill>
+                  <a:srgbClr val="595959"/>
+                </a:solidFill>
+                <a:latin typeface="맑은 고딕"/>
+              </a:rPr>
+              <a:t>전진</a:t>
+            </a:r>
+            <a:r>
+              <a:rPr sz="1000" b="0" dirty="0">
+                <a:solidFill>
+                  <a:srgbClr val="595959"/>
+                </a:solidFill>
+                <a:latin typeface="맑은 고딕"/>
+              </a:rPr>
+              <a:t> </a:t>
+            </a:r>
+            <a:r>
+              <a:rPr sz="1000" b="0" dirty="0" err="1">
+                <a:solidFill>
+                  <a:srgbClr val="595959"/>
+                </a:solidFill>
+                <a:latin typeface="맑은 고딕"/>
+              </a:rPr>
+              <a:t>한계점</a:t>
+            </a:r>
+            <a:r>
+              <a:rPr sz="1000" b="0" dirty="0">
+                <a:solidFill>
+                  <a:srgbClr val="595959"/>
+                </a:solidFill>
+                <a:latin typeface="맑은 고딕"/>
+              </a:rPr>
+              <a:t>, PLC </a:t>
+            </a:r>
+            <a:r>
+              <a:rPr sz="1000" b="0" dirty="0" err="1">
+                <a:solidFill>
+                  <a:srgbClr val="595959"/>
+                </a:solidFill>
+                <a:latin typeface="맑은 고딕"/>
+              </a:rPr>
+              <a:t>알람</a:t>
+            </a:r>
+            <a:r>
+              <a:rPr sz="1000" b="0" dirty="0">
+                <a:solidFill>
+                  <a:srgbClr val="595959"/>
+                </a:solidFill>
+                <a:latin typeface="맑은 고딕"/>
+              </a:rPr>
+              <a:t> </a:t>
+            </a:r>
+            <a:r>
+              <a:rPr sz="1000" b="0" dirty="0" err="1">
+                <a:solidFill>
+                  <a:srgbClr val="595959"/>
+                </a:solidFill>
+                <a:latin typeface="맑은 고딕"/>
+              </a:rPr>
+              <a:t>비트</a:t>
+            </a:r>
+            <a:r>
+              <a:rPr sz="1000" b="0" dirty="0">
+                <a:solidFill>
+                  <a:srgbClr val="595959"/>
+                </a:solidFill>
+                <a:latin typeface="맑은 고딕"/>
+              </a:rPr>
+              <a:t> M5601~M560F).</a:t>
             </a:r>
           </a:p>
         </p:txBody>
@@ -9331,7 +12911,7 @@
                 </a:solidFill>
                 <a:latin typeface="맑은 고딕"/>
               </a:rPr>
-              <a:t>LG 화학 1동 ECS  |  화면설계서  |  Ver 2.0</a:t>
+              <a:t>LG 화학 1동 ECS  |  화면설계서  |  Ver 1.1</a:t>
             </a:r>
           </a:p>
         </p:txBody>
@@ -9366,740 +12946,6 @@
                 </a:solidFill>
                 <a:latin typeface="맑은 고딕"/>
               </a:rPr>
-              <a:t>25</a:t>
-            </a:r>
-          </a:p>
-        </p:txBody>
-      </p:sp>
-      <p:pic>
-        <p:nvPicPr>
-          <p:cNvPr id="8" name="Picture 7" descr="cv_0_v20.png"/>
-          <p:cNvPicPr>
-            <a:picLocks noChangeAspect="1"/>
-          </p:cNvPicPr>
-          <p:nvPr/>
-        </p:nvPicPr>
-        <p:blipFill>
-          <a:blip r:embed="rId3"/>
-          <a:stretch>
-            <a:fillRect/>
-          </a:stretch>
-        </p:blipFill>
-        <p:spPr>
-          <a:xfrm>
-            <a:off x="2196917" y="1280160"/>
-            <a:ext cx="4384405" cy="4747878"/>
-          </a:xfrm>
-          <a:prstGeom prst="rect">
-            <a:avLst/>
-          </a:prstGeom>
-        </p:spPr>
-      </p:pic>
-    </p:spTree>
-  </p:cSld>
-  <p:clrMapOvr>
-    <a:masterClrMapping/>
-  </p:clrMapOvr>
-</p:sld>
-</file>
-
-<file path=ppt/slides/slide26.xml><?xml version="1.0" encoding="utf-8"?>
-<p:sld xmlns:a="http://schemas.openxmlformats.org/drawingml/2006/main" xmlns:r="http://schemas.openxmlformats.org/officeDocument/2006/relationships" xmlns:p="http://schemas.openxmlformats.org/presentationml/2006/main">
-  <p:cSld>
-    <p:spTree>
-      <p:nvGrpSpPr>
-        <p:cNvPr id="1" name=""/>
-        <p:cNvGrpSpPr/>
-        <p:nvPr/>
-      </p:nvGrpSpPr>
-      <p:grpSpPr>
-        <a:xfrm>
-          <a:off x="0" y="0"/>
-          <a:ext cx="0" cy="0"/>
-          <a:chOff x="0" y="0"/>
-          <a:chExt cx="0" cy="0"/>
-        </a:xfrm>
-      </p:grpSpPr>
-      <p:sp>
-        <p:nvSpPr>
-          <p:cNvPr id="2" name="TextBox 1"/>
-          <p:cNvSpPr txBox="1"/>
-          <p:nvPr/>
-        </p:nvSpPr>
-        <p:spPr>
-          <a:xfrm>
-            <a:off x="457200" y="274320"/>
-            <a:ext cx="11247120" cy="640080"/>
-          </a:xfrm>
-          <a:prstGeom prst="rect">
-            <a:avLst/>
-          </a:prstGeom>
-          <a:noFill/>
-        </p:spPr>
-        <p:txBody>
-          <a:bodyPr wrap="square" lIns="45720" rIns="45720" anchor="ctr">
-            <a:spAutoFit/>
-          </a:bodyPr>
-          <a:lstStyle/>
-          <a:p>
-            <a:pPr algn="l"/>
-            <a:r>
-              <a:rPr sz="2600" b="1">
-                <a:solidFill>
-                  <a:srgbClr val="1E2761"/>
-                </a:solidFill>
-                <a:latin typeface="맑은 고딕"/>
-              </a:rPr>
-              <a:t>설비 대화상자 - SC 상태</a:t>
-            </a:r>
-          </a:p>
-        </p:txBody>
-      </p:sp>
-      <p:sp>
-        <p:nvSpPr>
-          <p:cNvPr id="3" name="Rectangle 2"/>
-          <p:cNvSpPr/>
-          <p:nvPr/>
-        </p:nvSpPr>
-        <p:spPr>
-          <a:xfrm>
-            <a:off x="548640" y="1188720"/>
-            <a:ext cx="7680960" cy="5029200"/>
-          </a:xfrm>
-          <a:prstGeom prst="rect">
-            <a:avLst/>
-          </a:prstGeom>
-          <a:solidFill>
-            <a:srgbClr val="F7F8FA"/>
-          </a:solidFill>
-          <a:ln>
-            <a:solidFill>
-              <a:srgbClr val="C8CEDA"/>
-            </a:solidFill>
-          </a:ln>
-        </p:spPr>
-        <p:style>
-          <a:lnRef idx="1">
-            <a:schemeClr val="accent1"/>
-          </a:lnRef>
-          <a:fillRef idx="3">
-            <a:schemeClr val="accent1"/>
-          </a:fillRef>
-          <a:effectRef idx="2">
-            <a:schemeClr val="accent1"/>
-          </a:effectRef>
-          <a:fontRef idx="minor">
-            <a:schemeClr val="lt1"/>
-          </a:fontRef>
-        </p:style>
-        <p:txBody>
-          <a:bodyPr rtlCol="0" anchor="ctr"/>
-          <a:lstStyle/>
-          <a:p>
-            <a:pPr algn="ctr"/>
-            <a:endParaRPr/>
-          </a:p>
-        </p:txBody>
-      </p:sp>
-      <p:sp>
-        <p:nvSpPr>
-          <p:cNvPr id="5" name="TextBox 4"/>
-          <p:cNvSpPr txBox="1"/>
-          <p:nvPr/>
-        </p:nvSpPr>
-        <p:spPr>
-          <a:xfrm>
-            <a:off x="8503920" y="1188720"/>
-            <a:ext cx="3291840" cy="5029200"/>
-          </a:xfrm>
-          <a:prstGeom prst="rect">
-            <a:avLst/>
-          </a:prstGeom>
-          <a:noFill/>
-        </p:spPr>
-        <p:txBody>
-          <a:bodyPr wrap="square" lIns="45720" rIns="45720" anchor="t">
-            <a:spAutoFit/>
-          </a:bodyPr>
-          <a:lstStyle/>
-          <a:p>
-            <a:pPr algn="l"/>
-            <a:r>
-              <a:rPr sz="1300" b="1">
-                <a:solidFill>
-                  <a:srgbClr val="1E2761"/>
-                </a:solidFill>
-                <a:latin typeface="맑은 고딕"/>
-              </a:rPr>
-              <a:t>■ 메뉴 Path</a:t>
-            </a:r>
-          </a:p>
-          <a:p>
-            <a:pPr algn="l"/>
-            <a:r>
-              <a:rPr sz="1100" b="0">
-                <a:solidFill>
-                  <a:srgbClr val="595959"/>
-                </a:solidFill>
-                <a:latin typeface="맑은 고딕"/>
-              </a:rPr>
-              <a:t>메인 화면에서 크레인 클릭</a:t>
-            </a:r>
-          </a:p>
-          <a:p>
-            <a:pPr algn="l"/>
-            <a:endParaRPr sz="1100" b="0">
-              <a:solidFill>
-                <a:srgbClr val="595959"/>
-              </a:solidFill>
-              <a:latin typeface="맑은 고딕"/>
-            </a:endParaRPr>
-          </a:p>
-          <a:p>
-            <a:pPr algn="l"/>
-            <a:r>
-              <a:rPr sz="1300" b="1">
-                <a:solidFill>
-                  <a:srgbClr val="1E2761"/>
-                </a:solidFill>
-                <a:latin typeface="맑은 고딕"/>
-              </a:rPr>
-              <a:t>■ 프로그램 개요</a:t>
-            </a:r>
-          </a:p>
-          <a:p>
-            <a:pPr algn="l"/>
-            <a:r>
-              <a:rPr sz="1100" b="0">
-                <a:solidFill>
-                  <a:srgbClr val="595959"/>
-                </a:solidFill>
-                <a:latin typeface="맑은 고딕"/>
-              </a:rPr>
-              <a:t>크레인 상태·차상 화물·좌표·에러와 작업 상태를 본다. 명령 : 지시 재전송 / 강제완료 / 수동지시, 입출고상태 : 입고 정지 / 출고 정지 / 작업금지.</a:t>
-            </a:r>
-          </a:p>
-          <a:p>
-            <a:pPr algn="l"/>
-            <a:endParaRPr sz="1100" b="0">
-              <a:solidFill>
-                <a:srgbClr val="595959"/>
-              </a:solidFill>
-              <a:latin typeface="맑은 고딕"/>
-            </a:endParaRPr>
-          </a:p>
-          <a:p>
-            <a:pPr algn="l"/>
-            <a:r>
-              <a:rPr sz="1300" b="1">
-                <a:solidFill>
-                  <a:srgbClr val="1E2761"/>
-                </a:solidFill>
-                <a:latin typeface="맑은 고딕"/>
-              </a:rPr>
-              <a:t>■ 특기사항</a:t>
-            </a:r>
-          </a:p>
-          <a:p>
-            <a:pPr algn="l"/>
-            <a:r>
-              <a:rPr sz="1000" b="0">
-                <a:solidFill>
-                  <a:srgbClr val="595959"/>
-                </a:solidFill>
-                <a:latin typeface="맑은 고딕"/>
-              </a:rPr>
-              <a:t>· 제목줄에 호기와 담당 Bank 를 표시한다 (예 S/C#2 (Bank 03,04)).</a:t>
-            </a:r>
-          </a:p>
-          <a:p>
-            <a:pPr algn="l"/>
-            <a:r>
-              <a:rPr sz="1000" b="0">
-                <a:solidFill>
-                  <a:srgbClr val="595959"/>
-                </a:solidFill>
-                <a:latin typeface="맑은 고딕"/>
-              </a:rPr>
-              <a:t>· [수동지시] 는 MANUAL &gt; 크레인 창을 연다.</a:t>
-            </a:r>
-          </a:p>
-          <a:p>
-            <a:pPr algn="l"/>
-            <a:r>
-              <a:rPr sz="1000" b="0">
-                <a:solidFill>
-                  <a:srgbClr val="595959"/>
-                </a:solidFill>
-                <a:latin typeface="맑은 고딕"/>
-              </a:rPr>
-              <a:t>· 확대 버튼은 숨김(ZOOM_BTN=0).</a:t>
-            </a:r>
-          </a:p>
-          <a:p>
-            <a:pPr algn="l"/>
-            <a:r>
-              <a:rPr sz="1000" b="0">
-                <a:solidFill>
-                  <a:srgbClr val="595959"/>
-                </a:solidFill>
-                <a:latin typeface="맑은 고딕"/>
-              </a:rPr>
-              <a:t>· 에러 칸은 "[코드]알람 문구" 로 표시한다 (예 [0073]좌측 렉 이중입고). 코드표 = Ecs.ini [SC_ERR] ERR_TYP(SC_LGLS).</a:t>
-            </a:r>
-          </a:p>
-          <a:p>
-            <a:pPr algn="l"/>
-            <a:r>
-              <a:rPr sz="1000" b="0">
-                <a:solidFill>
-                  <a:srgbClr val="595959"/>
-                </a:solidFill>
-                <a:latin typeface="맑은 고딕"/>
-              </a:rPr>
-              <a:t>· 에러 해제 시 이중입고(73·74)·공출고(75) 확인창은 Ecs.ini [SC_ERR] DUAL_CODES / EMPTY_CODES 기준.</a:t>
-            </a:r>
-          </a:p>
-          <a:p>
-            <a:pPr algn="l"/>
-            <a:r>
-              <a:rPr sz="1000" b="0">
-                <a:solidFill>
-                  <a:srgbClr val="595959"/>
-                </a:solidFill>
-                <a:latin typeface="맑은 고딕"/>
-              </a:rPr>
-              <a:t>· 2026-09-21 : 지상반·기상반·SRC상태 칸을 없앴다(셋 다 동작상태 워드에서 계산한 값이라 동작상태와 늘 같았다).</a:t>
-            </a:r>
-          </a:p>
-          <a:p>
-            <a:pPr algn="l"/>
-            <a:r>
-              <a:rPr sz="1000" b="0">
-                <a:solidFill>
-                  <a:srgbClr val="595959"/>
-                </a:solidFill>
-                <a:latin typeface="맑은 고딕"/>
-              </a:rPr>
-              <a:t>· 화물유무·포크위치·수평주행·완료상태를 동작상태와 한 그룹으로 모으고 값 칸을 넓혔다.</a:t>
-            </a:r>
-          </a:p>
-        </p:txBody>
-      </p:sp>
-      <p:sp>
-        <p:nvSpPr>
-          <p:cNvPr id="6" name="TextBox 5"/>
-          <p:cNvSpPr txBox="1"/>
-          <p:nvPr/>
-        </p:nvSpPr>
-        <p:spPr>
-          <a:xfrm>
-            <a:off x="457200" y="6446520"/>
-            <a:ext cx="4572000" cy="320040"/>
-          </a:xfrm>
-          <a:prstGeom prst="rect">
-            <a:avLst/>
-          </a:prstGeom>
-          <a:noFill/>
-        </p:spPr>
-        <p:txBody>
-          <a:bodyPr wrap="square" lIns="45720" rIns="45720" anchor="t">
-            <a:spAutoFit/>
-          </a:bodyPr>
-          <a:lstStyle/>
-          <a:p>
-            <a:pPr algn="l"/>
-            <a:r>
-              <a:rPr sz="1000" b="0">
-                <a:solidFill>
-                  <a:srgbClr val="595959"/>
-                </a:solidFill>
-                <a:latin typeface="맑은 고딕"/>
-              </a:rPr>
-              <a:t>LG 화학 1동 ECS  |  화면설계서  |  Ver 2.0</a:t>
-            </a:r>
-          </a:p>
-        </p:txBody>
-      </p:sp>
-      <p:sp>
-        <p:nvSpPr>
-          <p:cNvPr id="7" name="TextBox 6"/>
-          <p:cNvSpPr txBox="1"/>
-          <p:nvPr/>
-        </p:nvSpPr>
-        <p:spPr>
-          <a:xfrm>
-            <a:off x="11155680" y="6446520"/>
-            <a:ext cx="731520" cy="320040"/>
-          </a:xfrm>
-          <a:prstGeom prst="rect">
-            <a:avLst/>
-          </a:prstGeom>
-          <a:noFill/>
-        </p:spPr>
-        <p:txBody>
-          <a:bodyPr wrap="square" lIns="45720" rIns="45720" anchor="t">
-            <a:spAutoFit/>
-          </a:bodyPr>
-          <a:lstStyle/>
-          <a:p>
-            <a:pPr algn="r"/>
-            <a:r>
-              <a:rPr sz="1000" b="0">
-                <a:solidFill>
-                  <a:srgbClr val="595959"/>
-                </a:solidFill>
-                <a:latin typeface="맑은 고딕"/>
-              </a:rPr>
-              <a:t>26</a:t>
-            </a:r>
-          </a:p>
-        </p:txBody>
-      </p:sp>
-      <p:pic>
-        <p:nvPicPr>
-          <p:cNvPr id="8" name="Picture 7" descr="sc_0_v20.png"/>
-          <p:cNvPicPr>
-            <a:picLocks noChangeAspect="1"/>
-          </p:cNvPicPr>
-          <p:nvPr/>
-        </p:nvPicPr>
-        <p:blipFill>
-          <a:blip r:embed="rId3"/>
-          <a:stretch>
-            <a:fillRect/>
-          </a:stretch>
-        </p:blipFill>
-        <p:spPr>
-          <a:xfrm>
-            <a:off x="2405492" y="1280160"/>
-            <a:ext cx="3967255" cy="4694585"/>
-          </a:xfrm>
-          <a:prstGeom prst="rect">
-            <a:avLst/>
-          </a:prstGeom>
-        </p:spPr>
-      </p:pic>
-    </p:spTree>
-  </p:cSld>
-  <p:clrMapOvr>
-    <a:masterClrMapping/>
-  </p:clrMapOvr>
-</p:sld>
-</file>
-
-<file path=ppt/slides/slide27.xml><?xml version="1.0" encoding="utf-8"?>
-<p:sld xmlns:a="http://schemas.openxmlformats.org/drawingml/2006/main" xmlns:r="http://schemas.openxmlformats.org/officeDocument/2006/relationships" xmlns:p="http://schemas.openxmlformats.org/presentationml/2006/main">
-  <p:cSld>
-    <p:spTree>
-      <p:nvGrpSpPr>
-        <p:cNvPr id="1" name=""/>
-        <p:cNvGrpSpPr/>
-        <p:nvPr/>
-      </p:nvGrpSpPr>
-      <p:grpSpPr>
-        <a:xfrm>
-          <a:off x="0" y="0"/>
-          <a:ext cx="0" cy="0"/>
-          <a:chOff x="0" y="0"/>
-          <a:chExt cx="0" cy="0"/>
-        </a:xfrm>
-      </p:grpSpPr>
-      <p:sp>
-        <p:nvSpPr>
-          <p:cNvPr id="2" name="TextBox 1"/>
-          <p:cNvSpPr txBox="1"/>
-          <p:nvPr/>
-        </p:nvSpPr>
-        <p:spPr>
-          <a:xfrm>
-            <a:off x="457200" y="274320"/>
-            <a:ext cx="11247120" cy="640080"/>
-          </a:xfrm>
-          <a:prstGeom prst="rect">
-            <a:avLst/>
-          </a:prstGeom>
-          <a:noFill/>
-        </p:spPr>
-        <p:txBody>
-          <a:bodyPr wrap="square" lIns="45720" rIns="45720" anchor="ctr">
-            <a:spAutoFit/>
-          </a:bodyPr>
-          <a:lstStyle/>
-          <a:p>
-            <a:pPr algn="l"/>
-            <a:r>
-              <a:rPr sz="2600" b="1">
-                <a:solidFill>
-                  <a:srgbClr val="1E2761"/>
-                </a:solidFill>
-                <a:latin typeface="맑은 고딕"/>
-              </a:rPr>
-              <a:t>설비 대화상자 - RTV(RGV) 상태</a:t>
-            </a:r>
-          </a:p>
-        </p:txBody>
-      </p:sp>
-      <p:sp>
-        <p:nvSpPr>
-          <p:cNvPr id="3" name="Rectangle 2"/>
-          <p:cNvSpPr/>
-          <p:nvPr/>
-        </p:nvSpPr>
-        <p:spPr>
-          <a:xfrm>
-            <a:off x="548640" y="1188720"/>
-            <a:ext cx="7680960" cy="5029200"/>
-          </a:xfrm>
-          <a:prstGeom prst="rect">
-            <a:avLst/>
-          </a:prstGeom>
-          <a:solidFill>
-            <a:srgbClr val="F7F8FA"/>
-          </a:solidFill>
-          <a:ln>
-            <a:solidFill>
-              <a:srgbClr val="C8CEDA"/>
-            </a:solidFill>
-          </a:ln>
-        </p:spPr>
-        <p:style>
-          <a:lnRef idx="1">
-            <a:schemeClr val="accent1"/>
-          </a:lnRef>
-          <a:fillRef idx="3">
-            <a:schemeClr val="accent1"/>
-          </a:fillRef>
-          <a:effectRef idx="2">
-            <a:schemeClr val="accent1"/>
-          </a:effectRef>
-          <a:fontRef idx="minor">
-            <a:schemeClr val="lt1"/>
-          </a:fontRef>
-        </p:style>
-        <p:txBody>
-          <a:bodyPr rtlCol="0" anchor="ctr"/>
-          <a:lstStyle/>
-          <a:p>
-            <a:pPr algn="ctr"/>
-            <a:endParaRPr/>
-          </a:p>
-        </p:txBody>
-      </p:sp>
-      <p:sp>
-        <p:nvSpPr>
-          <p:cNvPr id="5" name="TextBox 4"/>
-          <p:cNvSpPr txBox="1"/>
-          <p:nvPr/>
-        </p:nvSpPr>
-        <p:spPr>
-          <a:xfrm>
-            <a:off x="8503920" y="1188720"/>
-            <a:ext cx="3291840" cy="5029200"/>
-          </a:xfrm>
-          <a:prstGeom prst="rect">
-            <a:avLst/>
-          </a:prstGeom>
-          <a:noFill/>
-        </p:spPr>
-        <p:txBody>
-          <a:bodyPr wrap="square" lIns="45720" rIns="45720" anchor="t">
-            <a:spAutoFit/>
-          </a:bodyPr>
-          <a:lstStyle/>
-          <a:p>
-            <a:pPr algn="l"/>
-            <a:r>
-              <a:rPr sz="1300" b="1">
-                <a:solidFill>
-                  <a:srgbClr val="1E2761"/>
-                </a:solidFill>
-                <a:latin typeface="맑은 고딕"/>
-              </a:rPr>
-              <a:t>■ 메뉴 Path</a:t>
-            </a:r>
-          </a:p>
-          <a:p>
-            <a:pPr algn="l"/>
-            <a:r>
-              <a:rPr sz="1100" b="0">
-                <a:solidFill>
-                  <a:srgbClr val="595959"/>
-                </a:solidFill>
-                <a:latin typeface="맑은 고딕"/>
-              </a:rPr>
-              <a:t>메인 화면에서 RGV 클릭</a:t>
-            </a:r>
-          </a:p>
-          <a:p>
-            <a:pPr algn="l"/>
-            <a:endParaRPr sz="1100" b="0">
-              <a:solidFill>
-                <a:srgbClr val="595959"/>
-              </a:solidFill>
-              <a:latin typeface="맑은 고딕"/>
-            </a:endParaRPr>
-          </a:p>
-          <a:p>
-            <a:pPr algn="l"/>
-            <a:r>
-              <a:rPr sz="1300" b="1">
-                <a:solidFill>
-                  <a:srgbClr val="1E2761"/>
-                </a:solidFill>
-                <a:latin typeface="맑은 고딕"/>
-              </a:rPr>
-              <a:t>■ 프로그램 개요</a:t>
-            </a:r>
-          </a:p>
-          <a:p>
-            <a:pPr algn="l"/>
-            <a:r>
-              <a:rPr sz="1100" b="0">
-                <a:solidFill>
-                  <a:srgbClr val="595959"/>
-                </a:solidFill>
-                <a:latin typeface="맑은 고딕"/>
-              </a:rPr>
-              <a:t>RGV 상태와 작업 상태를 본다. 명령 : 지시 재전송 / 강제완료 / 수동지시, RTV 금지.</a:t>
-            </a:r>
-          </a:p>
-          <a:p>
-            <a:pPr algn="l"/>
-            <a:endParaRPr sz="1100" b="0">
-              <a:solidFill>
-                <a:srgbClr val="595959"/>
-              </a:solidFill>
-              <a:latin typeface="맑은 고딕"/>
-            </a:endParaRPr>
-          </a:p>
-          <a:p>
-            <a:pPr algn="l"/>
-            <a:r>
-              <a:rPr sz="1300" b="1">
-                <a:solidFill>
-                  <a:srgbClr val="1E2761"/>
-                </a:solidFill>
-                <a:latin typeface="맑은 고딕"/>
-              </a:rPr>
-              <a:t>■ 특기사항</a:t>
-            </a:r>
-          </a:p>
-          <a:p>
-            <a:pPr algn="l"/>
-            <a:r>
-              <a:rPr sz="1000" b="0">
-                <a:solidFill>
-                  <a:srgbClr val="595959"/>
-                </a:solidFill>
-                <a:latin typeface="맑은 고딕"/>
-              </a:rPr>
-              <a:t>· RTV 상태 : 운영모드 / 완료상태 / 화물유무 / RTV상태 / ACTIVE / 주행위치.</a:t>
-            </a:r>
-          </a:p>
-          <a:p>
-            <a:pPr algn="l"/>
-            <a:r>
-              <a:rPr sz="1000" b="0">
-                <a:solidFill>
-                  <a:srgbClr val="595959"/>
-                </a:solidFill>
-                <a:latin typeface="맑은 고딕"/>
-              </a:rPr>
-              <a:t>· 확대 버튼은 숨김(ZOOM_BTN=0).</a:t>
-            </a:r>
-          </a:p>
-          <a:p>
-            <a:pPr algn="l"/>
-            <a:r>
-              <a:rPr sz="1000" b="0">
-                <a:solidFill>
-                  <a:srgbClr val="595959"/>
-                </a:solidFill>
-                <a:latin typeface="맑은 고딕"/>
-              </a:rPr>
-              <a:t>· 진단 칸은 "[코드]알람 문구" 로 표시한다 (예 [0033]RGV 전진 한계점, PLC 알람 비트 M5601~M560F).</a:t>
-            </a:r>
-          </a:p>
-          <a:p>
-            <a:pPr algn="l"/>
-            <a:r>
-              <a:rPr sz="1000" b="0">
-                <a:solidFill>
-                  <a:srgbClr val="595959"/>
-                </a:solidFill>
-                <a:latin typeface="맑은 고딕"/>
-              </a:rPr>
-              <a:t>· 2026-09-21 : 운영모드·ACTIVE 칸을 없애고(동작상태 파생값), [RTV 금지] 영역에 맞춰 배치를 정리했다.</a:t>
-            </a:r>
-          </a:p>
-        </p:txBody>
-      </p:sp>
-      <p:sp>
-        <p:nvSpPr>
-          <p:cNvPr id="6" name="TextBox 5"/>
-          <p:cNvSpPr txBox="1"/>
-          <p:nvPr/>
-        </p:nvSpPr>
-        <p:spPr>
-          <a:xfrm>
-            <a:off x="457200" y="6446520"/>
-            <a:ext cx="4572000" cy="320040"/>
-          </a:xfrm>
-          <a:prstGeom prst="rect">
-            <a:avLst/>
-          </a:prstGeom>
-          <a:noFill/>
-        </p:spPr>
-        <p:txBody>
-          <a:bodyPr wrap="square" lIns="45720" rIns="45720" anchor="t">
-            <a:spAutoFit/>
-          </a:bodyPr>
-          <a:lstStyle/>
-          <a:p>
-            <a:pPr algn="l"/>
-            <a:r>
-              <a:rPr sz="1000" b="0">
-                <a:solidFill>
-                  <a:srgbClr val="595959"/>
-                </a:solidFill>
-                <a:latin typeface="맑은 고딕"/>
-              </a:rPr>
-              <a:t>LG 화학 1동 ECS  |  화면설계서  |  Ver 2.0</a:t>
-            </a:r>
-          </a:p>
-        </p:txBody>
-      </p:sp>
-      <p:sp>
-        <p:nvSpPr>
-          <p:cNvPr id="7" name="TextBox 6"/>
-          <p:cNvSpPr txBox="1"/>
-          <p:nvPr/>
-        </p:nvSpPr>
-        <p:spPr>
-          <a:xfrm>
-            <a:off x="11155680" y="6446520"/>
-            <a:ext cx="731520" cy="320040"/>
-          </a:xfrm>
-          <a:prstGeom prst="rect">
-            <a:avLst/>
-          </a:prstGeom>
-          <a:noFill/>
-        </p:spPr>
-        <p:txBody>
-          <a:bodyPr wrap="square" lIns="45720" rIns="45720" anchor="t">
-            <a:spAutoFit/>
-          </a:bodyPr>
-          <a:lstStyle/>
-          <a:p>
-            <a:pPr algn="r"/>
-            <a:r>
-              <a:rPr sz="1000" b="0">
-                <a:solidFill>
-                  <a:srgbClr val="595959"/>
-                </a:solidFill>
-                <a:latin typeface="맑은 고딕"/>
-              </a:rPr>
               <a:t>27</a:t>
             </a:r>
           </a:p>
@@ -10114,7 +12960,7 @@
           <p:nvPr/>
         </p:nvPicPr>
         <p:blipFill>
-          <a:blip r:embed="rId3"/>
+          <a:blip r:embed="rId2"/>
           <a:stretch>
             <a:fillRect/>
           </a:stretch>
@@ -11527,7 +14373,7 @@
                 </a:solidFill>
                 <a:latin typeface="맑은 고딕"/>
               </a:rPr>
-              <a:t>LG 화학 1동 ECS  |  화면설계서  |  Ver 2.0</a:t>
+              <a:t>LG 화학 1동 ECS  |  화면설계서  |  Ver 1.1</a:t>
             </a:r>
           </a:p>
         </p:txBody>
@@ -11657,7 +14503,7 @@
                 </a:solidFill>
                 <a:latin typeface="맑은 고딕"/>
               </a:rPr>
-              <a:t>LG 화학 1동 ECS  |  화면설계서  |  Ver 2.0</a:t>
+              <a:t>LG 화학 1동 ECS  |  화면설계서  |  Ver 1.1</a:t>
             </a:r>
           </a:p>
         </p:txBody>
@@ -11706,7 +14552,7 @@
           <p:nvPr/>
         </p:nvPicPr>
         <p:blipFill>
-          <a:blip r:embed="rId3"/>
+          <a:blip r:embed="rId2"/>
           <a:stretch>
             <a:fillRect/>
           </a:stretch>
@@ -11781,35 +14627,6 @@
           </a:p>
         </p:txBody>
       </p:sp>
-      <p:pic>
-        <p:nvPicPr>
-          <p:cNvPr id="3" name="Picture 2" descr="main_full.png"/>
-          <p:cNvPicPr>
-            <a:picLocks noChangeAspect="1"/>
-          </p:cNvPicPr>
-          <p:nvPr/>
-        </p:nvPicPr>
-        <p:blipFill>
-          <a:blip r:embed="rId2"/>
-          <a:stretch>
-            <a:fillRect/>
-          </a:stretch>
-        </p:blipFill>
-        <p:spPr>
-          <a:xfrm>
-            <a:off x="457200" y="1097280"/>
-            <a:ext cx="5120640" cy="2752344"/>
-          </a:xfrm>
-          <a:prstGeom prst="rect">
-            <a:avLst/>
-          </a:prstGeom>
-          <a:ln>
-            <a:solidFill>
-              <a:srgbClr val="C8CEDA"/>
-            </a:solidFill>
-          </a:ln>
-        </p:spPr>
-      </p:pic>
       <p:sp>
         <p:nvSpPr>
           <p:cNvPr id="4" name="TextBox 3"/>
@@ -12422,13 +15239,49 @@
           <a:p>
             <a:pPr algn="l"/>
             <a:r>
-              <a:rPr sz="1000" b="0">
-                <a:solidFill>
-                  <a:srgbClr val="595959"/>
-                </a:solidFill>
-                <a:latin typeface="맑은 고딕"/>
-              </a:rPr>
-              <a:t>LG 화학 1동 ECS  |  화면설계서  |  Ver 2.0</a:t>
+              <a:rPr sz="1000" b="0" dirty="0">
+                <a:solidFill>
+                  <a:srgbClr val="595959"/>
+                </a:solidFill>
+                <a:latin typeface="맑은 고딕"/>
+              </a:rPr>
+              <a:t>LG </a:t>
+            </a:r>
+            <a:r>
+              <a:rPr sz="1000" b="0" dirty="0" err="1">
+                <a:solidFill>
+                  <a:srgbClr val="595959"/>
+                </a:solidFill>
+                <a:latin typeface="맑은 고딕"/>
+              </a:rPr>
+              <a:t>화학</a:t>
+            </a:r>
+            <a:r>
+              <a:rPr sz="1000" b="0" dirty="0">
+                <a:solidFill>
+                  <a:srgbClr val="595959"/>
+                </a:solidFill>
+                <a:latin typeface="맑은 고딕"/>
+              </a:rPr>
+              <a:t> 1동 ECS  |  </a:t>
+            </a:r>
+            <a:r>
+              <a:rPr sz="1000" b="0" dirty="0" err="1">
+                <a:solidFill>
+                  <a:srgbClr val="595959"/>
+                </a:solidFill>
+                <a:latin typeface="맑은 고딕"/>
+              </a:rPr>
+              <a:t>화면설계서</a:t>
+            </a:r>
+            <a:r>
+              <a:rPr sz="1000" b="0" dirty="0">
+                <a:solidFill>
+                  <a:srgbClr val="595959"/>
+                </a:solidFill>
+                <a:latin typeface="맑은 고딕"/>
+              </a:rPr>
+              <a:t>  |  Ver 1.1</a:t>
             </a:r>
           </a:p>
         </p:txBody>
@@ -12468,6 +15321,30 @@
           </a:p>
         </p:txBody>
       </p:sp>
+      <p:pic>
+        <p:nvPicPr>
+          <p:cNvPr id="9" name="Picture 8" descr="image.png"/>
+          <p:cNvPicPr>
+            <a:picLocks noChangeAspect="1"/>
+          </p:cNvPicPr>
+          <p:nvPr/>
+        </p:nvPicPr>
+        <p:blipFill>
+          <a:blip r:embed="rId3"/>
+          <a:stretch>
+            <a:fillRect/>
+          </a:stretch>
+        </p:blipFill>
+        <p:spPr>
+          <a:xfrm>
+            <a:off x="475279" y="1097280"/>
+            <a:ext cx="5084482" cy="2752344"/>
+          </a:xfrm>
+          <a:prstGeom prst="rect">
+            <a:avLst/>
+          </a:prstGeom>
+        </p:spPr>
+      </p:pic>
     </p:spTree>
   </p:cSld>
   <p:clrMapOvr>
@@ -12674,10 +15551,16 @@
           <p:cNvGraphicFramePr>
             <a:graphicFrameLocks noGrp="1"/>
           </p:cNvGraphicFramePr>
-          <p:nvPr/>
+          <p:nvPr>
+            <p:extLst>
+              <p:ext uri="{D42A27DB-BD31-4B8C-83A1-F6EECF244321}">
+                <p14:modId xmlns:p14="http://schemas.microsoft.com/office/powerpoint/2010/main" val="1827657774"/>
+              </p:ext>
+            </p:extLst>
+          </p:nvPr>
         </p:nvGraphicFramePr>
         <p:xfrm>
-          <a:off x="457200" y="3657600"/>
+          <a:off x="438728" y="3657600"/>
           <a:ext cx="11338560" cy="2414016"/>
         </p:xfrm>
         <a:graphic>
@@ -12818,7 +15701,7 @@
                     <a:lstStyle/>
                     <a:p>
                       <a:r>
-                        <a:rPr sz="1050">
+                        <a:rPr sz="1050" dirty="0">
                           <a:solidFill>
                             <a:srgbClr val="222222"/>
                           </a:solidFill>
@@ -12883,15 +15766,12 @@
                     <a:bodyPr/>
                     <a:lstStyle/>
                     <a:p>
-                      <a:r>
-                        <a:rPr sz="1050">
-                          <a:solidFill>
-                            <a:srgbClr val="222222"/>
-                          </a:solidFill>
-                          <a:latin typeface="맑은 고딕"/>
-                        </a:rPr>
-                        <a:t>INI 열기(INI_MENU=0) · 사용자(USER_MENU=0) 숨김</a:t>
-                      </a:r>
+                      <a:endParaRPr sz="1050" dirty="0">
+                        <a:solidFill>
+                          <a:srgbClr val="222222"/>
+                        </a:solidFill>
+                        <a:latin typeface="맑은 고딕"/>
+                      </a:endParaRPr>
                     </a:p>
                   </a:txBody>
                   <a:tcPr marT="27432" marB="27432">
@@ -12978,15 +15858,12 @@
                     <a:bodyPr/>
                     <a:lstStyle/>
                     <a:p>
-                      <a:r>
-                        <a:rPr sz="1050">
-                          <a:solidFill>
-                            <a:srgbClr val="222222"/>
-                          </a:solidFill>
-                          <a:latin typeface="맑은 고딕"/>
-                        </a:rPr>
-                        <a:t>판넬 보기 · 처리 그룹 숨김(PANEVIEW_MENU / PROCESS_MENU)</a:t>
-                      </a:r>
+                      <a:endParaRPr sz="1050" dirty="0">
+                        <a:solidFill>
+                          <a:srgbClr val="222222"/>
+                        </a:solidFill>
+                        <a:latin typeface="맑은 고딕"/>
+                      </a:endParaRPr>
                     </a:p>
                   </a:txBody>
                   <a:tcPr marT="27432" marB="27432">
@@ -13073,15 +15950,12 @@
                     <a:bodyPr/>
                     <a:lstStyle/>
                     <a:p>
-                      <a:r>
-                        <a:rPr sz="1050">
-                          <a:solidFill>
-                            <a:srgbClr val="222222"/>
-                          </a:solidFill>
-                          <a:latin typeface="맑은 고딕"/>
-                        </a:rPr>
-                        <a:t>반자동 TEST 그룹 숨김(SEMITEST_MENU=0)</a:t>
-                      </a:r>
+                      <a:endParaRPr lang="en-US" sz="1050" dirty="0">
+                        <a:solidFill>
+                          <a:srgbClr val="222222"/>
+                        </a:solidFill>
+                        <a:latin typeface="맑은 고딕"/>
+                      </a:endParaRPr>
                     </a:p>
                   </a:txBody>
                   <a:tcPr marT="27432" marB="27432">
@@ -13168,7 +16042,7 @@
                     <a:bodyPr/>
                     <a:lstStyle/>
                     <a:p>
-                      <a:endParaRPr/>
+                      <a:endParaRPr dirty="0"/>
                     </a:p>
                   </a:txBody>
                   <a:tcPr marT="27432" marB="27432">
@@ -13256,13 +16130,166 @@
                     <a:lstStyle/>
                     <a:p>
                       <a:r>
-                        <a:rPr sz="1050">
+                        <a:rPr sz="1050" dirty="0" err="1">
                           <a:solidFill>
                             <a:srgbClr val="222222"/>
                           </a:solidFill>
                           <a:latin typeface="맑은 고딕"/>
                         </a:rPr>
-                        <a:t>파랑=정상, 빨강=단절. 단절 시 클릭하면 핑·포트 점검 안내 (STATUS_POS=RIBBON, COMM_MODE=2)</a:t>
+                        <a:t>파랑</a:t>
+                      </a:r>
+                      <a:r>
+                        <a:rPr sz="1050" dirty="0">
+                          <a:solidFill>
+                            <a:srgbClr val="222222"/>
+                          </a:solidFill>
+                          <a:latin typeface="맑은 고딕"/>
+                        </a:rPr>
+                        <a:t>=</a:t>
+                      </a:r>
+                      <a:r>
+                        <a:rPr sz="1050" dirty="0" err="1">
+                          <a:solidFill>
+                            <a:srgbClr val="222222"/>
+                          </a:solidFill>
+                          <a:latin typeface="맑은 고딕"/>
+                        </a:rPr>
+                        <a:t>정상</a:t>
+                      </a:r>
+                      <a:r>
+                        <a:rPr sz="1050" dirty="0">
+                          <a:solidFill>
+                            <a:srgbClr val="222222"/>
+                          </a:solidFill>
+                          <a:latin typeface="맑은 고딕"/>
+                        </a:rPr>
+                        <a:t>, </a:t>
+                      </a:r>
+                      <a:r>
+                        <a:rPr sz="1050" dirty="0" err="1">
+                          <a:solidFill>
+                            <a:srgbClr val="222222"/>
+                          </a:solidFill>
+                          <a:latin typeface="맑은 고딕"/>
+                        </a:rPr>
+                        <a:t>빨강</a:t>
+                      </a:r>
+                      <a:r>
+                        <a:rPr sz="1050" dirty="0">
+                          <a:solidFill>
+                            <a:srgbClr val="222222"/>
+                          </a:solidFill>
+                          <a:latin typeface="맑은 고딕"/>
+                        </a:rPr>
+                        <a:t>=</a:t>
+                      </a:r>
+                      <a:r>
+                        <a:rPr sz="1050" dirty="0" err="1">
+                          <a:solidFill>
+                            <a:srgbClr val="222222"/>
+                          </a:solidFill>
+                          <a:latin typeface="맑은 고딕"/>
+                        </a:rPr>
+                        <a:t>단절</a:t>
+                      </a:r>
+                      <a:r>
+                        <a:rPr sz="1050" dirty="0">
+                          <a:solidFill>
+                            <a:srgbClr val="222222"/>
+                          </a:solidFill>
+                          <a:latin typeface="맑은 고딕"/>
+                        </a:rPr>
+                        <a:t>. </a:t>
+                      </a:r>
+                      <a:r>
+                        <a:rPr sz="1050" dirty="0" err="1">
+                          <a:solidFill>
+                            <a:srgbClr val="222222"/>
+                          </a:solidFill>
+                          <a:latin typeface="맑은 고딕"/>
+                        </a:rPr>
+                        <a:t>단절</a:t>
+                      </a:r>
+                      <a:r>
+                        <a:rPr sz="1050" dirty="0">
+                          <a:solidFill>
+                            <a:srgbClr val="222222"/>
+                          </a:solidFill>
+                          <a:latin typeface="맑은 고딕"/>
+                        </a:rPr>
+                        <a:t> 시 </a:t>
+                      </a:r>
+                      <a:r>
+                        <a:rPr sz="1050" dirty="0" err="1">
+                          <a:solidFill>
+                            <a:srgbClr val="222222"/>
+                          </a:solidFill>
+                          <a:latin typeface="맑은 고딕"/>
+                        </a:rPr>
+                        <a:t>클릭하면</a:t>
+                      </a:r>
+                      <a:r>
+                        <a:rPr sz="1050" dirty="0">
+                          <a:solidFill>
+                            <a:srgbClr val="222222"/>
+                          </a:solidFill>
+                          <a:latin typeface="맑은 고딕"/>
+                        </a:rPr>
+                        <a:t> </a:t>
+                      </a:r>
+                      <a:r>
+                        <a:rPr sz="1050" dirty="0" err="1">
+                          <a:solidFill>
+                            <a:srgbClr val="222222"/>
+                          </a:solidFill>
+                          <a:latin typeface="맑은 고딕"/>
+                        </a:rPr>
+                        <a:t>핑·포트</a:t>
+                      </a:r>
+                      <a:r>
+                        <a:rPr sz="1050" dirty="0">
+                          <a:solidFill>
+                            <a:srgbClr val="222222"/>
+                          </a:solidFill>
+                          <a:latin typeface="맑은 고딕"/>
+                        </a:rPr>
+                        <a:t> </a:t>
+                      </a:r>
+                      <a:r>
+                        <a:rPr sz="1050" dirty="0" err="1">
+                          <a:solidFill>
+                            <a:srgbClr val="222222"/>
+                          </a:solidFill>
+                          <a:latin typeface="맑은 고딕"/>
+                        </a:rPr>
+                        <a:t>점검</a:t>
+                      </a:r>
+                      <a:r>
+                        <a:rPr sz="1050" dirty="0">
+                          <a:solidFill>
+                            <a:srgbClr val="222222"/>
+                          </a:solidFill>
+                          <a:latin typeface="맑은 고딕"/>
+                        </a:rPr>
+                        <a:t> </a:t>
+                      </a:r>
+                      <a:r>
+                        <a:rPr sz="1050" dirty="0" err="1">
+                          <a:solidFill>
+                            <a:srgbClr val="222222"/>
+                          </a:solidFill>
+                          <a:latin typeface="맑은 고딕"/>
+                        </a:rPr>
+                        <a:t>안내</a:t>
+                      </a:r>
+                      <a:r>
+                        <a:rPr sz="1050" dirty="0">
+                          <a:solidFill>
+                            <a:srgbClr val="222222"/>
+                          </a:solidFill>
+                          <a:latin typeface="맑은 고딕"/>
+                        </a:rPr>
+                        <a:t> (STATUS_POS=RIBBON, COMM_MODE=2)</a:t>
                       </a:r>
                     </a:p>
                   </a:txBody>
@@ -13312,7 +16339,7 @@
                 </a:solidFill>
                 <a:latin typeface="맑은 고딕"/>
               </a:rPr>
-              <a:t>LG 화학 1동 ECS  |  화면설계서  |  Ver 2.0</a:t>
+              <a:t>LG 화학 1동 ECS  |  화면설계서  |  Ver 1.1</a:t>
             </a:r>
           </a:p>
         </p:txBody>
@@ -13361,7 +16388,7 @@
           <p:nvPr/>
         </p:nvPicPr>
         <p:blipFill>
-          <a:blip r:embed="rId6"/>
+          <a:blip r:embed="rId2"/>
           <a:stretch>
             <a:fillRect/>
           </a:stretch>
@@ -13385,7 +16412,7 @@
           <p:nvPr/>
         </p:nvPicPr>
         <p:blipFill>
-          <a:blip r:embed="rId7"/>
+          <a:blip r:embed="rId3"/>
           <a:stretch>
             <a:fillRect/>
           </a:stretch>
@@ -13409,7 +16436,7 @@
           <p:nvPr/>
         </p:nvPicPr>
         <p:blipFill>
-          <a:blip r:embed="rId8"/>
+          <a:blip r:embed="rId4"/>
           <a:stretch>
             <a:fillRect/>
           </a:stretch>
@@ -13433,7 +16460,7 @@
           <p:nvPr/>
         </p:nvPicPr>
         <p:blipFill>
-          <a:blip r:embed="rId9"/>
+          <a:blip r:embed="rId5"/>
           <a:stretch>
             <a:fillRect/>
           </a:stretch>
@@ -13912,7 +16939,7 @@
         <p:spPr>
           <a:xfrm>
             <a:off x="6126480" y="2651760"/>
-            <a:ext cx="5669280" cy="3657600"/>
+            <a:ext cx="5669280" cy="1423467"/>
           </a:xfrm>
           <a:prstGeom prst="rect">
             <a:avLst/>
@@ -13927,85 +16954,964 @@
           <a:p>
             <a:pPr algn="l"/>
             <a:r>
-              <a:rPr sz="1300" b="1">
+              <a:rPr sz="1300" b="1" dirty="0">
                 <a:solidFill>
                   <a:srgbClr val="1E2761"/>
                 </a:solidFill>
                 <a:latin typeface="맑은 고딕"/>
               </a:rPr>
-              <a:t>■ 범례 (28항목, 색 = Ecs.ini [USER] USER_COLOR_*)</a:t>
-            </a:r>
-          </a:p>
-          <a:p>
-            <a:pPr algn="l"/>
-            <a:r>
-              <a:rPr sz="1050" b="0">
-                <a:solidFill>
-                  <a:srgbClr val="595959"/>
-                </a:solidFill>
-                <a:latin typeface="맑은 고딕"/>
-              </a:rPr>
-              <a:t>· 작업 색상 10 : 입고 · 출고 · 이동 · 랙투랙 · 호기간이동 + 반자동 5종</a:t>
-            </a:r>
-          </a:p>
-          <a:p>
-            <a:pPr algn="l"/>
-            <a:r>
-              <a:rPr sz="1050" b="0">
-                <a:solidFill>
-                  <a:srgbClr val="595959"/>
-                </a:solidFill>
-                <a:latin typeface="맑은 고딕"/>
-              </a:rPr>
-              <a:t>· C/V 상태 10 : 입고대 · 출고대 · 입고 HS · 출고 HS · 일시정지 · 에러 · 수동 · 통신두절 · 검색 · 작업번호 있음</a:t>
-            </a:r>
-          </a:p>
-          <a:p>
-            <a:pPr algn="l"/>
-            <a:r>
-              <a:rPr sz="1050" b="0">
-                <a:solidFill>
-                  <a:srgbClr val="595959"/>
-                </a:solidFill>
-                <a:latin typeface="맑은 고딕"/>
-              </a:rPr>
-              <a:t>· S/C·RGV 상태 3 : 작업없음(정상) · 미가동(수동) · 에러 - 크레인·RGV 포크 색이 이 범례와 같다</a:t>
-            </a:r>
-          </a:p>
-          <a:p>
-            <a:pPr algn="l"/>
-            <a:r>
-              <a:rPr sz="1050" b="0">
-                <a:solidFill>
-                  <a:srgbClr val="595959"/>
-                </a:solidFill>
-                <a:latin typeface="맑은 고딕"/>
-              </a:rPr>
-              <a:t>· S/C·RGV 레일 5 : 입고 금지 · 출고 금지 · 입출고 정지 · 레일 에러 · 작업중</a:t>
-            </a:r>
-          </a:p>
-          <a:p>
-            <a:pPr algn="l"/>
-            <a:r>
-              <a:rPr sz="1050" b="0">
-                <a:solidFill>
-                  <a:srgbClr val="595959"/>
-                </a:solidFill>
-                <a:latin typeface="맑은 고딕"/>
-              </a:rPr>
-              <a:t>· 색은 ECS &gt; 환경설정 &gt; 범례 에서 바꾸며 저장 즉시 반영된다.</a:t>
-            </a:r>
-          </a:p>
-          <a:p>
-            <a:pPr algn="l"/>
-            <a:r>
-              <a:rPr sz="1050" b="0">
-                <a:solidFill>
-                  <a:srgbClr val="595959"/>
-                </a:solidFill>
-                <a:latin typeface="맑은 고딕"/>
-              </a:rPr>
-              <a:t>· 2026-09-21 : 설비 동작상태가 DOWN 이거나 기상반이 수동이면 크레인·RGV 를 에러색으로 그린다.</a:t>
+              <a:t>■ </a:t>
+            </a:r>
+            <a:r>
+              <a:rPr sz="1300" b="1" dirty="0" err="1">
+                <a:solidFill>
+                  <a:srgbClr val="1E2761"/>
+                </a:solidFill>
+                <a:latin typeface="맑은 고딕"/>
+              </a:rPr>
+              <a:t>범례</a:t>
+            </a:r>
+            <a:r>
+              <a:rPr sz="1300" b="1" dirty="0">
+                <a:solidFill>
+                  <a:srgbClr val="1E2761"/>
+                </a:solidFill>
+                <a:latin typeface="맑은 고딕"/>
+              </a:rPr>
+              <a:t> (28항목, 색 = Ecs.ini [USER] USER_COLOR_*)</a:t>
+            </a:r>
+          </a:p>
+          <a:p>
+            <a:pPr algn="l"/>
+            <a:r>
+              <a:rPr sz="1050" b="0" dirty="0">
+                <a:solidFill>
+                  <a:srgbClr val="595959"/>
+                </a:solidFill>
+                <a:latin typeface="맑은 고딕"/>
+              </a:rPr>
+              <a:t>· </a:t>
+            </a:r>
+            <a:r>
+              <a:rPr sz="1050" b="0" dirty="0" err="1">
+                <a:solidFill>
+                  <a:srgbClr val="595959"/>
+                </a:solidFill>
+                <a:latin typeface="맑은 고딕"/>
+              </a:rPr>
+              <a:t>작업</a:t>
+            </a:r>
+            <a:r>
+              <a:rPr sz="1050" b="0" dirty="0">
+                <a:solidFill>
+                  <a:srgbClr val="595959"/>
+                </a:solidFill>
+                <a:latin typeface="맑은 고딕"/>
+              </a:rPr>
+              <a:t> </a:t>
+            </a:r>
+            <a:r>
+              <a:rPr sz="1050" b="0" dirty="0" err="1">
+                <a:solidFill>
+                  <a:srgbClr val="595959"/>
+                </a:solidFill>
+                <a:latin typeface="맑은 고딕"/>
+              </a:rPr>
+              <a:t>색상</a:t>
+            </a:r>
+            <a:r>
+              <a:rPr sz="1050" b="0" dirty="0">
+                <a:solidFill>
+                  <a:srgbClr val="595959"/>
+                </a:solidFill>
+                <a:latin typeface="맑은 고딕"/>
+              </a:rPr>
+              <a:t> 10 : </a:t>
+            </a:r>
+            <a:r>
+              <a:rPr sz="1050" b="0" dirty="0" err="1">
+                <a:solidFill>
+                  <a:srgbClr val="595959"/>
+                </a:solidFill>
+                <a:latin typeface="맑은 고딕"/>
+              </a:rPr>
+              <a:t>입고</a:t>
+            </a:r>
+            <a:r>
+              <a:rPr sz="1050" b="0" dirty="0">
+                <a:solidFill>
+                  <a:srgbClr val="595959"/>
+                </a:solidFill>
+                <a:latin typeface="맑은 고딕"/>
+              </a:rPr>
+              <a:t> · </a:t>
+            </a:r>
+            <a:r>
+              <a:rPr sz="1050" b="0" dirty="0" err="1">
+                <a:solidFill>
+                  <a:srgbClr val="595959"/>
+                </a:solidFill>
+                <a:latin typeface="맑은 고딕"/>
+              </a:rPr>
+              <a:t>출고</a:t>
+            </a:r>
+            <a:r>
+              <a:rPr sz="1050" b="0" dirty="0">
+                <a:solidFill>
+                  <a:srgbClr val="595959"/>
+                </a:solidFill>
+                <a:latin typeface="맑은 고딕"/>
+              </a:rPr>
+              <a:t> · </a:t>
+            </a:r>
+            <a:r>
+              <a:rPr sz="1050" b="0" dirty="0" err="1">
+                <a:solidFill>
+                  <a:srgbClr val="595959"/>
+                </a:solidFill>
+                <a:latin typeface="맑은 고딕"/>
+              </a:rPr>
+              <a:t>이동</a:t>
+            </a:r>
+            <a:r>
+              <a:rPr sz="1050" b="0" dirty="0">
+                <a:solidFill>
+                  <a:srgbClr val="595959"/>
+                </a:solidFill>
+                <a:latin typeface="맑은 고딕"/>
+              </a:rPr>
+              <a:t> · </a:t>
+            </a:r>
+            <a:r>
+              <a:rPr sz="1050" b="0" dirty="0" err="1">
+                <a:solidFill>
+                  <a:srgbClr val="595959"/>
+                </a:solidFill>
+                <a:latin typeface="맑은 고딕"/>
+              </a:rPr>
+              <a:t>랙투랙</a:t>
+            </a:r>
+            <a:r>
+              <a:rPr sz="1050" b="0" dirty="0">
+                <a:solidFill>
+                  <a:srgbClr val="595959"/>
+                </a:solidFill>
+                <a:latin typeface="맑은 고딕"/>
+              </a:rPr>
+              <a:t> · </a:t>
+            </a:r>
+            <a:r>
+              <a:rPr sz="1050" b="0" dirty="0" err="1">
+                <a:solidFill>
+                  <a:srgbClr val="595959"/>
+                </a:solidFill>
+                <a:latin typeface="맑은 고딕"/>
+              </a:rPr>
+              <a:t>호기간이동</a:t>
+            </a:r>
+            <a:r>
+              <a:rPr sz="1050" b="0" dirty="0">
+                <a:solidFill>
+                  <a:srgbClr val="595959"/>
+                </a:solidFill>
+                <a:latin typeface="맑은 고딕"/>
+              </a:rPr>
+              <a:t> + </a:t>
+            </a:r>
+            <a:r>
+              <a:rPr sz="1050" b="0" dirty="0" err="1">
+                <a:solidFill>
+                  <a:srgbClr val="595959"/>
+                </a:solidFill>
+                <a:latin typeface="맑은 고딕"/>
+              </a:rPr>
+              <a:t>반자동</a:t>
+            </a:r>
+            <a:r>
+              <a:rPr sz="1050" b="0" dirty="0">
+                <a:solidFill>
+                  <a:srgbClr val="595959"/>
+                </a:solidFill>
+                <a:latin typeface="맑은 고딕"/>
+              </a:rPr>
+              <a:t> 5종</a:t>
+            </a:r>
+          </a:p>
+          <a:p>
+            <a:pPr algn="l"/>
+            <a:r>
+              <a:rPr sz="1050" b="0" dirty="0">
+                <a:solidFill>
+                  <a:srgbClr val="595959"/>
+                </a:solidFill>
+                <a:latin typeface="맑은 고딕"/>
+              </a:rPr>
+              <a:t>· C/V </a:t>
+            </a:r>
+            <a:r>
+              <a:rPr sz="1050" b="0" dirty="0" err="1">
+                <a:solidFill>
+                  <a:srgbClr val="595959"/>
+                </a:solidFill>
+                <a:latin typeface="맑은 고딕"/>
+              </a:rPr>
+              <a:t>상태</a:t>
+            </a:r>
+            <a:r>
+              <a:rPr sz="1050" b="0" dirty="0">
+                <a:solidFill>
+                  <a:srgbClr val="595959"/>
+                </a:solidFill>
+                <a:latin typeface="맑은 고딕"/>
+              </a:rPr>
+              <a:t> 10 : </a:t>
+            </a:r>
+            <a:r>
+              <a:rPr sz="1050" b="0" dirty="0" err="1">
+                <a:solidFill>
+                  <a:srgbClr val="595959"/>
+                </a:solidFill>
+                <a:latin typeface="맑은 고딕"/>
+              </a:rPr>
+              <a:t>입고대</a:t>
+            </a:r>
+            <a:r>
+              <a:rPr sz="1050" b="0" dirty="0">
+                <a:solidFill>
+                  <a:srgbClr val="595959"/>
+                </a:solidFill>
+                <a:latin typeface="맑은 고딕"/>
+              </a:rPr>
+              <a:t> · </a:t>
+            </a:r>
+            <a:r>
+              <a:rPr sz="1050" b="0" dirty="0" err="1">
+                <a:solidFill>
+                  <a:srgbClr val="595959"/>
+                </a:solidFill>
+                <a:latin typeface="맑은 고딕"/>
+              </a:rPr>
+              <a:t>출고대</a:t>
+            </a:r>
+            <a:r>
+              <a:rPr sz="1050" b="0" dirty="0">
+                <a:solidFill>
+                  <a:srgbClr val="595959"/>
+                </a:solidFill>
+                <a:latin typeface="맑은 고딕"/>
+              </a:rPr>
+              <a:t> · </a:t>
+            </a:r>
+            <a:r>
+              <a:rPr sz="1050" b="0" dirty="0" err="1">
+                <a:solidFill>
+                  <a:srgbClr val="595959"/>
+                </a:solidFill>
+                <a:latin typeface="맑은 고딕"/>
+              </a:rPr>
+              <a:t>입고</a:t>
+            </a:r>
+            <a:r>
+              <a:rPr sz="1050" b="0" dirty="0">
+                <a:solidFill>
+                  <a:srgbClr val="595959"/>
+                </a:solidFill>
+                <a:latin typeface="맑은 고딕"/>
+              </a:rPr>
+              <a:t> HS · </a:t>
+            </a:r>
+            <a:r>
+              <a:rPr sz="1050" b="0" dirty="0" err="1">
+                <a:solidFill>
+                  <a:srgbClr val="595959"/>
+                </a:solidFill>
+                <a:latin typeface="맑은 고딕"/>
+              </a:rPr>
+              <a:t>출고</a:t>
+            </a:r>
+            <a:r>
+              <a:rPr sz="1050" b="0" dirty="0">
+                <a:solidFill>
+                  <a:srgbClr val="595959"/>
+                </a:solidFill>
+                <a:latin typeface="맑은 고딕"/>
+              </a:rPr>
+              <a:t> HS · </a:t>
+            </a:r>
+            <a:r>
+              <a:rPr sz="1050" b="0" dirty="0" err="1">
+                <a:solidFill>
+                  <a:srgbClr val="595959"/>
+                </a:solidFill>
+                <a:latin typeface="맑은 고딕"/>
+              </a:rPr>
+              <a:t>일시정지</a:t>
+            </a:r>
+            <a:r>
+              <a:rPr sz="1050" b="0" dirty="0">
+                <a:solidFill>
+                  <a:srgbClr val="595959"/>
+                </a:solidFill>
+                <a:latin typeface="맑은 고딕"/>
+              </a:rPr>
+              <a:t> · </a:t>
+            </a:r>
+            <a:r>
+              <a:rPr sz="1050" b="0" dirty="0" err="1">
+                <a:solidFill>
+                  <a:srgbClr val="595959"/>
+                </a:solidFill>
+                <a:latin typeface="맑은 고딕"/>
+              </a:rPr>
+              <a:t>에러</a:t>
+            </a:r>
+            <a:r>
+              <a:rPr sz="1050" b="0" dirty="0">
+                <a:solidFill>
+                  <a:srgbClr val="595959"/>
+                </a:solidFill>
+                <a:latin typeface="맑은 고딕"/>
+              </a:rPr>
+              <a:t> · </a:t>
+            </a:r>
+            <a:r>
+              <a:rPr sz="1050" b="0" dirty="0" err="1">
+                <a:solidFill>
+                  <a:srgbClr val="595959"/>
+                </a:solidFill>
+                <a:latin typeface="맑은 고딕"/>
+              </a:rPr>
+              <a:t>수동</a:t>
+            </a:r>
+            <a:r>
+              <a:rPr sz="1050" b="0" dirty="0">
+                <a:solidFill>
+                  <a:srgbClr val="595959"/>
+                </a:solidFill>
+                <a:latin typeface="맑은 고딕"/>
+              </a:rPr>
+              <a:t> · </a:t>
+            </a:r>
+            <a:r>
+              <a:rPr sz="1050" b="0" dirty="0" err="1">
+                <a:solidFill>
+                  <a:srgbClr val="595959"/>
+                </a:solidFill>
+                <a:latin typeface="맑은 고딕"/>
+              </a:rPr>
+              <a:t>통신두절</a:t>
+            </a:r>
+            <a:r>
+              <a:rPr sz="1050" b="0" dirty="0">
+                <a:solidFill>
+                  <a:srgbClr val="595959"/>
+                </a:solidFill>
+                <a:latin typeface="맑은 고딕"/>
+              </a:rPr>
+              <a:t> · </a:t>
+            </a:r>
+            <a:r>
+              <a:rPr sz="1050" b="0" dirty="0" err="1">
+                <a:solidFill>
+                  <a:srgbClr val="595959"/>
+                </a:solidFill>
+                <a:latin typeface="맑은 고딕"/>
+              </a:rPr>
+              <a:t>검색</a:t>
+            </a:r>
+            <a:r>
+              <a:rPr sz="1050" b="0" dirty="0">
+                <a:solidFill>
+                  <a:srgbClr val="595959"/>
+                </a:solidFill>
+                <a:latin typeface="맑은 고딕"/>
+              </a:rPr>
+              <a:t> · </a:t>
+            </a:r>
+            <a:r>
+              <a:rPr sz="1050" b="0" dirty="0" err="1">
+                <a:solidFill>
+                  <a:srgbClr val="595959"/>
+                </a:solidFill>
+                <a:latin typeface="맑은 고딕"/>
+              </a:rPr>
+              <a:t>작업번호</a:t>
+            </a:r>
+            <a:r>
+              <a:rPr sz="1050" b="0" dirty="0">
+                <a:solidFill>
+                  <a:srgbClr val="595959"/>
+                </a:solidFill>
+                <a:latin typeface="맑은 고딕"/>
+              </a:rPr>
+              <a:t> </a:t>
+            </a:r>
+            <a:r>
+              <a:rPr sz="1050" b="0" dirty="0" err="1">
+                <a:solidFill>
+                  <a:srgbClr val="595959"/>
+                </a:solidFill>
+                <a:latin typeface="맑은 고딕"/>
+              </a:rPr>
+              <a:t>있음</a:t>
+            </a:r>
+            <a:endParaRPr sz="1050" b="0" dirty="0">
+              <a:solidFill>
+                <a:srgbClr val="595959"/>
+              </a:solidFill>
+              <a:latin typeface="맑은 고딕"/>
+            </a:endParaRPr>
+          </a:p>
+          <a:p>
+            <a:pPr algn="l"/>
+            <a:r>
+              <a:rPr sz="1050" b="0" dirty="0">
+                <a:solidFill>
+                  <a:srgbClr val="595959"/>
+                </a:solidFill>
+                <a:latin typeface="맑은 고딕"/>
+              </a:rPr>
+              <a:t>· S/C·RGV </a:t>
+            </a:r>
+            <a:r>
+              <a:rPr sz="1050" b="0" dirty="0" err="1">
+                <a:solidFill>
+                  <a:srgbClr val="595959"/>
+                </a:solidFill>
+                <a:latin typeface="맑은 고딕"/>
+              </a:rPr>
+              <a:t>상태</a:t>
+            </a:r>
+            <a:r>
+              <a:rPr sz="1050" b="0" dirty="0">
+                <a:solidFill>
+                  <a:srgbClr val="595959"/>
+                </a:solidFill>
+                <a:latin typeface="맑은 고딕"/>
+              </a:rPr>
+              <a:t> 3 : </a:t>
+            </a:r>
+            <a:r>
+              <a:rPr sz="1050" b="0" dirty="0" err="1">
+                <a:solidFill>
+                  <a:srgbClr val="595959"/>
+                </a:solidFill>
+                <a:latin typeface="맑은 고딕"/>
+              </a:rPr>
+              <a:t>작업없음</a:t>
+            </a:r>
+            <a:r>
+              <a:rPr sz="1050" b="0" dirty="0">
+                <a:solidFill>
+                  <a:srgbClr val="595959"/>
+                </a:solidFill>
+                <a:latin typeface="맑은 고딕"/>
+              </a:rPr>
+              <a:t>(</a:t>
+            </a:r>
+            <a:r>
+              <a:rPr sz="1050" b="0" dirty="0" err="1">
+                <a:solidFill>
+                  <a:srgbClr val="595959"/>
+                </a:solidFill>
+                <a:latin typeface="맑은 고딕"/>
+              </a:rPr>
+              <a:t>정상</a:t>
+            </a:r>
+            <a:r>
+              <a:rPr sz="1050" b="0" dirty="0">
+                <a:solidFill>
+                  <a:srgbClr val="595959"/>
+                </a:solidFill>
+                <a:latin typeface="맑은 고딕"/>
+              </a:rPr>
+              <a:t>) · </a:t>
+            </a:r>
+            <a:r>
+              <a:rPr sz="1050" b="0" dirty="0" err="1">
+                <a:solidFill>
+                  <a:srgbClr val="595959"/>
+                </a:solidFill>
+                <a:latin typeface="맑은 고딕"/>
+              </a:rPr>
+              <a:t>미가동</a:t>
+            </a:r>
+            <a:r>
+              <a:rPr sz="1050" b="0" dirty="0">
+                <a:solidFill>
+                  <a:srgbClr val="595959"/>
+                </a:solidFill>
+                <a:latin typeface="맑은 고딕"/>
+              </a:rPr>
+              <a:t>(</a:t>
+            </a:r>
+            <a:r>
+              <a:rPr sz="1050" b="0" dirty="0" err="1">
+                <a:solidFill>
+                  <a:srgbClr val="595959"/>
+                </a:solidFill>
+                <a:latin typeface="맑은 고딕"/>
+              </a:rPr>
+              <a:t>수동</a:t>
+            </a:r>
+            <a:r>
+              <a:rPr sz="1050" b="0" dirty="0">
+                <a:solidFill>
+                  <a:srgbClr val="595959"/>
+                </a:solidFill>
+                <a:latin typeface="맑은 고딕"/>
+              </a:rPr>
+              <a:t>) · </a:t>
+            </a:r>
+            <a:r>
+              <a:rPr sz="1050" b="0" dirty="0" err="1">
+                <a:solidFill>
+                  <a:srgbClr val="595959"/>
+                </a:solidFill>
+                <a:latin typeface="맑은 고딕"/>
+              </a:rPr>
+              <a:t>에러</a:t>
+            </a:r>
+            <a:r>
+              <a:rPr sz="1050" b="0" dirty="0">
+                <a:solidFill>
+                  <a:srgbClr val="595959"/>
+                </a:solidFill>
+                <a:latin typeface="맑은 고딕"/>
+              </a:rPr>
+              <a:t> - </a:t>
+            </a:r>
+            <a:r>
+              <a:rPr sz="1050" b="0" dirty="0" err="1">
+                <a:solidFill>
+                  <a:srgbClr val="595959"/>
+                </a:solidFill>
+                <a:latin typeface="맑은 고딕"/>
+              </a:rPr>
+              <a:t>크레인·RGV</a:t>
+            </a:r>
+            <a:r>
+              <a:rPr sz="1050" b="0" dirty="0">
+                <a:solidFill>
+                  <a:srgbClr val="595959"/>
+                </a:solidFill>
+                <a:latin typeface="맑은 고딕"/>
+              </a:rPr>
+              <a:t> </a:t>
+            </a:r>
+            <a:r>
+              <a:rPr sz="1050" b="0" dirty="0" err="1">
+                <a:solidFill>
+                  <a:srgbClr val="595959"/>
+                </a:solidFill>
+                <a:latin typeface="맑은 고딕"/>
+              </a:rPr>
+              <a:t>포크</a:t>
+            </a:r>
+            <a:r>
+              <a:rPr sz="1050" b="0" dirty="0">
+                <a:solidFill>
+                  <a:srgbClr val="595959"/>
+                </a:solidFill>
+                <a:latin typeface="맑은 고딕"/>
+              </a:rPr>
+              <a:t> </a:t>
+            </a:r>
+            <a:r>
+              <a:rPr sz="1050" b="0" dirty="0" err="1">
+                <a:solidFill>
+                  <a:srgbClr val="595959"/>
+                </a:solidFill>
+                <a:latin typeface="맑은 고딕"/>
+              </a:rPr>
+              <a:t>색이</a:t>
+            </a:r>
+            <a:r>
+              <a:rPr sz="1050" b="0" dirty="0">
+                <a:solidFill>
+                  <a:srgbClr val="595959"/>
+                </a:solidFill>
+                <a:latin typeface="맑은 고딕"/>
+              </a:rPr>
+              <a:t> 이 </a:t>
+            </a:r>
+            <a:r>
+              <a:rPr sz="1050" b="0" dirty="0" err="1">
+                <a:solidFill>
+                  <a:srgbClr val="595959"/>
+                </a:solidFill>
+                <a:latin typeface="맑은 고딕"/>
+              </a:rPr>
+              <a:t>범례와</a:t>
+            </a:r>
+            <a:r>
+              <a:rPr sz="1050" b="0" dirty="0">
+                <a:solidFill>
+                  <a:srgbClr val="595959"/>
+                </a:solidFill>
+                <a:latin typeface="맑은 고딕"/>
+              </a:rPr>
+              <a:t> </a:t>
+            </a:r>
+            <a:r>
+              <a:rPr sz="1050" b="0" dirty="0" err="1">
+                <a:solidFill>
+                  <a:srgbClr val="595959"/>
+                </a:solidFill>
+                <a:latin typeface="맑은 고딕"/>
+              </a:rPr>
+              <a:t>같다</a:t>
+            </a:r>
+            <a:endParaRPr sz="1050" b="0" dirty="0">
+              <a:solidFill>
+                <a:srgbClr val="595959"/>
+              </a:solidFill>
+              <a:latin typeface="맑은 고딕"/>
+            </a:endParaRPr>
+          </a:p>
+          <a:p>
+            <a:pPr algn="l"/>
+            <a:r>
+              <a:rPr sz="1050" b="0" dirty="0">
+                <a:solidFill>
+                  <a:srgbClr val="595959"/>
+                </a:solidFill>
+                <a:latin typeface="맑은 고딕"/>
+              </a:rPr>
+              <a:t>· S/C·RGV </a:t>
+            </a:r>
+            <a:r>
+              <a:rPr sz="1050" b="0" dirty="0" err="1">
+                <a:solidFill>
+                  <a:srgbClr val="595959"/>
+                </a:solidFill>
+                <a:latin typeface="맑은 고딕"/>
+              </a:rPr>
+              <a:t>레일</a:t>
+            </a:r>
+            <a:r>
+              <a:rPr sz="1050" b="0" dirty="0">
+                <a:solidFill>
+                  <a:srgbClr val="595959"/>
+                </a:solidFill>
+                <a:latin typeface="맑은 고딕"/>
+              </a:rPr>
+              <a:t> 5 : </a:t>
+            </a:r>
+            <a:r>
+              <a:rPr sz="1050" b="0" dirty="0" err="1">
+                <a:solidFill>
+                  <a:srgbClr val="595959"/>
+                </a:solidFill>
+                <a:latin typeface="맑은 고딕"/>
+              </a:rPr>
+              <a:t>입고</a:t>
+            </a:r>
+            <a:r>
+              <a:rPr sz="1050" b="0" dirty="0">
+                <a:solidFill>
+                  <a:srgbClr val="595959"/>
+                </a:solidFill>
+                <a:latin typeface="맑은 고딕"/>
+              </a:rPr>
+              <a:t> </a:t>
+            </a:r>
+            <a:r>
+              <a:rPr sz="1050" b="0" dirty="0" err="1">
+                <a:solidFill>
+                  <a:srgbClr val="595959"/>
+                </a:solidFill>
+                <a:latin typeface="맑은 고딕"/>
+              </a:rPr>
+              <a:t>금지</a:t>
+            </a:r>
+            <a:r>
+              <a:rPr sz="1050" b="0" dirty="0">
+                <a:solidFill>
+                  <a:srgbClr val="595959"/>
+                </a:solidFill>
+                <a:latin typeface="맑은 고딕"/>
+              </a:rPr>
+              <a:t> · </a:t>
+            </a:r>
+            <a:r>
+              <a:rPr sz="1050" b="0" dirty="0" err="1">
+                <a:solidFill>
+                  <a:srgbClr val="595959"/>
+                </a:solidFill>
+                <a:latin typeface="맑은 고딕"/>
+              </a:rPr>
+              <a:t>출고</a:t>
+            </a:r>
+            <a:r>
+              <a:rPr sz="1050" b="0" dirty="0">
+                <a:solidFill>
+                  <a:srgbClr val="595959"/>
+                </a:solidFill>
+                <a:latin typeface="맑은 고딕"/>
+              </a:rPr>
+              <a:t> </a:t>
+            </a:r>
+            <a:r>
+              <a:rPr sz="1050" b="0" dirty="0" err="1">
+                <a:solidFill>
+                  <a:srgbClr val="595959"/>
+                </a:solidFill>
+                <a:latin typeface="맑은 고딕"/>
+              </a:rPr>
+              <a:t>금지</a:t>
+            </a:r>
+            <a:r>
+              <a:rPr sz="1050" b="0" dirty="0">
+                <a:solidFill>
+                  <a:srgbClr val="595959"/>
+                </a:solidFill>
+                <a:latin typeface="맑은 고딕"/>
+              </a:rPr>
+              <a:t> · </a:t>
+            </a:r>
+            <a:r>
+              <a:rPr sz="1050" b="0" dirty="0" err="1">
+                <a:solidFill>
+                  <a:srgbClr val="595959"/>
+                </a:solidFill>
+                <a:latin typeface="맑은 고딕"/>
+              </a:rPr>
+              <a:t>입출고</a:t>
+            </a:r>
+            <a:r>
+              <a:rPr sz="1050" b="0" dirty="0">
+                <a:solidFill>
+                  <a:srgbClr val="595959"/>
+                </a:solidFill>
+                <a:latin typeface="맑은 고딕"/>
+              </a:rPr>
+              <a:t> </a:t>
+            </a:r>
+            <a:r>
+              <a:rPr sz="1050" b="0" dirty="0" err="1">
+                <a:solidFill>
+                  <a:srgbClr val="595959"/>
+                </a:solidFill>
+                <a:latin typeface="맑은 고딕"/>
+              </a:rPr>
+              <a:t>정지</a:t>
+            </a:r>
+            <a:r>
+              <a:rPr sz="1050" b="0" dirty="0">
+                <a:solidFill>
+                  <a:srgbClr val="595959"/>
+                </a:solidFill>
+                <a:latin typeface="맑은 고딕"/>
+              </a:rPr>
+              <a:t> · </a:t>
+            </a:r>
+            <a:r>
+              <a:rPr sz="1050" b="0" dirty="0" err="1">
+                <a:solidFill>
+                  <a:srgbClr val="595959"/>
+                </a:solidFill>
+                <a:latin typeface="맑은 고딕"/>
+              </a:rPr>
+              <a:t>레일</a:t>
+            </a:r>
+            <a:r>
+              <a:rPr sz="1050" b="0" dirty="0">
+                <a:solidFill>
+                  <a:srgbClr val="595959"/>
+                </a:solidFill>
+                <a:latin typeface="맑은 고딕"/>
+              </a:rPr>
+              <a:t> </a:t>
+            </a:r>
+            <a:r>
+              <a:rPr sz="1050" b="0" dirty="0" err="1">
+                <a:solidFill>
+                  <a:srgbClr val="595959"/>
+                </a:solidFill>
+                <a:latin typeface="맑은 고딕"/>
+              </a:rPr>
+              <a:t>에러</a:t>
+            </a:r>
+            <a:r>
+              <a:rPr sz="1050" b="0" dirty="0">
+                <a:solidFill>
+                  <a:srgbClr val="595959"/>
+                </a:solidFill>
+                <a:latin typeface="맑은 고딕"/>
+              </a:rPr>
+              <a:t> · </a:t>
+            </a:r>
+            <a:r>
+              <a:rPr sz="1050" b="0" dirty="0" err="1">
+                <a:solidFill>
+                  <a:srgbClr val="595959"/>
+                </a:solidFill>
+                <a:latin typeface="맑은 고딕"/>
+              </a:rPr>
+              <a:t>작업중</a:t>
+            </a:r>
+            <a:endParaRPr sz="1050" b="0" dirty="0">
+              <a:solidFill>
+                <a:srgbClr val="595959"/>
+              </a:solidFill>
+              <a:latin typeface="맑은 고딕"/>
+            </a:endParaRPr>
+          </a:p>
+          <a:p>
+            <a:pPr algn="l"/>
+            <a:r>
+              <a:rPr sz="1050" b="0" dirty="0">
+                <a:solidFill>
+                  <a:srgbClr val="595959"/>
+                </a:solidFill>
+                <a:latin typeface="맑은 고딕"/>
+              </a:rPr>
+              <a:t>· </a:t>
+            </a:r>
+            <a:r>
+              <a:rPr sz="1050" b="0" dirty="0" err="1">
+                <a:solidFill>
+                  <a:srgbClr val="595959"/>
+                </a:solidFill>
+                <a:latin typeface="맑은 고딕"/>
+              </a:rPr>
+              <a:t>색은</a:t>
+            </a:r>
+            <a:r>
+              <a:rPr sz="1050" b="0" dirty="0">
+                <a:solidFill>
+                  <a:srgbClr val="595959"/>
+                </a:solidFill>
+                <a:latin typeface="맑은 고딕"/>
+              </a:rPr>
+              <a:t> ECS &gt; </a:t>
+            </a:r>
+            <a:r>
+              <a:rPr sz="1050" b="0" dirty="0" err="1">
+                <a:solidFill>
+                  <a:srgbClr val="595959"/>
+                </a:solidFill>
+                <a:latin typeface="맑은 고딕"/>
+              </a:rPr>
+              <a:t>환경설정</a:t>
+            </a:r>
+            <a:r>
+              <a:rPr sz="1050" b="0" dirty="0">
+                <a:solidFill>
+                  <a:srgbClr val="595959"/>
+                </a:solidFill>
+                <a:latin typeface="맑은 고딕"/>
+              </a:rPr>
+              <a:t> &gt; </a:t>
+            </a:r>
+            <a:r>
+              <a:rPr sz="1050" b="0" dirty="0" err="1">
+                <a:solidFill>
+                  <a:srgbClr val="595959"/>
+                </a:solidFill>
+                <a:latin typeface="맑은 고딕"/>
+              </a:rPr>
+              <a:t>범례</a:t>
+            </a:r>
+            <a:r>
+              <a:rPr sz="1050" b="0" dirty="0">
+                <a:solidFill>
+                  <a:srgbClr val="595959"/>
+                </a:solidFill>
+                <a:latin typeface="맑은 고딕"/>
+              </a:rPr>
+              <a:t> </a:t>
+            </a:r>
+            <a:r>
+              <a:rPr sz="1050" b="0" dirty="0" err="1">
+                <a:solidFill>
+                  <a:srgbClr val="595959"/>
+                </a:solidFill>
+                <a:latin typeface="맑은 고딕"/>
+              </a:rPr>
+              <a:t>에서</a:t>
+            </a:r>
+            <a:r>
+              <a:rPr sz="1050" b="0" dirty="0">
+                <a:solidFill>
+                  <a:srgbClr val="595959"/>
+                </a:solidFill>
+                <a:latin typeface="맑은 고딕"/>
+              </a:rPr>
+              <a:t> </a:t>
+            </a:r>
+            <a:r>
+              <a:rPr sz="1050" b="0" dirty="0" err="1">
+                <a:solidFill>
+                  <a:srgbClr val="595959"/>
+                </a:solidFill>
+                <a:latin typeface="맑은 고딕"/>
+              </a:rPr>
+              <a:t>바꾸며</a:t>
+            </a:r>
+            <a:r>
+              <a:rPr sz="1050" b="0" dirty="0">
+                <a:solidFill>
+                  <a:srgbClr val="595959"/>
+                </a:solidFill>
+                <a:latin typeface="맑은 고딕"/>
+              </a:rPr>
+              <a:t> </a:t>
+            </a:r>
+            <a:r>
+              <a:rPr sz="1050" b="0" dirty="0" err="1">
+                <a:solidFill>
+                  <a:srgbClr val="595959"/>
+                </a:solidFill>
+                <a:latin typeface="맑은 고딕"/>
+              </a:rPr>
+              <a:t>저장</a:t>
+            </a:r>
+            <a:r>
+              <a:rPr sz="1050" b="0" dirty="0">
+                <a:solidFill>
+                  <a:srgbClr val="595959"/>
+                </a:solidFill>
+                <a:latin typeface="맑은 고딕"/>
+              </a:rPr>
+              <a:t> </a:t>
+            </a:r>
+            <a:r>
+              <a:rPr sz="1050" b="0" dirty="0" err="1">
+                <a:solidFill>
+                  <a:srgbClr val="595959"/>
+                </a:solidFill>
+                <a:latin typeface="맑은 고딕"/>
+              </a:rPr>
+              <a:t>즉시</a:t>
+            </a:r>
+            <a:r>
+              <a:rPr sz="1050" b="0" dirty="0">
+                <a:solidFill>
+                  <a:srgbClr val="595959"/>
+                </a:solidFill>
+                <a:latin typeface="맑은 고딕"/>
+              </a:rPr>
+              <a:t> </a:t>
+            </a:r>
+            <a:r>
+              <a:rPr sz="1050" b="0" dirty="0" err="1">
+                <a:solidFill>
+                  <a:srgbClr val="595959"/>
+                </a:solidFill>
+                <a:latin typeface="맑은 고딕"/>
+              </a:rPr>
+              <a:t>반영된다</a:t>
+            </a:r>
+            <a:r>
+              <a:rPr sz="1050" b="0" dirty="0">
+                <a:solidFill>
+                  <a:srgbClr val="595959"/>
+                </a:solidFill>
+                <a:latin typeface="맑은 고딕"/>
+              </a:rPr>
+              <a:t>.</a:t>
             </a:r>
           </a:p>
         </p:txBody>
@@ -14040,7 +17946,7 @@
                 </a:solidFill>
                 <a:latin typeface="맑은 고딕"/>
               </a:rPr>
-              <a:t>LG 화학 1동 ECS  |  화면설계서  |  Ver 2.0</a:t>
+              <a:t>LG 화학 1동 ECS  |  화면설계서  |  Ver 1.1</a:t>
             </a:r>
           </a:p>
         </p:txBody>
@@ -14382,7 +18288,7 @@
                 </a:solidFill>
                 <a:latin typeface="맑은 고딕"/>
               </a:rPr>
-              <a:t>LG 화학 1동 ECS  |  화면설계서  |  Ver 2.0</a:t>
+              <a:t>LG 화학 1동 ECS  |  화면설계서  |  Ver 1.1</a:t>
             </a:r>
           </a:p>
         </p:txBody>
@@ -14482,35 +18388,6 @@
           </a:p>
         </p:txBody>
       </p:sp>
-      <p:pic>
-        <p:nvPicPr>
-          <p:cNvPr id="3" name="Picture 2" descr="layout.png"/>
-          <p:cNvPicPr>
-            <a:picLocks noChangeAspect="1"/>
-          </p:cNvPicPr>
-          <p:nvPr/>
-        </p:nvPicPr>
-        <p:blipFill>
-          <a:blip r:embed="rId2"/>
-          <a:stretch>
-            <a:fillRect/>
-          </a:stretch>
-        </p:blipFill>
-        <p:spPr>
-          <a:xfrm>
-            <a:off x="457200" y="1097280"/>
-            <a:ext cx="5212080" cy="3927032"/>
-          </a:xfrm>
-          <a:prstGeom prst="rect">
-            <a:avLst/>
-          </a:prstGeom>
-          <a:ln>
-            <a:solidFill>
-              <a:srgbClr val="C8CEDA"/>
-            </a:solidFill>
-          </a:ln>
-        </p:spPr>
-      </p:pic>
       <p:graphicFrame>
         <p:nvGraphicFramePr>
           <p:cNvPr id="4" name="Table 3"/>
@@ -15143,7 +19020,7 @@
                 </a:solidFill>
                 <a:latin typeface="맑은 고딕"/>
               </a:rPr>
-              <a:t>LG 화학 1동 ECS  |  화면설계서  |  Ver 2.0</a:t>
+              <a:t>LG 화학 1동 ECS  |  화면설계서  |  Ver 1.1</a:t>
             </a:r>
           </a:p>
         </p:txBody>
@@ -15183,6 +19060,30 @@
           </a:p>
         </p:txBody>
       </p:sp>
+      <p:pic>
+        <p:nvPicPr>
+          <p:cNvPr id="8" name="Picture 7" descr="image.png"/>
+          <p:cNvPicPr>
+            <a:picLocks noChangeAspect="1"/>
+          </p:cNvPicPr>
+          <p:nvPr/>
+        </p:nvPicPr>
+        <p:blipFill>
+          <a:blip r:embed="rId3"/>
+          <a:stretch>
+            <a:fillRect/>
+          </a:stretch>
+        </p:blipFill>
+        <p:spPr>
+          <a:xfrm>
+            <a:off x="457200" y="1097280"/>
+            <a:ext cx="5212080" cy="2821415"/>
+          </a:xfrm>
+          <a:prstGeom prst="rect">
+            <a:avLst/>
+          </a:prstGeom>
+        </p:spPr>
+      </p:pic>
     </p:spTree>
   </p:cSld>
   <p:clrMapOvr>

--- a/docs/산출물_20260921/06_ECS_화면설계서.pptx
+++ b/docs/산출물_20260921/06_ECS_화면설계서.pptx
@@ -3258,7 +3258,7 @@
                 </a:solidFill>
                 <a:latin typeface="맑은 고딕"/>
               </a:rPr>
-              <a:t>ECS Renewal   ·   Ver 1.1   ·   2026-09-21</a:t>
+              <a:t>ECS Renewal   ·   Ver 1.3   ·   2026-09-21</a:t>
             </a:r>
           </a:p>
         </p:txBody>
@@ -3592,7 +3592,7 @@
                 </a:solidFill>
                 <a:latin typeface="맑은 고딕"/>
               </a:rPr>
-              <a:t>LG 화학 1동 ECS  |  화면설계서  |  Ver 1.1</a:t>
+              <a:t>LG 화학 1동 ECS  |  화면설계서  |  Ver 1.3</a:t>
             </a:r>
           </a:p>
         </p:txBody>
@@ -3917,7 +3917,7 @@
                 </a:solidFill>
                 <a:latin typeface="맑은 고딕"/>
               </a:rPr>
-              <a:t>LG 화학 1동 ECS  |  화면설계서  |  Ver 1.1</a:t>
+              <a:t>LG 화학 1동 ECS  |  화면설계서  |  Ver 1.3</a:t>
             </a:r>
           </a:p>
         </p:txBody>
@@ -4254,7 +4254,7 @@
                 </a:solidFill>
                 <a:latin typeface="맑은 고딕"/>
               </a:rPr>
-              <a:t>LG 화학 1동 ECS  |  화면설계서  |  Ver 1.1</a:t>
+              <a:t>LG 화학 1동 ECS  |  화면설계서  |  Ver 1.3</a:t>
             </a:r>
           </a:p>
         </p:txBody>
@@ -4591,7 +4591,7 @@
                 </a:solidFill>
                 <a:latin typeface="맑은 고딕"/>
               </a:rPr>
-              <a:t>LG 화학 1동 ECS  |  화면설계서  |  Ver 1.1</a:t>
+              <a:t>LG 화학 1동 ECS  |  화면설계서  |  Ver 1.3</a:t>
             </a:r>
           </a:p>
         </p:txBody>
@@ -4871,7 +4871,7 @@
                 </a:solidFill>
                 <a:latin typeface="맑은 고딕"/>
               </a:rPr>
-              <a:t>LG 화학 1동 ECS  |  화면설계서  |  Ver 1.1</a:t>
+              <a:t>LG 화학 1동 ECS  |  화면설계서  |  Ver 1.3</a:t>
             </a:r>
           </a:p>
         </p:txBody>
@@ -5160,7 +5160,7 @@
                 </a:solidFill>
                 <a:latin typeface="맑은 고딕"/>
               </a:rPr>
-              <a:t>LG 화학 1동 ECS  |  화면설계서  |  Ver 1.1</a:t>
+              <a:t>LG 화학 1동 ECS  |  화면설계서  |  Ver 1.3</a:t>
             </a:r>
           </a:p>
         </p:txBody>
@@ -5515,7 +5515,7 @@
                 </a:solidFill>
                 <a:latin typeface="맑은 고딕"/>
               </a:rPr>
-              <a:t>LG 화학 1동 ECS  |  화면설계서  |  Ver 1.1</a:t>
+              <a:t>LG 화학 1동 ECS  |  화면설계서  |  Ver 1.3</a:t>
             </a:r>
           </a:p>
         </p:txBody>
@@ -5795,7 +5795,7 @@
                 </a:solidFill>
                 <a:latin typeface="맑은 고딕"/>
               </a:rPr>
-              <a:t>LG 화학 1동 ECS  |  화면설계서  |  Ver 1.1</a:t>
+              <a:t>LG 화학 1동 ECS  |  화면설계서  |  Ver 1.3</a:t>
             </a:r>
           </a:p>
         </p:txBody>
@@ -6108,7 +6108,7 @@
                 </a:solidFill>
                 <a:latin typeface="맑은 고딕"/>
               </a:rPr>
-              <a:t>LG 화학 1동 ECS  |  화면설계서  |  Ver 1.1</a:t>
+              <a:t>LG 화학 1동 ECS  |  화면설계서  |  Ver 1.3</a:t>
             </a:r>
           </a:p>
         </p:txBody>
@@ -6433,7 +6433,7 @@
                 </a:solidFill>
                 <a:latin typeface="맑은 고딕"/>
               </a:rPr>
-              <a:t>LG 화학 1동 ECS  |  화면설계서  |  Ver 1.1</a:t>
+              <a:t>LG 화학 1동 ECS  |  화면설계서  |  Ver 1.3</a:t>
             </a:r>
           </a:p>
         </p:txBody>
@@ -7528,7 +7528,7 @@
                           </a:solidFill>
                           <a:latin typeface="맑은 고딕"/>
                         </a:rPr>
-                        <a:t>V1.1</a:t>
+                        <a:t>V1.3</a:t>
                       </a:r>
                     </a:p>
                   </a:txBody>
@@ -7664,7 +7664,7 @@
                 </a:solidFill>
                 <a:latin typeface="맑은 고딕"/>
               </a:rPr>
-              <a:t>LG 화학 1동 ECS  |  화면설계서  |  Ver 1.1</a:t>
+              <a:t>LG 화학 1동 ECS  |  화면설계서  |  Ver 1.3</a:t>
             </a:r>
           </a:p>
         </p:txBody>
@@ -7944,7 +7944,7 @@
                 </a:solidFill>
                 <a:latin typeface="맑은 고딕"/>
               </a:rPr>
-              <a:t>LG 화학 1동 ECS  |  화면설계서  |  Ver 1.1</a:t>
+              <a:t>LG 화학 1동 ECS  |  화면설계서  |  Ver 1.3</a:t>
             </a:r>
           </a:p>
         </p:txBody>
@@ -8224,7 +8224,7 @@
                 </a:solidFill>
                 <a:latin typeface="맑은 고딕"/>
               </a:rPr>
-              <a:t>LG 화학 1동 ECS  |  화면설계서  |  Ver 1.1</a:t>
+              <a:t>LG 화학 1동 ECS  |  화면설계서  |  Ver 1.3</a:t>
             </a:r>
           </a:p>
         </p:txBody>
@@ -9440,7 +9440,7 @@
                 </a:solidFill>
                 <a:latin typeface="맑은 고딕"/>
               </a:rPr>
-              <a:t>LG 화학 1동 ECS  |  화면설계서  |  Ver 1.1</a:t>
+              <a:t>LG 화학 1동 ECS  |  화면설계서  |  Ver 1.3</a:t>
             </a:r>
           </a:p>
         </p:txBody>
@@ -10908,7 +10908,7 @@
                 </a:solidFill>
                 <a:latin typeface="맑은 고딕"/>
               </a:rPr>
-              <a:t>LG 화학 1동 ECS  |  화면설계서  |  Ver 1.1</a:t>
+              <a:t>LG 화학 1동 ECS  |  화면설계서  |  Ver 1.3</a:t>
             </a:r>
           </a:p>
         </p:txBody>
@@ -12010,7 +12010,7 @@
                 </a:solidFill>
                 <a:latin typeface="맑은 고딕"/>
               </a:rPr>
-              <a:t>LG 화학 1동 ECS  |  화면설계서  |  Ver 1.1</a:t>
+              <a:t>LG 화학 1동 ECS  |  화면설계서  |  Ver 1.3</a:t>
             </a:r>
           </a:p>
         </p:txBody>
@@ -12911,7 +12911,7 @@
                 </a:solidFill>
                 <a:latin typeface="맑은 고딕"/>
               </a:rPr>
-              <a:t>LG 화학 1동 ECS  |  화면설계서  |  Ver 1.1</a:t>
+              <a:t>LG 화학 1동 ECS  |  화면설계서  |  Ver 1.3</a:t>
             </a:r>
           </a:p>
         </p:txBody>
@@ -12953,14 +12953,14 @@
       </p:sp>
       <p:pic>
         <p:nvPicPr>
-          <p:cNvPr id="8" name="Picture 7" descr="rtv_0_v20.png"/>
+          <p:cNvPr id="8" name="Picture 7" descr="rtv_0_v13.png"/>
           <p:cNvPicPr>
             <a:picLocks noChangeAspect="1"/>
           </p:cNvPicPr>
           <p:nvPr/>
         </p:nvPicPr>
         <p:blipFill>
-          <a:blip r:embed="rId2"/>
+          <a:blip r:embed="rId3"/>
           <a:stretch>
             <a:fillRect/>
           </a:stretch>
@@ -12968,7 +12968,7 @@
         <p:spPr>
           <a:xfrm>
             <a:off x="2183372" y="1280160"/>
-            <a:ext cx="4411495" cy="4668248"/>
+            <a:ext cx="4411495" cy="4450397"/>
           </a:xfrm>
           <a:prstGeom prst="rect">
             <a:avLst/>
@@ -14373,7 +14373,7 @@
                 </a:solidFill>
                 <a:latin typeface="맑은 고딕"/>
               </a:rPr>
-              <a:t>LG 화학 1동 ECS  |  화면설계서  |  Ver 1.1</a:t>
+              <a:t>LG 화학 1동 ECS  |  화면설계서  |  Ver 1.3</a:t>
             </a:r>
           </a:p>
         </p:txBody>
@@ -14503,7 +14503,7 @@
                 </a:solidFill>
                 <a:latin typeface="맑은 고딕"/>
               </a:rPr>
-              <a:t>LG 화학 1동 ECS  |  화면설계서  |  Ver 1.1</a:t>
+              <a:t>LG 화학 1동 ECS  |  화면설계서  |  Ver 1.3</a:t>
             </a:r>
           </a:p>
         </p:txBody>
@@ -15281,7 +15281,7 @@
                 </a:solidFill>
                 <a:latin typeface="맑은 고딕"/>
               </a:rPr>
-              <a:t>  |  Ver 1.1</a:t>
+              <a:t>  |  Ver 1.3</a:t>
             </a:r>
           </a:p>
         </p:txBody>
@@ -16339,7 +16339,7 @@
                 </a:solidFill>
                 <a:latin typeface="맑은 고딕"/>
               </a:rPr>
-              <a:t>LG 화학 1동 ECS  |  화면설계서  |  Ver 1.1</a:t>
+              <a:t>LG 화학 1동 ECS  |  화면설계서  |  Ver 1.3</a:t>
             </a:r>
           </a:p>
         </p:txBody>
@@ -17946,7 +17946,7 @@
                 </a:solidFill>
                 <a:latin typeface="맑은 고딕"/>
               </a:rPr>
-              <a:t>LG 화학 1동 ECS  |  화면설계서  |  Ver 1.1</a:t>
+              <a:t>LG 화학 1동 ECS  |  화면설계서  |  Ver 1.3</a:t>
             </a:r>
           </a:p>
         </p:txBody>
@@ -18288,7 +18288,7 @@
                 </a:solidFill>
                 <a:latin typeface="맑은 고딕"/>
               </a:rPr>
-              <a:t>LG 화학 1동 ECS  |  화면설계서  |  Ver 1.1</a:t>
+              <a:t>LG 화학 1동 ECS  |  화면설계서  |  Ver 1.3</a:t>
             </a:r>
           </a:p>
         </p:txBody>
@@ -19020,7 +19020,7 @@
                 </a:solidFill>
                 <a:latin typeface="맑은 고딕"/>
               </a:rPr>
-              <a:t>LG 화학 1동 ECS  |  화면설계서  |  Ver 1.1</a:t>
+              <a:t>LG 화학 1동 ECS  |  화면설계서  |  Ver 1.3</a:t>
             </a:r>
           </a:p>
         </p:txBody>

--- a/docs/산출물_20260921/06_ECS_화면설계서.pptx
+++ b/docs/산출물_20260921/06_ECS_화면설계서.pptx
@@ -4096,7 +4096,7 @@
         <p:spPr>
           <a:xfrm>
             <a:off x="8503920" y="1188720"/>
-            <a:ext cx="3291840" cy="5029200"/>
+            <a:ext cx="3291840" cy="2323713"/>
           </a:xfrm>
           <a:prstGeom prst="rect">
             <a:avLst/>
@@ -4111,30 +4111,72 @@
           <a:p>
             <a:pPr algn="l"/>
             <a:r>
-              <a:rPr sz="1300" b="1">
+              <a:rPr sz="1300" b="1" dirty="0">
                 <a:solidFill>
                   <a:srgbClr val="1E2761"/>
                 </a:solidFill>
                 <a:latin typeface="맑은 고딕"/>
               </a:rPr>
-              <a:t>■ 메뉴 Path</a:t>
-            </a:r>
-          </a:p>
-          <a:p>
-            <a:pPr algn="l"/>
-            <a:r>
-              <a:rPr sz="1100" b="0">
-                <a:solidFill>
-                  <a:srgbClr val="595959"/>
-                </a:solidFill>
-                <a:latin typeface="맑은 고딕"/>
-              </a:rPr>
-              <a:t>ECS ▷ 환경설정 ▷ 범례</a:t>
-            </a:r>
-          </a:p>
-          <a:p>
-            <a:pPr algn="l"/>
-            <a:endParaRPr sz="1100" b="0">
+              <a:t>■ </a:t>
+            </a:r>
+            <a:r>
+              <a:rPr sz="1300" b="1" dirty="0" err="1">
+                <a:solidFill>
+                  <a:srgbClr val="1E2761"/>
+                </a:solidFill>
+                <a:latin typeface="맑은 고딕"/>
+              </a:rPr>
+              <a:t>메뉴</a:t>
+            </a:r>
+            <a:r>
+              <a:rPr sz="1300" b="1" dirty="0">
+                <a:solidFill>
+                  <a:srgbClr val="1E2761"/>
+                </a:solidFill>
+                <a:latin typeface="맑은 고딕"/>
+              </a:rPr>
+              <a:t> Path</a:t>
+            </a:r>
+          </a:p>
+          <a:p>
+            <a:pPr algn="l"/>
+            <a:r>
+              <a:rPr sz="1100" b="0" dirty="0">
+                <a:solidFill>
+                  <a:srgbClr val="595959"/>
+                </a:solidFill>
+                <a:latin typeface="맑은 고딕"/>
+              </a:rPr>
+              <a:t>ECS ▷ </a:t>
+            </a:r>
+            <a:r>
+              <a:rPr sz="1100" b="0" dirty="0" err="1">
+                <a:solidFill>
+                  <a:srgbClr val="595959"/>
+                </a:solidFill>
+                <a:latin typeface="맑은 고딕"/>
+              </a:rPr>
+              <a:t>환경설정</a:t>
+            </a:r>
+            <a:r>
+              <a:rPr sz="1100" b="0" dirty="0">
+                <a:solidFill>
+                  <a:srgbClr val="595959"/>
+                </a:solidFill>
+                <a:latin typeface="맑은 고딕"/>
+              </a:rPr>
+              <a:t> ▷ </a:t>
+            </a:r>
+            <a:r>
+              <a:rPr sz="1100" b="0" dirty="0" err="1">
+                <a:solidFill>
+                  <a:srgbClr val="595959"/>
+                </a:solidFill>
+                <a:latin typeface="맑은 고딕"/>
+              </a:rPr>
+              <a:t>범례</a:t>
+            </a:r>
+            <a:endParaRPr sz="1100" b="0" dirty="0">
               <a:solidFill>
                 <a:srgbClr val="595959"/>
               </a:solidFill>
@@ -4143,31 +4185,7 @@
           </a:p>
           <a:p>
             <a:pPr algn="l"/>
-            <a:r>
-              <a:rPr sz="1300" b="1">
-                <a:solidFill>
-                  <a:srgbClr val="1E2761"/>
-                </a:solidFill>
-                <a:latin typeface="맑은 고딕"/>
-              </a:rPr>
-              <a:t>■ 프로그램 개요</a:t>
-            </a:r>
-          </a:p>
-          <a:p>
-            <a:pPr algn="l"/>
-            <a:r>
-              <a:rPr sz="1100" b="0">
-                <a:solidFill>
-                  <a:srgbClr val="595959"/>
-                </a:solidFill>
-                <a:latin typeface="맑은 고딕"/>
-              </a:rPr>
-              <a:t>메인 화면에서 쓰는 색(작업상태·CV 신호·CV/SC 상태·RAIL·반자동)을 확인·변경한다. 저장하면 Ecs.ini [USER] USER_COLOR_* 에 기록된다.</a:t>
-            </a:r>
-          </a:p>
-          <a:p>
-            <a:pPr algn="l"/>
-            <a:endParaRPr sz="1100" b="0">
+            <a:endParaRPr sz="1100" b="0" dirty="0">
               <a:solidFill>
                 <a:srgbClr val="595959"/>
               </a:solidFill>
@@ -4177,49 +4195,613 @@
           <a:p>
             <a:pPr algn="l"/>
             <a:r>
-              <a:rPr sz="1300" b="1">
+              <a:rPr sz="1300" b="1" dirty="0">
                 <a:solidFill>
                   <a:srgbClr val="1E2761"/>
                 </a:solidFill>
                 <a:latin typeface="맑은 고딕"/>
               </a:rPr>
-              <a:t>■ 특기사항</a:t>
-            </a:r>
-          </a:p>
-          <a:p>
-            <a:pPr algn="l"/>
-            <a:r>
-              <a:rPr sz="1000" b="0">
-                <a:solidFill>
-                  <a:srgbClr val="595959"/>
-                </a:solidFill>
-                <a:latin typeface="맑은 고딕"/>
-              </a:rPr>
-              <a:t>· 색을 바꾸면 메인 화면 설비와 왼쪽 범례 칸에 곧바로 반영된다.</a:t>
-            </a:r>
-          </a:p>
-          <a:p>
-            <a:pPr algn="l"/>
-            <a:r>
-              <a:rPr sz="1000" b="0">
-                <a:solidFill>
-                  <a:srgbClr val="595959"/>
-                </a:solidFill>
-                <a:latin typeface="맑은 고딕"/>
-              </a:rPr>
-              <a:t>· 크레인·RGV 포크 색도 범례를 따른다 : 작업없음 = 범례 "작업없음(정상)", 미가동 = 범례 "수동" 색 (2026-09-17 정합).</a:t>
-            </a:r>
-          </a:p>
-          <a:p>
-            <a:pPr algn="l"/>
-            <a:r>
-              <a:rPr sz="1000" b="0">
-                <a:solidFill>
-                  <a:srgbClr val="595959"/>
-                </a:solidFill>
-                <a:latin typeface="맑은 고딕"/>
-              </a:rPr>
-              <a:t>· RAIL 색은 정지 사유별로 나뉜다 : 입고금지 / 출고금지 / 입출고금지 / 에러 / 작업 중.</a:t>
+              <a:t>■ </a:t>
+            </a:r>
+            <a:r>
+              <a:rPr sz="1300" b="1" dirty="0" err="1">
+                <a:solidFill>
+                  <a:srgbClr val="1E2761"/>
+                </a:solidFill>
+                <a:latin typeface="맑은 고딕"/>
+              </a:rPr>
+              <a:t>프로그램</a:t>
+            </a:r>
+            <a:r>
+              <a:rPr sz="1300" b="1" dirty="0">
+                <a:solidFill>
+                  <a:srgbClr val="1E2761"/>
+                </a:solidFill>
+                <a:latin typeface="맑은 고딕"/>
+              </a:rPr>
+              <a:t> </a:t>
+            </a:r>
+            <a:r>
+              <a:rPr sz="1300" b="1" dirty="0" err="1">
+                <a:solidFill>
+                  <a:srgbClr val="1E2761"/>
+                </a:solidFill>
+                <a:latin typeface="맑은 고딕"/>
+              </a:rPr>
+              <a:t>개요</a:t>
+            </a:r>
+            <a:endParaRPr sz="1300" b="1" dirty="0">
+              <a:solidFill>
+                <a:srgbClr val="1E2761"/>
+              </a:solidFill>
+              <a:latin typeface="맑은 고딕"/>
+            </a:endParaRPr>
+          </a:p>
+          <a:p>
+            <a:pPr algn="l"/>
+            <a:r>
+              <a:rPr sz="1100" b="0" dirty="0" err="1">
+                <a:solidFill>
+                  <a:srgbClr val="595959"/>
+                </a:solidFill>
+                <a:latin typeface="맑은 고딕"/>
+              </a:rPr>
+              <a:t>메인</a:t>
+            </a:r>
+            <a:r>
+              <a:rPr sz="1100" b="0" dirty="0">
+                <a:solidFill>
+                  <a:srgbClr val="595959"/>
+                </a:solidFill>
+                <a:latin typeface="맑은 고딕"/>
+              </a:rPr>
+              <a:t> </a:t>
+            </a:r>
+            <a:r>
+              <a:rPr sz="1100" b="0" dirty="0" err="1">
+                <a:solidFill>
+                  <a:srgbClr val="595959"/>
+                </a:solidFill>
+                <a:latin typeface="맑은 고딕"/>
+              </a:rPr>
+              <a:t>화면에서</a:t>
+            </a:r>
+            <a:r>
+              <a:rPr sz="1100" b="0" dirty="0">
+                <a:solidFill>
+                  <a:srgbClr val="595959"/>
+                </a:solidFill>
+                <a:latin typeface="맑은 고딕"/>
+              </a:rPr>
+              <a:t> </a:t>
+            </a:r>
+            <a:r>
+              <a:rPr sz="1100" b="0" dirty="0" err="1">
+                <a:solidFill>
+                  <a:srgbClr val="595959"/>
+                </a:solidFill>
+                <a:latin typeface="맑은 고딕"/>
+              </a:rPr>
+              <a:t>쓰는</a:t>
+            </a:r>
+            <a:r>
+              <a:rPr sz="1100" b="0" dirty="0">
+                <a:solidFill>
+                  <a:srgbClr val="595959"/>
+                </a:solidFill>
+                <a:latin typeface="맑은 고딕"/>
+              </a:rPr>
+              <a:t> 색(</a:t>
+            </a:r>
+            <a:r>
+              <a:rPr sz="1100" b="0" dirty="0" err="1">
+                <a:solidFill>
+                  <a:srgbClr val="595959"/>
+                </a:solidFill>
+                <a:latin typeface="맑은 고딕"/>
+              </a:rPr>
+              <a:t>작업상태·CV</a:t>
+            </a:r>
+            <a:r>
+              <a:rPr sz="1100" b="0" dirty="0">
+                <a:solidFill>
+                  <a:srgbClr val="595959"/>
+                </a:solidFill>
+                <a:latin typeface="맑은 고딕"/>
+              </a:rPr>
+              <a:t> </a:t>
+            </a:r>
+            <a:r>
+              <a:rPr sz="1100" b="0" dirty="0" err="1">
+                <a:solidFill>
+                  <a:srgbClr val="595959"/>
+                </a:solidFill>
+                <a:latin typeface="맑은 고딕"/>
+              </a:rPr>
+              <a:t>신호·CV</a:t>
+            </a:r>
+            <a:r>
+              <a:rPr sz="1100" b="0" dirty="0">
+                <a:solidFill>
+                  <a:srgbClr val="595959"/>
+                </a:solidFill>
+                <a:latin typeface="맑은 고딕"/>
+              </a:rPr>
+              <a:t>/SC </a:t>
+            </a:r>
+            <a:r>
+              <a:rPr sz="1100" b="0" dirty="0" err="1">
+                <a:solidFill>
+                  <a:srgbClr val="595959"/>
+                </a:solidFill>
+                <a:latin typeface="맑은 고딕"/>
+              </a:rPr>
+              <a:t>상태·RAIL·반자동</a:t>
+            </a:r>
+            <a:r>
+              <a:rPr sz="1100" b="0" dirty="0">
+                <a:solidFill>
+                  <a:srgbClr val="595959"/>
+                </a:solidFill>
+                <a:latin typeface="맑은 고딕"/>
+              </a:rPr>
+              <a:t>)을 </a:t>
+            </a:r>
+            <a:r>
+              <a:rPr sz="1100" b="0" dirty="0" err="1">
+                <a:solidFill>
+                  <a:srgbClr val="595959"/>
+                </a:solidFill>
+                <a:latin typeface="맑은 고딕"/>
+              </a:rPr>
+              <a:t>확인·변경한다</a:t>
+            </a:r>
+            <a:r>
+              <a:rPr sz="1100" b="0" dirty="0">
+                <a:solidFill>
+                  <a:srgbClr val="595959"/>
+                </a:solidFill>
+                <a:latin typeface="맑은 고딕"/>
+              </a:rPr>
+              <a:t>. </a:t>
+            </a:r>
+            <a:r>
+              <a:rPr sz="1100" b="0" dirty="0" err="1">
+                <a:solidFill>
+                  <a:srgbClr val="595959"/>
+                </a:solidFill>
+                <a:latin typeface="맑은 고딕"/>
+              </a:rPr>
+              <a:t>저장하면</a:t>
+            </a:r>
+            <a:r>
+              <a:rPr sz="1100" b="0" dirty="0">
+                <a:solidFill>
+                  <a:srgbClr val="595959"/>
+                </a:solidFill>
+                <a:latin typeface="맑은 고딕"/>
+              </a:rPr>
+              <a:t> Ecs.ini [USER] USER_COLOR_* 에 </a:t>
+            </a:r>
+            <a:r>
+              <a:rPr sz="1100" b="0" dirty="0" err="1">
+                <a:solidFill>
+                  <a:srgbClr val="595959"/>
+                </a:solidFill>
+                <a:latin typeface="맑은 고딕"/>
+              </a:rPr>
+              <a:t>기록된다</a:t>
+            </a:r>
+            <a:r>
+              <a:rPr sz="1100" b="0" dirty="0">
+                <a:solidFill>
+                  <a:srgbClr val="595959"/>
+                </a:solidFill>
+                <a:latin typeface="맑은 고딕"/>
+              </a:rPr>
+              <a:t>.</a:t>
+            </a:r>
+          </a:p>
+          <a:p>
+            <a:pPr algn="l"/>
+            <a:endParaRPr sz="1100" b="0" dirty="0">
+              <a:solidFill>
+                <a:srgbClr val="595959"/>
+              </a:solidFill>
+              <a:latin typeface="맑은 고딕"/>
+            </a:endParaRPr>
+          </a:p>
+          <a:p>
+            <a:pPr algn="l"/>
+            <a:r>
+              <a:rPr sz="1300" b="1" dirty="0">
+                <a:solidFill>
+                  <a:srgbClr val="1E2761"/>
+                </a:solidFill>
+                <a:latin typeface="맑은 고딕"/>
+              </a:rPr>
+              <a:t>■ </a:t>
+            </a:r>
+            <a:r>
+              <a:rPr sz="1300" b="1" dirty="0" err="1">
+                <a:solidFill>
+                  <a:srgbClr val="1E2761"/>
+                </a:solidFill>
+                <a:latin typeface="맑은 고딕"/>
+              </a:rPr>
+              <a:t>특기사항</a:t>
+            </a:r>
+            <a:endParaRPr sz="1300" b="1" dirty="0">
+              <a:solidFill>
+                <a:srgbClr val="1E2761"/>
+              </a:solidFill>
+              <a:latin typeface="맑은 고딕"/>
+            </a:endParaRPr>
+          </a:p>
+          <a:p>
+            <a:pPr algn="l"/>
+            <a:r>
+              <a:rPr sz="1000" b="0" dirty="0">
+                <a:solidFill>
+                  <a:srgbClr val="595959"/>
+                </a:solidFill>
+                <a:latin typeface="맑은 고딕"/>
+              </a:rPr>
+              <a:t>· </a:t>
+            </a:r>
+            <a:r>
+              <a:rPr sz="1000" b="0" dirty="0" err="1">
+                <a:solidFill>
+                  <a:srgbClr val="595959"/>
+                </a:solidFill>
+                <a:latin typeface="맑은 고딕"/>
+              </a:rPr>
+              <a:t>색을</a:t>
+            </a:r>
+            <a:r>
+              <a:rPr sz="1000" b="0" dirty="0">
+                <a:solidFill>
+                  <a:srgbClr val="595959"/>
+                </a:solidFill>
+                <a:latin typeface="맑은 고딕"/>
+              </a:rPr>
+              <a:t> </a:t>
+            </a:r>
+            <a:r>
+              <a:rPr sz="1000" b="0" dirty="0" err="1">
+                <a:solidFill>
+                  <a:srgbClr val="595959"/>
+                </a:solidFill>
+                <a:latin typeface="맑은 고딕"/>
+              </a:rPr>
+              <a:t>바꾸면</a:t>
+            </a:r>
+            <a:r>
+              <a:rPr sz="1000" b="0" dirty="0">
+                <a:solidFill>
+                  <a:srgbClr val="595959"/>
+                </a:solidFill>
+                <a:latin typeface="맑은 고딕"/>
+              </a:rPr>
+              <a:t> </a:t>
+            </a:r>
+            <a:r>
+              <a:rPr sz="1000" b="0" dirty="0" err="1">
+                <a:solidFill>
+                  <a:srgbClr val="595959"/>
+                </a:solidFill>
+                <a:latin typeface="맑은 고딕"/>
+              </a:rPr>
+              <a:t>메인</a:t>
+            </a:r>
+            <a:r>
+              <a:rPr sz="1000" b="0" dirty="0">
+                <a:solidFill>
+                  <a:srgbClr val="595959"/>
+                </a:solidFill>
+                <a:latin typeface="맑은 고딕"/>
+              </a:rPr>
+              <a:t> </a:t>
+            </a:r>
+            <a:r>
+              <a:rPr sz="1000" b="0" dirty="0" err="1">
+                <a:solidFill>
+                  <a:srgbClr val="595959"/>
+                </a:solidFill>
+                <a:latin typeface="맑은 고딕"/>
+              </a:rPr>
+              <a:t>화면</a:t>
+            </a:r>
+            <a:r>
+              <a:rPr sz="1000" b="0" dirty="0">
+                <a:solidFill>
+                  <a:srgbClr val="595959"/>
+                </a:solidFill>
+                <a:latin typeface="맑은 고딕"/>
+              </a:rPr>
+              <a:t> </a:t>
+            </a:r>
+            <a:r>
+              <a:rPr sz="1000" b="0" dirty="0" err="1">
+                <a:solidFill>
+                  <a:srgbClr val="595959"/>
+                </a:solidFill>
+                <a:latin typeface="맑은 고딕"/>
+              </a:rPr>
+              <a:t>설비와</a:t>
+            </a:r>
+            <a:r>
+              <a:rPr sz="1000" b="0" dirty="0">
+                <a:solidFill>
+                  <a:srgbClr val="595959"/>
+                </a:solidFill>
+                <a:latin typeface="맑은 고딕"/>
+              </a:rPr>
+              <a:t> </a:t>
+            </a:r>
+            <a:r>
+              <a:rPr sz="1000" b="0" dirty="0" err="1">
+                <a:solidFill>
+                  <a:srgbClr val="595959"/>
+                </a:solidFill>
+                <a:latin typeface="맑은 고딕"/>
+              </a:rPr>
+              <a:t>왼쪽</a:t>
+            </a:r>
+            <a:r>
+              <a:rPr sz="1000" b="0" dirty="0">
+                <a:solidFill>
+                  <a:srgbClr val="595959"/>
+                </a:solidFill>
+                <a:latin typeface="맑은 고딕"/>
+              </a:rPr>
+              <a:t> </a:t>
+            </a:r>
+            <a:r>
+              <a:rPr sz="1000" b="0" dirty="0" err="1">
+                <a:solidFill>
+                  <a:srgbClr val="595959"/>
+                </a:solidFill>
+                <a:latin typeface="맑은 고딕"/>
+              </a:rPr>
+              <a:t>범례</a:t>
+            </a:r>
+            <a:r>
+              <a:rPr sz="1000" b="0" dirty="0">
+                <a:solidFill>
+                  <a:srgbClr val="595959"/>
+                </a:solidFill>
+                <a:latin typeface="맑은 고딕"/>
+              </a:rPr>
+              <a:t> </a:t>
+            </a:r>
+            <a:r>
+              <a:rPr sz="1000" b="0" dirty="0" err="1">
+                <a:solidFill>
+                  <a:srgbClr val="595959"/>
+                </a:solidFill>
+                <a:latin typeface="맑은 고딕"/>
+              </a:rPr>
+              <a:t>칸에</a:t>
+            </a:r>
+            <a:r>
+              <a:rPr sz="1000" b="0" dirty="0">
+                <a:solidFill>
+                  <a:srgbClr val="595959"/>
+                </a:solidFill>
+                <a:latin typeface="맑은 고딕"/>
+              </a:rPr>
+              <a:t> </a:t>
+            </a:r>
+            <a:r>
+              <a:rPr sz="1000" b="0" dirty="0" err="1">
+                <a:solidFill>
+                  <a:srgbClr val="595959"/>
+                </a:solidFill>
+                <a:latin typeface="맑은 고딕"/>
+              </a:rPr>
+              <a:t>곧바로</a:t>
+            </a:r>
+            <a:r>
+              <a:rPr sz="1000" b="0" dirty="0">
+                <a:solidFill>
+                  <a:srgbClr val="595959"/>
+                </a:solidFill>
+                <a:latin typeface="맑은 고딕"/>
+              </a:rPr>
+              <a:t> </a:t>
+            </a:r>
+            <a:r>
+              <a:rPr sz="1000" b="0" dirty="0" err="1">
+                <a:solidFill>
+                  <a:srgbClr val="595959"/>
+                </a:solidFill>
+                <a:latin typeface="맑은 고딕"/>
+              </a:rPr>
+              <a:t>반영된다</a:t>
+            </a:r>
+            <a:r>
+              <a:rPr sz="1000" b="0" dirty="0">
+                <a:solidFill>
+                  <a:srgbClr val="595959"/>
+                </a:solidFill>
+                <a:latin typeface="맑은 고딕"/>
+              </a:rPr>
+              <a:t>.</a:t>
+            </a:r>
+          </a:p>
+          <a:p>
+            <a:pPr algn="l"/>
+            <a:r>
+              <a:rPr sz="1000" b="0" dirty="0">
+                <a:solidFill>
+                  <a:srgbClr val="595959"/>
+                </a:solidFill>
+                <a:latin typeface="맑은 고딕"/>
+              </a:rPr>
+              <a:t>· RAIL </a:t>
+            </a:r>
+            <a:r>
+              <a:rPr sz="1000" b="0" dirty="0" err="1">
+                <a:solidFill>
+                  <a:srgbClr val="595959"/>
+                </a:solidFill>
+                <a:latin typeface="맑은 고딕"/>
+              </a:rPr>
+              <a:t>색은</a:t>
+            </a:r>
+            <a:r>
+              <a:rPr sz="1000" b="0" dirty="0">
+                <a:solidFill>
+                  <a:srgbClr val="595959"/>
+                </a:solidFill>
+                <a:latin typeface="맑은 고딕"/>
+              </a:rPr>
+              <a:t> </a:t>
+            </a:r>
+            <a:r>
+              <a:rPr sz="1000" b="0" dirty="0" err="1">
+                <a:solidFill>
+                  <a:srgbClr val="595959"/>
+                </a:solidFill>
+                <a:latin typeface="맑은 고딕"/>
+              </a:rPr>
+              <a:t>정지</a:t>
+            </a:r>
+            <a:r>
+              <a:rPr sz="1000" b="0" dirty="0">
+                <a:solidFill>
+                  <a:srgbClr val="595959"/>
+                </a:solidFill>
+                <a:latin typeface="맑은 고딕"/>
+              </a:rPr>
+              <a:t> </a:t>
+            </a:r>
+            <a:r>
+              <a:rPr sz="1000" b="0" dirty="0" err="1">
+                <a:solidFill>
+                  <a:srgbClr val="595959"/>
+                </a:solidFill>
+                <a:latin typeface="맑은 고딕"/>
+              </a:rPr>
+              <a:t>사유별로</a:t>
+            </a:r>
+            <a:r>
+              <a:rPr sz="1000" b="0" dirty="0">
+                <a:solidFill>
+                  <a:srgbClr val="595959"/>
+                </a:solidFill>
+                <a:latin typeface="맑은 고딕"/>
+              </a:rPr>
+              <a:t> </a:t>
+            </a:r>
+            <a:r>
+              <a:rPr sz="1000" b="0" dirty="0" err="1">
+                <a:solidFill>
+                  <a:srgbClr val="595959"/>
+                </a:solidFill>
+                <a:latin typeface="맑은 고딕"/>
+              </a:rPr>
+              <a:t>나뉜다</a:t>
+            </a:r>
+            <a:r>
+              <a:rPr sz="1000" b="0" dirty="0">
+                <a:solidFill>
+                  <a:srgbClr val="595959"/>
+                </a:solidFill>
+                <a:latin typeface="맑은 고딕"/>
+              </a:rPr>
+              <a:t> : </a:t>
+            </a:r>
+            <a:r>
+              <a:rPr sz="1000" b="0" dirty="0" err="1">
+                <a:solidFill>
+                  <a:srgbClr val="595959"/>
+                </a:solidFill>
+                <a:latin typeface="맑은 고딕"/>
+              </a:rPr>
+              <a:t>입고금지</a:t>
+            </a:r>
+            <a:r>
+              <a:rPr sz="1000" b="0" dirty="0">
+                <a:solidFill>
+                  <a:srgbClr val="595959"/>
+                </a:solidFill>
+                <a:latin typeface="맑은 고딕"/>
+              </a:rPr>
+              <a:t> / </a:t>
+            </a:r>
+            <a:r>
+              <a:rPr sz="1000" b="0" dirty="0" err="1">
+                <a:solidFill>
+                  <a:srgbClr val="595959"/>
+                </a:solidFill>
+                <a:latin typeface="맑은 고딕"/>
+              </a:rPr>
+              <a:t>출고금지</a:t>
+            </a:r>
+            <a:r>
+              <a:rPr sz="1000" b="0" dirty="0">
+                <a:solidFill>
+                  <a:srgbClr val="595959"/>
+                </a:solidFill>
+                <a:latin typeface="맑은 고딕"/>
+              </a:rPr>
+              <a:t> / </a:t>
+            </a:r>
+            <a:r>
+              <a:rPr sz="1000" b="0" dirty="0" err="1">
+                <a:solidFill>
+                  <a:srgbClr val="595959"/>
+                </a:solidFill>
+                <a:latin typeface="맑은 고딕"/>
+              </a:rPr>
+              <a:t>입출고금지</a:t>
+            </a:r>
+            <a:r>
+              <a:rPr sz="1000" b="0" dirty="0">
+                <a:solidFill>
+                  <a:srgbClr val="595959"/>
+                </a:solidFill>
+                <a:latin typeface="맑은 고딕"/>
+              </a:rPr>
+              <a:t> / </a:t>
+            </a:r>
+            <a:r>
+              <a:rPr sz="1000" b="0" dirty="0" err="1">
+                <a:solidFill>
+                  <a:srgbClr val="595959"/>
+                </a:solidFill>
+                <a:latin typeface="맑은 고딕"/>
+              </a:rPr>
+              <a:t>에러</a:t>
+            </a:r>
+            <a:r>
+              <a:rPr sz="1000" b="0" dirty="0">
+                <a:solidFill>
+                  <a:srgbClr val="595959"/>
+                </a:solidFill>
+                <a:latin typeface="맑은 고딕"/>
+              </a:rPr>
+              <a:t> / </a:t>
+            </a:r>
+            <a:r>
+              <a:rPr sz="1000" b="0" dirty="0" err="1">
+                <a:solidFill>
+                  <a:srgbClr val="595959"/>
+                </a:solidFill>
+                <a:latin typeface="맑은 고딕"/>
+              </a:rPr>
+              <a:t>작업</a:t>
+            </a:r>
+            <a:r>
+              <a:rPr sz="1000" b="0" dirty="0">
+                <a:solidFill>
+                  <a:srgbClr val="595959"/>
+                </a:solidFill>
+                <a:latin typeface="맑은 고딕"/>
+              </a:rPr>
+              <a:t> 중.</a:t>
             </a:r>
           </a:p>
         </p:txBody>
@@ -9126,13 +9708,67 @@
               <a:t>. [STOP] 은 </a:t>
             </a:r>
             <a:r>
+              <a:rPr lang="ko-KR" altLang="en-US" sz="1000" b="0" dirty="0">
+                <a:solidFill>
+                  <a:srgbClr val="595959"/>
+                </a:solidFill>
+                <a:latin typeface="맑은 고딕"/>
+              </a:rPr>
+              <a:t>더 이상 알람을 </a:t>
+            </a:r>
+            <a:r>
+              <a:rPr lang="ko-KR" altLang="en-US" sz="1000" b="0" dirty="0" err="1">
+                <a:solidFill>
+                  <a:srgbClr val="595959"/>
+                </a:solidFill>
+                <a:latin typeface="맑은 고딕"/>
+              </a:rPr>
+              <a:t>팝업하지</a:t>
+            </a:r>
+            <a:r>
+              <a:rPr lang="ko-KR" altLang="en-US" sz="1000" b="0" dirty="0">
+                <a:solidFill>
+                  <a:srgbClr val="595959"/>
+                </a:solidFill>
+                <a:latin typeface="맑은 고딕"/>
+              </a:rPr>
+              <a:t> 않는다</a:t>
+            </a:r>
+            <a:r>
+              <a:rPr lang="en-US" altLang="ko-KR" sz="1000" b="0" dirty="0">
+                <a:solidFill>
+                  <a:srgbClr val="595959"/>
+                </a:solidFill>
+                <a:latin typeface="맑은 고딕"/>
+              </a:rPr>
+              <a:t>.</a:t>
+            </a:r>
+            <a:endParaRPr sz="1000" b="0" dirty="0">
+              <a:solidFill>
+                <a:srgbClr val="595959"/>
+              </a:solidFill>
+              <a:latin typeface="맑은 고딕"/>
+            </a:endParaRPr>
+          </a:p>
+          <a:p>
+            <a:pPr algn="l"/>
+            <a:r>
+              <a:rPr sz="1000" b="0" dirty="0">
+                <a:solidFill>
+                  <a:srgbClr val="595959"/>
+                </a:solidFill>
+                <a:latin typeface="맑은 고딕"/>
+              </a:rPr>
+              <a:t>· </a:t>
+            </a:r>
+            <a:r>
               <a:rPr sz="1000" b="0" dirty="0" err="1">
                 <a:solidFill>
                   <a:srgbClr val="595959"/>
                 </a:solidFill>
                 <a:latin typeface="맑은 고딕"/>
               </a:rPr>
-              <a:t>숨긴다</a:t>
+              <a:t>체류는</a:t>
             </a:r>
             <a:r>
               <a:rPr sz="1000" b="0" dirty="0">
@@ -9141,11 +9777,17 @@
                 </a:solidFill>
                 <a:latin typeface="맑은 고딕"/>
               </a:rPr>
-              <a:t>.</a:t>
-            </a:r>
-          </a:p>
-          <a:p>
-            <a:pPr algn="l"/>
+              <a:t> </a:t>
+            </a:r>
+            <a:r>
+              <a:rPr sz="1000" b="0" dirty="0" err="1">
+                <a:solidFill>
+                  <a:srgbClr val="595959"/>
+                </a:solidFill>
+                <a:latin typeface="맑은 고딕"/>
+              </a:rPr>
+              <a:t>경고만</a:t>
+            </a:r>
             <a:r>
               <a:rPr sz="1000" b="0" dirty="0">
                 <a:solidFill>
@@ -9153,7 +9795,7 @@
                 </a:solidFill>
                 <a:latin typeface="맑은 고딕"/>
               </a:rPr>
-              <a:t>· </a:t>
+              <a:t> </a:t>
             </a:r>
             <a:r>
               <a:rPr sz="1000" b="0" dirty="0" err="1">
@@ -9162,7 +9804,7 @@
                 </a:solidFill>
                 <a:latin typeface="맑은 고딕"/>
               </a:rPr>
-              <a:t>체류는</a:t>
+              <a:t>한다</a:t>
             </a:r>
             <a:r>
               <a:rPr sz="1000" b="0" dirty="0">
@@ -9174,13 +9816,13 @@
               <a:t> </a:t>
             </a:r>
             <a:r>
-              <a:rPr sz="1000" b="0" dirty="0" err="1">
-                <a:solidFill>
-                  <a:srgbClr val="595959"/>
-                </a:solidFill>
-                <a:latin typeface="맑은 고딕"/>
-              </a:rPr>
-              <a:t>경고만</a:t>
+              <a:rPr lang="en-US" altLang="ko-KR" sz="1000" b="0" dirty="0">
+                <a:solidFill>
+                  <a:srgbClr val="595959"/>
+                </a:solidFill>
+                <a:latin typeface="맑은 고딕"/>
+              </a:rPr>
+              <a:t>–</a:t>
             </a:r>
             <a:r>
               <a:rPr sz="1000" b="0" dirty="0">
@@ -9190,24 +9832,6 @@
                 <a:latin typeface="맑은 고딕"/>
               </a:rPr>
               <a:t> </a:t>
-            </a:r>
-            <a:r>
-              <a:rPr sz="1000" b="0" dirty="0" err="1">
-                <a:solidFill>
-                  <a:srgbClr val="595959"/>
-                </a:solidFill>
-                <a:latin typeface="맑은 고딕"/>
-              </a:rPr>
-              <a:t>한다</a:t>
-            </a:r>
-            <a:r>
-              <a:rPr sz="1000" b="0" dirty="0">
-                <a:solidFill>
-                  <a:srgbClr val="595959"/>
-                </a:solidFill>
-                <a:latin typeface="맑은 고딕"/>
-              </a:rPr>
-              <a:t> - </a:t>
             </a:r>
             <a:r>
               <a:rPr sz="1000" b="0" dirty="0" err="1">
@@ -11087,7 +11711,7 @@
         <p:spPr>
           <a:xfrm>
             <a:off x="8503920" y="1188720"/>
-            <a:ext cx="3291840" cy="2785378"/>
+            <a:ext cx="3291840" cy="2477601"/>
           </a:xfrm>
           <a:prstGeom prst="rect">
             <a:avLst/>
@@ -11444,24 +12068,6 @@
                 </a:solidFill>
                 <a:latin typeface="맑은 고딕"/>
               </a:rPr>
-              <a:t>수동지시</a:t>
-            </a:r>
-            <a:r>
-              <a:rPr sz="1100" b="0" dirty="0">
-                <a:solidFill>
-                  <a:srgbClr val="595959"/>
-                </a:solidFill>
-                <a:latin typeface="맑은 고딕"/>
-              </a:rPr>
-              <a:t>, </a:t>
-            </a:r>
-            <a:r>
-              <a:rPr sz="1100" b="0" dirty="0" err="1">
-                <a:solidFill>
-                  <a:srgbClr val="595959"/>
-                </a:solidFill>
-                <a:latin typeface="맑은 고딕"/>
-              </a:rPr>
               <a:t>입출고상태</a:t>
             </a:r>
             <a:r>
@@ -11856,126 +12462,6 @@
                 <a:latin typeface="맑은 고딕"/>
               </a:rPr>
               <a:t> = Ecs.ini [SC_ERR] ERR_TYP(SC_LGLS).</a:t>
-            </a:r>
-          </a:p>
-          <a:p>
-            <a:pPr algn="l"/>
-            <a:r>
-              <a:rPr sz="1000" b="0" dirty="0">
-                <a:solidFill>
-                  <a:srgbClr val="595959"/>
-                </a:solidFill>
-                <a:latin typeface="맑은 고딕"/>
-              </a:rPr>
-              <a:t>· </a:t>
-            </a:r>
-            <a:r>
-              <a:rPr sz="1000" b="0" dirty="0" err="1">
-                <a:solidFill>
-                  <a:srgbClr val="595959"/>
-                </a:solidFill>
-                <a:latin typeface="맑은 고딕"/>
-              </a:rPr>
-              <a:t>에러</a:t>
-            </a:r>
-            <a:r>
-              <a:rPr sz="1000" b="0" dirty="0">
-                <a:solidFill>
-                  <a:srgbClr val="595959"/>
-                </a:solidFill>
-                <a:latin typeface="맑은 고딕"/>
-              </a:rPr>
-              <a:t> </a:t>
-            </a:r>
-            <a:r>
-              <a:rPr sz="1000" b="0" dirty="0" err="1">
-                <a:solidFill>
-                  <a:srgbClr val="595959"/>
-                </a:solidFill>
-                <a:latin typeface="맑은 고딕"/>
-              </a:rPr>
-              <a:t>해제</a:t>
-            </a:r>
-            <a:r>
-              <a:rPr sz="1000" b="0" dirty="0">
-                <a:solidFill>
-                  <a:srgbClr val="595959"/>
-                </a:solidFill>
-                <a:latin typeface="맑은 고딕"/>
-              </a:rPr>
-              <a:t> 시 </a:t>
-            </a:r>
-            <a:r>
-              <a:rPr sz="1000" b="0" dirty="0" err="1">
-                <a:solidFill>
-                  <a:srgbClr val="595959"/>
-                </a:solidFill>
-                <a:latin typeface="맑은 고딕"/>
-              </a:rPr>
-              <a:t>이중입고</a:t>
-            </a:r>
-            <a:r>
-              <a:rPr sz="1000" b="0" dirty="0">
-                <a:solidFill>
-                  <a:srgbClr val="595959"/>
-                </a:solidFill>
-                <a:latin typeface="맑은 고딕"/>
-              </a:rPr>
-              <a:t>(73·74)·</a:t>
-            </a:r>
-            <a:r>
-              <a:rPr sz="1000" b="0" dirty="0" err="1">
-                <a:solidFill>
-                  <a:srgbClr val="595959"/>
-                </a:solidFill>
-                <a:latin typeface="맑은 고딕"/>
-              </a:rPr>
-              <a:t>공출고</a:t>
-            </a:r>
-            <a:r>
-              <a:rPr sz="1000" b="0" dirty="0">
-                <a:solidFill>
-                  <a:srgbClr val="595959"/>
-                </a:solidFill>
-                <a:latin typeface="맑은 고딕"/>
-              </a:rPr>
-              <a:t>(75) </a:t>
-            </a:r>
-            <a:r>
-              <a:rPr sz="1000" b="0" dirty="0" err="1">
-                <a:solidFill>
-                  <a:srgbClr val="595959"/>
-                </a:solidFill>
-                <a:latin typeface="맑은 고딕"/>
-              </a:rPr>
-              <a:t>확인창은</a:t>
-            </a:r>
-            <a:r>
-              <a:rPr sz="1000" b="0" dirty="0">
-                <a:solidFill>
-                  <a:srgbClr val="595959"/>
-                </a:solidFill>
-                <a:latin typeface="맑은 고딕"/>
-              </a:rPr>
-              <a:t> Ecs.ini [SC_ERR] DUAL_CODES / EMPTY_CODES </a:t>
-            </a:r>
-            <a:r>
-              <a:rPr sz="1000" b="0" dirty="0" err="1">
-                <a:solidFill>
-                  <a:srgbClr val="595959"/>
-                </a:solidFill>
-                <a:latin typeface="맑은 고딕"/>
-              </a:rPr>
-              <a:t>기준</a:t>
-            </a:r>
-            <a:r>
-              <a:rPr sz="1000" b="0" dirty="0">
-                <a:solidFill>
-                  <a:srgbClr val="595959"/>
-                </a:solidFill>
-                <a:latin typeface="맑은 고딕"/>
-              </a:rPr>
-              <a:t>.</a:t>
             </a:r>
           </a:p>
         </p:txBody>
@@ -12189,7 +12675,7 @@
         <p:spPr>
           <a:xfrm>
             <a:off x="8503920" y="1188720"/>
-            <a:ext cx="3291840" cy="2154436"/>
+            <a:ext cx="3291840" cy="2000548"/>
           </a:xfrm>
           <a:prstGeom prst="rect">
             <a:avLst/>
@@ -12492,25 +12978,7 @@
                 </a:solidFill>
                 <a:latin typeface="맑은 고딕"/>
               </a:rPr>
-              <a:t> / </a:t>
-            </a:r>
-            <a:r>
-              <a:rPr sz="1100" b="0" dirty="0" err="1">
-                <a:solidFill>
-                  <a:srgbClr val="595959"/>
-                </a:solidFill>
-                <a:latin typeface="맑은 고딕"/>
-              </a:rPr>
-              <a:t>수동지시</a:t>
-            </a:r>
-            <a:r>
-              <a:rPr sz="1100" b="0" dirty="0">
-                <a:solidFill>
-                  <a:srgbClr val="595959"/>
-                </a:solidFill>
-                <a:latin typeface="맑은 고딕"/>
-              </a:rPr>
-              <a:t>, RTV </a:t>
+              <a:t> / RTV </a:t>
             </a:r>
             <a:r>
               <a:rPr sz="1100" b="0" dirty="0" err="1">
@@ -12603,7 +13071,7 @@
                 </a:solidFill>
                 <a:latin typeface="맑은 고딕"/>
               </a:rPr>
-              <a:t>운영모드</a:t>
+              <a:t>완료상태</a:t>
             </a:r>
             <a:r>
               <a:rPr sz="1000" b="0" dirty="0">
@@ -12621,7 +13089,7 @@
                 </a:solidFill>
                 <a:latin typeface="맑은 고딕"/>
               </a:rPr>
-              <a:t>완료상태</a:t>
+              <a:t>화물유무</a:t>
             </a:r>
             <a:r>
               <a:rPr sz="1000" b="0" dirty="0">
@@ -12639,7 +13107,7 @@
                 </a:solidFill>
                 <a:latin typeface="맑은 고딕"/>
               </a:rPr>
-              <a:t>화물유무</a:t>
+              <a:t>RTV상태</a:t>
             </a:r>
             <a:r>
               <a:rPr sz="1000" b="0" dirty="0">
@@ -12649,24 +13117,6 @@
                 <a:latin typeface="맑은 고딕"/>
               </a:rPr>
               <a:t> / </a:t>
-            </a:r>
-            <a:r>
-              <a:rPr sz="1000" b="0" dirty="0" err="1">
-                <a:solidFill>
-                  <a:srgbClr val="595959"/>
-                </a:solidFill>
-                <a:latin typeface="맑은 고딕"/>
-              </a:rPr>
-              <a:t>RTV상태</a:t>
-            </a:r>
-            <a:r>
-              <a:rPr sz="1000" b="0" dirty="0">
-                <a:solidFill>
-                  <a:srgbClr val="595959"/>
-                </a:solidFill>
-                <a:latin typeface="맑은 고딕"/>
-              </a:rPr>
-              <a:t> / ACTIVE / </a:t>
             </a:r>
             <a:r>
               <a:rPr sz="1000" b="0" dirty="0" err="1">
@@ -12960,7 +13410,7 @@
           <p:nvPr/>
         </p:nvPicPr>
         <p:blipFill>
-          <a:blip r:embed="rId3"/>
+          <a:blip r:embed="rId2"/>
           <a:stretch>
             <a:fillRect/>
           </a:stretch>
@@ -13700,7 +14150,7 @@
         <p:spPr>
           <a:xfrm>
             <a:off x="4343400" y="1097280"/>
-            <a:ext cx="3657600" cy="2046714"/>
+            <a:ext cx="3657600" cy="1708160"/>
           </a:xfrm>
           <a:prstGeom prst="rect">
             <a:avLst/>
@@ -14049,78 +14499,6 @@
                 <a:latin typeface="맑은 고딕"/>
               </a:rPr>
               <a:t>수동지시</a:t>
-            </a:r>
-            <a:endParaRPr sz="1100" b="0" dirty="0">
-              <a:solidFill>
-                <a:srgbClr val="595959"/>
-              </a:solidFill>
-              <a:latin typeface="맑은 고딕"/>
-            </a:endParaRPr>
-          </a:p>
-          <a:p>
-            <a:pPr algn="l"/>
-            <a:r>
-              <a:rPr sz="1100" b="0" dirty="0">
-                <a:solidFill>
-                  <a:srgbClr val="595959"/>
-                </a:solidFill>
-                <a:latin typeface="맑은 고딕"/>
-              </a:rPr>
-              <a:t>   </a:t>
-            </a:r>
-            <a:r>
-              <a:rPr sz="1100" b="0" dirty="0" err="1">
-                <a:solidFill>
-                  <a:srgbClr val="595959"/>
-                </a:solidFill>
-                <a:latin typeface="맑은 고딕"/>
-              </a:rPr>
-              <a:t>크레인</a:t>
-            </a:r>
-            <a:r>
-              <a:rPr sz="1100" b="0" dirty="0">
-                <a:solidFill>
-                  <a:srgbClr val="595959"/>
-                </a:solidFill>
-                <a:latin typeface="맑은 고딕"/>
-              </a:rPr>
-              <a:t> </a:t>
-            </a:r>
-            <a:r>
-              <a:rPr sz="1100" b="0" dirty="0" err="1">
-                <a:solidFill>
-                  <a:srgbClr val="595959"/>
-                </a:solidFill>
-                <a:latin typeface="맑은 고딕"/>
-              </a:rPr>
-              <a:t>수동작업</a:t>
-            </a:r>
-            <a:endParaRPr sz="1100" b="0" dirty="0">
-              <a:solidFill>
-                <a:srgbClr val="595959"/>
-              </a:solidFill>
-              <a:latin typeface="맑은 고딕"/>
-            </a:endParaRPr>
-          </a:p>
-          <a:p>
-            <a:pPr algn="l"/>
-            <a:r>
-              <a:rPr sz="1100" b="0" dirty="0">
-                <a:solidFill>
-                  <a:srgbClr val="595959"/>
-                </a:solidFill>
-                <a:latin typeface="맑은 고딕"/>
-              </a:rPr>
-              <a:t>   RTV(RGV) </a:t>
-            </a:r>
-            <a:r>
-              <a:rPr sz="1100" b="0" dirty="0" err="1">
-                <a:solidFill>
-                  <a:srgbClr val="595959"/>
-                </a:solidFill>
-                <a:latin typeface="맑은 고딕"/>
-              </a:rPr>
-              <a:t>수동작업</a:t>
             </a:r>
             <a:endParaRPr sz="1100" b="0" dirty="0">
               <a:solidFill>
@@ -14651,49 +15029,406 @@
           <a:p>
             <a:pPr algn="l"/>
             <a:r>
-              <a:rPr sz="1300" b="1">
+              <a:rPr sz="1300" b="1" dirty="0">
                 <a:solidFill>
                   <a:srgbClr val="1E2761"/>
                 </a:solidFill>
                 <a:latin typeface="맑은 고딕"/>
               </a:rPr>
-              <a:t>■ 프로그램 개요</a:t>
-            </a:r>
-          </a:p>
-          <a:p>
-            <a:pPr algn="l"/>
-            <a:r>
-              <a:rPr sz="1050" b="0">
-                <a:solidFill>
-                  <a:srgbClr val="595959"/>
-                </a:solidFill>
-                <a:latin typeface="맑은 고딕"/>
-              </a:rPr>
-              <a:t>· 1동 자동창고 전체 배치(랙 10열, 크레인 5대, RGV 1대, C/V#2~#15, 작업대)와 작업 진행을 실시간 표시한다.</a:t>
-            </a:r>
-          </a:p>
-          <a:p>
-            <a:pPr algn="l"/>
-            <a:r>
-              <a:rPr sz="1050" b="0">
-                <a:solidFill>
-                  <a:srgbClr val="595959"/>
-                </a:solidFill>
-                <a:latin typeface="맑은 고딕"/>
-              </a:rPr>
-              <a:t>· 실행 : Ecs.exe. 기동 시 [USER] DEFAULT_ID 로 자동 로그인한다.</a:t>
-            </a:r>
-          </a:p>
-          <a:p>
-            <a:pPr algn="l"/>
-            <a:r>
-              <a:rPr sz="1050" b="0">
-                <a:solidFill>
-                  <a:srgbClr val="595959"/>
-                </a:solidFill>
-                <a:latin typeface="맑은 고딕"/>
-              </a:rPr>
-              <a:t>· 설비 데이터는 [ETC] COLLECT_INTERVAL_MS=300 주기로 DB 에서 읽는다.</a:t>
+              <a:t>■ </a:t>
+            </a:r>
+            <a:r>
+              <a:rPr sz="1300" b="1" dirty="0" err="1">
+                <a:solidFill>
+                  <a:srgbClr val="1E2761"/>
+                </a:solidFill>
+                <a:latin typeface="맑은 고딕"/>
+              </a:rPr>
+              <a:t>프로그램</a:t>
+            </a:r>
+            <a:r>
+              <a:rPr sz="1300" b="1" dirty="0">
+                <a:solidFill>
+                  <a:srgbClr val="1E2761"/>
+                </a:solidFill>
+                <a:latin typeface="맑은 고딕"/>
+              </a:rPr>
+              <a:t> </a:t>
+            </a:r>
+            <a:r>
+              <a:rPr sz="1300" b="1" dirty="0" err="1">
+                <a:solidFill>
+                  <a:srgbClr val="1E2761"/>
+                </a:solidFill>
+                <a:latin typeface="맑은 고딕"/>
+              </a:rPr>
+              <a:t>개요</a:t>
+            </a:r>
+            <a:endParaRPr sz="1300" b="1" dirty="0">
+              <a:solidFill>
+                <a:srgbClr val="1E2761"/>
+              </a:solidFill>
+              <a:latin typeface="맑은 고딕"/>
+            </a:endParaRPr>
+          </a:p>
+          <a:p>
+            <a:pPr algn="l"/>
+            <a:r>
+              <a:rPr sz="1050" b="0" dirty="0">
+                <a:solidFill>
+                  <a:srgbClr val="595959"/>
+                </a:solidFill>
+                <a:latin typeface="맑은 고딕"/>
+              </a:rPr>
+              <a:t>· 1동 </a:t>
+            </a:r>
+            <a:r>
+              <a:rPr sz="1050" b="0" dirty="0" err="1">
+                <a:solidFill>
+                  <a:srgbClr val="595959"/>
+                </a:solidFill>
+                <a:latin typeface="맑은 고딕"/>
+              </a:rPr>
+              <a:t>자동창고</a:t>
+            </a:r>
+            <a:r>
+              <a:rPr sz="1050" b="0" dirty="0">
+                <a:solidFill>
+                  <a:srgbClr val="595959"/>
+                </a:solidFill>
+                <a:latin typeface="맑은 고딕"/>
+              </a:rPr>
+              <a:t> </a:t>
+            </a:r>
+            <a:r>
+              <a:rPr sz="1050" b="0" dirty="0" err="1">
+                <a:solidFill>
+                  <a:srgbClr val="595959"/>
+                </a:solidFill>
+                <a:latin typeface="맑은 고딕"/>
+              </a:rPr>
+              <a:t>전체</a:t>
+            </a:r>
+            <a:r>
+              <a:rPr sz="1050" b="0" dirty="0">
+                <a:solidFill>
+                  <a:srgbClr val="595959"/>
+                </a:solidFill>
+                <a:latin typeface="맑은 고딕"/>
+              </a:rPr>
+              <a:t> </a:t>
+            </a:r>
+            <a:r>
+              <a:rPr sz="1050" b="0" dirty="0" err="1">
+                <a:solidFill>
+                  <a:srgbClr val="595959"/>
+                </a:solidFill>
+                <a:latin typeface="맑은 고딕"/>
+              </a:rPr>
+              <a:t>배치</a:t>
+            </a:r>
+            <a:r>
+              <a:rPr sz="1050" b="0" dirty="0">
+                <a:solidFill>
+                  <a:srgbClr val="595959"/>
+                </a:solidFill>
+                <a:latin typeface="맑은 고딕"/>
+              </a:rPr>
+              <a:t>(랙 10열, </a:t>
+            </a:r>
+            <a:r>
+              <a:rPr sz="1050" b="0" dirty="0" err="1">
+                <a:solidFill>
+                  <a:srgbClr val="595959"/>
+                </a:solidFill>
+                <a:latin typeface="맑은 고딕"/>
+              </a:rPr>
+              <a:t>크레인</a:t>
+            </a:r>
+            <a:r>
+              <a:rPr sz="1050" b="0" dirty="0">
+                <a:solidFill>
+                  <a:srgbClr val="595959"/>
+                </a:solidFill>
+                <a:latin typeface="맑은 고딕"/>
+              </a:rPr>
+              <a:t> 5대, RGV 1대, C/V#2~#15, </a:t>
+            </a:r>
+            <a:r>
+              <a:rPr sz="1050" b="0" dirty="0" err="1">
+                <a:solidFill>
+                  <a:srgbClr val="595959"/>
+                </a:solidFill>
+                <a:latin typeface="맑은 고딕"/>
+              </a:rPr>
+              <a:t>작업대</a:t>
+            </a:r>
+            <a:r>
+              <a:rPr sz="1050" b="0" dirty="0">
+                <a:solidFill>
+                  <a:srgbClr val="595959"/>
+                </a:solidFill>
+                <a:latin typeface="맑은 고딕"/>
+              </a:rPr>
+              <a:t>)와 </a:t>
+            </a:r>
+            <a:r>
+              <a:rPr sz="1050" b="0" dirty="0" err="1">
+                <a:solidFill>
+                  <a:srgbClr val="595959"/>
+                </a:solidFill>
+                <a:latin typeface="맑은 고딕"/>
+              </a:rPr>
+              <a:t>작업</a:t>
+            </a:r>
+            <a:r>
+              <a:rPr sz="1050" b="0" dirty="0">
+                <a:solidFill>
+                  <a:srgbClr val="595959"/>
+                </a:solidFill>
+                <a:latin typeface="맑은 고딕"/>
+              </a:rPr>
+              <a:t> </a:t>
+            </a:r>
+            <a:r>
+              <a:rPr sz="1050" b="0" dirty="0" err="1">
+                <a:solidFill>
+                  <a:srgbClr val="595959"/>
+                </a:solidFill>
+                <a:latin typeface="맑은 고딕"/>
+              </a:rPr>
+              <a:t>진행을</a:t>
+            </a:r>
+            <a:r>
+              <a:rPr sz="1050" b="0" dirty="0">
+                <a:solidFill>
+                  <a:srgbClr val="595959"/>
+                </a:solidFill>
+                <a:latin typeface="맑은 고딕"/>
+              </a:rPr>
+              <a:t> </a:t>
+            </a:r>
+            <a:r>
+              <a:rPr sz="1050" b="0" dirty="0" err="1">
+                <a:solidFill>
+                  <a:srgbClr val="595959"/>
+                </a:solidFill>
+                <a:latin typeface="맑은 고딕"/>
+              </a:rPr>
+              <a:t>실시간</a:t>
+            </a:r>
+            <a:r>
+              <a:rPr sz="1050" b="0" dirty="0">
+                <a:solidFill>
+                  <a:srgbClr val="595959"/>
+                </a:solidFill>
+                <a:latin typeface="맑은 고딕"/>
+              </a:rPr>
+              <a:t> </a:t>
+            </a:r>
+            <a:r>
+              <a:rPr sz="1050" b="0" dirty="0" err="1">
+                <a:solidFill>
+                  <a:srgbClr val="595959"/>
+                </a:solidFill>
+                <a:latin typeface="맑은 고딕"/>
+              </a:rPr>
+              <a:t>표시한다</a:t>
+            </a:r>
+            <a:r>
+              <a:rPr sz="1050" b="0" dirty="0">
+                <a:solidFill>
+                  <a:srgbClr val="595959"/>
+                </a:solidFill>
+                <a:latin typeface="맑은 고딕"/>
+              </a:rPr>
+              <a:t>.</a:t>
+            </a:r>
+          </a:p>
+          <a:p>
+            <a:pPr algn="l"/>
+            <a:r>
+              <a:rPr sz="1050" b="0" dirty="0">
+                <a:solidFill>
+                  <a:srgbClr val="595959"/>
+                </a:solidFill>
+                <a:latin typeface="맑은 고딕"/>
+              </a:rPr>
+              <a:t>· </a:t>
+            </a:r>
+            <a:r>
+              <a:rPr sz="1050" b="0" dirty="0" err="1">
+                <a:solidFill>
+                  <a:srgbClr val="595959"/>
+                </a:solidFill>
+                <a:latin typeface="맑은 고딕"/>
+              </a:rPr>
+              <a:t>실행</a:t>
+            </a:r>
+            <a:r>
+              <a:rPr sz="1050" b="0" dirty="0">
+                <a:solidFill>
+                  <a:srgbClr val="595959"/>
+                </a:solidFill>
+                <a:latin typeface="맑은 고딕"/>
+              </a:rPr>
+              <a:t> : Ecs.exe. </a:t>
+            </a:r>
+            <a:r>
+              <a:rPr sz="1050" b="0" dirty="0" err="1">
+                <a:solidFill>
+                  <a:srgbClr val="595959"/>
+                </a:solidFill>
+                <a:latin typeface="맑은 고딕"/>
+              </a:rPr>
+              <a:t>기동</a:t>
+            </a:r>
+            <a:r>
+              <a:rPr sz="1050" b="0" dirty="0">
+                <a:solidFill>
+                  <a:srgbClr val="595959"/>
+                </a:solidFill>
+                <a:latin typeface="맑은 고딕"/>
+              </a:rPr>
+              <a:t> 시 [USER] DEFAULT_ID 로 </a:t>
+            </a:r>
+            <a:r>
+              <a:rPr sz="1050" b="0" dirty="0" err="1">
+                <a:solidFill>
+                  <a:srgbClr val="595959"/>
+                </a:solidFill>
+                <a:latin typeface="맑은 고딕"/>
+              </a:rPr>
+              <a:t>자동</a:t>
+            </a:r>
+            <a:r>
+              <a:rPr sz="1050" b="0" dirty="0">
+                <a:solidFill>
+                  <a:srgbClr val="595959"/>
+                </a:solidFill>
+                <a:latin typeface="맑은 고딕"/>
+              </a:rPr>
+              <a:t> </a:t>
+            </a:r>
+            <a:r>
+              <a:rPr sz="1050" b="0" dirty="0" err="1">
+                <a:solidFill>
+                  <a:srgbClr val="595959"/>
+                </a:solidFill>
+                <a:latin typeface="맑은 고딕"/>
+              </a:rPr>
+              <a:t>로그인한다</a:t>
+            </a:r>
+            <a:r>
+              <a:rPr sz="1050" b="0" dirty="0">
+                <a:solidFill>
+                  <a:srgbClr val="595959"/>
+                </a:solidFill>
+                <a:latin typeface="맑은 고딕"/>
+              </a:rPr>
+              <a:t>.</a:t>
+            </a:r>
+          </a:p>
+          <a:p>
+            <a:pPr algn="l"/>
+            <a:r>
+              <a:rPr sz="1050" b="0" dirty="0">
+                <a:solidFill>
+                  <a:srgbClr val="595959"/>
+                </a:solidFill>
+                <a:latin typeface="맑은 고딕"/>
+              </a:rPr>
+              <a:t>· </a:t>
+            </a:r>
+            <a:r>
+              <a:rPr sz="1050" b="0" dirty="0" err="1">
+                <a:solidFill>
+                  <a:srgbClr val="595959"/>
+                </a:solidFill>
+                <a:latin typeface="맑은 고딕"/>
+              </a:rPr>
+              <a:t>설비</a:t>
+            </a:r>
+            <a:r>
+              <a:rPr sz="1050" b="0" dirty="0">
+                <a:solidFill>
+                  <a:srgbClr val="595959"/>
+                </a:solidFill>
+                <a:latin typeface="맑은 고딕"/>
+              </a:rPr>
+              <a:t> </a:t>
+            </a:r>
+            <a:r>
+              <a:rPr sz="1050" b="0" dirty="0" err="1">
+                <a:solidFill>
+                  <a:srgbClr val="595959"/>
+                </a:solidFill>
+                <a:latin typeface="맑은 고딕"/>
+              </a:rPr>
+              <a:t>데이터는</a:t>
+            </a:r>
+            <a:r>
+              <a:rPr sz="1050" b="0" dirty="0">
+                <a:solidFill>
+                  <a:srgbClr val="595959"/>
+                </a:solidFill>
+                <a:latin typeface="맑은 고딕"/>
+              </a:rPr>
+              <a:t> [ETC] COLLECT_INTERVAL_MS=300 </a:t>
+            </a:r>
+            <a:r>
+              <a:rPr sz="1050" b="0" dirty="0" err="1">
+                <a:solidFill>
+                  <a:srgbClr val="595959"/>
+                </a:solidFill>
+                <a:latin typeface="맑은 고딕"/>
+              </a:rPr>
+              <a:t>주기로</a:t>
+            </a:r>
+            <a:r>
+              <a:rPr sz="1050" b="0" dirty="0">
+                <a:solidFill>
+                  <a:srgbClr val="595959"/>
+                </a:solidFill>
+                <a:latin typeface="맑은 고딕"/>
+              </a:rPr>
+              <a:t> DB </a:t>
+            </a:r>
+            <a:r>
+              <a:rPr sz="1050" b="0" dirty="0" err="1">
+                <a:solidFill>
+                  <a:srgbClr val="595959"/>
+                </a:solidFill>
+                <a:latin typeface="맑은 고딕"/>
+              </a:rPr>
+              <a:t>에서</a:t>
+            </a:r>
+            <a:r>
+              <a:rPr sz="1050" b="0" dirty="0">
+                <a:solidFill>
+                  <a:srgbClr val="595959"/>
+                </a:solidFill>
+                <a:latin typeface="맑은 고딕"/>
+              </a:rPr>
+              <a:t> </a:t>
+            </a:r>
+            <a:r>
+              <a:rPr sz="1050" b="0" dirty="0" err="1">
+                <a:solidFill>
+                  <a:srgbClr val="595959"/>
+                </a:solidFill>
+                <a:latin typeface="맑은 고딕"/>
+              </a:rPr>
+              <a:t>읽는다</a:t>
+            </a:r>
+            <a:r>
+              <a:rPr sz="1050" b="0" dirty="0">
+                <a:solidFill>
+                  <a:srgbClr val="595959"/>
+                </a:solidFill>
+                <a:latin typeface="맑은 고딕"/>
+              </a:rPr>
+              <a:t>.</a:t>
             </a:r>
           </a:p>
         </p:txBody>
@@ -15168,49 +15903,460 @@
           <a:p>
             <a:pPr algn="l"/>
             <a:r>
-              <a:rPr sz="1300" b="1">
+              <a:rPr sz="1300" b="1" dirty="0">
                 <a:solidFill>
                   <a:srgbClr val="1E2761"/>
                 </a:solidFill>
                 <a:latin typeface="맑은 고딕"/>
               </a:rPr>
-              <a:t>■ 크기 조절</a:t>
-            </a:r>
-          </a:p>
-          <a:p>
-            <a:pPr algn="l"/>
-            <a:r>
-              <a:rPr sz="1050" b="0">
-                <a:solidFill>
-                  <a:srgbClr val="595959"/>
-                </a:solidFill>
-                <a:latin typeface="맑은 고딕"/>
-              </a:rPr>
-              <a:t>· 칸 사이 손잡이(점선)를 끌면 크기가 바뀌고 Ecs.ini MAIN_UI_LEFT_W / COMM_H / LEG_H / VEH_H 에 저장된다.</a:t>
-            </a:r>
-          </a:p>
-          <a:p>
-            <a:pPr algn="l"/>
-            <a:r>
-              <a:rPr sz="1050" b="0">
-                <a:solidFill>
-                  <a:srgbClr val="595959"/>
-                </a:solidFill>
-                <a:latin typeface="맑은 고딕"/>
-              </a:rPr>
-              <a:t>· 창 크기를 바꾸면 왼쪽 칸 폭도 비례해 다시 저장된다. 기준값 : 1920×1080 최대화에서 LEFT_W=531.</a:t>
-            </a:r>
-          </a:p>
-          <a:p>
-            <a:pPr algn="l"/>
-            <a:r>
-              <a:rPr sz="1050" b="0">
-                <a:solidFill>
-                  <a:srgbClr val="595959"/>
-                </a:solidFill>
-                <a:latin typeface="맑은 고딕"/>
-              </a:rPr>
-              <a:t>· MAIN_UI=2(왼쪽 고정 칸 배치)는 기동 시 한 번 읽는다.</a:t>
+              <a:t>■ </a:t>
+            </a:r>
+            <a:r>
+              <a:rPr sz="1300" b="1" dirty="0" err="1">
+                <a:solidFill>
+                  <a:srgbClr val="1E2761"/>
+                </a:solidFill>
+                <a:latin typeface="맑은 고딕"/>
+              </a:rPr>
+              <a:t>크기</a:t>
+            </a:r>
+            <a:r>
+              <a:rPr sz="1300" b="1" dirty="0">
+                <a:solidFill>
+                  <a:srgbClr val="1E2761"/>
+                </a:solidFill>
+                <a:latin typeface="맑은 고딕"/>
+              </a:rPr>
+              <a:t> </a:t>
+            </a:r>
+            <a:r>
+              <a:rPr sz="1300" b="1" dirty="0" err="1">
+                <a:solidFill>
+                  <a:srgbClr val="1E2761"/>
+                </a:solidFill>
+                <a:latin typeface="맑은 고딕"/>
+              </a:rPr>
+              <a:t>조절</a:t>
+            </a:r>
+            <a:endParaRPr sz="1300" b="1" dirty="0">
+              <a:solidFill>
+                <a:srgbClr val="1E2761"/>
+              </a:solidFill>
+              <a:latin typeface="맑은 고딕"/>
+            </a:endParaRPr>
+          </a:p>
+          <a:p>
+            <a:pPr algn="l"/>
+            <a:r>
+              <a:rPr sz="1050" b="0" dirty="0">
+                <a:solidFill>
+                  <a:srgbClr val="595959"/>
+                </a:solidFill>
+                <a:latin typeface="맑은 고딕"/>
+              </a:rPr>
+              <a:t>· 칸 </a:t>
+            </a:r>
+            <a:r>
+              <a:rPr sz="1050" b="0" dirty="0" err="1">
+                <a:solidFill>
+                  <a:srgbClr val="595959"/>
+                </a:solidFill>
+                <a:latin typeface="맑은 고딕"/>
+              </a:rPr>
+              <a:t>사이</a:t>
+            </a:r>
+            <a:r>
+              <a:rPr sz="1050" b="0" dirty="0">
+                <a:solidFill>
+                  <a:srgbClr val="595959"/>
+                </a:solidFill>
+                <a:latin typeface="맑은 고딕"/>
+              </a:rPr>
+              <a:t> </a:t>
+            </a:r>
+            <a:r>
+              <a:rPr sz="1050" b="0" dirty="0" err="1">
+                <a:solidFill>
+                  <a:srgbClr val="595959"/>
+                </a:solidFill>
+                <a:latin typeface="맑은 고딕"/>
+              </a:rPr>
+              <a:t>손잡이</a:t>
+            </a:r>
+            <a:r>
+              <a:rPr sz="1050" b="0" dirty="0">
+                <a:solidFill>
+                  <a:srgbClr val="595959"/>
+                </a:solidFill>
+                <a:latin typeface="맑은 고딕"/>
+              </a:rPr>
+              <a:t>(</a:t>
+            </a:r>
+            <a:r>
+              <a:rPr sz="1050" b="0" dirty="0" err="1">
+                <a:solidFill>
+                  <a:srgbClr val="595959"/>
+                </a:solidFill>
+                <a:latin typeface="맑은 고딕"/>
+              </a:rPr>
+              <a:t>점선</a:t>
+            </a:r>
+            <a:r>
+              <a:rPr sz="1050" b="0" dirty="0">
+                <a:solidFill>
+                  <a:srgbClr val="595959"/>
+                </a:solidFill>
+                <a:latin typeface="맑은 고딕"/>
+              </a:rPr>
+              <a:t>)를 </a:t>
+            </a:r>
+            <a:r>
+              <a:rPr sz="1050" b="0" dirty="0" err="1">
+                <a:solidFill>
+                  <a:srgbClr val="595959"/>
+                </a:solidFill>
+                <a:latin typeface="맑은 고딕"/>
+              </a:rPr>
+              <a:t>끌면</a:t>
+            </a:r>
+            <a:r>
+              <a:rPr sz="1050" b="0" dirty="0">
+                <a:solidFill>
+                  <a:srgbClr val="595959"/>
+                </a:solidFill>
+                <a:latin typeface="맑은 고딕"/>
+              </a:rPr>
+              <a:t> </a:t>
+            </a:r>
+            <a:r>
+              <a:rPr sz="1050" b="0" dirty="0" err="1">
+                <a:solidFill>
+                  <a:srgbClr val="595959"/>
+                </a:solidFill>
+                <a:latin typeface="맑은 고딕"/>
+              </a:rPr>
+              <a:t>크기가</a:t>
+            </a:r>
+            <a:r>
+              <a:rPr sz="1050" b="0" dirty="0">
+                <a:solidFill>
+                  <a:srgbClr val="595959"/>
+                </a:solidFill>
+                <a:latin typeface="맑은 고딕"/>
+              </a:rPr>
+              <a:t> </a:t>
+            </a:r>
+            <a:r>
+              <a:rPr sz="1050" b="0" dirty="0" err="1">
+                <a:solidFill>
+                  <a:srgbClr val="595959"/>
+                </a:solidFill>
+                <a:latin typeface="맑은 고딕"/>
+              </a:rPr>
+              <a:t>바뀌고</a:t>
+            </a:r>
+            <a:r>
+              <a:rPr sz="1050" b="0" dirty="0">
+                <a:solidFill>
+                  <a:srgbClr val="595959"/>
+                </a:solidFill>
+                <a:latin typeface="맑은 고딕"/>
+              </a:rPr>
+              <a:t> Ecs.ini MAIN_UI_LEFT_W / COMM_H / LEG_H / VEH_H 에 </a:t>
+            </a:r>
+            <a:r>
+              <a:rPr sz="1050" b="0" dirty="0" err="1">
+                <a:solidFill>
+                  <a:srgbClr val="595959"/>
+                </a:solidFill>
+                <a:latin typeface="맑은 고딕"/>
+              </a:rPr>
+              <a:t>저장된다</a:t>
+            </a:r>
+            <a:r>
+              <a:rPr sz="1050" b="0" dirty="0">
+                <a:solidFill>
+                  <a:srgbClr val="595959"/>
+                </a:solidFill>
+                <a:latin typeface="맑은 고딕"/>
+              </a:rPr>
+              <a:t>.</a:t>
+            </a:r>
+          </a:p>
+          <a:p>
+            <a:pPr algn="l"/>
+            <a:r>
+              <a:rPr sz="1050" b="0" dirty="0">
+                <a:solidFill>
+                  <a:srgbClr val="595959"/>
+                </a:solidFill>
+                <a:latin typeface="맑은 고딕"/>
+              </a:rPr>
+              <a:t>· 창 </a:t>
+            </a:r>
+            <a:r>
+              <a:rPr sz="1050" b="0" dirty="0" err="1">
+                <a:solidFill>
+                  <a:srgbClr val="595959"/>
+                </a:solidFill>
+                <a:latin typeface="맑은 고딕"/>
+              </a:rPr>
+              <a:t>크기를</a:t>
+            </a:r>
+            <a:r>
+              <a:rPr sz="1050" b="0" dirty="0">
+                <a:solidFill>
+                  <a:srgbClr val="595959"/>
+                </a:solidFill>
+                <a:latin typeface="맑은 고딕"/>
+              </a:rPr>
+              <a:t> </a:t>
+            </a:r>
+            <a:r>
+              <a:rPr sz="1050" b="0" dirty="0" err="1">
+                <a:solidFill>
+                  <a:srgbClr val="595959"/>
+                </a:solidFill>
+                <a:latin typeface="맑은 고딕"/>
+              </a:rPr>
+              <a:t>바꾸면</a:t>
+            </a:r>
+            <a:r>
+              <a:rPr sz="1050" b="0" dirty="0">
+                <a:solidFill>
+                  <a:srgbClr val="595959"/>
+                </a:solidFill>
+                <a:latin typeface="맑은 고딕"/>
+              </a:rPr>
+              <a:t> </a:t>
+            </a:r>
+            <a:r>
+              <a:rPr sz="1050" b="0" dirty="0" err="1">
+                <a:solidFill>
+                  <a:srgbClr val="595959"/>
+                </a:solidFill>
+                <a:latin typeface="맑은 고딕"/>
+              </a:rPr>
+              <a:t>왼쪽</a:t>
+            </a:r>
+            <a:r>
+              <a:rPr sz="1050" b="0" dirty="0">
+                <a:solidFill>
+                  <a:srgbClr val="595959"/>
+                </a:solidFill>
+                <a:latin typeface="맑은 고딕"/>
+              </a:rPr>
+              <a:t> 칸 </a:t>
+            </a:r>
+            <a:r>
+              <a:rPr sz="1050" b="0" dirty="0" err="1">
+                <a:solidFill>
+                  <a:srgbClr val="595959"/>
+                </a:solidFill>
+                <a:latin typeface="맑은 고딕"/>
+              </a:rPr>
+              <a:t>폭도</a:t>
+            </a:r>
+            <a:r>
+              <a:rPr sz="1050" b="0" dirty="0">
+                <a:solidFill>
+                  <a:srgbClr val="595959"/>
+                </a:solidFill>
+                <a:latin typeface="맑은 고딕"/>
+              </a:rPr>
+              <a:t> </a:t>
+            </a:r>
+            <a:r>
+              <a:rPr sz="1050" b="0" dirty="0" err="1">
+                <a:solidFill>
+                  <a:srgbClr val="595959"/>
+                </a:solidFill>
+                <a:latin typeface="맑은 고딕"/>
+              </a:rPr>
+              <a:t>비례해</a:t>
+            </a:r>
+            <a:r>
+              <a:rPr sz="1050" b="0" dirty="0">
+                <a:solidFill>
+                  <a:srgbClr val="595959"/>
+                </a:solidFill>
+                <a:latin typeface="맑은 고딕"/>
+              </a:rPr>
+              <a:t> </a:t>
+            </a:r>
+            <a:r>
+              <a:rPr sz="1050" b="0" dirty="0" err="1">
+                <a:solidFill>
+                  <a:srgbClr val="595959"/>
+                </a:solidFill>
+                <a:latin typeface="맑은 고딕"/>
+              </a:rPr>
+              <a:t>다시</a:t>
+            </a:r>
+            <a:r>
+              <a:rPr sz="1050" b="0" dirty="0">
+                <a:solidFill>
+                  <a:srgbClr val="595959"/>
+                </a:solidFill>
+                <a:latin typeface="맑은 고딕"/>
+              </a:rPr>
+              <a:t> </a:t>
+            </a:r>
+            <a:r>
+              <a:rPr sz="1050" b="0" dirty="0" err="1">
+                <a:solidFill>
+                  <a:srgbClr val="595959"/>
+                </a:solidFill>
+                <a:latin typeface="맑은 고딕"/>
+              </a:rPr>
+              <a:t>저장된다</a:t>
+            </a:r>
+            <a:r>
+              <a:rPr sz="1050" b="0" dirty="0">
+                <a:solidFill>
+                  <a:srgbClr val="595959"/>
+                </a:solidFill>
+                <a:latin typeface="맑은 고딕"/>
+              </a:rPr>
+              <a:t>. </a:t>
+            </a:r>
+            <a:r>
+              <a:rPr sz="1050" b="0" dirty="0" err="1">
+                <a:solidFill>
+                  <a:srgbClr val="595959"/>
+                </a:solidFill>
+                <a:latin typeface="맑은 고딕"/>
+              </a:rPr>
+              <a:t>기준값</a:t>
+            </a:r>
+            <a:r>
+              <a:rPr sz="1050" b="0" dirty="0">
+                <a:solidFill>
+                  <a:srgbClr val="595959"/>
+                </a:solidFill>
+                <a:latin typeface="맑은 고딕"/>
+              </a:rPr>
+              <a:t> : 1920×1080 </a:t>
+            </a:r>
+            <a:r>
+              <a:rPr sz="1050" b="0" dirty="0" err="1">
+                <a:solidFill>
+                  <a:srgbClr val="595959"/>
+                </a:solidFill>
+                <a:latin typeface="맑은 고딕"/>
+              </a:rPr>
+              <a:t>최대화에서</a:t>
+            </a:r>
+            <a:r>
+              <a:rPr sz="1050" b="0" dirty="0">
+                <a:solidFill>
+                  <a:srgbClr val="595959"/>
+                </a:solidFill>
+                <a:latin typeface="맑은 고딕"/>
+              </a:rPr>
+              <a:t> LEFT_W=531.</a:t>
+            </a:r>
+          </a:p>
+          <a:p>
+            <a:pPr algn="l"/>
+            <a:r>
+              <a:rPr sz="1050" b="0" dirty="0">
+                <a:solidFill>
+                  <a:srgbClr val="595959"/>
+                </a:solidFill>
+                <a:latin typeface="맑은 고딕"/>
+              </a:rPr>
+              <a:t>· MAIN_UI=2(</a:t>
+            </a:r>
+            <a:r>
+              <a:rPr sz="1050" b="0" dirty="0" err="1">
+                <a:solidFill>
+                  <a:srgbClr val="595959"/>
+                </a:solidFill>
+                <a:latin typeface="맑은 고딕"/>
+              </a:rPr>
+              <a:t>왼쪽</a:t>
+            </a:r>
+            <a:r>
+              <a:rPr sz="1050" b="0" dirty="0">
+                <a:solidFill>
+                  <a:srgbClr val="595959"/>
+                </a:solidFill>
+                <a:latin typeface="맑은 고딕"/>
+              </a:rPr>
+              <a:t> </a:t>
+            </a:r>
+            <a:r>
+              <a:rPr sz="1050" b="0" dirty="0" err="1">
+                <a:solidFill>
+                  <a:srgbClr val="595959"/>
+                </a:solidFill>
+                <a:latin typeface="맑은 고딕"/>
+              </a:rPr>
+              <a:t>고정</a:t>
+            </a:r>
+            <a:r>
+              <a:rPr sz="1050" b="0" dirty="0">
+                <a:solidFill>
+                  <a:srgbClr val="595959"/>
+                </a:solidFill>
+                <a:latin typeface="맑은 고딕"/>
+              </a:rPr>
+              <a:t> 칸 </a:t>
+            </a:r>
+            <a:r>
+              <a:rPr sz="1050" b="0" dirty="0" err="1">
+                <a:solidFill>
+                  <a:srgbClr val="595959"/>
+                </a:solidFill>
+                <a:latin typeface="맑은 고딕"/>
+              </a:rPr>
+              <a:t>배치</a:t>
+            </a:r>
+            <a:r>
+              <a:rPr sz="1050" b="0" dirty="0">
+                <a:solidFill>
+                  <a:srgbClr val="595959"/>
+                </a:solidFill>
+                <a:latin typeface="맑은 고딕"/>
+              </a:rPr>
+              <a:t>)는 </a:t>
+            </a:r>
+            <a:r>
+              <a:rPr sz="1050" b="0" dirty="0" err="1">
+                <a:solidFill>
+                  <a:srgbClr val="595959"/>
+                </a:solidFill>
+                <a:latin typeface="맑은 고딕"/>
+              </a:rPr>
+              <a:t>기동</a:t>
+            </a:r>
+            <a:r>
+              <a:rPr sz="1050" b="0" dirty="0">
+                <a:solidFill>
+                  <a:srgbClr val="595959"/>
+                </a:solidFill>
+                <a:latin typeface="맑은 고딕"/>
+              </a:rPr>
+              <a:t> 시 한 번 </a:t>
+            </a:r>
+            <a:r>
+              <a:rPr sz="1050" b="0" dirty="0" err="1">
+                <a:solidFill>
+                  <a:srgbClr val="595959"/>
+                </a:solidFill>
+                <a:latin typeface="맑은 고딕"/>
+              </a:rPr>
+              <a:t>읽는다</a:t>
+            </a:r>
+            <a:r>
+              <a:rPr sz="1050" b="0" dirty="0">
+                <a:solidFill>
+                  <a:srgbClr val="595959"/>
+                </a:solidFill>
+                <a:latin typeface="맑은 고딕"/>
+              </a:rPr>
+              <a:t>.</a:t>
             </a:r>
           </a:p>
         </p:txBody>
@@ -15330,7 +16476,7 @@
           <p:nvPr/>
         </p:nvPicPr>
         <p:blipFill>
-          <a:blip r:embed="rId3"/>
+          <a:blip r:embed="rId2"/>
           <a:stretch>
             <a:fillRect/>
           </a:stretch>
@@ -15554,7 +16700,7 @@
           <p:nvPr>
             <p:extLst>
               <p:ext uri="{D42A27DB-BD31-4B8C-83A1-F6EECF244321}">
-                <p14:modId xmlns:p14="http://schemas.microsoft.com/office/powerpoint/2010/main" val="1827657774"/>
+                <p14:modId xmlns:p14="http://schemas.microsoft.com/office/powerpoint/2010/main" val="1676606862"/>
               </p:ext>
             </p:extLst>
           </p:nvPr>
@@ -15837,14 +16983,92 @@
                     <a:lstStyle/>
                     <a:p>
                       <a:r>
-                        <a:rPr sz="1050">
+                        <a:rPr sz="1050" dirty="0" err="1">
                           <a:solidFill>
                             <a:srgbClr val="222222"/>
                           </a:solidFill>
                           <a:latin typeface="맑은 고딕"/>
                         </a:rPr>
-                        <a:t>작업정보 · 찾기 / 작업번호 · 트랙번호 · 적재용기</a:t>
+                        <a:t>작업정보</a:t>
                       </a:r>
+                      <a:r>
+                        <a:rPr sz="1050" dirty="0">
+                          <a:solidFill>
+                            <a:srgbClr val="222222"/>
+                          </a:solidFill>
+                          <a:latin typeface="맑은 고딕"/>
+                        </a:rPr>
+                        <a:t> · </a:t>
+                      </a:r>
+                      <a:r>
+                        <a:rPr sz="1050" dirty="0" err="1">
+                          <a:solidFill>
+                            <a:srgbClr val="222222"/>
+                          </a:solidFill>
+                          <a:latin typeface="맑은 고딕"/>
+                        </a:rPr>
+                        <a:t>찾기</a:t>
+                      </a:r>
+                      <a:r>
+                        <a:rPr sz="1050" dirty="0">
+                          <a:solidFill>
+                            <a:srgbClr val="222222"/>
+                          </a:solidFill>
+                          <a:latin typeface="맑은 고딕"/>
+                        </a:rPr>
+                        <a:t> / </a:t>
+                      </a:r>
+                      <a:r>
+                        <a:rPr sz="1050" dirty="0" err="1">
+                          <a:solidFill>
+                            <a:srgbClr val="222222"/>
+                          </a:solidFill>
+                          <a:latin typeface="맑은 고딕"/>
+                        </a:rPr>
+                        <a:t>작업번호</a:t>
+                      </a:r>
+                      <a:r>
+                        <a:rPr sz="1050" dirty="0">
+                          <a:solidFill>
+                            <a:srgbClr val="222222"/>
+                          </a:solidFill>
+                          <a:latin typeface="맑은 고딕"/>
+                        </a:rPr>
+                        <a:t> · </a:t>
+                      </a:r>
+                      <a:r>
+                        <a:rPr sz="1050" dirty="0" err="1">
+                          <a:solidFill>
+                            <a:srgbClr val="222222"/>
+                          </a:solidFill>
+                          <a:latin typeface="맑은 고딕"/>
+                        </a:rPr>
+                        <a:t>트랙번호</a:t>
+                      </a:r>
+                      <a:r>
+                        <a:rPr sz="1050" dirty="0">
+                          <a:solidFill>
+                            <a:srgbClr val="222222"/>
+                          </a:solidFill>
+                          <a:latin typeface="맑은 고딕"/>
+                        </a:rPr>
+                        <a:t> · </a:t>
+                      </a:r>
+                      <a:r>
+                        <a:rPr sz="1050" dirty="0" err="1">
+                          <a:solidFill>
+                            <a:srgbClr val="222222"/>
+                          </a:solidFill>
+                          <a:latin typeface="맑은 고딕"/>
+                        </a:rPr>
+                        <a:t>적재용기</a:t>
+                      </a:r>
+                      <a:endParaRPr sz="1050" dirty="0">
+                        <a:solidFill>
+                          <a:srgbClr val="222222"/>
+                        </a:solidFill>
+                        <a:latin typeface="맑은 고딕"/>
+                      </a:endParaRPr>
                     </a:p>
                   </a:txBody>
                   <a:tcPr marT="27432" marB="27432">
@@ -15907,7 +17131,7 @@
                     <a:lstStyle/>
                     <a:p>
                       <a:r>
-                        <a:rPr sz="1050">
+                        <a:rPr sz="1050" dirty="0" err="1">
                           <a:solidFill>
                             <a:srgbClr val="222222"/>
                           </a:solidFill>
@@ -15915,6 +17139,12 @@
                         </a:rPr>
                         <a:t>수동조작</a:t>
                       </a:r>
+                      <a:endParaRPr sz="1050" dirty="0">
+                        <a:solidFill>
+                          <a:srgbClr val="222222"/>
+                        </a:solidFill>
+                        <a:latin typeface="맑은 고딕"/>
+                      </a:endParaRPr>
                     </a:p>
                   </a:txBody>
                   <a:tcPr marT="27432" marB="27432">
@@ -15929,14 +17159,20 @@
                     <a:lstStyle/>
                     <a:p>
                       <a:r>
-                        <a:rPr sz="1050">
+                        <a:rPr sz="1050" dirty="0" err="1">
                           <a:solidFill>
                             <a:srgbClr val="222222"/>
                           </a:solidFill>
                           <a:latin typeface="맑은 고딕"/>
                         </a:rPr>
-                        <a:t>작업 · 크레인 · RTV</a:t>
+                        <a:t>작업</a:t>
                       </a:r>
+                      <a:endParaRPr sz="1050" dirty="0">
+                        <a:solidFill>
+                          <a:srgbClr val="222222"/>
+                        </a:solidFill>
+                        <a:latin typeface="맑은 고딕"/>
+                      </a:endParaRPr>
                     </a:p>
                   </a:txBody>
                   <a:tcPr marT="27432" marB="27432">
@@ -16021,14 +17257,110 @@
                     <a:lstStyle/>
                     <a:p>
                       <a:r>
-                        <a:rPr sz="1050">
+                        <a:rPr sz="1050" dirty="0" err="1">
                           <a:solidFill>
                             <a:srgbClr val="222222"/>
                           </a:solidFill>
                           <a:latin typeface="맑은 고딕"/>
                         </a:rPr>
-                        <a:t>작업로그 · HOST로그 · 설비에러이력 · 유저사용로그 · ECS프로그램로그 / 알람</a:t>
+                        <a:t>작업로그</a:t>
                       </a:r>
+                      <a:r>
+                        <a:rPr sz="1050" dirty="0">
+                          <a:solidFill>
+                            <a:srgbClr val="222222"/>
+                          </a:solidFill>
+                          <a:latin typeface="맑은 고딕"/>
+                        </a:rPr>
+                        <a:t> · </a:t>
+                      </a:r>
+                      <a:r>
+                        <a:rPr sz="1050" dirty="0" err="1">
+                          <a:solidFill>
+                            <a:srgbClr val="222222"/>
+                          </a:solidFill>
+                          <a:latin typeface="맑은 고딕"/>
+                        </a:rPr>
+                        <a:t>HOST로그</a:t>
+                      </a:r>
+                      <a:r>
+                        <a:rPr sz="1050" dirty="0">
+                          <a:solidFill>
+                            <a:srgbClr val="222222"/>
+                          </a:solidFill>
+                          <a:latin typeface="맑은 고딕"/>
+                        </a:rPr>
+                        <a:t> · </a:t>
+                      </a:r>
+                      <a:r>
+                        <a:rPr sz="1050" dirty="0" err="1">
+                          <a:solidFill>
+                            <a:srgbClr val="222222"/>
+                          </a:solidFill>
+                          <a:latin typeface="맑은 고딕"/>
+                        </a:rPr>
+                        <a:t>설비에러이력</a:t>
+                      </a:r>
+                      <a:r>
+                        <a:rPr sz="1050" dirty="0">
+                          <a:solidFill>
+                            <a:srgbClr val="222222"/>
+                          </a:solidFill>
+                          <a:latin typeface="맑은 고딕"/>
+                        </a:rPr>
+                        <a:t> · </a:t>
+                      </a:r>
+                      <a:r>
+                        <a:rPr sz="1050" dirty="0" err="1">
+                          <a:solidFill>
+                            <a:srgbClr val="222222"/>
+                          </a:solidFill>
+                          <a:latin typeface="맑은 고딕"/>
+                        </a:rPr>
+                        <a:t>유저사용로그</a:t>
+                      </a:r>
+                      <a:r>
+                        <a:rPr sz="1050" dirty="0">
+                          <a:solidFill>
+                            <a:srgbClr val="222222"/>
+                          </a:solidFill>
+                          <a:latin typeface="맑은 고딕"/>
+                        </a:rPr>
+                        <a:t> · </a:t>
+                      </a:r>
+                      <a:r>
+                        <a:rPr sz="1050" dirty="0" err="1">
+                          <a:solidFill>
+                            <a:srgbClr val="222222"/>
+                          </a:solidFill>
+                          <a:latin typeface="맑은 고딕"/>
+                        </a:rPr>
+                        <a:t>ECS프로그램로그</a:t>
+                      </a:r>
+                      <a:r>
+                        <a:rPr sz="1050" dirty="0">
+                          <a:solidFill>
+                            <a:srgbClr val="222222"/>
+                          </a:solidFill>
+                          <a:latin typeface="맑은 고딕"/>
+                        </a:rPr>
+                        <a:t> / </a:t>
+                      </a:r>
+                      <a:r>
+                        <a:rPr sz="1050" dirty="0" err="1">
+                          <a:solidFill>
+                            <a:srgbClr val="222222"/>
+                          </a:solidFill>
+                          <a:latin typeface="맑은 고딕"/>
+                        </a:rPr>
+                        <a:t>알람</a:t>
+                      </a:r>
+                      <a:endParaRPr sz="1050" dirty="0">
+                        <a:solidFill>
+                          <a:srgbClr val="222222"/>
+                        </a:solidFill>
+                        <a:latin typeface="맑은 고딕"/>
+                      </a:endParaRPr>
                     </a:p>
                   </a:txBody>
                   <a:tcPr marT="27432" marB="27432">
@@ -16108,7 +17440,7 @@
                     <a:lstStyle/>
                     <a:p>
                       <a:r>
-                        <a:rPr sz="1050">
+                        <a:rPr sz="1050" dirty="0">
                           <a:solidFill>
                             <a:srgbClr val="222222"/>
                           </a:solidFill>
@@ -16663,13 +17995,40 @@
                     <a:lstStyle/>
                     <a:p>
                       <a:r>
-                        <a:rPr sz="1050" b="1">
+                        <a:rPr sz="1050" b="1" dirty="0" err="1">
                           <a:solidFill>
                             <a:srgbClr val="FFFFFF"/>
                           </a:solidFill>
                           <a:latin typeface="맑은 고딕"/>
                         </a:rPr>
-                        <a:t>조회 대상(5초)</a:t>
+                        <a:t>조회</a:t>
+                      </a:r>
+                      <a:r>
+                        <a:rPr sz="1050" b="1" dirty="0">
+                          <a:solidFill>
+                            <a:srgbClr val="FFFFFF"/>
+                          </a:solidFill>
+                          <a:latin typeface="맑은 고딕"/>
+                        </a:rPr>
+                        <a:t> </a:t>
+                      </a:r>
+                      <a:r>
+                        <a:rPr sz="1050" b="1" dirty="0" err="1">
+                          <a:solidFill>
+                            <a:srgbClr val="FFFFFF"/>
+                          </a:solidFill>
+                          <a:latin typeface="맑은 고딕"/>
+                        </a:rPr>
+                        <a:t>대상</a:t>
+                      </a:r>
+                      <a:r>
+                        <a:rPr sz="1050" b="1" dirty="0">
+                          <a:solidFill>
+                            <a:srgbClr val="FFFFFF"/>
+                          </a:solidFill>
+                          <a:latin typeface="맑은 고딕"/>
+                        </a:rPr>
+                        <a:t>(5초)</a:t>
                       </a:r>
                     </a:p>
                   </a:txBody>
@@ -16736,7 +18095,7 @@
                     <a:lstStyle/>
                     <a:p>
                       <a:r>
-                        <a:rPr sz="1050">
+                        <a:rPr sz="1050" dirty="0">
                           <a:solidFill>
                             <a:srgbClr val="222222"/>
                           </a:solidFill>
@@ -16904,7 +18263,7 @@
                     <a:lstStyle/>
                     <a:p>
                       <a:r>
-                        <a:rPr sz="1050">
+                        <a:rPr sz="1050" dirty="0">
                           <a:solidFill>
                             <a:srgbClr val="222222"/>
                           </a:solidFill>
@@ -16939,7 +18298,7 @@
         <p:spPr>
           <a:xfrm>
             <a:off x="6126480" y="2651760"/>
-            <a:ext cx="5669280" cy="1423467"/>
+            <a:ext cx="5669280" cy="1261884"/>
           </a:xfrm>
           <a:prstGeom prst="rect">
             <a:avLst/>
@@ -17398,7 +18757,7 @@
                 </a:solidFill>
                 <a:latin typeface="맑은 고딕"/>
               </a:rPr>
-              <a:t>작업없음</a:t>
+              <a:t>정상</a:t>
             </a:r>
             <a:r>
               <a:rPr sz="1050" b="0" dirty="0">
@@ -17407,7 +18766,7 @@
                 </a:solidFill>
                 <a:latin typeface="맑은 고딕"/>
               </a:rPr>
-              <a:t>(</a:t>
+              <a:t> · </a:t>
             </a:r>
             <a:r>
               <a:rPr sz="1050" b="0" dirty="0" err="1">
@@ -17416,7 +18775,7 @@
                 </a:solidFill>
                 <a:latin typeface="맑은 고딕"/>
               </a:rPr>
-              <a:t>정상</a:t>
+              <a:t>수동</a:t>
             </a:r>
             <a:r>
               <a:rPr sz="1050" b="0" dirty="0">
@@ -17425,43 +18784,7 @@
                 </a:solidFill>
                 <a:latin typeface="맑은 고딕"/>
               </a:rPr>
-              <a:t>) · </a:t>
-            </a:r>
-            <a:r>
-              <a:rPr sz="1050" b="0" dirty="0" err="1">
-                <a:solidFill>
-                  <a:srgbClr val="595959"/>
-                </a:solidFill>
-                <a:latin typeface="맑은 고딕"/>
-              </a:rPr>
-              <a:t>미가동</a:t>
-            </a:r>
-            <a:r>
-              <a:rPr sz="1050" b="0" dirty="0">
-                <a:solidFill>
-                  <a:srgbClr val="595959"/>
-                </a:solidFill>
-                <a:latin typeface="맑은 고딕"/>
-              </a:rPr>
-              <a:t>(</a:t>
-            </a:r>
-            <a:r>
-              <a:rPr sz="1050" b="0" dirty="0" err="1">
-                <a:solidFill>
-                  <a:srgbClr val="595959"/>
-                </a:solidFill>
-                <a:latin typeface="맑은 고딕"/>
-              </a:rPr>
-              <a:t>수동</a:t>
-            </a:r>
-            <a:r>
-              <a:rPr sz="1050" b="0" dirty="0">
-                <a:solidFill>
-                  <a:srgbClr val="595959"/>
-                </a:solidFill>
-                <a:latin typeface="맑은 고딕"/>
-              </a:rPr>
-              <a:t>) · </a:t>
+              <a:t> · </a:t>
             </a:r>
             <a:r>
               <a:rPr sz="1050" b="0" dirty="0" err="1">
@@ -18199,61 +19522,628 @@
           <a:p>
             <a:pPr algn="l"/>
             <a:r>
-              <a:rPr sz="1300" b="1">
+              <a:rPr sz="1300" b="1" dirty="0">
                 <a:solidFill>
                   <a:srgbClr val="1E2761"/>
                 </a:solidFill>
                 <a:latin typeface="맑은 고딕"/>
               </a:rPr>
-              <a:t>■ 작업정보 (자동 갱신 2초)</a:t>
-            </a:r>
-          </a:p>
-          <a:p>
-            <a:pPr algn="l"/>
-            <a:r>
-              <a:rPr sz="1050" b="0">
-                <a:solidFill>
-                  <a:srgbClr val="595959"/>
-                </a:solidFill>
-                <a:latin typeface="맑은 고딕"/>
-              </a:rPr>
-              <a:t>· 탭 : 전체 · 입고 · 출고 · 피킹출고 · 랙투랙 · 호기간이동 · 이동</a:t>
-            </a:r>
-          </a:p>
-          <a:p>
-            <a:pPr algn="l"/>
-            <a:r>
-              <a:rPr sz="1050" b="0">
-                <a:solidFill>
-                  <a:srgbClr val="595959"/>
-                </a:solidFill>
-                <a:latin typeface="맑은 고딕"/>
-              </a:rPr>
-              <a:t>· 열 : 작업번호 · 구분 · 상태 · 출발 · 출발위치 · 도착 · 도착위치 · LOT · 제품 · 우선 · 수정시각</a:t>
-            </a:r>
-          </a:p>
-          <a:p>
-            <a:pPr algn="l"/>
-            <a:r>
-              <a:rPr sz="1050" b="0">
-                <a:solidFill>
-                  <a:srgbClr val="595959"/>
-                </a:solidFill>
-                <a:latin typeface="맑은 고딕"/>
-              </a:rPr>
-              <a:t>· 상태 표기 예 : [15] CV 구동중 / [16] 통로CV 구동중 / [25] SC 구동중 / [35] RGV 구동중</a:t>
-            </a:r>
-          </a:p>
-          <a:p>
-            <a:pPr algn="l"/>
-            <a:r>
-              <a:rPr sz="1050" b="0">
-                <a:solidFill>
-                  <a:srgbClr val="595959"/>
-                </a:solidFill>
-                <a:latin typeface="맑은 고딕"/>
-              </a:rPr>
-              <a:t>· 조건 조회·수정·삭제는 ECS &gt; 뷰 &gt; 작업정보 창에서 한다.</a:t>
+              <a:t>■ </a:t>
+            </a:r>
+            <a:r>
+              <a:rPr sz="1300" b="1" dirty="0" err="1">
+                <a:solidFill>
+                  <a:srgbClr val="1E2761"/>
+                </a:solidFill>
+                <a:latin typeface="맑은 고딕"/>
+              </a:rPr>
+              <a:t>작업정보</a:t>
+            </a:r>
+            <a:r>
+              <a:rPr sz="1300" b="1" dirty="0">
+                <a:solidFill>
+                  <a:srgbClr val="1E2761"/>
+                </a:solidFill>
+                <a:latin typeface="맑은 고딕"/>
+              </a:rPr>
+              <a:t> (</a:t>
+            </a:r>
+            <a:r>
+              <a:rPr sz="1300" b="1" dirty="0" err="1">
+                <a:solidFill>
+                  <a:srgbClr val="1E2761"/>
+                </a:solidFill>
+                <a:latin typeface="맑은 고딕"/>
+              </a:rPr>
+              <a:t>자동</a:t>
+            </a:r>
+            <a:r>
+              <a:rPr sz="1300" b="1" dirty="0">
+                <a:solidFill>
+                  <a:srgbClr val="1E2761"/>
+                </a:solidFill>
+                <a:latin typeface="맑은 고딕"/>
+              </a:rPr>
+              <a:t> </a:t>
+            </a:r>
+            <a:r>
+              <a:rPr sz="1300" b="1" dirty="0" err="1">
+                <a:solidFill>
+                  <a:srgbClr val="1E2761"/>
+                </a:solidFill>
+                <a:latin typeface="맑은 고딕"/>
+              </a:rPr>
+              <a:t>갱신</a:t>
+            </a:r>
+            <a:r>
+              <a:rPr sz="1300" b="1" dirty="0">
+                <a:solidFill>
+                  <a:srgbClr val="1E2761"/>
+                </a:solidFill>
+                <a:latin typeface="맑은 고딕"/>
+              </a:rPr>
+              <a:t> 2초)</a:t>
+            </a:r>
+          </a:p>
+          <a:p>
+            <a:pPr algn="l"/>
+            <a:r>
+              <a:rPr sz="1050" b="0" dirty="0">
+                <a:solidFill>
+                  <a:srgbClr val="595959"/>
+                </a:solidFill>
+                <a:latin typeface="맑은 고딕"/>
+              </a:rPr>
+              <a:t>· 탭 : </a:t>
+            </a:r>
+            <a:r>
+              <a:rPr sz="1050" b="0" dirty="0" err="1">
+                <a:solidFill>
+                  <a:srgbClr val="595959"/>
+                </a:solidFill>
+                <a:latin typeface="맑은 고딕"/>
+              </a:rPr>
+              <a:t>전체</a:t>
+            </a:r>
+            <a:r>
+              <a:rPr sz="1050" b="0" dirty="0">
+                <a:solidFill>
+                  <a:srgbClr val="595959"/>
+                </a:solidFill>
+                <a:latin typeface="맑은 고딕"/>
+              </a:rPr>
+              <a:t> · </a:t>
+            </a:r>
+            <a:r>
+              <a:rPr sz="1050" b="0" dirty="0" err="1">
+                <a:solidFill>
+                  <a:srgbClr val="595959"/>
+                </a:solidFill>
+                <a:latin typeface="맑은 고딕"/>
+              </a:rPr>
+              <a:t>입고</a:t>
+            </a:r>
+            <a:r>
+              <a:rPr sz="1050" b="0" dirty="0">
+                <a:solidFill>
+                  <a:srgbClr val="595959"/>
+                </a:solidFill>
+                <a:latin typeface="맑은 고딕"/>
+              </a:rPr>
+              <a:t> · </a:t>
+            </a:r>
+            <a:r>
+              <a:rPr sz="1050" b="0" dirty="0" err="1">
+                <a:solidFill>
+                  <a:srgbClr val="595959"/>
+                </a:solidFill>
+                <a:latin typeface="맑은 고딕"/>
+              </a:rPr>
+              <a:t>출고</a:t>
+            </a:r>
+            <a:r>
+              <a:rPr sz="1050" b="0" dirty="0">
+                <a:solidFill>
+                  <a:srgbClr val="595959"/>
+                </a:solidFill>
+                <a:latin typeface="맑은 고딕"/>
+              </a:rPr>
+              <a:t> · </a:t>
+            </a:r>
+            <a:r>
+              <a:rPr sz="1050" b="0" dirty="0" err="1">
+                <a:solidFill>
+                  <a:srgbClr val="595959"/>
+                </a:solidFill>
+                <a:latin typeface="맑은 고딕"/>
+              </a:rPr>
+              <a:t>피킹출고</a:t>
+            </a:r>
+            <a:r>
+              <a:rPr sz="1050" b="0" dirty="0">
+                <a:solidFill>
+                  <a:srgbClr val="595959"/>
+                </a:solidFill>
+                <a:latin typeface="맑은 고딕"/>
+              </a:rPr>
+              <a:t> · </a:t>
+            </a:r>
+            <a:r>
+              <a:rPr sz="1050" b="0" dirty="0" err="1">
+                <a:solidFill>
+                  <a:srgbClr val="595959"/>
+                </a:solidFill>
+                <a:latin typeface="맑은 고딕"/>
+              </a:rPr>
+              <a:t>랙투랙</a:t>
+            </a:r>
+            <a:r>
+              <a:rPr sz="1050" b="0" dirty="0">
+                <a:solidFill>
+                  <a:srgbClr val="595959"/>
+                </a:solidFill>
+                <a:latin typeface="맑은 고딕"/>
+              </a:rPr>
+              <a:t> · </a:t>
+            </a:r>
+            <a:r>
+              <a:rPr sz="1050" b="0" dirty="0" err="1">
+                <a:solidFill>
+                  <a:srgbClr val="595959"/>
+                </a:solidFill>
+                <a:latin typeface="맑은 고딕"/>
+              </a:rPr>
+              <a:t>호기간이동</a:t>
+            </a:r>
+            <a:r>
+              <a:rPr sz="1050" b="0" dirty="0">
+                <a:solidFill>
+                  <a:srgbClr val="595959"/>
+                </a:solidFill>
+                <a:latin typeface="맑은 고딕"/>
+              </a:rPr>
+              <a:t> · </a:t>
+            </a:r>
+            <a:r>
+              <a:rPr sz="1050" b="0" dirty="0" err="1">
+                <a:solidFill>
+                  <a:srgbClr val="595959"/>
+                </a:solidFill>
+                <a:latin typeface="맑은 고딕"/>
+              </a:rPr>
+              <a:t>이동</a:t>
+            </a:r>
+            <a:endParaRPr sz="1050" b="0" dirty="0">
+              <a:solidFill>
+                <a:srgbClr val="595959"/>
+              </a:solidFill>
+              <a:latin typeface="맑은 고딕"/>
+            </a:endParaRPr>
+          </a:p>
+          <a:p>
+            <a:pPr algn="l"/>
+            <a:r>
+              <a:rPr sz="1050" b="0" dirty="0">
+                <a:solidFill>
+                  <a:srgbClr val="595959"/>
+                </a:solidFill>
+                <a:latin typeface="맑은 고딕"/>
+              </a:rPr>
+              <a:t>· 열 : </a:t>
+            </a:r>
+            <a:r>
+              <a:rPr sz="1050" b="0" dirty="0" err="1">
+                <a:solidFill>
+                  <a:srgbClr val="595959"/>
+                </a:solidFill>
+                <a:latin typeface="맑은 고딕"/>
+              </a:rPr>
+              <a:t>작업번호</a:t>
+            </a:r>
+            <a:r>
+              <a:rPr sz="1050" b="0" dirty="0">
+                <a:solidFill>
+                  <a:srgbClr val="595959"/>
+                </a:solidFill>
+                <a:latin typeface="맑은 고딕"/>
+              </a:rPr>
+              <a:t> · </a:t>
+            </a:r>
+            <a:r>
+              <a:rPr sz="1050" b="0" dirty="0" err="1">
+                <a:solidFill>
+                  <a:srgbClr val="595959"/>
+                </a:solidFill>
+                <a:latin typeface="맑은 고딕"/>
+              </a:rPr>
+              <a:t>구분</a:t>
+            </a:r>
+            <a:r>
+              <a:rPr sz="1050" b="0" dirty="0">
+                <a:solidFill>
+                  <a:srgbClr val="595959"/>
+                </a:solidFill>
+                <a:latin typeface="맑은 고딕"/>
+              </a:rPr>
+              <a:t> · </a:t>
+            </a:r>
+            <a:r>
+              <a:rPr sz="1050" b="0" dirty="0" err="1">
+                <a:solidFill>
+                  <a:srgbClr val="595959"/>
+                </a:solidFill>
+                <a:latin typeface="맑은 고딕"/>
+              </a:rPr>
+              <a:t>상태</a:t>
+            </a:r>
+            <a:r>
+              <a:rPr sz="1050" b="0" dirty="0">
+                <a:solidFill>
+                  <a:srgbClr val="595959"/>
+                </a:solidFill>
+                <a:latin typeface="맑은 고딕"/>
+              </a:rPr>
+              <a:t> · </a:t>
+            </a:r>
+            <a:r>
+              <a:rPr sz="1050" b="0" dirty="0" err="1">
+                <a:solidFill>
+                  <a:srgbClr val="595959"/>
+                </a:solidFill>
+                <a:latin typeface="맑은 고딕"/>
+              </a:rPr>
+              <a:t>출발</a:t>
+            </a:r>
+            <a:r>
+              <a:rPr sz="1050" b="0" dirty="0">
+                <a:solidFill>
+                  <a:srgbClr val="595959"/>
+                </a:solidFill>
+                <a:latin typeface="맑은 고딕"/>
+              </a:rPr>
+              <a:t> · </a:t>
+            </a:r>
+            <a:r>
+              <a:rPr sz="1050" b="0" dirty="0" err="1">
+                <a:solidFill>
+                  <a:srgbClr val="595959"/>
+                </a:solidFill>
+                <a:latin typeface="맑은 고딕"/>
+              </a:rPr>
+              <a:t>출발위치</a:t>
+            </a:r>
+            <a:r>
+              <a:rPr sz="1050" b="0" dirty="0">
+                <a:solidFill>
+                  <a:srgbClr val="595959"/>
+                </a:solidFill>
+                <a:latin typeface="맑은 고딕"/>
+              </a:rPr>
+              <a:t> · </a:t>
+            </a:r>
+            <a:r>
+              <a:rPr sz="1050" b="0" dirty="0" err="1">
+                <a:solidFill>
+                  <a:srgbClr val="595959"/>
+                </a:solidFill>
+                <a:latin typeface="맑은 고딕"/>
+              </a:rPr>
+              <a:t>도착</a:t>
+            </a:r>
+            <a:r>
+              <a:rPr sz="1050" b="0" dirty="0">
+                <a:solidFill>
+                  <a:srgbClr val="595959"/>
+                </a:solidFill>
+                <a:latin typeface="맑은 고딕"/>
+              </a:rPr>
+              <a:t> · </a:t>
+            </a:r>
+            <a:r>
+              <a:rPr sz="1050" b="0" dirty="0" err="1">
+                <a:solidFill>
+                  <a:srgbClr val="595959"/>
+                </a:solidFill>
+                <a:latin typeface="맑은 고딕"/>
+              </a:rPr>
+              <a:t>도착위치</a:t>
+            </a:r>
+            <a:r>
+              <a:rPr sz="1050" b="0" dirty="0">
+                <a:solidFill>
+                  <a:srgbClr val="595959"/>
+                </a:solidFill>
+                <a:latin typeface="맑은 고딕"/>
+              </a:rPr>
+              <a:t> · LOT · </a:t>
+            </a:r>
+            <a:r>
+              <a:rPr sz="1050" b="0" dirty="0" err="1">
+                <a:solidFill>
+                  <a:srgbClr val="595959"/>
+                </a:solidFill>
+                <a:latin typeface="맑은 고딕"/>
+              </a:rPr>
+              <a:t>제품</a:t>
+            </a:r>
+            <a:r>
+              <a:rPr sz="1050" b="0" dirty="0">
+                <a:solidFill>
+                  <a:srgbClr val="595959"/>
+                </a:solidFill>
+                <a:latin typeface="맑은 고딕"/>
+              </a:rPr>
+              <a:t> · </a:t>
+            </a:r>
+            <a:r>
+              <a:rPr sz="1050" b="0" dirty="0" err="1">
+                <a:solidFill>
+                  <a:srgbClr val="595959"/>
+                </a:solidFill>
+                <a:latin typeface="맑은 고딕"/>
+              </a:rPr>
+              <a:t>우선</a:t>
+            </a:r>
+            <a:r>
+              <a:rPr sz="1050" b="0" dirty="0">
+                <a:solidFill>
+                  <a:srgbClr val="595959"/>
+                </a:solidFill>
+                <a:latin typeface="맑은 고딕"/>
+              </a:rPr>
+              <a:t> · </a:t>
+            </a:r>
+            <a:r>
+              <a:rPr sz="1050" b="0" dirty="0" err="1">
+                <a:solidFill>
+                  <a:srgbClr val="595959"/>
+                </a:solidFill>
+                <a:latin typeface="맑은 고딕"/>
+              </a:rPr>
+              <a:t>수정시각</a:t>
+            </a:r>
+            <a:endParaRPr sz="1050" b="0" dirty="0">
+              <a:solidFill>
+                <a:srgbClr val="595959"/>
+              </a:solidFill>
+              <a:latin typeface="맑은 고딕"/>
+            </a:endParaRPr>
+          </a:p>
+          <a:p>
+            <a:pPr algn="l"/>
+            <a:r>
+              <a:rPr sz="1050" b="0" dirty="0">
+                <a:solidFill>
+                  <a:srgbClr val="595959"/>
+                </a:solidFill>
+                <a:latin typeface="맑은 고딕"/>
+              </a:rPr>
+              <a:t>· </a:t>
+            </a:r>
+            <a:r>
+              <a:rPr sz="1050" b="0" dirty="0" err="1">
+                <a:solidFill>
+                  <a:srgbClr val="595959"/>
+                </a:solidFill>
+                <a:latin typeface="맑은 고딕"/>
+              </a:rPr>
+              <a:t>상태</a:t>
+            </a:r>
+            <a:r>
+              <a:rPr sz="1050" b="0" dirty="0">
+                <a:solidFill>
+                  <a:srgbClr val="595959"/>
+                </a:solidFill>
+                <a:latin typeface="맑은 고딕"/>
+              </a:rPr>
+              <a:t> </a:t>
+            </a:r>
+            <a:r>
+              <a:rPr sz="1050" b="0" dirty="0" err="1">
+                <a:solidFill>
+                  <a:srgbClr val="595959"/>
+                </a:solidFill>
+                <a:latin typeface="맑은 고딕"/>
+              </a:rPr>
+              <a:t>표기</a:t>
+            </a:r>
+            <a:r>
+              <a:rPr sz="1050" b="0" dirty="0">
+                <a:solidFill>
+                  <a:srgbClr val="595959"/>
+                </a:solidFill>
+                <a:latin typeface="맑은 고딕"/>
+              </a:rPr>
+              <a:t> 예 : [15] CV </a:t>
+            </a:r>
+            <a:r>
+              <a:rPr sz="1050" b="0" dirty="0" err="1">
+                <a:solidFill>
+                  <a:srgbClr val="595959"/>
+                </a:solidFill>
+                <a:latin typeface="맑은 고딕"/>
+              </a:rPr>
+              <a:t>구동중</a:t>
+            </a:r>
+            <a:r>
+              <a:rPr sz="1050" b="0" dirty="0">
+                <a:solidFill>
+                  <a:srgbClr val="595959"/>
+                </a:solidFill>
+                <a:latin typeface="맑은 고딕"/>
+              </a:rPr>
+              <a:t> / [16] </a:t>
+            </a:r>
+            <a:r>
+              <a:rPr sz="1050" b="0" dirty="0" err="1">
+                <a:solidFill>
+                  <a:srgbClr val="595959"/>
+                </a:solidFill>
+                <a:latin typeface="맑은 고딕"/>
+              </a:rPr>
+              <a:t>통로CV</a:t>
+            </a:r>
+            <a:r>
+              <a:rPr sz="1050" b="0" dirty="0">
+                <a:solidFill>
+                  <a:srgbClr val="595959"/>
+                </a:solidFill>
+                <a:latin typeface="맑은 고딕"/>
+              </a:rPr>
+              <a:t> </a:t>
+            </a:r>
+            <a:r>
+              <a:rPr sz="1050" b="0" dirty="0" err="1">
+                <a:solidFill>
+                  <a:srgbClr val="595959"/>
+                </a:solidFill>
+                <a:latin typeface="맑은 고딕"/>
+              </a:rPr>
+              <a:t>구동중</a:t>
+            </a:r>
+            <a:r>
+              <a:rPr sz="1050" b="0" dirty="0">
+                <a:solidFill>
+                  <a:srgbClr val="595959"/>
+                </a:solidFill>
+                <a:latin typeface="맑은 고딕"/>
+              </a:rPr>
+              <a:t> / [25] SC </a:t>
+            </a:r>
+            <a:r>
+              <a:rPr sz="1050" b="0" dirty="0" err="1">
+                <a:solidFill>
+                  <a:srgbClr val="595959"/>
+                </a:solidFill>
+                <a:latin typeface="맑은 고딕"/>
+              </a:rPr>
+              <a:t>구동중</a:t>
+            </a:r>
+            <a:r>
+              <a:rPr sz="1050" b="0" dirty="0">
+                <a:solidFill>
+                  <a:srgbClr val="595959"/>
+                </a:solidFill>
+                <a:latin typeface="맑은 고딕"/>
+              </a:rPr>
+              <a:t> / [35] RGV </a:t>
+            </a:r>
+            <a:r>
+              <a:rPr sz="1050" b="0" dirty="0" err="1">
+                <a:solidFill>
+                  <a:srgbClr val="595959"/>
+                </a:solidFill>
+                <a:latin typeface="맑은 고딕"/>
+              </a:rPr>
+              <a:t>구동중</a:t>
+            </a:r>
+            <a:endParaRPr sz="1050" b="0" dirty="0">
+              <a:solidFill>
+                <a:srgbClr val="595959"/>
+              </a:solidFill>
+              <a:latin typeface="맑은 고딕"/>
+            </a:endParaRPr>
+          </a:p>
+          <a:p>
+            <a:pPr algn="l"/>
+            <a:r>
+              <a:rPr sz="1050" b="0" dirty="0">
+                <a:solidFill>
+                  <a:srgbClr val="595959"/>
+                </a:solidFill>
+                <a:latin typeface="맑은 고딕"/>
+              </a:rPr>
+              <a:t>· </a:t>
+            </a:r>
+            <a:r>
+              <a:rPr sz="1050" b="0" dirty="0" err="1">
+                <a:solidFill>
+                  <a:srgbClr val="595959"/>
+                </a:solidFill>
+                <a:latin typeface="맑은 고딕"/>
+              </a:rPr>
+              <a:t>조건</a:t>
+            </a:r>
+            <a:r>
+              <a:rPr sz="1050" b="0" dirty="0">
+                <a:solidFill>
+                  <a:srgbClr val="595959"/>
+                </a:solidFill>
+                <a:latin typeface="맑은 고딕"/>
+              </a:rPr>
+              <a:t> </a:t>
+            </a:r>
+            <a:r>
+              <a:rPr sz="1050" b="0" dirty="0" err="1">
+                <a:solidFill>
+                  <a:srgbClr val="595959"/>
+                </a:solidFill>
+                <a:latin typeface="맑은 고딕"/>
+              </a:rPr>
+              <a:t>조회·수정·삭제는</a:t>
+            </a:r>
+            <a:r>
+              <a:rPr sz="1050" b="0" dirty="0">
+                <a:solidFill>
+                  <a:srgbClr val="595959"/>
+                </a:solidFill>
+                <a:latin typeface="맑은 고딕"/>
+              </a:rPr>
+              <a:t> ECS &gt; 뷰 &gt; </a:t>
+            </a:r>
+            <a:r>
+              <a:rPr sz="1050" b="0" dirty="0" err="1">
+                <a:solidFill>
+                  <a:srgbClr val="595959"/>
+                </a:solidFill>
+                <a:latin typeface="맑은 고딕"/>
+              </a:rPr>
+              <a:t>작업정보</a:t>
+            </a:r>
+            <a:r>
+              <a:rPr sz="1050" b="0" dirty="0">
+                <a:solidFill>
+                  <a:srgbClr val="595959"/>
+                </a:solidFill>
+                <a:latin typeface="맑은 고딕"/>
+              </a:rPr>
+              <a:t> </a:t>
+            </a:r>
+            <a:r>
+              <a:rPr sz="1050" b="0" dirty="0" err="1">
+                <a:solidFill>
+                  <a:srgbClr val="595959"/>
+                </a:solidFill>
+                <a:latin typeface="맑은 고딕"/>
+              </a:rPr>
+              <a:t>창에서</a:t>
+            </a:r>
+            <a:r>
+              <a:rPr sz="1050" b="0" dirty="0">
+                <a:solidFill>
+                  <a:srgbClr val="595959"/>
+                </a:solidFill>
+                <a:latin typeface="맑은 고딕"/>
+              </a:rPr>
+              <a:t> </a:t>
+            </a:r>
+            <a:r>
+              <a:rPr sz="1050" b="0" dirty="0" err="1">
+                <a:solidFill>
+                  <a:srgbClr val="595959"/>
+                </a:solidFill>
+                <a:latin typeface="맑은 고딕"/>
+              </a:rPr>
+              <a:t>한다</a:t>
+            </a:r>
+            <a:r>
+              <a:rPr sz="1050" b="0" dirty="0">
+                <a:solidFill>
+                  <a:srgbClr val="595959"/>
+                </a:solidFill>
+                <a:latin typeface="맑은 고딕"/>
+              </a:rPr>
+              <a:t>.</a:t>
             </a:r>
           </a:p>
         </p:txBody>
@@ -18880,7 +20770,7 @@
         <p:spPr>
           <a:xfrm>
             <a:off x="5852160" y="3291840"/>
-            <a:ext cx="5943600" cy="3017520"/>
+            <a:ext cx="5943600" cy="1746632"/>
           </a:xfrm>
           <a:prstGeom prst="rect">
             <a:avLst/>
@@ -18895,97 +20785,1291 @@
           <a:p>
             <a:pPr algn="l"/>
             <a:r>
-              <a:rPr sz="1300" b="1">
+              <a:rPr sz="1300" b="1" dirty="0">
                 <a:solidFill>
                   <a:srgbClr val="1E2761"/>
                 </a:solidFill>
                 <a:latin typeface="맑은 고딕"/>
               </a:rPr>
-              <a:t>■ 입출고 모드 전환 (더블클릭)</a:t>
-            </a:r>
-          </a:p>
-          <a:p>
-            <a:pPr algn="l"/>
-            <a:r>
-              <a:rPr sz="1050" b="0">
-                <a:solidFill>
-                  <a:srgbClr val="595959"/>
-                </a:solidFill>
-                <a:latin typeface="맑은 고딕"/>
-              </a:rPr>
-              <a:t>· 대상 : C/V#11 입출고 겸용대(트랙 122) / C/V#2 S/C#1 통로(트랙 103)</a:t>
-            </a:r>
-          </a:p>
-          <a:p>
-            <a:pPr algn="l"/>
-            <a:r>
-              <a:rPr sz="1050" b="0">
-                <a:solidFill>
-                  <a:srgbClr val="595959"/>
-                </a:solidFill>
-                <a:latin typeface="맑은 고딕"/>
-              </a:rPr>
-              <a:t>· 확인창에 PLC 방향 워드 주소를 보여 준다 : DIR_ADDR_CV11=310, DIR_ADDR_CV2=301</a:t>
-            </a:r>
-          </a:p>
-          <a:p>
-            <a:pPr algn="l"/>
-            <a:r>
-              <a:rPr sz="1050" b="0">
-                <a:solidFill>
-                  <a:srgbClr val="595959"/>
-                </a:solidFill>
-                <a:latin typeface="맑은 고딕"/>
-              </a:rPr>
-              <a:t>· 확인하면 설비 통신이 즉시 방향을 바꾸고(DIRM), 스케줄러는 MANUAL_DIR_HOLD_SEC(기본 120초) 동안 자동 전환을 멈춘다.</a:t>
-            </a:r>
-          </a:p>
-          <a:p>
-            <a:pPr algn="l"/>
-            <a:r>
-              <a:rPr sz="1050" b="0">
-                <a:solidFill>
-                  <a:srgbClr val="595959"/>
-                </a:solidFill>
-                <a:latin typeface="맑은 고딕"/>
-              </a:rPr>
-              <a:t>· 크레인·RGV 색 : 에러 → 미가동(범례 수동색) → 작업없음(범례 정상색) → 작업구분 색. 색을 지우는 시점은 VEH_CLEAR_MODE=3.</a:t>
-            </a:r>
-          </a:p>
-          <a:p>
-            <a:pPr algn="l"/>
-            <a:r>
-              <a:rPr sz="1050" b="0">
-                <a:solidFill>
-                  <a:srgbClr val="595959"/>
-                </a:solidFill>
-                <a:latin typeface="맑은 고딕"/>
-              </a:rPr>
-              <a:t>· 트랙 글자는 리본 [창고 모니터링] 선택(작업번호/트랙번호/적재용기)을 따른다.</a:t>
-            </a:r>
-          </a:p>
-          <a:p>
-            <a:pPr algn="l"/>
-            <a:r>
-              <a:rPr sz="1050" b="0">
-                <a:solidFill>
-                  <a:srgbClr val="595959"/>
-                </a:solidFill>
-                <a:latin typeface="맑은 고딕"/>
-              </a:rPr>
-              <a:t>· 작업대 명칭은 해당 트랙 왼쪽에 둔다 : 103 제품 입고대(TR#24) · 104 원부자재불출대(TR#26) · 102 피킹 작업대(출고대 TR#29 / 입고대 TR#30) · [101] 입출고대(TR#22).</a:t>
-            </a:r>
-          </a:p>
-          <a:p>
-            <a:pPr algn="l"/>
-            <a:r>
-              <a:rPr sz="1050" b="0">
-                <a:solidFill>
-                  <a:srgbClr val="595959"/>
-                </a:solidFill>
-                <a:latin typeface="맑은 고딕"/>
-              </a:rPr>
-              <a:t>· 명칭 글자색 : 입고대 = 범례 입고색, 출고대 = 범례 출고색(범례 변경 시 함께 바뀜), 101 입출고대 = 핑크 고정.</a:t>
+              <a:t>■ </a:t>
+            </a:r>
+            <a:r>
+              <a:rPr sz="1300" b="1" dirty="0" err="1">
+                <a:solidFill>
+                  <a:srgbClr val="1E2761"/>
+                </a:solidFill>
+                <a:latin typeface="맑은 고딕"/>
+              </a:rPr>
+              <a:t>입출고</a:t>
+            </a:r>
+            <a:r>
+              <a:rPr sz="1300" b="1" dirty="0">
+                <a:solidFill>
+                  <a:srgbClr val="1E2761"/>
+                </a:solidFill>
+                <a:latin typeface="맑은 고딕"/>
+              </a:rPr>
+              <a:t> </a:t>
+            </a:r>
+            <a:r>
+              <a:rPr sz="1300" b="1" dirty="0" err="1">
+                <a:solidFill>
+                  <a:srgbClr val="1E2761"/>
+                </a:solidFill>
+                <a:latin typeface="맑은 고딕"/>
+              </a:rPr>
+              <a:t>모드</a:t>
+            </a:r>
+            <a:r>
+              <a:rPr sz="1300" b="1" dirty="0">
+                <a:solidFill>
+                  <a:srgbClr val="1E2761"/>
+                </a:solidFill>
+                <a:latin typeface="맑은 고딕"/>
+              </a:rPr>
+              <a:t> </a:t>
+            </a:r>
+            <a:r>
+              <a:rPr sz="1300" b="1" dirty="0" err="1">
+                <a:solidFill>
+                  <a:srgbClr val="1E2761"/>
+                </a:solidFill>
+                <a:latin typeface="맑은 고딕"/>
+              </a:rPr>
+              <a:t>전환</a:t>
+            </a:r>
+            <a:r>
+              <a:rPr sz="1300" b="1" dirty="0">
+                <a:solidFill>
+                  <a:srgbClr val="1E2761"/>
+                </a:solidFill>
+                <a:latin typeface="맑은 고딕"/>
+              </a:rPr>
+              <a:t> (</a:t>
+            </a:r>
+            <a:r>
+              <a:rPr sz="1300" b="1" dirty="0" err="1">
+                <a:solidFill>
+                  <a:srgbClr val="1E2761"/>
+                </a:solidFill>
+                <a:latin typeface="맑은 고딕"/>
+              </a:rPr>
+              <a:t>더블클릭</a:t>
+            </a:r>
+            <a:r>
+              <a:rPr sz="1300" b="1" dirty="0">
+                <a:solidFill>
+                  <a:srgbClr val="1E2761"/>
+                </a:solidFill>
+                <a:latin typeface="맑은 고딕"/>
+              </a:rPr>
+              <a:t>)</a:t>
+            </a:r>
+          </a:p>
+          <a:p>
+            <a:pPr algn="l"/>
+            <a:r>
+              <a:rPr sz="1050" b="0" dirty="0">
+                <a:solidFill>
+                  <a:srgbClr val="595959"/>
+                </a:solidFill>
+                <a:latin typeface="맑은 고딕"/>
+              </a:rPr>
+              <a:t>· </a:t>
+            </a:r>
+            <a:r>
+              <a:rPr sz="1050" b="0" dirty="0" err="1">
+                <a:solidFill>
+                  <a:srgbClr val="595959"/>
+                </a:solidFill>
+                <a:latin typeface="맑은 고딕"/>
+              </a:rPr>
+              <a:t>대상</a:t>
+            </a:r>
+            <a:r>
+              <a:rPr sz="1050" b="0" dirty="0">
+                <a:solidFill>
+                  <a:srgbClr val="595959"/>
+                </a:solidFill>
+                <a:latin typeface="맑은 고딕"/>
+              </a:rPr>
+              <a:t> : C/V#11 </a:t>
+            </a:r>
+            <a:r>
+              <a:rPr sz="1050" b="0" dirty="0" err="1">
+                <a:solidFill>
+                  <a:srgbClr val="595959"/>
+                </a:solidFill>
+                <a:latin typeface="맑은 고딕"/>
+              </a:rPr>
+              <a:t>입출고</a:t>
+            </a:r>
+            <a:r>
+              <a:rPr sz="1050" b="0" dirty="0">
+                <a:solidFill>
+                  <a:srgbClr val="595959"/>
+                </a:solidFill>
+                <a:latin typeface="맑은 고딕"/>
+              </a:rPr>
+              <a:t> </a:t>
+            </a:r>
+            <a:r>
+              <a:rPr sz="1050" b="0" dirty="0" err="1">
+                <a:solidFill>
+                  <a:srgbClr val="595959"/>
+                </a:solidFill>
+                <a:latin typeface="맑은 고딕"/>
+              </a:rPr>
+              <a:t>겸용대</a:t>
+            </a:r>
+            <a:r>
+              <a:rPr sz="1050" b="0" dirty="0">
+                <a:solidFill>
+                  <a:srgbClr val="595959"/>
+                </a:solidFill>
+                <a:latin typeface="맑은 고딕"/>
+              </a:rPr>
+              <a:t>(</a:t>
+            </a:r>
+            <a:r>
+              <a:rPr sz="1050" b="0" dirty="0" err="1">
+                <a:solidFill>
+                  <a:srgbClr val="595959"/>
+                </a:solidFill>
+                <a:latin typeface="맑은 고딕"/>
+              </a:rPr>
+              <a:t>트랙</a:t>
+            </a:r>
+            <a:r>
+              <a:rPr sz="1050" b="0" dirty="0">
+                <a:solidFill>
+                  <a:srgbClr val="595959"/>
+                </a:solidFill>
+                <a:latin typeface="맑은 고딕"/>
+              </a:rPr>
+              <a:t> 122) / C/V#2 S/C#1 </a:t>
+            </a:r>
+            <a:r>
+              <a:rPr sz="1050" b="0" dirty="0" err="1">
+                <a:solidFill>
+                  <a:srgbClr val="595959"/>
+                </a:solidFill>
+                <a:latin typeface="맑은 고딕"/>
+              </a:rPr>
+              <a:t>통로</a:t>
+            </a:r>
+            <a:r>
+              <a:rPr sz="1050" b="0" dirty="0">
+                <a:solidFill>
+                  <a:srgbClr val="595959"/>
+                </a:solidFill>
+                <a:latin typeface="맑은 고딕"/>
+              </a:rPr>
+              <a:t>(</a:t>
+            </a:r>
+            <a:r>
+              <a:rPr sz="1050" b="0" dirty="0" err="1">
+                <a:solidFill>
+                  <a:srgbClr val="595959"/>
+                </a:solidFill>
+                <a:latin typeface="맑은 고딕"/>
+              </a:rPr>
+              <a:t>트랙</a:t>
+            </a:r>
+            <a:r>
+              <a:rPr sz="1050" b="0" dirty="0">
+                <a:solidFill>
+                  <a:srgbClr val="595959"/>
+                </a:solidFill>
+                <a:latin typeface="맑은 고딕"/>
+              </a:rPr>
+              <a:t> 103)</a:t>
+            </a:r>
+          </a:p>
+          <a:p>
+            <a:pPr algn="l"/>
+            <a:r>
+              <a:rPr sz="1050" b="0" dirty="0">
+                <a:solidFill>
+                  <a:srgbClr val="595959"/>
+                </a:solidFill>
+                <a:latin typeface="맑은 고딕"/>
+              </a:rPr>
+              <a:t>· </a:t>
+            </a:r>
+            <a:r>
+              <a:rPr sz="1050" b="0" dirty="0" err="1">
+                <a:solidFill>
+                  <a:srgbClr val="595959"/>
+                </a:solidFill>
+                <a:latin typeface="맑은 고딕"/>
+              </a:rPr>
+              <a:t>확인창에</a:t>
+            </a:r>
+            <a:r>
+              <a:rPr sz="1050" b="0" dirty="0">
+                <a:solidFill>
+                  <a:srgbClr val="595959"/>
+                </a:solidFill>
+                <a:latin typeface="맑은 고딕"/>
+              </a:rPr>
+              <a:t> PLC </a:t>
+            </a:r>
+            <a:r>
+              <a:rPr sz="1050" b="0" dirty="0" err="1">
+                <a:solidFill>
+                  <a:srgbClr val="595959"/>
+                </a:solidFill>
+                <a:latin typeface="맑은 고딕"/>
+              </a:rPr>
+              <a:t>방향</a:t>
+            </a:r>
+            <a:r>
+              <a:rPr sz="1050" b="0" dirty="0">
+                <a:solidFill>
+                  <a:srgbClr val="595959"/>
+                </a:solidFill>
+                <a:latin typeface="맑은 고딕"/>
+              </a:rPr>
+              <a:t> </a:t>
+            </a:r>
+            <a:r>
+              <a:rPr sz="1050" b="0" dirty="0" err="1">
+                <a:solidFill>
+                  <a:srgbClr val="595959"/>
+                </a:solidFill>
+                <a:latin typeface="맑은 고딕"/>
+              </a:rPr>
+              <a:t>워드</a:t>
+            </a:r>
+            <a:r>
+              <a:rPr sz="1050" b="0" dirty="0">
+                <a:solidFill>
+                  <a:srgbClr val="595959"/>
+                </a:solidFill>
+                <a:latin typeface="맑은 고딕"/>
+              </a:rPr>
+              <a:t> </a:t>
+            </a:r>
+            <a:r>
+              <a:rPr sz="1050" b="0" dirty="0" err="1">
+                <a:solidFill>
+                  <a:srgbClr val="595959"/>
+                </a:solidFill>
+                <a:latin typeface="맑은 고딕"/>
+              </a:rPr>
+              <a:t>주소를</a:t>
+            </a:r>
+            <a:r>
+              <a:rPr sz="1050" b="0" dirty="0">
+                <a:solidFill>
+                  <a:srgbClr val="595959"/>
+                </a:solidFill>
+                <a:latin typeface="맑은 고딕"/>
+              </a:rPr>
+              <a:t> </a:t>
+            </a:r>
+            <a:r>
+              <a:rPr sz="1050" b="0" dirty="0" err="1">
+                <a:solidFill>
+                  <a:srgbClr val="595959"/>
+                </a:solidFill>
+                <a:latin typeface="맑은 고딕"/>
+              </a:rPr>
+              <a:t>보여</a:t>
+            </a:r>
+            <a:r>
+              <a:rPr sz="1050" b="0" dirty="0">
+                <a:solidFill>
+                  <a:srgbClr val="595959"/>
+                </a:solidFill>
+                <a:latin typeface="맑은 고딕"/>
+              </a:rPr>
+              <a:t> </a:t>
+            </a:r>
+            <a:r>
+              <a:rPr sz="1050" b="0" dirty="0" err="1">
+                <a:solidFill>
+                  <a:srgbClr val="595959"/>
+                </a:solidFill>
+                <a:latin typeface="맑은 고딕"/>
+              </a:rPr>
+              <a:t>준다</a:t>
+            </a:r>
+            <a:r>
+              <a:rPr sz="1050" b="0" dirty="0">
+                <a:solidFill>
+                  <a:srgbClr val="595959"/>
+                </a:solidFill>
+                <a:latin typeface="맑은 고딕"/>
+              </a:rPr>
+              <a:t> : DIR_ADDR_CV11=310, DIR_ADDR_CV2=301</a:t>
+            </a:r>
+          </a:p>
+          <a:p>
+            <a:pPr algn="l"/>
+            <a:r>
+              <a:rPr sz="1050" b="0" dirty="0">
+                <a:solidFill>
+                  <a:srgbClr val="595959"/>
+                </a:solidFill>
+                <a:latin typeface="맑은 고딕"/>
+              </a:rPr>
+              <a:t>· </a:t>
+            </a:r>
+            <a:r>
+              <a:rPr sz="1050" b="0" dirty="0" err="1">
+                <a:solidFill>
+                  <a:srgbClr val="595959"/>
+                </a:solidFill>
+                <a:latin typeface="맑은 고딕"/>
+              </a:rPr>
+              <a:t>확인하면</a:t>
+            </a:r>
+            <a:r>
+              <a:rPr sz="1050" b="0" dirty="0">
+                <a:solidFill>
+                  <a:srgbClr val="595959"/>
+                </a:solidFill>
+                <a:latin typeface="맑은 고딕"/>
+              </a:rPr>
+              <a:t> </a:t>
+            </a:r>
+            <a:r>
+              <a:rPr sz="1050" b="0" dirty="0" err="1">
+                <a:solidFill>
+                  <a:srgbClr val="595959"/>
+                </a:solidFill>
+                <a:latin typeface="맑은 고딕"/>
+              </a:rPr>
+              <a:t>설비</a:t>
+            </a:r>
+            <a:r>
+              <a:rPr sz="1050" b="0" dirty="0">
+                <a:solidFill>
+                  <a:srgbClr val="595959"/>
+                </a:solidFill>
+                <a:latin typeface="맑은 고딕"/>
+              </a:rPr>
+              <a:t> </a:t>
+            </a:r>
+            <a:r>
+              <a:rPr sz="1050" b="0" dirty="0" err="1">
+                <a:solidFill>
+                  <a:srgbClr val="595959"/>
+                </a:solidFill>
+                <a:latin typeface="맑은 고딕"/>
+              </a:rPr>
+              <a:t>통신이</a:t>
+            </a:r>
+            <a:r>
+              <a:rPr sz="1050" b="0" dirty="0">
+                <a:solidFill>
+                  <a:srgbClr val="595959"/>
+                </a:solidFill>
+                <a:latin typeface="맑은 고딕"/>
+              </a:rPr>
+              <a:t> </a:t>
+            </a:r>
+            <a:r>
+              <a:rPr sz="1050" b="0" dirty="0" err="1">
+                <a:solidFill>
+                  <a:srgbClr val="595959"/>
+                </a:solidFill>
+                <a:latin typeface="맑은 고딕"/>
+              </a:rPr>
+              <a:t>즉시</a:t>
+            </a:r>
+            <a:r>
+              <a:rPr sz="1050" b="0" dirty="0">
+                <a:solidFill>
+                  <a:srgbClr val="595959"/>
+                </a:solidFill>
+                <a:latin typeface="맑은 고딕"/>
+              </a:rPr>
+              <a:t> </a:t>
+            </a:r>
+            <a:r>
+              <a:rPr sz="1050" b="0" dirty="0" err="1">
+                <a:solidFill>
+                  <a:srgbClr val="595959"/>
+                </a:solidFill>
+                <a:latin typeface="맑은 고딕"/>
+              </a:rPr>
+              <a:t>방향을</a:t>
+            </a:r>
+            <a:r>
+              <a:rPr sz="1050" b="0" dirty="0">
+                <a:solidFill>
+                  <a:srgbClr val="595959"/>
+                </a:solidFill>
+                <a:latin typeface="맑은 고딕"/>
+              </a:rPr>
+              <a:t> </a:t>
+            </a:r>
+            <a:r>
+              <a:rPr sz="1050" b="0" dirty="0" err="1">
+                <a:solidFill>
+                  <a:srgbClr val="595959"/>
+                </a:solidFill>
+                <a:latin typeface="맑은 고딕"/>
+              </a:rPr>
+              <a:t>바꾸고</a:t>
+            </a:r>
+            <a:r>
+              <a:rPr sz="1050" b="0" dirty="0">
+                <a:solidFill>
+                  <a:srgbClr val="595959"/>
+                </a:solidFill>
+                <a:latin typeface="맑은 고딕"/>
+              </a:rPr>
+              <a:t>(DIRM), </a:t>
+            </a:r>
+            <a:r>
+              <a:rPr sz="1050" b="0" dirty="0" err="1">
+                <a:solidFill>
+                  <a:srgbClr val="595959"/>
+                </a:solidFill>
+                <a:latin typeface="맑은 고딕"/>
+              </a:rPr>
+              <a:t>스케줄러는</a:t>
+            </a:r>
+            <a:r>
+              <a:rPr sz="1050" b="0" dirty="0">
+                <a:solidFill>
+                  <a:srgbClr val="595959"/>
+                </a:solidFill>
+                <a:latin typeface="맑은 고딕"/>
+              </a:rPr>
+              <a:t> MANUAL_DIR_HOLD_SEC(</a:t>
+            </a:r>
+            <a:r>
+              <a:rPr sz="1050" b="0" dirty="0" err="1">
+                <a:solidFill>
+                  <a:srgbClr val="595959"/>
+                </a:solidFill>
+                <a:latin typeface="맑은 고딕"/>
+              </a:rPr>
+              <a:t>기본</a:t>
+            </a:r>
+            <a:r>
+              <a:rPr sz="1050" b="0" dirty="0">
+                <a:solidFill>
+                  <a:srgbClr val="595959"/>
+                </a:solidFill>
+                <a:latin typeface="맑은 고딕"/>
+              </a:rPr>
+              <a:t> 120초) </a:t>
+            </a:r>
+            <a:r>
+              <a:rPr sz="1050" b="0" dirty="0" err="1">
+                <a:solidFill>
+                  <a:srgbClr val="595959"/>
+                </a:solidFill>
+                <a:latin typeface="맑은 고딕"/>
+              </a:rPr>
+              <a:t>동안</a:t>
+            </a:r>
+            <a:r>
+              <a:rPr sz="1050" b="0" dirty="0">
+                <a:solidFill>
+                  <a:srgbClr val="595959"/>
+                </a:solidFill>
+                <a:latin typeface="맑은 고딕"/>
+              </a:rPr>
+              <a:t> </a:t>
+            </a:r>
+            <a:r>
+              <a:rPr sz="1050" b="0" dirty="0" err="1">
+                <a:solidFill>
+                  <a:srgbClr val="595959"/>
+                </a:solidFill>
+                <a:latin typeface="맑은 고딕"/>
+              </a:rPr>
+              <a:t>자동</a:t>
+            </a:r>
+            <a:r>
+              <a:rPr sz="1050" b="0" dirty="0">
+                <a:solidFill>
+                  <a:srgbClr val="595959"/>
+                </a:solidFill>
+                <a:latin typeface="맑은 고딕"/>
+              </a:rPr>
+              <a:t> </a:t>
+            </a:r>
+            <a:r>
+              <a:rPr sz="1050" b="0" dirty="0" err="1">
+                <a:solidFill>
+                  <a:srgbClr val="595959"/>
+                </a:solidFill>
+                <a:latin typeface="맑은 고딕"/>
+              </a:rPr>
+              <a:t>전환을</a:t>
+            </a:r>
+            <a:r>
+              <a:rPr sz="1050" b="0" dirty="0">
+                <a:solidFill>
+                  <a:srgbClr val="595959"/>
+                </a:solidFill>
+                <a:latin typeface="맑은 고딕"/>
+              </a:rPr>
+              <a:t> </a:t>
+            </a:r>
+            <a:r>
+              <a:rPr sz="1050" b="0" dirty="0" err="1">
+                <a:solidFill>
+                  <a:srgbClr val="595959"/>
+                </a:solidFill>
+                <a:latin typeface="맑은 고딕"/>
+              </a:rPr>
+              <a:t>멈춘다</a:t>
+            </a:r>
+            <a:r>
+              <a:rPr sz="1050" b="0" dirty="0">
+                <a:solidFill>
+                  <a:srgbClr val="595959"/>
+                </a:solidFill>
+                <a:latin typeface="맑은 고딕"/>
+              </a:rPr>
+              <a:t>.</a:t>
+            </a:r>
+          </a:p>
+          <a:p>
+            <a:pPr algn="l"/>
+            <a:r>
+              <a:rPr sz="1050" b="0" dirty="0">
+                <a:solidFill>
+                  <a:srgbClr val="595959"/>
+                </a:solidFill>
+                <a:latin typeface="맑은 고딕"/>
+              </a:rPr>
+              <a:t>· </a:t>
+            </a:r>
+            <a:r>
+              <a:rPr sz="1050" b="0" dirty="0" err="1">
+                <a:solidFill>
+                  <a:srgbClr val="595959"/>
+                </a:solidFill>
+                <a:latin typeface="맑은 고딕"/>
+              </a:rPr>
+              <a:t>트랙</a:t>
+            </a:r>
+            <a:r>
+              <a:rPr sz="1050" b="0" dirty="0">
+                <a:solidFill>
+                  <a:srgbClr val="595959"/>
+                </a:solidFill>
+                <a:latin typeface="맑은 고딕"/>
+              </a:rPr>
+              <a:t> </a:t>
+            </a:r>
+            <a:r>
+              <a:rPr sz="1050" b="0" dirty="0" err="1">
+                <a:solidFill>
+                  <a:srgbClr val="595959"/>
+                </a:solidFill>
+                <a:latin typeface="맑은 고딕"/>
+              </a:rPr>
+              <a:t>글자는</a:t>
+            </a:r>
+            <a:r>
+              <a:rPr sz="1050" b="0" dirty="0">
+                <a:solidFill>
+                  <a:srgbClr val="595959"/>
+                </a:solidFill>
+                <a:latin typeface="맑은 고딕"/>
+              </a:rPr>
+              <a:t> </a:t>
+            </a:r>
+            <a:r>
+              <a:rPr sz="1050" b="0" dirty="0" err="1">
+                <a:solidFill>
+                  <a:srgbClr val="595959"/>
+                </a:solidFill>
+                <a:latin typeface="맑은 고딕"/>
+              </a:rPr>
+              <a:t>리본</a:t>
+            </a:r>
+            <a:r>
+              <a:rPr sz="1050" b="0" dirty="0">
+                <a:solidFill>
+                  <a:srgbClr val="595959"/>
+                </a:solidFill>
+                <a:latin typeface="맑은 고딕"/>
+              </a:rPr>
+              <a:t> [</a:t>
+            </a:r>
+            <a:r>
+              <a:rPr sz="1050" b="0" dirty="0" err="1">
+                <a:solidFill>
+                  <a:srgbClr val="595959"/>
+                </a:solidFill>
+                <a:latin typeface="맑은 고딕"/>
+              </a:rPr>
+              <a:t>창고</a:t>
+            </a:r>
+            <a:r>
+              <a:rPr sz="1050" b="0" dirty="0">
+                <a:solidFill>
+                  <a:srgbClr val="595959"/>
+                </a:solidFill>
+                <a:latin typeface="맑은 고딕"/>
+              </a:rPr>
+              <a:t> </a:t>
+            </a:r>
+            <a:r>
+              <a:rPr sz="1050" b="0" dirty="0" err="1">
+                <a:solidFill>
+                  <a:srgbClr val="595959"/>
+                </a:solidFill>
+                <a:latin typeface="맑은 고딕"/>
+              </a:rPr>
+              <a:t>모니터링</a:t>
+            </a:r>
+            <a:r>
+              <a:rPr sz="1050" b="0" dirty="0">
+                <a:solidFill>
+                  <a:srgbClr val="595959"/>
+                </a:solidFill>
+                <a:latin typeface="맑은 고딕"/>
+              </a:rPr>
+              <a:t>] </a:t>
+            </a:r>
+            <a:r>
+              <a:rPr sz="1050" b="0" dirty="0" err="1">
+                <a:solidFill>
+                  <a:srgbClr val="595959"/>
+                </a:solidFill>
+                <a:latin typeface="맑은 고딕"/>
+              </a:rPr>
+              <a:t>선택</a:t>
+            </a:r>
+            <a:r>
+              <a:rPr sz="1050" b="0" dirty="0">
+                <a:solidFill>
+                  <a:srgbClr val="595959"/>
+                </a:solidFill>
+                <a:latin typeface="맑은 고딕"/>
+              </a:rPr>
+              <a:t>(</a:t>
+            </a:r>
+            <a:r>
+              <a:rPr sz="1050" b="0" dirty="0" err="1">
+                <a:solidFill>
+                  <a:srgbClr val="595959"/>
+                </a:solidFill>
+                <a:latin typeface="맑은 고딕"/>
+              </a:rPr>
+              <a:t>작업번호</a:t>
+            </a:r>
+            <a:r>
+              <a:rPr sz="1050" b="0" dirty="0">
+                <a:solidFill>
+                  <a:srgbClr val="595959"/>
+                </a:solidFill>
+                <a:latin typeface="맑은 고딕"/>
+              </a:rPr>
+              <a:t>/</a:t>
+            </a:r>
+            <a:r>
+              <a:rPr sz="1050" b="0" dirty="0" err="1">
+                <a:solidFill>
+                  <a:srgbClr val="595959"/>
+                </a:solidFill>
+                <a:latin typeface="맑은 고딕"/>
+              </a:rPr>
+              <a:t>트랙번호</a:t>
+            </a:r>
+            <a:r>
+              <a:rPr sz="1050" b="0" dirty="0">
+                <a:solidFill>
+                  <a:srgbClr val="595959"/>
+                </a:solidFill>
+                <a:latin typeface="맑은 고딕"/>
+              </a:rPr>
+              <a:t>/</a:t>
+            </a:r>
+            <a:r>
+              <a:rPr sz="1050" b="0" dirty="0" err="1">
+                <a:solidFill>
+                  <a:srgbClr val="595959"/>
+                </a:solidFill>
+                <a:latin typeface="맑은 고딕"/>
+              </a:rPr>
+              <a:t>적재용기</a:t>
+            </a:r>
+            <a:r>
+              <a:rPr sz="1050" b="0" dirty="0">
+                <a:solidFill>
+                  <a:srgbClr val="595959"/>
+                </a:solidFill>
+                <a:latin typeface="맑은 고딕"/>
+              </a:rPr>
+              <a:t>)을 </a:t>
+            </a:r>
+            <a:r>
+              <a:rPr sz="1050" b="0" dirty="0" err="1">
+                <a:solidFill>
+                  <a:srgbClr val="595959"/>
+                </a:solidFill>
+                <a:latin typeface="맑은 고딕"/>
+              </a:rPr>
+              <a:t>따른다</a:t>
+            </a:r>
+            <a:r>
+              <a:rPr sz="1050" b="0" dirty="0">
+                <a:solidFill>
+                  <a:srgbClr val="595959"/>
+                </a:solidFill>
+                <a:latin typeface="맑은 고딕"/>
+              </a:rPr>
+              <a:t>.</a:t>
+            </a:r>
+          </a:p>
+          <a:p>
+            <a:pPr algn="l"/>
+            <a:r>
+              <a:rPr sz="1050" b="0" dirty="0">
+                <a:solidFill>
+                  <a:srgbClr val="595959"/>
+                </a:solidFill>
+                <a:latin typeface="맑은 고딕"/>
+              </a:rPr>
+              <a:t>· </a:t>
+            </a:r>
+            <a:r>
+              <a:rPr sz="1050" b="0" dirty="0" err="1">
+                <a:solidFill>
+                  <a:srgbClr val="595959"/>
+                </a:solidFill>
+                <a:latin typeface="맑은 고딕"/>
+              </a:rPr>
+              <a:t>작업대</a:t>
+            </a:r>
+            <a:r>
+              <a:rPr sz="1050" b="0" dirty="0">
+                <a:solidFill>
+                  <a:srgbClr val="595959"/>
+                </a:solidFill>
+                <a:latin typeface="맑은 고딕"/>
+              </a:rPr>
+              <a:t> </a:t>
+            </a:r>
+            <a:r>
+              <a:rPr sz="1050" b="0" dirty="0" err="1">
+                <a:solidFill>
+                  <a:srgbClr val="595959"/>
+                </a:solidFill>
+                <a:latin typeface="맑은 고딕"/>
+              </a:rPr>
+              <a:t>명칭은</a:t>
+            </a:r>
+            <a:r>
+              <a:rPr sz="1050" b="0" dirty="0">
+                <a:solidFill>
+                  <a:srgbClr val="595959"/>
+                </a:solidFill>
+                <a:latin typeface="맑은 고딕"/>
+              </a:rPr>
+              <a:t> </a:t>
+            </a:r>
+            <a:r>
+              <a:rPr sz="1050" b="0" dirty="0" err="1">
+                <a:solidFill>
+                  <a:srgbClr val="595959"/>
+                </a:solidFill>
+                <a:latin typeface="맑은 고딕"/>
+              </a:rPr>
+              <a:t>해당</a:t>
+            </a:r>
+            <a:r>
+              <a:rPr sz="1050" b="0" dirty="0">
+                <a:solidFill>
+                  <a:srgbClr val="595959"/>
+                </a:solidFill>
+                <a:latin typeface="맑은 고딕"/>
+              </a:rPr>
+              <a:t> </a:t>
+            </a:r>
+            <a:r>
+              <a:rPr sz="1050" b="0" dirty="0" err="1">
+                <a:solidFill>
+                  <a:srgbClr val="595959"/>
+                </a:solidFill>
+                <a:latin typeface="맑은 고딕"/>
+              </a:rPr>
+              <a:t>트랙</a:t>
+            </a:r>
+            <a:r>
+              <a:rPr sz="1050" b="0" dirty="0">
+                <a:solidFill>
+                  <a:srgbClr val="595959"/>
+                </a:solidFill>
+                <a:latin typeface="맑은 고딕"/>
+              </a:rPr>
+              <a:t> </a:t>
+            </a:r>
+            <a:r>
+              <a:rPr lang="ko-KR" altLang="en-US" sz="1050" b="0" dirty="0">
+                <a:solidFill>
+                  <a:srgbClr val="595959"/>
+                </a:solidFill>
+                <a:latin typeface="맑은 고딕"/>
+              </a:rPr>
+              <a:t>옆</a:t>
+            </a:r>
+            <a:r>
+              <a:rPr sz="1050" b="0" dirty="0">
+                <a:solidFill>
+                  <a:srgbClr val="595959"/>
+                </a:solidFill>
+                <a:latin typeface="맑은 고딕"/>
+              </a:rPr>
+              <a:t>에 </a:t>
+            </a:r>
+            <a:r>
+              <a:rPr sz="1050" b="0" dirty="0" err="1">
+                <a:solidFill>
+                  <a:srgbClr val="595959"/>
+                </a:solidFill>
+                <a:latin typeface="맑은 고딕"/>
+              </a:rPr>
+              <a:t>둔다</a:t>
+            </a:r>
+            <a:r>
+              <a:rPr sz="1050" b="0" dirty="0">
+                <a:solidFill>
+                  <a:srgbClr val="595959"/>
+                </a:solidFill>
+                <a:latin typeface="맑은 고딕"/>
+              </a:rPr>
+              <a:t> : 103 </a:t>
+            </a:r>
+            <a:r>
+              <a:rPr sz="1050" b="0" dirty="0" err="1">
+                <a:solidFill>
+                  <a:srgbClr val="595959"/>
+                </a:solidFill>
+                <a:latin typeface="맑은 고딕"/>
+              </a:rPr>
+              <a:t>제품</a:t>
+            </a:r>
+            <a:r>
+              <a:rPr sz="1050" b="0" dirty="0">
+                <a:solidFill>
+                  <a:srgbClr val="595959"/>
+                </a:solidFill>
+                <a:latin typeface="맑은 고딕"/>
+              </a:rPr>
+              <a:t> </a:t>
+            </a:r>
+            <a:r>
+              <a:rPr sz="1050" b="0" dirty="0" err="1">
+                <a:solidFill>
+                  <a:srgbClr val="595959"/>
+                </a:solidFill>
+                <a:latin typeface="맑은 고딕"/>
+              </a:rPr>
+              <a:t>입고대</a:t>
+            </a:r>
+            <a:r>
+              <a:rPr sz="1050" b="0" dirty="0">
+                <a:solidFill>
+                  <a:srgbClr val="595959"/>
+                </a:solidFill>
+                <a:latin typeface="맑은 고딕"/>
+              </a:rPr>
+              <a:t>(TR#24) · 104 </a:t>
+            </a:r>
+            <a:r>
+              <a:rPr sz="1050" b="0" dirty="0" err="1">
+                <a:solidFill>
+                  <a:srgbClr val="595959"/>
+                </a:solidFill>
+                <a:latin typeface="맑은 고딕"/>
+              </a:rPr>
+              <a:t>원부자재불출대</a:t>
+            </a:r>
+            <a:r>
+              <a:rPr sz="1050" b="0" dirty="0">
+                <a:solidFill>
+                  <a:srgbClr val="595959"/>
+                </a:solidFill>
+                <a:latin typeface="맑은 고딕"/>
+              </a:rPr>
+              <a:t>(TR#26) · 102 </a:t>
+            </a:r>
+            <a:r>
+              <a:rPr sz="1050" b="0" dirty="0" err="1">
+                <a:solidFill>
+                  <a:srgbClr val="595959"/>
+                </a:solidFill>
+                <a:latin typeface="맑은 고딕"/>
+              </a:rPr>
+              <a:t>피킹</a:t>
+            </a:r>
+            <a:r>
+              <a:rPr sz="1050" b="0" dirty="0">
+                <a:solidFill>
+                  <a:srgbClr val="595959"/>
+                </a:solidFill>
+                <a:latin typeface="맑은 고딕"/>
+              </a:rPr>
+              <a:t> </a:t>
+            </a:r>
+            <a:r>
+              <a:rPr sz="1050" b="0" dirty="0" err="1">
+                <a:solidFill>
+                  <a:srgbClr val="595959"/>
+                </a:solidFill>
+                <a:latin typeface="맑은 고딕"/>
+              </a:rPr>
+              <a:t>작업대</a:t>
+            </a:r>
+            <a:r>
+              <a:rPr sz="1050" b="0" dirty="0">
+                <a:solidFill>
+                  <a:srgbClr val="595959"/>
+                </a:solidFill>
+                <a:latin typeface="맑은 고딕"/>
+              </a:rPr>
+              <a:t>(</a:t>
+            </a:r>
+            <a:r>
+              <a:rPr sz="1050" b="0" dirty="0" err="1">
+                <a:solidFill>
+                  <a:srgbClr val="595959"/>
+                </a:solidFill>
+                <a:latin typeface="맑은 고딕"/>
+              </a:rPr>
+              <a:t>출고대</a:t>
+            </a:r>
+            <a:r>
+              <a:rPr sz="1050" b="0" dirty="0">
+                <a:solidFill>
+                  <a:srgbClr val="595959"/>
+                </a:solidFill>
+                <a:latin typeface="맑은 고딕"/>
+              </a:rPr>
+              <a:t> TR#29 / </a:t>
+            </a:r>
+            <a:r>
+              <a:rPr sz="1050" b="0" dirty="0" err="1">
+                <a:solidFill>
+                  <a:srgbClr val="595959"/>
+                </a:solidFill>
+                <a:latin typeface="맑은 고딕"/>
+              </a:rPr>
+              <a:t>입고대</a:t>
+            </a:r>
+            <a:r>
+              <a:rPr sz="1050" b="0" dirty="0">
+                <a:solidFill>
+                  <a:srgbClr val="595959"/>
+                </a:solidFill>
+                <a:latin typeface="맑은 고딕"/>
+              </a:rPr>
+              <a:t> TR#30) · [101] </a:t>
+            </a:r>
+            <a:r>
+              <a:rPr sz="1050" b="0" dirty="0" err="1">
+                <a:solidFill>
+                  <a:srgbClr val="595959"/>
+                </a:solidFill>
+                <a:latin typeface="맑은 고딕"/>
+              </a:rPr>
+              <a:t>입출고대</a:t>
+            </a:r>
+            <a:r>
+              <a:rPr sz="1050" b="0" dirty="0">
+                <a:solidFill>
+                  <a:srgbClr val="595959"/>
+                </a:solidFill>
+                <a:latin typeface="맑은 고딕"/>
+              </a:rPr>
+              <a:t>(TR#22).</a:t>
+            </a:r>
+          </a:p>
+          <a:p>
+            <a:pPr algn="l"/>
+            <a:r>
+              <a:rPr sz="1050" b="0" dirty="0">
+                <a:solidFill>
+                  <a:srgbClr val="595959"/>
+                </a:solidFill>
+                <a:latin typeface="맑은 고딕"/>
+              </a:rPr>
+              <a:t>· </a:t>
+            </a:r>
+            <a:r>
+              <a:rPr sz="1050" b="0" dirty="0" err="1">
+                <a:solidFill>
+                  <a:srgbClr val="595959"/>
+                </a:solidFill>
+                <a:latin typeface="맑은 고딕"/>
+              </a:rPr>
+              <a:t>명칭</a:t>
+            </a:r>
+            <a:r>
+              <a:rPr sz="1050" b="0" dirty="0">
+                <a:solidFill>
+                  <a:srgbClr val="595959"/>
+                </a:solidFill>
+                <a:latin typeface="맑은 고딕"/>
+              </a:rPr>
+              <a:t> </a:t>
+            </a:r>
+            <a:r>
+              <a:rPr sz="1050" b="0" dirty="0" err="1">
+                <a:solidFill>
+                  <a:srgbClr val="595959"/>
+                </a:solidFill>
+                <a:latin typeface="맑은 고딕"/>
+              </a:rPr>
+              <a:t>글자색</a:t>
+            </a:r>
+            <a:r>
+              <a:rPr sz="1050" b="0" dirty="0">
+                <a:solidFill>
+                  <a:srgbClr val="595959"/>
+                </a:solidFill>
+                <a:latin typeface="맑은 고딕"/>
+              </a:rPr>
+              <a:t> : </a:t>
+            </a:r>
+            <a:r>
+              <a:rPr sz="1050" b="0" dirty="0" err="1">
+                <a:solidFill>
+                  <a:srgbClr val="595959"/>
+                </a:solidFill>
+                <a:latin typeface="맑은 고딕"/>
+              </a:rPr>
+              <a:t>입고대</a:t>
+            </a:r>
+            <a:r>
+              <a:rPr sz="1050" b="0" dirty="0">
+                <a:solidFill>
+                  <a:srgbClr val="595959"/>
+                </a:solidFill>
+                <a:latin typeface="맑은 고딕"/>
+              </a:rPr>
+              <a:t> = </a:t>
+            </a:r>
+            <a:r>
+              <a:rPr sz="1050" b="0" dirty="0" err="1">
+                <a:solidFill>
+                  <a:srgbClr val="595959"/>
+                </a:solidFill>
+                <a:latin typeface="맑은 고딕"/>
+              </a:rPr>
+              <a:t>범례</a:t>
+            </a:r>
+            <a:r>
+              <a:rPr sz="1050" b="0" dirty="0">
+                <a:solidFill>
+                  <a:srgbClr val="595959"/>
+                </a:solidFill>
+                <a:latin typeface="맑은 고딕"/>
+              </a:rPr>
+              <a:t> </a:t>
+            </a:r>
+            <a:r>
+              <a:rPr sz="1050" b="0" dirty="0" err="1">
+                <a:solidFill>
+                  <a:srgbClr val="595959"/>
+                </a:solidFill>
+                <a:latin typeface="맑은 고딕"/>
+              </a:rPr>
+              <a:t>입고색</a:t>
+            </a:r>
+            <a:r>
+              <a:rPr sz="1050" b="0" dirty="0">
+                <a:solidFill>
+                  <a:srgbClr val="595959"/>
+                </a:solidFill>
+                <a:latin typeface="맑은 고딕"/>
+              </a:rPr>
+              <a:t>, </a:t>
+            </a:r>
+            <a:r>
+              <a:rPr sz="1050" b="0" dirty="0" err="1">
+                <a:solidFill>
+                  <a:srgbClr val="595959"/>
+                </a:solidFill>
+                <a:latin typeface="맑은 고딕"/>
+              </a:rPr>
+              <a:t>출고대</a:t>
+            </a:r>
+            <a:r>
+              <a:rPr sz="1050" b="0" dirty="0">
+                <a:solidFill>
+                  <a:srgbClr val="595959"/>
+                </a:solidFill>
+                <a:latin typeface="맑은 고딕"/>
+              </a:rPr>
+              <a:t> = </a:t>
+            </a:r>
+            <a:r>
+              <a:rPr sz="1050" b="0" dirty="0" err="1">
+                <a:solidFill>
+                  <a:srgbClr val="595959"/>
+                </a:solidFill>
+                <a:latin typeface="맑은 고딕"/>
+              </a:rPr>
+              <a:t>범례</a:t>
+            </a:r>
+            <a:r>
+              <a:rPr sz="1050" b="0" dirty="0">
+                <a:solidFill>
+                  <a:srgbClr val="595959"/>
+                </a:solidFill>
+                <a:latin typeface="맑은 고딕"/>
+              </a:rPr>
+              <a:t> </a:t>
+            </a:r>
+            <a:r>
+              <a:rPr sz="1050" b="0" dirty="0" err="1">
+                <a:solidFill>
+                  <a:srgbClr val="595959"/>
+                </a:solidFill>
+                <a:latin typeface="맑은 고딕"/>
+              </a:rPr>
+              <a:t>출고색</a:t>
+            </a:r>
+            <a:r>
+              <a:rPr sz="1050" b="0" dirty="0">
+                <a:solidFill>
+                  <a:srgbClr val="595959"/>
+                </a:solidFill>
+                <a:latin typeface="맑은 고딕"/>
+              </a:rPr>
+              <a:t>(</a:t>
+            </a:r>
+            <a:r>
+              <a:rPr sz="1050" b="0" dirty="0" err="1">
+                <a:solidFill>
+                  <a:srgbClr val="595959"/>
+                </a:solidFill>
+                <a:latin typeface="맑은 고딕"/>
+              </a:rPr>
+              <a:t>범례</a:t>
+            </a:r>
+            <a:r>
+              <a:rPr sz="1050" b="0" dirty="0">
+                <a:solidFill>
+                  <a:srgbClr val="595959"/>
+                </a:solidFill>
+                <a:latin typeface="맑은 고딕"/>
+              </a:rPr>
+              <a:t> </a:t>
+            </a:r>
+            <a:r>
+              <a:rPr sz="1050" b="0" dirty="0" err="1">
+                <a:solidFill>
+                  <a:srgbClr val="595959"/>
+                </a:solidFill>
+                <a:latin typeface="맑은 고딕"/>
+              </a:rPr>
+              <a:t>변경</a:t>
+            </a:r>
+            <a:r>
+              <a:rPr sz="1050" b="0" dirty="0">
+                <a:solidFill>
+                  <a:srgbClr val="595959"/>
+                </a:solidFill>
+                <a:latin typeface="맑은 고딕"/>
+              </a:rPr>
+              <a:t> 시 </a:t>
+            </a:r>
+            <a:r>
+              <a:rPr sz="1050" b="0" dirty="0" err="1">
+                <a:solidFill>
+                  <a:srgbClr val="595959"/>
+                </a:solidFill>
+                <a:latin typeface="맑은 고딕"/>
+              </a:rPr>
+              <a:t>함께</a:t>
+            </a:r>
+            <a:r>
+              <a:rPr sz="1050" b="0" dirty="0">
+                <a:solidFill>
+                  <a:srgbClr val="595959"/>
+                </a:solidFill>
+                <a:latin typeface="맑은 고딕"/>
+              </a:rPr>
+              <a:t> </a:t>
+            </a:r>
+            <a:r>
+              <a:rPr sz="1050" b="0" dirty="0" err="1">
+                <a:solidFill>
+                  <a:srgbClr val="595959"/>
+                </a:solidFill>
+                <a:latin typeface="맑은 고딕"/>
+              </a:rPr>
+              <a:t>바뀜</a:t>
+            </a:r>
+            <a:r>
+              <a:rPr sz="1050" b="0" dirty="0">
+                <a:solidFill>
+                  <a:srgbClr val="595959"/>
+                </a:solidFill>
+                <a:latin typeface="맑은 고딕"/>
+              </a:rPr>
+              <a:t>), 101 </a:t>
+            </a:r>
+            <a:r>
+              <a:rPr sz="1050" b="0" dirty="0" err="1">
+                <a:solidFill>
+                  <a:srgbClr val="595959"/>
+                </a:solidFill>
+                <a:latin typeface="맑은 고딕"/>
+              </a:rPr>
+              <a:t>입출고대</a:t>
+            </a:r>
+            <a:r>
+              <a:rPr sz="1050" b="0" dirty="0">
+                <a:solidFill>
+                  <a:srgbClr val="595959"/>
+                </a:solidFill>
+                <a:latin typeface="맑은 고딕"/>
+              </a:rPr>
+              <a:t> = </a:t>
+            </a:r>
+            <a:r>
+              <a:rPr sz="1050" b="0" dirty="0" err="1">
+                <a:solidFill>
+                  <a:srgbClr val="595959"/>
+                </a:solidFill>
+                <a:latin typeface="맑은 고딕"/>
+              </a:rPr>
+              <a:t>핑크</a:t>
+            </a:r>
+            <a:r>
+              <a:rPr sz="1050" b="0" dirty="0">
+                <a:solidFill>
+                  <a:srgbClr val="595959"/>
+                </a:solidFill>
+                <a:latin typeface="맑은 고딕"/>
+              </a:rPr>
+              <a:t> </a:t>
+            </a:r>
+            <a:r>
+              <a:rPr sz="1050" b="0" dirty="0" err="1">
+                <a:solidFill>
+                  <a:srgbClr val="595959"/>
+                </a:solidFill>
+                <a:latin typeface="맑은 고딕"/>
+              </a:rPr>
+              <a:t>고정</a:t>
+            </a:r>
+            <a:r>
+              <a:rPr sz="1050" b="0" dirty="0">
+                <a:solidFill>
+                  <a:srgbClr val="595959"/>
+                </a:solidFill>
+                <a:latin typeface="맑은 고딕"/>
+              </a:rPr>
+              <a:t>.</a:t>
             </a:r>
           </a:p>
         </p:txBody>
@@ -19069,7 +22153,7 @@
           <p:nvPr/>
         </p:nvPicPr>
         <p:blipFill>
-          <a:blip r:embed="rId3"/>
+          <a:blip r:embed="rId2"/>
           <a:stretch>
             <a:fillRect/>
           </a:stretch>
